--- a/output/wordlabs-inter-prefix-3day.pptx
+++ b/output/wordlabs-inter-prefix-3day.pptx
@@ -6040,7 +6040,7 @@
                 <a:ea typeface="Calibri" pitchFamily="34" charset="-122"/>
                 <a:cs typeface="Calibri" pitchFamily="34" charset="-120"/>
               </a:rPr>
-              <a:t>The children were able to </a:t>
+              <a:t>The police managed to </a:t>
             </a:r>
             <a:pPr algn="l" indent="0" marL="0">
               <a:buNone/>
@@ -6057,7 +6057,7 @@
                 <a:ea typeface="Calibri" pitchFamily="34" charset="-122"/>
                 <a:cs typeface="Calibri" pitchFamily="34" charset="-120"/>
               </a:rPr>
-              <a:t>interact</a:t>
+              <a:t>intercept</a:t>
             </a:r>
             <a:pPr algn="l" indent="0" marL="0">
               <a:buNone/>
@@ -6071,7 +6071,7 @@
                 <a:ea typeface="Calibri" pitchFamily="34" charset="-122"/>
                 <a:cs typeface="Calibri" pitchFamily="34" charset="-120"/>
               </a:rPr>
-              <a:t> and </a:t>
+              <a:t> the message before it was </a:t>
             </a:r>
             <a:pPr algn="l" indent="0" marL="0">
               <a:buNone/>
@@ -6088,7 +6088,7 @@
                 <a:ea typeface="Calibri" pitchFamily="34" charset="-122"/>
                 <a:cs typeface="Calibri" pitchFamily="34" charset="-120"/>
               </a:rPr>
-              <a:t>interconnect</a:t>
+              <a:t>delivered</a:t>
             </a:r>
             <a:pPr algn="l" indent="0" marL="0">
               <a:buNone/>
@@ -6102,7 +6102,7 @@
                 <a:ea typeface="Calibri" pitchFamily="34" charset="-122"/>
                 <a:cs typeface="Calibri" pitchFamily="34" charset="-120"/>
               </a:rPr>
-              <a:t> their ideas during the project.</a:t>
+              <a:t> to the wrong person.</a:t>
             </a:r>
             <a:endParaRPr lang="en-US" sz="1800" dirty="0"/>
           </a:p>
@@ -6257,7 +6257,7 @@
                 <a:ea typeface="Trebuchet MS" pitchFamily="34" charset="-122"/>
                 <a:cs typeface="Trebuchet MS" pitchFamily="34" charset="-120"/>
               </a:rPr>
-              <a:t>interact</a:t>
+              <a:t>intercept</a:t>
             </a:r>
             <a:endParaRPr lang="en-US" sz="1400" dirty="0"/>
           </a:p>
@@ -6385,7 +6385,7 @@
                 <a:ea typeface="Trebuchet MS" pitchFamily="34" charset="-122"/>
                 <a:cs typeface="Trebuchet MS" pitchFamily="34" charset="-120"/>
               </a:rPr>
-              <a:t>interconnect</a:t>
+              <a:t>delivered</a:t>
             </a:r>
             <a:endParaRPr lang="en-US" sz="1400" dirty="0"/>
           </a:p>
@@ -6855,7 +6855,7 @@
                 <a:ea typeface="Trebuchet MS" pitchFamily="34" charset="-122"/>
                 <a:cs typeface="Trebuchet MS" pitchFamily="34" charset="-120"/>
               </a:rPr>
-              <a:t>interact</a:t>
+              <a:t>intercept</a:t>
             </a:r>
             <a:endParaRPr lang="en-US" sz="2800" dirty="0"/>
           </a:p>
@@ -7682,7 +7682,7 @@
                 <a:ea typeface="Trebuchet MS" pitchFamily="34" charset="-122"/>
                 <a:cs typeface="Trebuchet MS" pitchFamily="34" charset="-120"/>
               </a:rPr>
-              <a:t>interact</a:t>
+              <a:t>intercept</a:t>
             </a:r>
             <a:endParaRPr lang="en-US" sz="2800" dirty="0"/>
           </a:p>
@@ -7860,7 +7860,7 @@
                 <a:ea typeface="Calibri" pitchFamily="34" charset="-122"/>
                 <a:cs typeface="Calibri" pitchFamily="34" charset="-120"/>
               </a:rPr>
-              <a:t>between, among</a:t>
+              <a:t>between</a:t>
             </a:r>
             <a:endParaRPr lang="en-US" sz="850" dirty="0"/>
           </a:p>
@@ -7933,7 +7933,7 @@
                 <a:ea typeface="Trebuchet MS" pitchFamily="34" charset="-122"/>
                 <a:cs typeface="Trebuchet MS" pitchFamily="34" charset="-120"/>
               </a:rPr>
-              <a:t>act</a:t>
+              <a:t>cept</a:t>
             </a:r>
             <a:endParaRPr lang="en-US" sz="1300" dirty="0"/>
           </a:p>
@@ -7972,7 +7972,7 @@
                 <a:ea typeface="Calibri" pitchFamily="34" charset="-122"/>
                 <a:cs typeface="Calibri" pitchFamily="34" charset="-120"/>
               </a:rPr>
-              <a:t>to do, to perform</a:t>
+              <a:t>take, seize</a:t>
             </a:r>
             <a:endParaRPr lang="en-US" sz="850" dirty="0"/>
           </a:p>
@@ -8667,7 +8667,7 @@
                 <a:ea typeface="Trebuchet MS" pitchFamily="34" charset="-122"/>
                 <a:cs typeface="Trebuchet MS" pitchFamily="34" charset="-120"/>
               </a:rPr>
-              <a:t>interact</a:t>
+              <a:t>intercept</a:t>
             </a:r>
             <a:endParaRPr lang="en-US" sz="2800" dirty="0"/>
           </a:p>
@@ -8845,7 +8845,7 @@
                 <a:ea typeface="Calibri" pitchFamily="34" charset="-122"/>
                 <a:cs typeface="Calibri" pitchFamily="34" charset="-120"/>
               </a:rPr>
-              <a:t>between, among</a:t>
+              <a:t>between</a:t>
             </a:r>
             <a:endParaRPr lang="en-US" sz="850" dirty="0"/>
           </a:p>
@@ -8918,7 +8918,7 @@
                 <a:ea typeface="Trebuchet MS" pitchFamily="34" charset="-122"/>
                 <a:cs typeface="Trebuchet MS" pitchFamily="34" charset="-120"/>
               </a:rPr>
-              <a:t>act</a:t>
+              <a:t>cept</a:t>
             </a:r>
             <a:endParaRPr lang="en-US" sz="1300" dirty="0"/>
           </a:p>
@@ -8957,7 +8957,7 @@
                 <a:ea typeface="Calibri" pitchFamily="34" charset="-122"/>
                 <a:cs typeface="Calibri" pitchFamily="34" charset="-120"/>
               </a:rPr>
-              <a:t>to do, to perform</a:t>
+              <a:t>take, seize</a:t>
             </a:r>
             <a:endParaRPr lang="en-US" sz="850" dirty="0"/>
           </a:p>
@@ -9326,7 +9326,7 @@
                 <a:ea typeface="Trebuchet MS" pitchFamily="34" charset="-122"/>
                 <a:cs typeface="Trebuchet MS" pitchFamily="34" charset="-120"/>
               </a:rPr>
-              <a:t>act</a:t>
+              <a:t>cept</a:t>
             </a:r>
             <a:endParaRPr lang="en-US" sz="1400" dirty="0"/>
           </a:p>
@@ -9889,7 +9889,7 @@
                 <a:ea typeface="Trebuchet MS" pitchFamily="34" charset="-122"/>
                 <a:cs typeface="Trebuchet MS" pitchFamily="34" charset="-120"/>
               </a:rPr>
-              <a:t>interact</a:t>
+              <a:t>intercept</a:t>
             </a:r>
             <a:endParaRPr lang="en-US" sz="2800" dirty="0"/>
           </a:p>
@@ -10067,7 +10067,7 @@
                 <a:ea typeface="Calibri" pitchFamily="34" charset="-122"/>
                 <a:cs typeface="Calibri" pitchFamily="34" charset="-120"/>
               </a:rPr>
-              <a:t>between, among</a:t>
+              <a:t>between</a:t>
             </a:r>
             <a:endParaRPr lang="en-US" sz="850" dirty="0"/>
           </a:p>
@@ -10140,7 +10140,7 @@
                 <a:ea typeface="Trebuchet MS" pitchFamily="34" charset="-122"/>
                 <a:cs typeface="Trebuchet MS" pitchFamily="34" charset="-120"/>
               </a:rPr>
-              <a:t>act</a:t>
+              <a:t>cept</a:t>
             </a:r>
             <a:endParaRPr lang="en-US" sz="1300" dirty="0"/>
           </a:p>
@@ -10179,7 +10179,7 @@
                 <a:ea typeface="Calibri" pitchFamily="34" charset="-122"/>
                 <a:cs typeface="Calibri" pitchFamily="34" charset="-120"/>
               </a:rPr>
-              <a:t>to do, to perform</a:t>
+              <a:t>take, seize</a:t>
             </a:r>
             <a:endParaRPr lang="en-US" sz="850" dirty="0"/>
           </a:p>
@@ -10548,7 +10548,7 @@
                 <a:ea typeface="Trebuchet MS" pitchFamily="34" charset="-122"/>
                 <a:cs typeface="Trebuchet MS" pitchFamily="34" charset="-120"/>
               </a:rPr>
-              <a:t>act</a:t>
+              <a:t>cept</a:t>
             </a:r>
             <a:endParaRPr lang="en-US" sz="1400" dirty="0"/>
           </a:p>
@@ -10655,7 +10655,7 @@
         </p:nvSpPr>
         <p:spPr>
           <a:xfrm>
-            <a:off x="2124837" y="4169664"/>
+            <a:off x="2023872" y="4169664"/>
             <a:ext cx="685800" cy="475488"/>
           </a:xfrm>
           <a:prstGeom prst="rect">
@@ -10682,7 +10682,7 @@
         </p:nvSpPr>
         <p:spPr>
           <a:xfrm>
-            <a:off x="2124837" y="4169664"/>
+            <a:off x="2023872" y="4169664"/>
             <a:ext cx="685800" cy="475488"/>
           </a:xfrm>
           <a:prstGeom prst="rect">
@@ -10721,7 +10721,7 @@
         </p:nvSpPr>
         <p:spPr>
           <a:xfrm>
-            <a:off x="3033522" y="4169664"/>
+            <a:off x="2831592" y="4169664"/>
             <a:ext cx="685800" cy="475488"/>
           </a:xfrm>
           <a:prstGeom prst="rect">
@@ -10748,7 +10748,7 @@
         </p:nvSpPr>
         <p:spPr>
           <a:xfrm>
-            <a:off x="3033522" y="4169664"/>
+            <a:off x="2831592" y="4169664"/>
             <a:ext cx="685800" cy="475488"/>
           </a:xfrm>
           <a:prstGeom prst="rect">
@@ -10787,7 +10787,7 @@
         </p:nvSpPr>
         <p:spPr>
           <a:xfrm>
-            <a:off x="3942207" y="4169664"/>
+            <a:off x="3639312" y="4169664"/>
             <a:ext cx="685800" cy="475488"/>
           </a:xfrm>
           <a:prstGeom prst="rect">
@@ -10814,7 +10814,7 @@
         </p:nvSpPr>
         <p:spPr>
           <a:xfrm>
-            <a:off x="3942207" y="4169664"/>
+            <a:off x="3639312" y="4169664"/>
             <a:ext cx="685800" cy="475488"/>
           </a:xfrm>
           <a:prstGeom prst="rect">
@@ -10853,7 +10853,7 @@
         </p:nvSpPr>
         <p:spPr>
           <a:xfrm>
-            <a:off x="4850892" y="4169664"/>
+            <a:off x="4447032" y="4169664"/>
             <a:ext cx="685800" cy="475488"/>
           </a:xfrm>
           <a:prstGeom prst="rect">
@@ -10880,7 +10880,7 @@
         </p:nvSpPr>
         <p:spPr>
           <a:xfrm>
-            <a:off x="4850892" y="4169664"/>
+            <a:off x="4447032" y="4169664"/>
             <a:ext cx="685800" cy="475488"/>
           </a:xfrm>
           <a:prstGeom prst="rect">
@@ -10919,7 +10919,7 @@
         </p:nvSpPr>
         <p:spPr>
           <a:xfrm>
-            <a:off x="5759577" y="4169664"/>
+            <a:off x="5254752" y="4169664"/>
             <a:ext cx="685800" cy="475488"/>
           </a:xfrm>
           <a:prstGeom prst="rect">
@@ -10946,7 +10946,7 @@
         </p:nvSpPr>
         <p:spPr>
           <a:xfrm>
-            <a:off x="5759577" y="4169664"/>
+            <a:off x="5254752" y="4169664"/>
             <a:ext cx="685800" cy="475488"/>
           </a:xfrm>
           <a:prstGeom prst="rect">
@@ -10971,7 +10971,7 @@
                 <a:ea typeface="Trebuchet MS" pitchFamily="34" charset="-122"/>
                 <a:cs typeface="Trebuchet MS" pitchFamily="34" charset="-120"/>
               </a:rPr>
-              <a:t>a</a:t>
+              <a:t>c</a:t>
             </a:r>
             <a:endParaRPr lang="en-US" sz="900" dirty="0"/>
           </a:p>
@@ -10985,7 +10985,7 @@
         </p:nvSpPr>
         <p:spPr>
           <a:xfrm>
-            <a:off x="6668262" y="4169664"/>
+            <a:off x="6062472" y="4169664"/>
             <a:ext cx="685800" cy="475488"/>
           </a:xfrm>
           <a:prstGeom prst="rect">
@@ -11012,7 +11012,7 @@
         </p:nvSpPr>
         <p:spPr>
           <a:xfrm>
-            <a:off x="6668262" y="4169664"/>
+            <a:off x="6062472" y="4169664"/>
             <a:ext cx="685800" cy="475488"/>
           </a:xfrm>
           <a:prstGeom prst="rect">
@@ -11037,7 +11037,7 @@
                 <a:ea typeface="Trebuchet MS" pitchFamily="34" charset="-122"/>
                 <a:cs typeface="Trebuchet MS" pitchFamily="34" charset="-120"/>
               </a:rPr>
-              <a:t>c</a:t>
+              <a:t>e</a:t>
             </a:r>
             <a:endParaRPr lang="en-US" sz="900" dirty="0"/>
           </a:p>
@@ -11051,7 +11051,7 @@
         </p:nvSpPr>
         <p:spPr>
           <a:xfrm>
-            <a:off x="7576947" y="4169664"/>
+            <a:off x="6870192" y="4169664"/>
             <a:ext cx="685800" cy="475488"/>
           </a:xfrm>
           <a:prstGeom prst="rect">
@@ -11078,7 +11078,73 @@
         </p:nvSpPr>
         <p:spPr>
           <a:xfrm>
-            <a:off x="7576947" y="4169664"/>
+            <a:off x="6870192" y="4169664"/>
+            <a:ext cx="685800" cy="475488"/>
+          </a:xfrm>
+          <a:prstGeom prst="rect">
+            <a:avLst/>
+          </a:prstGeom>
+          <a:noFill/>
+          <a:ln/>
+        </p:spPr>
+        <p:txBody>
+          <a:bodyPr wrap="square" lIns="0" tIns="0" rIns="0" bIns="0" rtlCol="0" anchor="ctr"/>
+          <a:lstStyle/>
+          <a:p>
+            <a:pPr algn="ctr" indent="0" marL="0">
+              <a:buNone/>
+            </a:pPr>
+            <a:r>
+              <a:rPr lang="en-US" sz="900" b="1" dirty="0">
+                <a:solidFill>
+                  <a:srgbClr val="9D174D"/>
+                </a:solidFill>
+                <a:latin typeface="Trebuchet MS" pitchFamily="34" charset="0"/>
+                <a:ea typeface="Trebuchet MS" pitchFamily="34" charset="-122"/>
+                <a:cs typeface="Trebuchet MS" pitchFamily="34" charset="-120"/>
+              </a:rPr>
+              <a:t>p</a:t>
+            </a:r>
+            <a:endParaRPr lang="en-US" sz="900" dirty="0"/>
+          </a:p>
+        </p:txBody>
+      </p:sp>
+      <p:sp>
+        <p:nvSpPr>
+          <p:cNvPr id="50" name="Shape 48"/>
+          <p:cNvSpPr/>
+          <p:nvPr/>
+        </p:nvSpPr>
+        <p:spPr>
+          <a:xfrm>
+            <a:off x="7677912" y="4169664"/>
+            <a:ext cx="685800" cy="475488"/>
+          </a:xfrm>
+          <a:prstGeom prst="rect">
+            <a:avLst>
+              <a:gd name="adj" fmla="val 7692"/>
+            </a:avLst>
+          </a:prstGeom>
+          <a:solidFill>
+            <a:srgbClr val="FFFFFF"/>
+          </a:solidFill>
+          <a:ln w="12700">
+            <a:solidFill>
+              <a:srgbClr val="DB2777"/>
+            </a:solidFill>
+            <a:prstDash val="solid"/>
+          </a:ln>
+        </p:spPr>
+      </p:sp>
+      <p:sp>
+        <p:nvSpPr>
+          <p:cNvPr id="51" name="Text 49"/>
+          <p:cNvSpPr/>
+          <p:nvPr/>
+        </p:nvSpPr>
+        <p:spPr>
+          <a:xfrm>
+            <a:off x="7677912" y="4169664"/>
             <a:ext cx="685800" cy="475488"/>
           </a:xfrm>
           <a:prstGeom prst="rect">
@@ -11534,7 +11600,7 @@
                 <a:ea typeface="Trebuchet MS" pitchFamily="34" charset="-122"/>
                 <a:cs typeface="Trebuchet MS" pitchFamily="34" charset="-120"/>
               </a:rPr>
-              <a:t>interconnect</a:t>
+              <a:t>delivered</a:t>
             </a:r>
             <a:endParaRPr lang="en-US" sz="2800" dirty="0"/>
           </a:p>
@@ -12361,7 +12427,7 @@
                 <a:ea typeface="Trebuchet MS" pitchFamily="34" charset="-122"/>
                 <a:cs typeface="Trebuchet MS" pitchFamily="34" charset="-120"/>
               </a:rPr>
-              <a:t>interconnect</a:t>
+              <a:t>delivered</a:t>
             </a:r>
             <a:endParaRPr lang="en-US" sz="2800" dirty="0"/>
           </a:p>
@@ -12441,7 +12507,7 @@
         </p:nvSpPr>
         <p:spPr>
           <a:xfrm>
-            <a:off x="2938272" y="2258568"/>
+            <a:off x="2221992" y="2258568"/>
             <a:ext cx="1828800" cy="292608"/>
           </a:xfrm>
           <a:prstGeom prst="rect">
@@ -12450,11 +12516,11 @@
             </a:avLst>
           </a:prstGeom>
           <a:solidFill>
-            <a:srgbClr val="CCFBF1"/>
+            <a:srgbClr val="DDD6FE"/>
           </a:solidFill>
           <a:ln w="19050">
             <a:solidFill>
-              <a:srgbClr val="0D9488"/>
+              <a:srgbClr val="7C3AED"/>
             </a:solidFill>
             <a:prstDash val="solid"/>
           </a:ln>
@@ -12475,7 +12541,7 @@
         </p:nvSpPr>
         <p:spPr>
           <a:xfrm>
-            <a:off x="2938272" y="2258568"/>
+            <a:off x="2221992" y="2258568"/>
             <a:ext cx="1828800" cy="292608"/>
           </a:xfrm>
           <a:prstGeom prst="rect">
@@ -12494,13 +12560,13 @@
             <a:r>
               <a:rPr lang="en-US" sz="1300" b="1" dirty="0">
                 <a:solidFill>
-                  <a:srgbClr val="0F766E"/>
+                  <a:srgbClr val="4C1D95"/>
                 </a:solidFill>
                 <a:latin typeface="Trebuchet MS" pitchFamily="34" charset="0"/>
                 <a:ea typeface="Trebuchet MS" pitchFamily="34" charset="-122"/>
                 <a:cs typeface="Trebuchet MS" pitchFamily="34" charset="-120"/>
               </a:rPr>
-              <a:t>inter</a:t>
+              <a:t>de</a:t>
             </a:r>
             <a:endParaRPr lang="en-US" sz="1300" dirty="0"/>
           </a:p>
@@ -12514,7 +12580,7 @@
         </p:nvSpPr>
         <p:spPr>
           <a:xfrm>
-            <a:off x="2938272" y="2569464"/>
+            <a:off x="2221992" y="2569464"/>
             <a:ext cx="1828800" cy="201168"/>
           </a:xfrm>
           <a:prstGeom prst="rect">
@@ -12539,7 +12605,7 @@
                 <a:ea typeface="Calibri" pitchFamily="34" charset="-122"/>
                 <a:cs typeface="Calibri" pitchFamily="34" charset="-120"/>
               </a:rPr>
-              <a:t>between, among</a:t>
+              <a:t>away, from</a:t>
             </a:r>
             <a:endParaRPr lang="en-US" sz="850" dirty="0"/>
           </a:p>
@@ -12553,7 +12619,7 @@
         </p:nvSpPr>
         <p:spPr>
           <a:xfrm>
-            <a:off x="5803392" y="2258568"/>
+            <a:off x="4370832" y="2258568"/>
             <a:ext cx="1828800" cy="292608"/>
           </a:xfrm>
           <a:prstGeom prst="rect">
@@ -12587,7 +12653,7 @@
         </p:nvSpPr>
         <p:spPr>
           <a:xfrm>
-            <a:off x="5803392" y="2258568"/>
+            <a:off x="4370832" y="2258568"/>
             <a:ext cx="1828800" cy="292608"/>
           </a:xfrm>
           <a:prstGeom prst="rect">
@@ -12612,7 +12678,7 @@
                 <a:ea typeface="Trebuchet MS" pitchFamily="34" charset="-122"/>
                 <a:cs typeface="Trebuchet MS" pitchFamily="34" charset="-120"/>
               </a:rPr>
-              <a:t>connect</a:t>
+              <a:t>liver</a:t>
             </a:r>
             <a:endParaRPr lang="en-US" sz="1300" dirty="0"/>
           </a:p>
@@ -12626,7 +12692,7 @@
         </p:nvSpPr>
         <p:spPr>
           <a:xfrm>
-            <a:off x="5803392" y="2569464"/>
+            <a:off x="4370832" y="2569464"/>
             <a:ext cx="1828800" cy="201168"/>
           </a:xfrm>
           <a:prstGeom prst="rect">
@@ -12651,7 +12717,7 @@
                 <a:ea typeface="Calibri" pitchFamily="34" charset="-122"/>
                 <a:cs typeface="Calibri" pitchFamily="34" charset="-120"/>
               </a:rPr>
-              <a:t>to join together</a:t>
+              <a:t>carry, free</a:t>
             </a:r>
             <a:endParaRPr lang="en-US" sz="850" dirty="0"/>
           </a:p>
@@ -12660,6 +12726,118 @@
       <p:sp>
         <p:nvSpPr>
           <p:cNvPr id="22" name="Shape 20"/>
+          <p:cNvSpPr/>
+          <p:nvPr/>
+        </p:nvSpPr>
+        <p:spPr>
+          <a:xfrm>
+            <a:off x="6519672" y="2258568"/>
+            <a:ext cx="1828800" cy="292608"/>
+          </a:xfrm>
+          <a:prstGeom prst="rect">
+            <a:avLst>
+              <a:gd name="adj" fmla="val 25000"/>
+            </a:avLst>
+          </a:prstGeom>
+          <a:solidFill>
+            <a:srgbClr val="FCE7F3"/>
+          </a:solidFill>
+          <a:ln w="19050">
+            <a:solidFill>
+              <a:srgbClr val="DB2777"/>
+            </a:solidFill>
+            <a:prstDash val="solid"/>
+          </a:ln>
+          <a:effectLst>
+            <a:outerShdw sx="100000" sy="100000" kx="0" ky="0" algn="bl" rotWithShape="0" blurRad="101600" dist="38100" dir="8100000">
+              <a:srgbClr val="000000">
+                <a:alpha val="12000"/>
+              </a:srgbClr>
+            </a:outerShdw>
+          </a:effectLst>
+        </p:spPr>
+      </p:sp>
+      <p:sp>
+        <p:nvSpPr>
+          <p:cNvPr id="23" name="Text 21"/>
+          <p:cNvSpPr/>
+          <p:nvPr/>
+        </p:nvSpPr>
+        <p:spPr>
+          <a:xfrm>
+            <a:off x="6519672" y="2258568"/>
+            <a:ext cx="1828800" cy="292608"/>
+          </a:xfrm>
+          <a:prstGeom prst="rect">
+            <a:avLst/>
+          </a:prstGeom>
+          <a:noFill/>
+          <a:ln/>
+        </p:spPr>
+        <p:txBody>
+          <a:bodyPr wrap="square" lIns="0" tIns="0" rIns="0" bIns="0" rtlCol="0" anchor="ctr"/>
+          <a:lstStyle/>
+          <a:p>
+            <a:pPr algn="ctr" indent="0" marL="0">
+              <a:buNone/>
+            </a:pPr>
+            <a:r>
+              <a:rPr lang="en-US" sz="1300" b="1" dirty="0">
+                <a:solidFill>
+                  <a:srgbClr val="9D174D"/>
+                </a:solidFill>
+                <a:latin typeface="Trebuchet MS" pitchFamily="34" charset="0"/>
+                <a:ea typeface="Trebuchet MS" pitchFamily="34" charset="-122"/>
+                <a:cs typeface="Trebuchet MS" pitchFamily="34" charset="-120"/>
+              </a:rPr>
+              <a:t>ed</a:t>
+            </a:r>
+            <a:endParaRPr lang="en-US" sz="1300" dirty="0"/>
+          </a:p>
+        </p:txBody>
+      </p:sp>
+      <p:sp>
+        <p:nvSpPr>
+          <p:cNvPr id="24" name="Text 22"/>
+          <p:cNvSpPr/>
+          <p:nvPr/>
+        </p:nvSpPr>
+        <p:spPr>
+          <a:xfrm>
+            <a:off x="6519672" y="2569464"/>
+            <a:ext cx="1828800" cy="201168"/>
+          </a:xfrm>
+          <a:prstGeom prst="rect">
+            <a:avLst/>
+          </a:prstGeom>
+          <a:noFill/>
+          <a:ln/>
+        </p:spPr>
+        <p:txBody>
+          <a:bodyPr wrap="square" lIns="0" tIns="0" rIns="0" bIns="0" rtlCol="0" anchor="t"/>
+          <a:lstStyle/>
+          <a:p>
+            <a:pPr algn="ctr" indent="0" marL="0">
+              <a:buNone/>
+            </a:pPr>
+            <a:r>
+              <a:rPr lang="en-US" sz="850" dirty="0">
+                <a:solidFill>
+                  <a:srgbClr val="475569"/>
+                </a:solidFill>
+                <a:latin typeface="Calibri" pitchFamily="34" charset="0"/>
+                <a:ea typeface="Calibri" pitchFamily="34" charset="-122"/>
+                <a:cs typeface="Calibri" pitchFamily="34" charset="-120"/>
+              </a:rPr>
+              <a:t>past tense</a:t>
+            </a:r>
+            <a:endParaRPr lang="en-US" sz="850" dirty="0"/>
+          </a:p>
+        </p:txBody>
+      </p:sp>
+      <p:sp>
+        <p:nvSpPr>
+          <p:cNvPr id="25" name="Shape 23"/>
           <p:cNvSpPr/>
           <p:nvPr/>
         </p:nvSpPr>
@@ -12686,7 +12864,7 @@
       </p:sp>
       <p:sp>
         <p:nvSpPr>
-          <p:cNvPr id="23" name="Text 21"/>
+          <p:cNvPr id="26" name="Text 24"/>
           <p:cNvSpPr/>
           <p:nvPr/>
         </p:nvSpPr>
@@ -12725,7 +12903,7 @@
       </p:sp>
       <p:sp>
         <p:nvSpPr>
-          <p:cNvPr id="24" name="Shape 22"/>
+          <p:cNvPr id="27" name="Shape 25"/>
           <p:cNvSpPr/>
           <p:nvPr/>
         </p:nvSpPr>
@@ -12752,7 +12930,7 @@
       </p:sp>
       <p:sp>
         <p:nvSpPr>
-          <p:cNvPr id="25" name="Text 23"/>
+          <p:cNvPr id="28" name="Text 26"/>
           <p:cNvSpPr/>
           <p:nvPr/>
         </p:nvSpPr>
@@ -12791,7 +12969,7 @@
       </p:sp>
       <p:sp>
         <p:nvSpPr>
-          <p:cNvPr id="26" name="Shape 24"/>
+          <p:cNvPr id="29" name="Shape 27"/>
           <p:cNvSpPr/>
           <p:nvPr/>
         </p:nvSpPr>
@@ -12818,7 +12996,7 @@
       </p:sp>
       <p:sp>
         <p:nvSpPr>
-          <p:cNvPr id="27" name="Text 25"/>
+          <p:cNvPr id="30" name="Text 28"/>
           <p:cNvSpPr/>
           <p:nvPr/>
         </p:nvSpPr>
@@ -12857,7 +13035,7 @@
       </p:sp>
       <p:sp>
         <p:nvSpPr>
-          <p:cNvPr id="28" name="Shape 26"/>
+          <p:cNvPr id="31" name="Shape 29"/>
           <p:cNvSpPr/>
           <p:nvPr/>
         </p:nvSpPr>
@@ -12884,7 +13062,7 @@
       </p:sp>
       <p:sp>
         <p:nvSpPr>
-          <p:cNvPr id="29" name="Text 27"/>
+          <p:cNvPr id="32" name="Text 30"/>
           <p:cNvSpPr/>
           <p:nvPr/>
         </p:nvSpPr>
@@ -13346,7 +13524,7 @@
                 <a:ea typeface="Trebuchet MS" pitchFamily="34" charset="-122"/>
                 <a:cs typeface="Trebuchet MS" pitchFamily="34" charset="-120"/>
               </a:rPr>
-              <a:t>interconnect</a:t>
+              <a:t>delivered</a:t>
             </a:r>
             <a:endParaRPr lang="en-US" sz="2800" dirty="0"/>
           </a:p>
@@ -13426,7 +13604,7 @@
         </p:nvSpPr>
         <p:spPr>
           <a:xfrm>
-            <a:off x="2938272" y="2258568"/>
+            <a:off x="2221992" y="2258568"/>
             <a:ext cx="1828800" cy="292608"/>
           </a:xfrm>
           <a:prstGeom prst="rect">
@@ -13435,11 +13613,11 @@
             </a:avLst>
           </a:prstGeom>
           <a:solidFill>
-            <a:srgbClr val="CCFBF1"/>
+            <a:srgbClr val="DDD6FE"/>
           </a:solidFill>
           <a:ln w="19050">
             <a:solidFill>
-              <a:srgbClr val="0D9488"/>
+              <a:srgbClr val="7C3AED"/>
             </a:solidFill>
             <a:prstDash val="solid"/>
           </a:ln>
@@ -13460,7 +13638,7 @@
         </p:nvSpPr>
         <p:spPr>
           <a:xfrm>
-            <a:off x="2938272" y="2258568"/>
+            <a:off x="2221992" y="2258568"/>
             <a:ext cx="1828800" cy="292608"/>
           </a:xfrm>
           <a:prstGeom prst="rect">
@@ -13479,13 +13657,13 @@
             <a:r>
               <a:rPr lang="en-US" sz="1300" b="1" dirty="0">
                 <a:solidFill>
-                  <a:srgbClr val="0F766E"/>
+                  <a:srgbClr val="4C1D95"/>
                 </a:solidFill>
                 <a:latin typeface="Trebuchet MS" pitchFamily="34" charset="0"/>
                 <a:ea typeface="Trebuchet MS" pitchFamily="34" charset="-122"/>
                 <a:cs typeface="Trebuchet MS" pitchFamily="34" charset="-120"/>
               </a:rPr>
-              <a:t>inter</a:t>
+              <a:t>de</a:t>
             </a:r>
             <a:endParaRPr lang="en-US" sz="1300" dirty="0"/>
           </a:p>
@@ -13499,7 +13677,7 @@
         </p:nvSpPr>
         <p:spPr>
           <a:xfrm>
-            <a:off x="2938272" y="2569464"/>
+            <a:off x="2221992" y="2569464"/>
             <a:ext cx="1828800" cy="201168"/>
           </a:xfrm>
           <a:prstGeom prst="rect">
@@ -13524,7 +13702,7 @@
                 <a:ea typeface="Calibri" pitchFamily="34" charset="-122"/>
                 <a:cs typeface="Calibri" pitchFamily="34" charset="-120"/>
               </a:rPr>
-              <a:t>between, among</a:t>
+              <a:t>away, from</a:t>
             </a:r>
             <a:endParaRPr lang="en-US" sz="850" dirty="0"/>
           </a:p>
@@ -13538,7 +13716,7 @@
         </p:nvSpPr>
         <p:spPr>
           <a:xfrm>
-            <a:off x="5803392" y="2258568"/>
+            <a:off x="4370832" y="2258568"/>
             <a:ext cx="1828800" cy="292608"/>
           </a:xfrm>
           <a:prstGeom prst="rect">
@@ -13572,7 +13750,7 @@
         </p:nvSpPr>
         <p:spPr>
           <a:xfrm>
-            <a:off x="5803392" y="2258568"/>
+            <a:off x="4370832" y="2258568"/>
             <a:ext cx="1828800" cy="292608"/>
           </a:xfrm>
           <a:prstGeom prst="rect">
@@ -13597,7 +13775,7 @@
                 <a:ea typeface="Trebuchet MS" pitchFamily="34" charset="-122"/>
                 <a:cs typeface="Trebuchet MS" pitchFamily="34" charset="-120"/>
               </a:rPr>
-              <a:t>connect</a:t>
+              <a:t>liver</a:t>
             </a:r>
             <a:endParaRPr lang="en-US" sz="1300" dirty="0"/>
           </a:p>
@@ -13611,7 +13789,7 @@
         </p:nvSpPr>
         <p:spPr>
           <a:xfrm>
-            <a:off x="5803392" y="2569464"/>
+            <a:off x="4370832" y="2569464"/>
             <a:ext cx="1828800" cy="201168"/>
           </a:xfrm>
           <a:prstGeom prst="rect">
@@ -13636,7 +13814,7 @@
                 <a:ea typeface="Calibri" pitchFamily="34" charset="-122"/>
                 <a:cs typeface="Calibri" pitchFamily="34" charset="-120"/>
               </a:rPr>
-              <a:t>to join together</a:t>
+              <a:t>carry, free</a:t>
             </a:r>
             <a:endParaRPr lang="en-US" sz="850" dirty="0"/>
           </a:p>
@@ -13645,6 +13823,118 @@
       <p:sp>
         <p:nvSpPr>
           <p:cNvPr id="22" name="Shape 20"/>
+          <p:cNvSpPr/>
+          <p:nvPr/>
+        </p:nvSpPr>
+        <p:spPr>
+          <a:xfrm>
+            <a:off x="6519672" y="2258568"/>
+            <a:ext cx="1828800" cy="292608"/>
+          </a:xfrm>
+          <a:prstGeom prst="rect">
+            <a:avLst>
+              <a:gd name="adj" fmla="val 25000"/>
+            </a:avLst>
+          </a:prstGeom>
+          <a:solidFill>
+            <a:srgbClr val="FCE7F3"/>
+          </a:solidFill>
+          <a:ln w="19050">
+            <a:solidFill>
+              <a:srgbClr val="DB2777"/>
+            </a:solidFill>
+            <a:prstDash val="solid"/>
+          </a:ln>
+          <a:effectLst>
+            <a:outerShdw sx="100000" sy="100000" kx="0" ky="0" algn="bl" rotWithShape="0" blurRad="101600" dist="38100" dir="8100000">
+              <a:srgbClr val="000000">
+                <a:alpha val="12000"/>
+              </a:srgbClr>
+            </a:outerShdw>
+          </a:effectLst>
+        </p:spPr>
+      </p:sp>
+      <p:sp>
+        <p:nvSpPr>
+          <p:cNvPr id="23" name="Text 21"/>
+          <p:cNvSpPr/>
+          <p:nvPr/>
+        </p:nvSpPr>
+        <p:spPr>
+          <a:xfrm>
+            <a:off x="6519672" y="2258568"/>
+            <a:ext cx="1828800" cy="292608"/>
+          </a:xfrm>
+          <a:prstGeom prst="rect">
+            <a:avLst/>
+          </a:prstGeom>
+          <a:noFill/>
+          <a:ln/>
+        </p:spPr>
+        <p:txBody>
+          <a:bodyPr wrap="square" lIns="0" tIns="0" rIns="0" bIns="0" rtlCol="0" anchor="ctr"/>
+          <a:lstStyle/>
+          <a:p>
+            <a:pPr algn="ctr" indent="0" marL="0">
+              <a:buNone/>
+            </a:pPr>
+            <a:r>
+              <a:rPr lang="en-US" sz="1300" b="1" dirty="0">
+                <a:solidFill>
+                  <a:srgbClr val="9D174D"/>
+                </a:solidFill>
+                <a:latin typeface="Trebuchet MS" pitchFamily="34" charset="0"/>
+                <a:ea typeface="Trebuchet MS" pitchFamily="34" charset="-122"/>
+                <a:cs typeface="Trebuchet MS" pitchFamily="34" charset="-120"/>
+              </a:rPr>
+              <a:t>ed</a:t>
+            </a:r>
+            <a:endParaRPr lang="en-US" sz="1300" dirty="0"/>
+          </a:p>
+        </p:txBody>
+      </p:sp>
+      <p:sp>
+        <p:nvSpPr>
+          <p:cNvPr id="24" name="Text 22"/>
+          <p:cNvSpPr/>
+          <p:nvPr/>
+        </p:nvSpPr>
+        <p:spPr>
+          <a:xfrm>
+            <a:off x="6519672" y="2569464"/>
+            <a:ext cx="1828800" cy="201168"/>
+          </a:xfrm>
+          <a:prstGeom prst="rect">
+            <a:avLst/>
+          </a:prstGeom>
+          <a:noFill/>
+          <a:ln/>
+        </p:spPr>
+        <p:txBody>
+          <a:bodyPr wrap="square" lIns="0" tIns="0" rIns="0" bIns="0" rtlCol="0" anchor="t"/>
+          <a:lstStyle/>
+          <a:p>
+            <a:pPr algn="ctr" indent="0" marL="0">
+              <a:buNone/>
+            </a:pPr>
+            <a:r>
+              <a:rPr lang="en-US" sz="850" dirty="0">
+                <a:solidFill>
+                  <a:srgbClr val="475569"/>
+                </a:solidFill>
+                <a:latin typeface="Calibri" pitchFamily="34" charset="0"/>
+                <a:ea typeface="Calibri" pitchFamily="34" charset="-122"/>
+                <a:cs typeface="Calibri" pitchFamily="34" charset="-120"/>
+              </a:rPr>
+              <a:t>past tense</a:t>
+            </a:r>
+            <a:endParaRPr lang="en-US" sz="850" dirty="0"/>
+          </a:p>
+        </p:txBody>
+      </p:sp>
+      <p:sp>
+        <p:nvSpPr>
+          <p:cNvPr id="25" name="Shape 23"/>
           <p:cNvSpPr/>
           <p:nvPr/>
         </p:nvSpPr>
@@ -13671,7 +13961,7 @@
       </p:sp>
       <p:sp>
         <p:nvSpPr>
-          <p:cNvPr id="23" name="Text 21"/>
+          <p:cNvPr id="26" name="Text 24"/>
           <p:cNvSpPr/>
           <p:nvPr/>
         </p:nvSpPr>
@@ -13710,7 +14000,7 @@
       </p:sp>
       <p:sp>
         <p:nvSpPr>
-          <p:cNvPr id="24" name="Shape 22"/>
+          <p:cNvPr id="27" name="Shape 25"/>
           <p:cNvSpPr/>
           <p:nvPr/>
         </p:nvSpPr>
@@ -13737,14 +14027,14 @@
       </p:sp>
       <p:sp>
         <p:nvSpPr>
-          <p:cNvPr id="25" name="Shape 23"/>
-          <p:cNvSpPr/>
-          <p:nvPr/>
-        </p:nvSpPr>
-        <p:spPr>
-          <a:xfrm>
-            <a:off x="1975104" y="3364992"/>
-            <a:ext cx="1554480" cy="475488"/>
+          <p:cNvPr id="28" name="Shape 26"/>
+          <p:cNvSpPr/>
+          <p:nvPr/>
+        </p:nvSpPr>
+        <p:spPr>
+          <a:xfrm>
+            <a:off x="2313432" y="3364992"/>
+            <a:ext cx="1645920" cy="475488"/>
           </a:xfrm>
           <a:prstGeom prst="rect">
             <a:avLst>
@@ -13764,14 +14054,14 @@
       </p:sp>
       <p:sp>
         <p:nvSpPr>
-          <p:cNvPr id="26" name="Text 24"/>
-          <p:cNvSpPr/>
-          <p:nvPr/>
-        </p:nvSpPr>
-        <p:spPr>
-          <a:xfrm>
-            <a:off x="1975104" y="3364992"/>
-            <a:ext cx="1554480" cy="475488"/>
+          <p:cNvPr id="29" name="Text 27"/>
+          <p:cNvSpPr/>
+          <p:nvPr/>
+        </p:nvSpPr>
+        <p:spPr>
+          <a:xfrm>
+            <a:off x="2313432" y="3364992"/>
+            <a:ext cx="1645920" cy="475488"/>
           </a:xfrm>
           <a:prstGeom prst="rect">
             <a:avLst/>
@@ -13795,7 +14085,7 @@
                 <a:ea typeface="Trebuchet MS" pitchFamily="34" charset="-122"/>
                 <a:cs typeface="Trebuchet MS" pitchFamily="34" charset="-120"/>
               </a:rPr>
-              <a:t>in</a:t>
+              <a:t>de</a:t>
             </a:r>
             <a:endParaRPr lang="en-US" sz="1400" dirty="0"/>
           </a:p>
@@ -13803,14 +14093,14 @@
       </p:sp>
       <p:sp>
         <p:nvSpPr>
-          <p:cNvPr id="27" name="Text 25"/>
-          <p:cNvSpPr/>
-          <p:nvPr/>
-        </p:nvSpPr>
-        <p:spPr>
-          <a:xfrm>
-            <a:off x="3529584" y="3364992"/>
-            <a:ext cx="73152" cy="475488"/>
+          <p:cNvPr id="30" name="Text 28"/>
+          <p:cNvSpPr/>
+          <p:nvPr/>
+        </p:nvSpPr>
+        <p:spPr>
+          <a:xfrm>
+            <a:off x="3959352" y="3364992"/>
+            <a:ext cx="411480" cy="475488"/>
           </a:xfrm>
           <a:prstGeom prst="rect">
             <a:avLst/>
@@ -13842,14 +14132,14 @@
       </p:sp>
       <p:sp>
         <p:nvSpPr>
-          <p:cNvPr id="28" name="Shape 26"/>
-          <p:cNvSpPr/>
-          <p:nvPr/>
-        </p:nvSpPr>
-        <p:spPr>
-          <a:xfrm>
-            <a:off x="3602736" y="3364992"/>
-            <a:ext cx="1554480" cy="475488"/>
+          <p:cNvPr id="31" name="Shape 29"/>
+          <p:cNvSpPr/>
+          <p:nvPr/>
+        </p:nvSpPr>
+        <p:spPr>
+          <a:xfrm>
+            <a:off x="4370832" y="3364992"/>
+            <a:ext cx="1645920" cy="475488"/>
           </a:xfrm>
           <a:prstGeom prst="rect">
             <a:avLst>
@@ -13869,14 +14159,14 @@
       </p:sp>
       <p:sp>
         <p:nvSpPr>
-          <p:cNvPr id="29" name="Text 27"/>
-          <p:cNvSpPr/>
-          <p:nvPr/>
-        </p:nvSpPr>
-        <p:spPr>
-          <a:xfrm>
-            <a:off x="3602736" y="3364992"/>
-            <a:ext cx="1554480" cy="475488"/>
+          <p:cNvPr id="32" name="Text 30"/>
+          <p:cNvSpPr/>
+          <p:nvPr/>
+        </p:nvSpPr>
+        <p:spPr>
+          <a:xfrm>
+            <a:off x="4370832" y="3364992"/>
+            <a:ext cx="1645920" cy="475488"/>
           </a:xfrm>
           <a:prstGeom prst="rect">
             <a:avLst/>
@@ -13900,7 +14190,7 @@
                 <a:ea typeface="Trebuchet MS" pitchFamily="34" charset="-122"/>
                 <a:cs typeface="Trebuchet MS" pitchFamily="34" charset="-120"/>
               </a:rPr>
-              <a:t>ter</a:t>
+              <a:t>liv</a:t>
             </a:r>
             <a:endParaRPr lang="en-US" sz="1400" dirty="0"/>
           </a:p>
@@ -13908,14 +14198,14 @@
       </p:sp>
       <p:sp>
         <p:nvSpPr>
-          <p:cNvPr id="30" name="Text 28"/>
-          <p:cNvSpPr/>
-          <p:nvPr/>
-        </p:nvSpPr>
-        <p:spPr>
-          <a:xfrm>
-            <a:off x="5157216" y="3364992"/>
-            <a:ext cx="73152" cy="475488"/>
+          <p:cNvPr id="33" name="Text 31"/>
+          <p:cNvSpPr/>
+          <p:nvPr/>
+        </p:nvSpPr>
+        <p:spPr>
+          <a:xfrm>
+            <a:off x="6016752" y="3364992"/>
+            <a:ext cx="411480" cy="475488"/>
           </a:xfrm>
           <a:prstGeom prst="rect">
             <a:avLst/>
@@ -13947,14 +14237,14 @@
       </p:sp>
       <p:sp>
         <p:nvSpPr>
-          <p:cNvPr id="31" name="Shape 29"/>
-          <p:cNvSpPr/>
-          <p:nvPr/>
-        </p:nvSpPr>
-        <p:spPr>
-          <a:xfrm>
-            <a:off x="5230368" y="3364992"/>
-            <a:ext cx="1554480" cy="475488"/>
+          <p:cNvPr id="34" name="Shape 32"/>
+          <p:cNvSpPr/>
+          <p:nvPr/>
+        </p:nvSpPr>
+        <p:spPr>
+          <a:xfrm>
+            <a:off x="6428232" y="3364992"/>
+            <a:ext cx="1645920" cy="475488"/>
           </a:xfrm>
           <a:prstGeom prst="rect">
             <a:avLst>
@@ -13974,14 +14264,14 @@
       </p:sp>
       <p:sp>
         <p:nvSpPr>
-          <p:cNvPr id="32" name="Text 30"/>
-          <p:cNvSpPr/>
-          <p:nvPr/>
-        </p:nvSpPr>
-        <p:spPr>
-          <a:xfrm>
-            <a:off x="5230368" y="3364992"/>
-            <a:ext cx="1554480" cy="475488"/>
+          <p:cNvPr id="35" name="Text 33"/>
+          <p:cNvSpPr/>
+          <p:nvPr/>
+        </p:nvSpPr>
+        <p:spPr>
+          <a:xfrm>
+            <a:off x="6428232" y="3364992"/>
+            <a:ext cx="1645920" cy="475488"/>
           </a:xfrm>
           <a:prstGeom prst="rect">
             <a:avLst/>
@@ -14005,112 +14295,7 @@
                 <a:ea typeface="Trebuchet MS" pitchFamily="34" charset="-122"/>
                 <a:cs typeface="Trebuchet MS" pitchFamily="34" charset="-120"/>
               </a:rPr>
-              <a:t>con</a:t>
-            </a:r>
-            <a:endParaRPr lang="en-US" sz="1400" dirty="0"/>
-          </a:p>
-        </p:txBody>
-      </p:sp>
-      <p:sp>
-        <p:nvSpPr>
-          <p:cNvPr id="33" name="Text 31"/>
-          <p:cNvSpPr/>
-          <p:nvPr/>
-        </p:nvSpPr>
-        <p:spPr>
-          <a:xfrm>
-            <a:off x="6784848" y="3364992"/>
-            <a:ext cx="73152" cy="475488"/>
-          </a:xfrm>
-          <a:prstGeom prst="rect">
-            <a:avLst/>
-          </a:prstGeom>
-          <a:noFill/>
-          <a:ln/>
-        </p:spPr>
-        <p:txBody>
-          <a:bodyPr wrap="square" lIns="0" tIns="0" rIns="0" bIns="0" rtlCol="0" anchor="ctr"/>
-          <a:lstStyle/>
-          <a:p>
-            <a:pPr algn="ctr" indent="0" marL="0">
-              <a:buNone/>
-            </a:pPr>
-            <a:r>
-              <a:rPr lang="en-US" sz="1600" b="1" dirty="0">
-                <a:solidFill>
-                  <a:srgbClr val="0D9488"/>
-                </a:solidFill>
-                <a:latin typeface="Trebuchet MS" pitchFamily="34" charset="0"/>
-                <a:ea typeface="Trebuchet MS" pitchFamily="34" charset="-122"/>
-                <a:cs typeface="Trebuchet MS" pitchFamily="34" charset="-120"/>
-              </a:rPr>
-              <a:t>·</a:t>
-            </a:r>
-            <a:endParaRPr lang="en-US" sz="1600" dirty="0"/>
-          </a:p>
-        </p:txBody>
-      </p:sp>
-      <p:sp>
-        <p:nvSpPr>
-          <p:cNvPr id="34" name="Shape 32"/>
-          <p:cNvSpPr/>
-          <p:nvPr/>
-        </p:nvSpPr>
-        <p:spPr>
-          <a:xfrm>
-            <a:off x="6858000" y="3364992"/>
-            <a:ext cx="1554480" cy="475488"/>
-          </a:xfrm>
-          <a:prstGeom prst="rect">
-            <a:avLst>
-              <a:gd name="adj" fmla="val 9615"/>
-            </a:avLst>
-          </a:prstGeom>
-          <a:solidFill>
-            <a:srgbClr val="FFFFFF"/>
-          </a:solidFill>
-          <a:ln w="12700">
-            <a:solidFill>
-              <a:srgbClr val="0D9488"/>
-            </a:solidFill>
-            <a:prstDash val="solid"/>
-          </a:ln>
-        </p:spPr>
-      </p:sp>
-      <p:sp>
-        <p:nvSpPr>
-          <p:cNvPr id="35" name="Text 33"/>
-          <p:cNvSpPr/>
-          <p:nvPr/>
-        </p:nvSpPr>
-        <p:spPr>
-          <a:xfrm>
-            <a:off x="6858000" y="3364992"/>
-            <a:ext cx="1554480" cy="475488"/>
-          </a:xfrm>
-          <a:prstGeom prst="rect">
-            <a:avLst/>
-          </a:prstGeom>
-          <a:noFill/>
-          <a:ln/>
-        </p:spPr>
-        <p:txBody>
-          <a:bodyPr wrap="square" lIns="0" tIns="0" rIns="0" bIns="0" rtlCol="0" anchor="ctr"/>
-          <a:lstStyle/>
-          <a:p>
-            <a:pPr algn="ctr" indent="0" marL="0">
-              <a:buNone/>
-            </a:pPr>
-            <a:r>
-              <a:rPr lang="en-US" sz="1400" b="1" dirty="0">
-                <a:solidFill>
-                  <a:srgbClr val="0D9488"/>
-                </a:solidFill>
-                <a:latin typeface="Trebuchet MS" pitchFamily="34" charset="0"/>
-                <a:ea typeface="Trebuchet MS" pitchFamily="34" charset="-122"/>
-                <a:cs typeface="Trebuchet MS" pitchFamily="34" charset="-120"/>
-              </a:rPr>
-              <a:t>nect</a:t>
+              <a:t>ered</a:t>
             </a:r>
             <a:endParaRPr lang="en-US" sz="1400" dirty="0"/>
           </a:p>
@@ -14938,7 +15123,7 @@
                 <a:ea typeface="Trebuchet MS" pitchFamily="34" charset="-122"/>
                 <a:cs typeface="Trebuchet MS" pitchFamily="34" charset="-120"/>
               </a:rPr>
-              <a:t>interconnect</a:t>
+              <a:t>delivered</a:t>
             </a:r>
             <a:endParaRPr lang="en-US" sz="2800" dirty="0"/>
           </a:p>
@@ -15018,7 +15203,7 @@
         </p:nvSpPr>
         <p:spPr>
           <a:xfrm>
-            <a:off x="2938272" y="2258568"/>
+            <a:off x="2221992" y="2258568"/>
             <a:ext cx="1828800" cy="292608"/>
           </a:xfrm>
           <a:prstGeom prst="rect">
@@ -15027,11 +15212,11 @@
             </a:avLst>
           </a:prstGeom>
           <a:solidFill>
-            <a:srgbClr val="CCFBF1"/>
+            <a:srgbClr val="DDD6FE"/>
           </a:solidFill>
           <a:ln w="19050">
             <a:solidFill>
-              <a:srgbClr val="0D9488"/>
+              <a:srgbClr val="7C3AED"/>
             </a:solidFill>
             <a:prstDash val="solid"/>
           </a:ln>
@@ -15052,7 +15237,7 @@
         </p:nvSpPr>
         <p:spPr>
           <a:xfrm>
-            <a:off x="2938272" y="2258568"/>
+            <a:off x="2221992" y="2258568"/>
             <a:ext cx="1828800" cy="292608"/>
           </a:xfrm>
           <a:prstGeom prst="rect">
@@ -15071,13 +15256,13 @@
             <a:r>
               <a:rPr lang="en-US" sz="1300" b="1" dirty="0">
                 <a:solidFill>
-                  <a:srgbClr val="0F766E"/>
+                  <a:srgbClr val="4C1D95"/>
                 </a:solidFill>
                 <a:latin typeface="Trebuchet MS" pitchFamily="34" charset="0"/>
                 <a:ea typeface="Trebuchet MS" pitchFamily="34" charset="-122"/>
                 <a:cs typeface="Trebuchet MS" pitchFamily="34" charset="-120"/>
               </a:rPr>
-              <a:t>inter</a:t>
+              <a:t>de</a:t>
             </a:r>
             <a:endParaRPr lang="en-US" sz="1300" dirty="0"/>
           </a:p>
@@ -15091,7 +15276,7 @@
         </p:nvSpPr>
         <p:spPr>
           <a:xfrm>
-            <a:off x="2938272" y="2569464"/>
+            <a:off x="2221992" y="2569464"/>
             <a:ext cx="1828800" cy="201168"/>
           </a:xfrm>
           <a:prstGeom prst="rect">
@@ -15116,7 +15301,7 @@
                 <a:ea typeface="Calibri" pitchFamily="34" charset="-122"/>
                 <a:cs typeface="Calibri" pitchFamily="34" charset="-120"/>
               </a:rPr>
-              <a:t>between, among</a:t>
+              <a:t>away, from</a:t>
             </a:r>
             <a:endParaRPr lang="en-US" sz="850" dirty="0"/>
           </a:p>
@@ -15130,7 +15315,7 @@
         </p:nvSpPr>
         <p:spPr>
           <a:xfrm>
-            <a:off x="5803392" y="2258568"/>
+            <a:off x="4370832" y="2258568"/>
             <a:ext cx="1828800" cy="292608"/>
           </a:xfrm>
           <a:prstGeom prst="rect">
@@ -15164,7 +15349,7 @@
         </p:nvSpPr>
         <p:spPr>
           <a:xfrm>
-            <a:off x="5803392" y="2258568"/>
+            <a:off x="4370832" y="2258568"/>
             <a:ext cx="1828800" cy="292608"/>
           </a:xfrm>
           <a:prstGeom prst="rect">
@@ -15189,7 +15374,7 @@
                 <a:ea typeface="Trebuchet MS" pitchFamily="34" charset="-122"/>
                 <a:cs typeface="Trebuchet MS" pitchFamily="34" charset="-120"/>
               </a:rPr>
-              <a:t>connect</a:t>
+              <a:t>liver</a:t>
             </a:r>
             <a:endParaRPr lang="en-US" sz="1300" dirty="0"/>
           </a:p>
@@ -15203,7 +15388,7 @@
         </p:nvSpPr>
         <p:spPr>
           <a:xfrm>
-            <a:off x="5803392" y="2569464"/>
+            <a:off x="4370832" y="2569464"/>
             <a:ext cx="1828800" cy="201168"/>
           </a:xfrm>
           <a:prstGeom prst="rect">
@@ -15228,7 +15413,7 @@
                 <a:ea typeface="Calibri" pitchFamily="34" charset="-122"/>
                 <a:cs typeface="Calibri" pitchFamily="34" charset="-120"/>
               </a:rPr>
-              <a:t>to join together</a:t>
+              <a:t>carry, free</a:t>
             </a:r>
             <a:endParaRPr lang="en-US" sz="850" dirty="0"/>
           </a:p>
@@ -15237,6 +15422,118 @@
       <p:sp>
         <p:nvSpPr>
           <p:cNvPr id="22" name="Shape 20"/>
+          <p:cNvSpPr/>
+          <p:nvPr/>
+        </p:nvSpPr>
+        <p:spPr>
+          <a:xfrm>
+            <a:off x="6519672" y="2258568"/>
+            <a:ext cx="1828800" cy="292608"/>
+          </a:xfrm>
+          <a:prstGeom prst="rect">
+            <a:avLst>
+              <a:gd name="adj" fmla="val 25000"/>
+            </a:avLst>
+          </a:prstGeom>
+          <a:solidFill>
+            <a:srgbClr val="FCE7F3"/>
+          </a:solidFill>
+          <a:ln w="19050">
+            <a:solidFill>
+              <a:srgbClr val="DB2777"/>
+            </a:solidFill>
+            <a:prstDash val="solid"/>
+          </a:ln>
+          <a:effectLst>
+            <a:outerShdw sx="100000" sy="100000" kx="0" ky="0" algn="bl" rotWithShape="0" blurRad="101600" dist="38100" dir="8100000">
+              <a:srgbClr val="000000">
+                <a:alpha val="12000"/>
+              </a:srgbClr>
+            </a:outerShdw>
+          </a:effectLst>
+        </p:spPr>
+      </p:sp>
+      <p:sp>
+        <p:nvSpPr>
+          <p:cNvPr id="23" name="Text 21"/>
+          <p:cNvSpPr/>
+          <p:nvPr/>
+        </p:nvSpPr>
+        <p:spPr>
+          <a:xfrm>
+            <a:off x="6519672" y="2258568"/>
+            <a:ext cx="1828800" cy="292608"/>
+          </a:xfrm>
+          <a:prstGeom prst="rect">
+            <a:avLst/>
+          </a:prstGeom>
+          <a:noFill/>
+          <a:ln/>
+        </p:spPr>
+        <p:txBody>
+          <a:bodyPr wrap="square" lIns="0" tIns="0" rIns="0" bIns="0" rtlCol="0" anchor="ctr"/>
+          <a:lstStyle/>
+          <a:p>
+            <a:pPr algn="ctr" indent="0" marL="0">
+              <a:buNone/>
+            </a:pPr>
+            <a:r>
+              <a:rPr lang="en-US" sz="1300" b="1" dirty="0">
+                <a:solidFill>
+                  <a:srgbClr val="9D174D"/>
+                </a:solidFill>
+                <a:latin typeface="Trebuchet MS" pitchFamily="34" charset="0"/>
+                <a:ea typeface="Trebuchet MS" pitchFamily="34" charset="-122"/>
+                <a:cs typeface="Trebuchet MS" pitchFamily="34" charset="-120"/>
+              </a:rPr>
+              <a:t>ed</a:t>
+            </a:r>
+            <a:endParaRPr lang="en-US" sz="1300" dirty="0"/>
+          </a:p>
+        </p:txBody>
+      </p:sp>
+      <p:sp>
+        <p:nvSpPr>
+          <p:cNvPr id="24" name="Text 22"/>
+          <p:cNvSpPr/>
+          <p:nvPr/>
+        </p:nvSpPr>
+        <p:spPr>
+          <a:xfrm>
+            <a:off x="6519672" y="2569464"/>
+            <a:ext cx="1828800" cy="201168"/>
+          </a:xfrm>
+          <a:prstGeom prst="rect">
+            <a:avLst/>
+          </a:prstGeom>
+          <a:noFill/>
+          <a:ln/>
+        </p:spPr>
+        <p:txBody>
+          <a:bodyPr wrap="square" lIns="0" tIns="0" rIns="0" bIns="0" rtlCol="0" anchor="t"/>
+          <a:lstStyle/>
+          <a:p>
+            <a:pPr algn="ctr" indent="0" marL="0">
+              <a:buNone/>
+            </a:pPr>
+            <a:r>
+              <a:rPr lang="en-US" sz="850" dirty="0">
+                <a:solidFill>
+                  <a:srgbClr val="475569"/>
+                </a:solidFill>
+                <a:latin typeface="Calibri" pitchFamily="34" charset="0"/>
+                <a:ea typeface="Calibri" pitchFamily="34" charset="-122"/>
+                <a:cs typeface="Calibri" pitchFamily="34" charset="-120"/>
+              </a:rPr>
+              <a:t>past tense</a:t>
+            </a:r>
+            <a:endParaRPr lang="en-US" sz="850" dirty="0"/>
+          </a:p>
+        </p:txBody>
+      </p:sp>
+      <p:sp>
+        <p:nvSpPr>
+          <p:cNvPr id="25" name="Shape 23"/>
           <p:cNvSpPr/>
           <p:nvPr/>
         </p:nvSpPr>
@@ -15263,7 +15560,7 @@
       </p:sp>
       <p:sp>
         <p:nvSpPr>
-          <p:cNvPr id="23" name="Text 21"/>
+          <p:cNvPr id="26" name="Text 24"/>
           <p:cNvSpPr/>
           <p:nvPr/>
         </p:nvSpPr>
@@ -15302,7 +15599,7 @@
       </p:sp>
       <p:sp>
         <p:nvSpPr>
-          <p:cNvPr id="24" name="Shape 22"/>
+          <p:cNvPr id="27" name="Shape 25"/>
           <p:cNvSpPr/>
           <p:nvPr/>
         </p:nvSpPr>
@@ -15329,14 +15626,14 @@
       </p:sp>
       <p:sp>
         <p:nvSpPr>
-          <p:cNvPr id="25" name="Shape 23"/>
-          <p:cNvSpPr/>
-          <p:nvPr/>
-        </p:nvSpPr>
-        <p:spPr>
-          <a:xfrm>
-            <a:off x="1975104" y="3364992"/>
-            <a:ext cx="1554480" cy="475488"/>
+          <p:cNvPr id="28" name="Shape 26"/>
+          <p:cNvSpPr/>
+          <p:nvPr/>
+        </p:nvSpPr>
+        <p:spPr>
+          <a:xfrm>
+            <a:off x="2313432" y="3364992"/>
+            <a:ext cx="1645920" cy="475488"/>
           </a:xfrm>
           <a:prstGeom prst="rect">
             <a:avLst>
@@ -15356,14 +15653,14 @@
       </p:sp>
       <p:sp>
         <p:nvSpPr>
-          <p:cNvPr id="26" name="Text 24"/>
-          <p:cNvSpPr/>
-          <p:nvPr/>
-        </p:nvSpPr>
-        <p:spPr>
-          <a:xfrm>
-            <a:off x="1975104" y="3364992"/>
-            <a:ext cx="1554480" cy="475488"/>
+          <p:cNvPr id="29" name="Text 27"/>
+          <p:cNvSpPr/>
+          <p:nvPr/>
+        </p:nvSpPr>
+        <p:spPr>
+          <a:xfrm>
+            <a:off x="2313432" y="3364992"/>
+            <a:ext cx="1645920" cy="475488"/>
           </a:xfrm>
           <a:prstGeom prst="rect">
             <a:avLst/>
@@ -15387,7 +15684,7 @@
                 <a:ea typeface="Trebuchet MS" pitchFamily="34" charset="-122"/>
                 <a:cs typeface="Trebuchet MS" pitchFamily="34" charset="-120"/>
               </a:rPr>
-              <a:t>in</a:t>
+              <a:t>de</a:t>
             </a:r>
             <a:endParaRPr lang="en-US" sz="1400" dirty="0"/>
           </a:p>
@@ -15395,14 +15692,14 @@
       </p:sp>
       <p:sp>
         <p:nvSpPr>
-          <p:cNvPr id="27" name="Text 25"/>
-          <p:cNvSpPr/>
-          <p:nvPr/>
-        </p:nvSpPr>
-        <p:spPr>
-          <a:xfrm>
-            <a:off x="3529584" y="3364992"/>
-            <a:ext cx="73152" cy="475488"/>
+          <p:cNvPr id="30" name="Text 28"/>
+          <p:cNvSpPr/>
+          <p:nvPr/>
+        </p:nvSpPr>
+        <p:spPr>
+          <a:xfrm>
+            <a:off x="3959352" y="3364992"/>
+            <a:ext cx="411480" cy="475488"/>
           </a:xfrm>
           <a:prstGeom prst="rect">
             <a:avLst/>
@@ -15434,14 +15731,14 @@
       </p:sp>
       <p:sp>
         <p:nvSpPr>
-          <p:cNvPr id="28" name="Shape 26"/>
-          <p:cNvSpPr/>
-          <p:nvPr/>
-        </p:nvSpPr>
-        <p:spPr>
-          <a:xfrm>
-            <a:off x="3602736" y="3364992"/>
-            <a:ext cx="1554480" cy="475488"/>
+          <p:cNvPr id="31" name="Shape 29"/>
+          <p:cNvSpPr/>
+          <p:nvPr/>
+        </p:nvSpPr>
+        <p:spPr>
+          <a:xfrm>
+            <a:off x="4370832" y="3364992"/>
+            <a:ext cx="1645920" cy="475488"/>
           </a:xfrm>
           <a:prstGeom prst="rect">
             <a:avLst>
@@ -15461,14 +15758,14 @@
       </p:sp>
       <p:sp>
         <p:nvSpPr>
-          <p:cNvPr id="29" name="Text 27"/>
-          <p:cNvSpPr/>
-          <p:nvPr/>
-        </p:nvSpPr>
-        <p:spPr>
-          <a:xfrm>
-            <a:off x="3602736" y="3364992"/>
-            <a:ext cx="1554480" cy="475488"/>
+          <p:cNvPr id="32" name="Text 30"/>
+          <p:cNvSpPr/>
+          <p:nvPr/>
+        </p:nvSpPr>
+        <p:spPr>
+          <a:xfrm>
+            <a:off x="4370832" y="3364992"/>
+            <a:ext cx="1645920" cy="475488"/>
           </a:xfrm>
           <a:prstGeom prst="rect">
             <a:avLst/>
@@ -15492,7 +15789,7 @@
                 <a:ea typeface="Trebuchet MS" pitchFamily="34" charset="-122"/>
                 <a:cs typeface="Trebuchet MS" pitchFamily="34" charset="-120"/>
               </a:rPr>
-              <a:t>ter</a:t>
+              <a:t>liv</a:t>
             </a:r>
             <a:endParaRPr lang="en-US" sz="1400" dirty="0"/>
           </a:p>
@@ -15500,14 +15797,14 @@
       </p:sp>
       <p:sp>
         <p:nvSpPr>
-          <p:cNvPr id="30" name="Text 28"/>
-          <p:cNvSpPr/>
-          <p:nvPr/>
-        </p:nvSpPr>
-        <p:spPr>
-          <a:xfrm>
-            <a:off x="5157216" y="3364992"/>
-            <a:ext cx="73152" cy="475488"/>
+          <p:cNvPr id="33" name="Text 31"/>
+          <p:cNvSpPr/>
+          <p:nvPr/>
+        </p:nvSpPr>
+        <p:spPr>
+          <a:xfrm>
+            <a:off x="6016752" y="3364992"/>
+            <a:ext cx="411480" cy="475488"/>
           </a:xfrm>
           <a:prstGeom prst="rect">
             <a:avLst/>
@@ -15539,14 +15836,14 @@
       </p:sp>
       <p:sp>
         <p:nvSpPr>
-          <p:cNvPr id="31" name="Shape 29"/>
-          <p:cNvSpPr/>
-          <p:nvPr/>
-        </p:nvSpPr>
-        <p:spPr>
-          <a:xfrm>
-            <a:off x="5230368" y="3364992"/>
-            <a:ext cx="1554480" cy="475488"/>
+          <p:cNvPr id="34" name="Shape 32"/>
+          <p:cNvSpPr/>
+          <p:nvPr/>
+        </p:nvSpPr>
+        <p:spPr>
+          <a:xfrm>
+            <a:off x="6428232" y="3364992"/>
+            <a:ext cx="1645920" cy="475488"/>
           </a:xfrm>
           <a:prstGeom prst="rect">
             <a:avLst>
@@ -15566,14 +15863,14 @@
       </p:sp>
       <p:sp>
         <p:nvSpPr>
-          <p:cNvPr id="32" name="Text 30"/>
-          <p:cNvSpPr/>
-          <p:nvPr/>
-        </p:nvSpPr>
-        <p:spPr>
-          <a:xfrm>
-            <a:off x="5230368" y="3364992"/>
-            <a:ext cx="1554480" cy="475488"/>
+          <p:cNvPr id="35" name="Text 33"/>
+          <p:cNvSpPr/>
+          <p:nvPr/>
+        </p:nvSpPr>
+        <p:spPr>
+          <a:xfrm>
+            <a:off x="6428232" y="3364992"/>
+            <a:ext cx="1645920" cy="475488"/>
           </a:xfrm>
           <a:prstGeom prst="rect">
             <a:avLst/>
@@ -15597,7 +15894,7 @@
                 <a:ea typeface="Trebuchet MS" pitchFamily="34" charset="-122"/>
                 <a:cs typeface="Trebuchet MS" pitchFamily="34" charset="-120"/>
               </a:rPr>
-              <a:t>con</a:t>
+              <a:t>ered</a:t>
             </a:r>
             <a:endParaRPr lang="en-US" sz="1400" dirty="0"/>
           </a:p>
@@ -15605,212 +15902,239 @@
       </p:sp>
       <p:sp>
         <p:nvSpPr>
-          <p:cNvPr id="33" name="Text 31"/>
-          <p:cNvSpPr/>
-          <p:nvPr/>
-        </p:nvSpPr>
-        <p:spPr>
-          <a:xfrm>
-            <a:off x="6784848" y="3364992"/>
-            <a:ext cx="73152" cy="475488"/>
-          </a:xfrm>
-          <a:prstGeom prst="rect">
-            <a:avLst/>
-          </a:prstGeom>
-          <a:noFill/>
-          <a:ln/>
-        </p:spPr>
-        <p:txBody>
-          <a:bodyPr wrap="square" lIns="0" tIns="0" rIns="0" bIns="0" rtlCol="0" anchor="ctr"/>
-          <a:lstStyle/>
-          <a:p>
-            <a:pPr algn="ctr" indent="0" marL="0">
-              <a:buNone/>
-            </a:pPr>
-            <a:r>
-              <a:rPr lang="en-US" sz="1600" b="1" dirty="0">
-                <a:solidFill>
-                  <a:srgbClr val="0D9488"/>
+          <p:cNvPr id="36" name="Shape 34"/>
+          <p:cNvSpPr/>
+          <p:nvPr/>
+        </p:nvSpPr>
+        <p:spPr>
+          <a:xfrm>
+            <a:off x="365760" y="4096512"/>
+            <a:ext cx="1371600" cy="804672"/>
+          </a:xfrm>
+          <a:prstGeom prst="rect">
+            <a:avLst>
+              <a:gd name="adj" fmla="val 6818"/>
+            </a:avLst>
+          </a:prstGeom>
+          <a:solidFill>
+            <a:srgbClr val="E2E8F0"/>
+          </a:solidFill>
+          <a:ln w="12700">
+            <a:solidFill>
+              <a:srgbClr val="E2E8F0"/>
+            </a:solidFill>
+            <a:prstDash val="solid"/>
+          </a:ln>
+        </p:spPr>
+      </p:sp>
+      <p:sp>
+        <p:nvSpPr>
+          <p:cNvPr id="37" name="Text 35"/>
+          <p:cNvSpPr/>
+          <p:nvPr/>
+        </p:nvSpPr>
+        <p:spPr>
+          <a:xfrm>
+            <a:off x="365760" y="4096512"/>
+            <a:ext cx="1371600" cy="804672"/>
+          </a:xfrm>
+          <a:prstGeom prst="rect">
+            <a:avLst/>
+          </a:prstGeom>
+          <a:noFill/>
+          <a:ln/>
+        </p:spPr>
+        <p:txBody>
+          <a:bodyPr wrap="square" lIns="0" tIns="0" rIns="0" bIns="0" rtlCol="0" anchor="ctr"/>
+          <a:lstStyle/>
+          <a:p>
+            <a:pPr algn="ctr" indent="0" marL="0">
+              <a:buNone/>
+            </a:pPr>
+            <a:r>
+              <a:rPr lang="en-US" sz="1100" b="1" dirty="0">
+                <a:solidFill>
+                  <a:srgbClr val="475569"/>
                 </a:solidFill>
                 <a:latin typeface="Trebuchet MS" pitchFamily="34" charset="0"/>
                 <a:ea typeface="Trebuchet MS" pitchFamily="34" charset="-122"/>
                 <a:cs typeface="Trebuchet MS" pitchFamily="34" charset="-120"/>
               </a:rPr>
-              <a:t>·</a:t>
-            </a:r>
-            <a:endParaRPr lang="en-US" sz="1600" dirty="0"/>
-          </a:p>
-        </p:txBody>
-      </p:sp>
-      <p:sp>
-        <p:nvSpPr>
-          <p:cNvPr id="34" name="Shape 32"/>
-          <p:cNvSpPr/>
-          <p:nvPr/>
-        </p:nvSpPr>
-        <p:spPr>
-          <a:xfrm>
-            <a:off x="6858000" y="3364992"/>
-            <a:ext cx="1554480" cy="475488"/>
+              <a:t>Phonemes</a:t>
+            </a:r>
+            <a:endParaRPr lang="en-US" sz="1100" dirty="0"/>
+          </a:p>
+        </p:txBody>
+      </p:sp>
+      <p:sp>
+        <p:nvSpPr>
+          <p:cNvPr id="38" name="Shape 36"/>
+          <p:cNvSpPr/>
+          <p:nvPr/>
+        </p:nvSpPr>
+        <p:spPr>
+          <a:xfrm>
+            <a:off x="1874520" y="4096512"/>
+            <a:ext cx="6903720" cy="658368"/>
           </a:xfrm>
           <a:prstGeom prst="rect">
             <a:avLst>
-              <a:gd name="adj" fmla="val 9615"/>
+              <a:gd name="adj" fmla="val 8333"/>
             </a:avLst>
           </a:prstGeom>
           <a:solidFill>
+            <a:srgbClr val="FCE7F3"/>
+          </a:solidFill>
+          <a:ln w="12700">
+            <a:solidFill>
+              <a:srgbClr val="DB2777"/>
+            </a:solidFill>
+            <a:prstDash val="solid"/>
+          </a:ln>
+        </p:spPr>
+      </p:sp>
+      <p:sp>
+        <p:nvSpPr>
+          <p:cNvPr id="39" name="Shape 37"/>
+          <p:cNvSpPr/>
+          <p:nvPr/>
+        </p:nvSpPr>
+        <p:spPr>
+          <a:xfrm>
+            <a:off x="2124837" y="4169664"/>
+            <a:ext cx="685800" cy="475488"/>
+          </a:xfrm>
+          <a:prstGeom prst="rect">
+            <a:avLst>
+              <a:gd name="adj" fmla="val 7692"/>
+            </a:avLst>
+          </a:prstGeom>
+          <a:solidFill>
             <a:srgbClr val="FFFFFF"/>
           </a:solidFill>
           <a:ln w="12700">
             <a:solidFill>
-              <a:srgbClr val="0D9488"/>
-            </a:solidFill>
-            <a:prstDash val="solid"/>
-          </a:ln>
-        </p:spPr>
-      </p:sp>
-      <p:sp>
-        <p:nvSpPr>
-          <p:cNvPr id="35" name="Text 33"/>
-          <p:cNvSpPr/>
-          <p:nvPr/>
-        </p:nvSpPr>
-        <p:spPr>
-          <a:xfrm>
-            <a:off x="6858000" y="3364992"/>
-            <a:ext cx="1554480" cy="475488"/>
-          </a:xfrm>
-          <a:prstGeom prst="rect">
-            <a:avLst/>
-          </a:prstGeom>
-          <a:noFill/>
-          <a:ln/>
-        </p:spPr>
-        <p:txBody>
-          <a:bodyPr wrap="square" lIns="0" tIns="0" rIns="0" bIns="0" rtlCol="0" anchor="ctr"/>
-          <a:lstStyle/>
-          <a:p>
-            <a:pPr algn="ctr" indent="0" marL="0">
-              <a:buNone/>
-            </a:pPr>
-            <a:r>
-              <a:rPr lang="en-US" sz="1400" b="1" dirty="0">
-                <a:solidFill>
-                  <a:srgbClr val="0D9488"/>
+              <a:srgbClr val="DB2777"/>
+            </a:solidFill>
+            <a:prstDash val="solid"/>
+          </a:ln>
+        </p:spPr>
+      </p:sp>
+      <p:sp>
+        <p:nvSpPr>
+          <p:cNvPr id="40" name="Text 38"/>
+          <p:cNvSpPr/>
+          <p:nvPr/>
+        </p:nvSpPr>
+        <p:spPr>
+          <a:xfrm>
+            <a:off x="2124837" y="4169664"/>
+            <a:ext cx="685800" cy="475488"/>
+          </a:xfrm>
+          <a:prstGeom prst="rect">
+            <a:avLst/>
+          </a:prstGeom>
+          <a:noFill/>
+          <a:ln/>
+        </p:spPr>
+        <p:txBody>
+          <a:bodyPr wrap="square" lIns="0" tIns="0" rIns="0" bIns="0" rtlCol="0" anchor="ctr"/>
+          <a:lstStyle/>
+          <a:p>
+            <a:pPr algn="ctr" indent="0" marL="0">
+              <a:buNone/>
+            </a:pPr>
+            <a:r>
+              <a:rPr lang="en-US" sz="900" b="1" dirty="0">
+                <a:solidFill>
+                  <a:srgbClr val="9D174D"/>
                 </a:solidFill>
                 <a:latin typeface="Trebuchet MS" pitchFamily="34" charset="0"/>
                 <a:ea typeface="Trebuchet MS" pitchFamily="34" charset="-122"/>
                 <a:cs typeface="Trebuchet MS" pitchFamily="34" charset="-120"/>
               </a:rPr>
-              <a:t>nect</a:t>
-            </a:r>
-            <a:endParaRPr lang="en-US" sz="1400" dirty="0"/>
-          </a:p>
-        </p:txBody>
-      </p:sp>
-      <p:sp>
-        <p:nvSpPr>
-          <p:cNvPr id="36" name="Shape 34"/>
-          <p:cNvSpPr/>
-          <p:nvPr/>
-        </p:nvSpPr>
-        <p:spPr>
-          <a:xfrm>
-            <a:off x="365760" y="4096512"/>
-            <a:ext cx="1371600" cy="804672"/>
+              <a:t>d</a:t>
+            </a:r>
+            <a:endParaRPr lang="en-US" sz="900" dirty="0"/>
+          </a:p>
+        </p:txBody>
+      </p:sp>
+      <p:sp>
+        <p:nvSpPr>
+          <p:cNvPr id="41" name="Shape 39"/>
+          <p:cNvSpPr/>
+          <p:nvPr/>
+        </p:nvSpPr>
+        <p:spPr>
+          <a:xfrm>
+            <a:off x="3033522" y="4169664"/>
+            <a:ext cx="685800" cy="475488"/>
           </a:xfrm>
           <a:prstGeom prst="rect">
             <a:avLst>
-              <a:gd name="adj" fmla="val 6818"/>
+              <a:gd name="adj" fmla="val 7692"/>
             </a:avLst>
           </a:prstGeom>
           <a:solidFill>
-            <a:srgbClr val="E2E8F0"/>
-          </a:solidFill>
-          <a:ln w="12700">
-            <a:solidFill>
-              <a:srgbClr val="E2E8F0"/>
-            </a:solidFill>
-            <a:prstDash val="solid"/>
-          </a:ln>
-        </p:spPr>
-      </p:sp>
-      <p:sp>
-        <p:nvSpPr>
-          <p:cNvPr id="37" name="Text 35"/>
-          <p:cNvSpPr/>
-          <p:nvPr/>
-        </p:nvSpPr>
-        <p:spPr>
-          <a:xfrm>
-            <a:off x="365760" y="4096512"/>
-            <a:ext cx="1371600" cy="804672"/>
-          </a:xfrm>
-          <a:prstGeom prst="rect">
-            <a:avLst/>
-          </a:prstGeom>
-          <a:noFill/>
-          <a:ln/>
-        </p:spPr>
-        <p:txBody>
-          <a:bodyPr wrap="square" lIns="0" tIns="0" rIns="0" bIns="0" rtlCol="0" anchor="ctr"/>
-          <a:lstStyle/>
-          <a:p>
-            <a:pPr algn="ctr" indent="0" marL="0">
-              <a:buNone/>
-            </a:pPr>
-            <a:r>
-              <a:rPr lang="en-US" sz="1100" b="1" dirty="0">
-                <a:solidFill>
-                  <a:srgbClr val="475569"/>
+            <a:srgbClr val="FFFFFF"/>
+          </a:solidFill>
+          <a:ln w="12700">
+            <a:solidFill>
+              <a:srgbClr val="DB2777"/>
+            </a:solidFill>
+            <a:prstDash val="solid"/>
+          </a:ln>
+        </p:spPr>
+      </p:sp>
+      <p:sp>
+        <p:nvSpPr>
+          <p:cNvPr id="42" name="Text 40"/>
+          <p:cNvSpPr/>
+          <p:nvPr/>
+        </p:nvSpPr>
+        <p:spPr>
+          <a:xfrm>
+            <a:off x="3033522" y="4169664"/>
+            <a:ext cx="685800" cy="475488"/>
+          </a:xfrm>
+          <a:prstGeom prst="rect">
+            <a:avLst/>
+          </a:prstGeom>
+          <a:noFill/>
+          <a:ln/>
+        </p:spPr>
+        <p:txBody>
+          <a:bodyPr wrap="square" lIns="0" tIns="0" rIns="0" bIns="0" rtlCol="0" anchor="ctr"/>
+          <a:lstStyle/>
+          <a:p>
+            <a:pPr algn="ctr" indent="0" marL="0">
+              <a:buNone/>
+            </a:pPr>
+            <a:r>
+              <a:rPr lang="en-US" sz="900" b="1" dirty="0">
+                <a:solidFill>
+                  <a:srgbClr val="9D174D"/>
                 </a:solidFill>
                 <a:latin typeface="Trebuchet MS" pitchFamily="34" charset="0"/>
                 <a:ea typeface="Trebuchet MS" pitchFamily="34" charset="-122"/>
                 <a:cs typeface="Trebuchet MS" pitchFamily="34" charset="-120"/>
               </a:rPr>
-              <a:t>Phonemes</a:t>
-            </a:r>
-            <a:endParaRPr lang="en-US" sz="1100" dirty="0"/>
-          </a:p>
-        </p:txBody>
-      </p:sp>
-      <p:sp>
-        <p:nvSpPr>
-          <p:cNvPr id="38" name="Shape 36"/>
-          <p:cNvSpPr/>
-          <p:nvPr/>
-        </p:nvSpPr>
-        <p:spPr>
-          <a:xfrm>
-            <a:off x="1874520" y="4096512"/>
-            <a:ext cx="6903720" cy="658368"/>
-          </a:xfrm>
-          <a:prstGeom prst="rect">
-            <a:avLst>
-              <a:gd name="adj" fmla="val 8333"/>
-            </a:avLst>
-          </a:prstGeom>
-          <a:solidFill>
-            <a:srgbClr val="FCE7F3"/>
-          </a:solidFill>
-          <a:ln w="12700">
-            <a:solidFill>
-              <a:srgbClr val="DB2777"/>
-            </a:solidFill>
-            <a:prstDash val="solid"/>
-          </a:ln>
-        </p:spPr>
-      </p:sp>
-      <p:sp>
-        <p:nvSpPr>
-          <p:cNvPr id="39" name="Shape 37"/>
-          <p:cNvSpPr/>
-          <p:nvPr/>
-        </p:nvSpPr>
-        <p:spPr>
-          <a:xfrm>
-            <a:off x="1951828" y="4169664"/>
-            <a:ext cx="603504" cy="475488"/>
+              <a:t>e</a:t>
+            </a:r>
+            <a:endParaRPr lang="en-US" sz="900" dirty="0"/>
+          </a:p>
+        </p:txBody>
+      </p:sp>
+      <p:sp>
+        <p:nvSpPr>
+          <p:cNvPr id="43" name="Shape 41"/>
+          <p:cNvSpPr/>
+          <p:nvPr/>
+        </p:nvSpPr>
+        <p:spPr>
+          <a:xfrm>
+            <a:off x="3942207" y="4169664"/>
+            <a:ext cx="685800" cy="475488"/>
           </a:xfrm>
           <a:prstGeom prst="rect">
             <a:avLst>
@@ -15830,14 +16154,14 @@
       </p:sp>
       <p:sp>
         <p:nvSpPr>
-          <p:cNvPr id="40" name="Text 38"/>
-          <p:cNvSpPr/>
-          <p:nvPr/>
-        </p:nvSpPr>
-        <p:spPr>
-          <a:xfrm>
-            <a:off x="1951828" y="4169664"/>
-            <a:ext cx="603504" cy="475488"/>
+          <p:cNvPr id="44" name="Text 42"/>
+          <p:cNvSpPr/>
+          <p:nvPr/>
+        </p:nvSpPr>
+        <p:spPr>
+          <a:xfrm>
+            <a:off x="3942207" y="4169664"/>
+            <a:ext cx="685800" cy="475488"/>
           </a:xfrm>
           <a:prstGeom prst="rect">
             <a:avLst/>
@@ -15861,7 +16185,7 @@
                 <a:ea typeface="Trebuchet MS" pitchFamily="34" charset="-122"/>
                 <a:cs typeface="Trebuchet MS" pitchFamily="34" charset="-120"/>
               </a:rPr>
-              <a:t>i</a:t>
+              <a:t>l</a:t>
             </a:r>
             <a:endParaRPr lang="en-US" sz="900" dirty="0"/>
           </a:p>
@@ -15869,14 +16193,14 @@
       </p:sp>
       <p:sp>
         <p:nvSpPr>
-          <p:cNvPr id="41" name="Shape 39"/>
-          <p:cNvSpPr/>
-          <p:nvPr/>
-        </p:nvSpPr>
-        <p:spPr>
-          <a:xfrm>
-            <a:off x="2605209" y="4169664"/>
-            <a:ext cx="603504" cy="475488"/>
+          <p:cNvPr id="45" name="Shape 43"/>
+          <p:cNvSpPr/>
+          <p:nvPr/>
+        </p:nvSpPr>
+        <p:spPr>
+          <a:xfrm>
+            <a:off x="4850892" y="4169664"/>
+            <a:ext cx="685800" cy="475488"/>
           </a:xfrm>
           <a:prstGeom prst="rect">
             <a:avLst>
@@ -15896,14 +16220,14 @@
       </p:sp>
       <p:sp>
         <p:nvSpPr>
-          <p:cNvPr id="42" name="Text 40"/>
-          <p:cNvSpPr/>
-          <p:nvPr/>
-        </p:nvSpPr>
-        <p:spPr>
-          <a:xfrm>
-            <a:off x="2605209" y="4169664"/>
-            <a:ext cx="603504" cy="475488"/>
+          <p:cNvPr id="46" name="Text 44"/>
+          <p:cNvSpPr/>
+          <p:nvPr/>
+        </p:nvSpPr>
+        <p:spPr>
+          <a:xfrm>
+            <a:off x="4850892" y="4169664"/>
+            <a:ext cx="685800" cy="475488"/>
           </a:xfrm>
           <a:prstGeom prst="rect">
             <a:avLst/>
@@ -15927,7 +16251,7 @@
                 <a:ea typeface="Trebuchet MS" pitchFamily="34" charset="-122"/>
                 <a:cs typeface="Trebuchet MS" pitchFamily="34" charset="-120"/>
               </a:rPr>
-              <a:t>n</a:t>
+              <a:t>i</a:t>
             </a:r>
             <a:endParaRPr lang="en-US" sz="900" dirty="0"/>
           </a:p>
@@ -15935,14 +16259,14 @@
       </p:sp>
       <p:sp>
         <p:nvSpPr>
-          <p:cNvPr id="43" name="Shape 41"/>
-          <p:cNvSpPr/>
-          <p:nvPr/>
-        </p:nvSpPr>
-        <p:spPr>
-          <a:xfrm>
-            <a:off x="3258589" y="4169664"/>
-            <a:ext cx="603504" cy="475488"/>
+          <p:cNvPr id="47" name="Shape 45"/>
+          <p:cNvSpPr/>
+          <p:nvPr/>
+        </p:nvSpPr>
+        <p:spPr>
+          <a:xfrm>
+            <a:off x="5759577" y="4169664"/>
+            <a:ext cx="685800" cy="475488"/>
           </a:xfrm>
           <a:prstGeom prst="rect">
             <a:avLst>
@@ -15962,14 +16286,14 @@
       </p:sp>
       <p:sp>
         <p:nvSpPr>
-          <p:cNvPr id="44" name="Text 42"/>
-          <p:cNvSpPr/>
-          <p:nvPr/>
-        </p:nvSpPr>
-        <p:spPr>
-          <a:xfrm>
-            <a:off x="3258589" y="4169664"/>
-            <a:ext cx="603504" cy="475488"/>
+          <p:cNvPr id="48" name="Text 46"/>
+          <p:cNvSpPr/>
+          <p:nvPr/>
+        </p:nvSpPr>
+        <p:spPr>
+          <a:xfrm>
+            <a:off x="5759577" y="4169664"/>
+            <a:ext cx="685800" cy="475488"/>
           </a:xfrm>
           <a:prstGeom prst="rect">
             <a:avLst/>
@@ -15993,7 +16317,7 @@
                 <a:ea typeface="Trebuchet MS" pitchFamily="34" charset="-122"/>
                 <a:cs typeface="Trebuchet MS" pitchFamily="34" charset="-120"/>
               </a:rPr>
-              <a:t>t</a:t>
+              <a:t>v</a:t>
             </a:r>
             <a:endParaRPr lang="en-US" sz="900" dirty="0"/>
           </a:p>
@@ -16001,14 +16325,14 @@
       </p:sp>
       <p:sp>
         <p:nvSpPr>
-          <p:cNvPr id="45" name="Shape 43"/>
-          <p:cNvSpPr/>
-          <p:nvPr/>
-        </p:nvSpPr>
-        <p:spPr>
-          <a:xfrm>
-            <a:off x="3911969" y="4169664"/>
-            <a:ext cx="603504" cy="475488"/>
+          <p:cNvPr id="49" name="Shape 47"/>
+          <p:cNvSpPr/>
+          <p:nvPr/>
+        </p:nvSpPr>
+        <p:spPr>
+          <a:xfrm>
+            <a:off x="6668262" y="4169664"/>
+            <a:ext cx="685800" cy="475488"/>
           </a:xfrm>
           <a:prstGeom prst="rect">
             <a:avLst>
@@ -16028,14 +16352,14 @@
       </p:sp>
       <p:sp>
         <p:nvSpPr>
-          <p:cNvPr id="46" name="Text 44"/>
-          <p:cNvSpPr/>
-          <p:nvPr/>
-        </p:nvSpPr>
-        <p:spPr>
-          <a:xfrm>
-            <a:off x="3911969" y="4169664"/>
-            <a:ext cx="603504" cy="475488"/>
+          <p:cNvPr id="50" name="Text 48"/>
+          <p:cNvSpPr/>
+          <p:nvPr/>
+        </p:nvSpPr>
+        <p:spPr>
+          <a:xfrm>
+            <a:off x="6668262" y="4169664"/>
+            <a:ext cx="685800" cy="475488"/>
           </a:xfrm>
           <a:prstGeom prst="rect">
             <a:avLst/>
@@ -16067,14 +16391,14 @@
       </p:sp>
       <p:sp>
         <p:nvSpPr>
-          <p:cNvPr id="47" name="Shape 45"/>
-          <p:cNvSpPr/>
-          <p:nvPr/>
-        </p:nvSpPr>
-        <p:spPr>
-          <a:xfrm>
-            <a:off x="4565350" y="4169664"/>
-            <a:ext cx="603504" cy="475488"/>
+          <p:cNvPr id="51" name="Shape 49"/>
+          <p:cNvSpPr/>
+          <p:nvPr/>
+        </p:nvSpPr>
+        <p:spPr>
+          <a:xfrm>
+            <a:off x="7576947" y="4169664"/>
+            <a:ext cx="685800" cy="475488"/>
           </a:xfrm>
           <a:prstGeom prst="rect">
             <a:avLst>
@@ -16094,14 +16418,14 @@
       </p:sp>
       <p:sp>
         <p:nvSpPr>
-          <p:cNvPr id="48" name="Text 46"/>
-          <p:cNvSpPr/>
-          <p:nvPr/>
-        </p:nvSpPr>
-        <p:spPr>
-          <a:xfrm>
-            <a:off x="4565350" y="4169664"/>
-            <a:ext cx="603504" cy="475488"/>
+          <p:cNvPr id="52" name="Text 50"/>
+          <p:cNvSpPr/>
+          <p:nvPr/>
+        </p:nvSpPr>
+        <p:spPr>
+          <a:xfrm>
+            <a:off x="7576947" y="4169664"/>
+            <a:ext cx="685800" cy="475488"/>
           </a:xfrm>
           <a:prstGeom prst="rect">
             <a:avLst/>
@@ -16125,337 +16449,7 @@
                 <a:ea typeface="Trebuchet MS" pitchFamily="34" charset="-122"/>
                 <a:cs typeface="Trebuchet MS" pitchFamily="34" charset="-120"/>
               </a:rPr>
-              <a:t>c</a:t>
-            </a:r>
-            <a:endParaRPr lang="en-US" sz="900" dirty="0"/>
-          </a:p>
-        </p:txBody>
-      </p:sp>
-      <p:sp>
-        <p:nvSpPr>
-          <p:cNvPr id="49" name="Shape 47"/>
-          <p:cNvSpPr/>
-          <p:nvPr/>
-        </p:nvSpPr>
-        <p:spPr>
-          <a:xfrm>
-            <a:off x="5218730" y="4169664"/>
-            <a:ext cx="603504" cy="475488"/>
-          </a:xfrm>
-          <a:prstGeom prst="rect">
-            <a:avLst>
-              <a:gd name="adj" fmla="val 7692"/>
-            </a:avLst>
-          </a:prstGeom>
-          <a:solidFill>
-            <a:srgbClr val="FFFFFF"/>
-          </a:solidFill>
-          <a:ln w="12700">
-            <a:solidFill>
-              <a:srgbClr val="DB2777"/>
-            </a:solidFill>
-            <a:prstDash val="solid"/>
-          </a:ln>
-        </p:spPr>
-      </p:sp>
-      <p:sp>
-        <p:nvSpPr>
-          <p:cNvPr id="50" name="Text 48"/>
-          <p:cNvSpPr/>
-          <p:nvPr/>
-        </p:nvSpPr>
-        <p:spPr>
-          <a:xfrm>
-            <a:off x="5218730" y="4169664"/>
-            <a:ext cx="603504" cy="475488"/>
-          </a:xfrm>
-          <a:prstGeom prst="rect">
-            <a:avLst/>
-          </a:prstGeom>
-          <a:noFill/>
-          <a:ln/>
-        </p:spPr>
-        <p:txBody>
-          <a:bodyPr wrap="square" lIns="0" tIns="0" rIns="0" bIns="0" rtlCol="0" anchor="ctr"/>
-          <a:lstStyle/>
-          <a:p>
-            <a:pPr algn="ctr" indent="0" marL="0">
-              <a:buNone/>
-            </a:pPr>
-            <a:r>
-              <a:rPr lang="en-US" sz="900" b="1" dirty="0">
-                <a:solidFill>
-                  <a:srgbClr val="9D174D"/>
-                </a:solidFill>
-                <a:latin typeface="Trebuchet MS" pitchFamily="34" charset="0"/>
-                <a:ea typeface="Trebuchet MS" pitchFamily="34" charset="-122"/>
-                <a:cs typeface="Trebuchet MS" pitchFamily="34" charset="-120"/>
-              </a:rPr>
-              <a:t>o</a:t>
-            </a:r>
-            <a:endParaRPr lang="en-US" sz="900" dirty="0"/>
-          </a:p>
-        </p:txBody>
-      </p:sp>
-      <p:sp>
-        <p:nvSpPr>
-          <p:cNvPr id="51" name="Shape 49"/>
-          <p:cNvSpPr/>
-          <p:nvPr/>
-        </p:nvSpPr>
-        <p:spPr>
-          <a:xfrm>
-            <a:off x="5872111" y="4169664"/>
-            <a:ext cx="603504" cy="475488"/>
-          </a:xfrm>
-          <a:prstGeom prst="rect">
-            <a:avLst>
-              <a:gd name="adj" fmla="val 7692"/>
-            </a:avLst>
-          </a:prstGeom>
-          <a:solidFill>
-            <a:srgbClr val="FFFFFF"/>
-          </a:solidFill>
-          <a:ln w="12700">
-            <a:solidFill>
-              <a:srgbClr val="DB2777"/>
-            </a:solidFill>
-            <a:prstDash val="solid"/>
-          </a:ln>
-        </p:spPr>
-      </p:sp>
-      <p:sp>
-        <p:nvSpPr>
-          <p:cNvPr id="52" name="Text 50"/>
-          <p:cNvSpPr/>
-          <p:nvPr/>
-        </p:nvSpPr>
-        <p:spPr>
-          <a:xfrm>
-            <a:off x="5872111" y="4169664"/>
-            <a:ext cx="603504" cy="475488"/>
-          </a:xfrm>
-          <a:prstGeom prst="rect">
-            <a:avLst/>
-          </a:prstGeom>
-          <a:noFill/>
-          <a:ln/>
-        </p:spPr>
-        <p:txBody>
-          <a:bodyPr wrap="square" lIns="0" tIns="0" rIns="0" bIns="0" rtlCol="0" anchor="ctr"/>
-          <a:lstStyle/>
-          <a:p>
-            <a:pPr algn="ctr" indent="0" marL="0">
-              <a:buNone/>
-            </a:pPr>
-            <a:r>
-              <a:rPr lang="en-US" sz="900" b="1" dirty="0">
-                <a:solidFill>
-                  <a:srgbClr val="9D174D"/>
-                </a:solidFill>
-                <a:latin typeface="Trebuchet MS" pitchFamily="34" charset="0"/>
-                <a:ea typeface="Trebuchet MS" pitchFamily="34" charset="-122"/>
-                <a:cs typeface="Trebuchet MS" pitchFamily="34" charset="-120"/>
-              </a:rPr>
-              <a:t>nn</a:t>
-            </a:r>
-            <a:endParaRPr lang="en-US" sz="900" dirty="0"/>
-          </a:p>
-        </p:txBody>
-      </p:sp>
-      <p:sp>
-        <p:nvSpPr>
-          <p:cNvPr id="53" name="Shape 51"/>
-          <p:cNvSpPr/>
-          <p:nvPr/>
-        </p:nvSpPr>
-        <p:spPr>
-          <a:xfrm>
-            <a:off x="6525491" y="4169664"/>
-            <a:ext cx="603504" cy="475488"/>
-          </a:xfrm>
-          <a:prstGeom prst="rect">
-            <a:avLst>
-              <a:gd name="adj" fmla="val 7692"/>
-            </a:avLst>
-          </a:prstGeom>
-          <a:solidFill>
-            <a:srgbClr val="FFFFFF"/>
-          </a:solidFill>
-          <a:ln w="12700">
-            <a:solidFill>
-              <a:srgbClr val="DB2777"/>
-            </a:solidFill>
-            <a:prstDash val="solid"/>
-          </a:ln>
-        </p:spPr>
-      </p:sp>
-      <p:sp>
-        <p:nvSpPr>
-          <p:cNvPr id="54" name="Text 52"/>
-          <p:cNvSpPr/>
-          <p:nvPr/>
-        </p:nvSpPr>
-        <p:spPr>
-          <a:xfrm>
-            <a:off x="6525491" y="4169664"/>
-            <a:ext cx="603504" cy="475488"/>
-          </a:xfrm>
-          <a:prstGeom prst="rect">
-            <a:avLst/>
-          </a:prstGeom>
-          <a:noFill/>
-          <a:ln/>
-        </p:spPr>
-        <p:txBody>
-          <a:bodyPr wrap="square" lIns="0" tIns="0" rIns="0" bIns="0" rtlCol="0" anchor="ctr"/>
-          <a:lstStyle/>
-          <a:p>
-            <a:pPr algn="ctr" indent="0" marL="0">
-              <a:buNone/>
-            </a:pPr>
-            <a:r>
-              <a:rPr lang="en-US" sz="900" b="1" dirty="0">
-                <a:solidFill>
-                  <a:srgbClr val="9D174D"/>
-                </a:solidFill>
-                <a:latin typeface="Trebuchet MS" pitchFamily="34" charset="0"/>
-                <a:ea typeface="Trebuchet MS" pitchFamily="34" charset="-122"/>
-                <a:cs typeface="Trebuchet MS" pitchFamily="34" charset="-120"/>
-              </a:rPr>
-              <a:t>e</a:t>
-            </a:r>
-            <a:endParaRPr lang="en-US" sz="900" dirty="0"/>
-          </a:p>
-        </p:txBody>
-      </p:sp>
-      <p:sp>
-        <p:nvSpPr>
-          <p:cNvPr id="55" name="Shape 53"/>
-          <p:cNvSpPr/>
-          <p:nvPr/>
-        </p:nvSpPr>
-        <p:spPr>
-          <a:xfrm>
-            <a:off x="7178871" y="4169664"/>
-            <a:ext cx="603504" cy="475488"/>
-          </a:xfrm>
-          <a:prstGeom prst="rect">
-            <a:avLst>
-              <a:gd name="adj" fmla="val 7692"/>
-            </a:avLst>
-          </a:prstGeom>
-          <a:solidFill>
-            <a:srgbClr val="FFFFFF"/>
-          </a:solidFill>
-          <a:ln w="12700">
-            <a:solidFill>
-              <a:srgbClr val="DB2777"/>
-            </a:solidFill>
-            <a:prstDash val="solid"/>
-          </a:ln>
-        </p:spPr>
-      </p:sp>
-      <p:sp>
-        <p:nvSpPr>
-          <p:cNvPr id="56" name="Text 54"/>
-          <p:cNvSpPr/>
-          <p:nvPr/>
-        </p:nvSpPr>
-        <p:spPr>
-          <a:xfrm>
-            <a:off x="7178871" y="4169664"/>
-            <a:ext cx="603504" cy="475488"/>
-          </a:xfrm>
-          <a:prstGeom prst="rect">
-            <a:avLst/>
-          </a:prstGeom>
-          <a:noFill/>
-          <a:ln/>
-        </p:spPr>
-        <p:txBody>
-          <a:bodyPr wrap="square" lIns="0" tIns="0" rIns="0" bIns="0" rtlCol="0" anchor="ctr"/>
-          <a:lstStyle/>
-          <a:p>
-            <a:pPr algn="ctr" indent="0" marL="0">
-              <a:buNone/>
-            </a:pPr>
-            <a:r>
-              <a:rPr lang="en-US" sz="900" b="1" dirty="0">
-                <a:solidFill>
-                  <a:srgbClr val="9D174D"/>
-                </a:solidFill>
-                <a:latin typeface="Trebuchet MS" pitchFamily="34" charset="0"/>
-                <a:ea typeface="Trebuchet MS" pitchFamily="34" charset="-122"/>
-                <a:cs typeface="Trebuchet MS" pitchFamily="34" charset="-120"/>
-              </a:rPr>
-              <a:t>c</a:t>
-            </a:r>
-            <a:endParaRPr lang="en-US" sz="900" dirty="0"/>
-          </a:p>
-        </p:txBody>
-      </p:sp>
-      <p:sp>
-        <p:nvSpPr>
-          <p:cNvPr id="57" name="Shape 55"/>
-          <p:cNvSpPr/>
-          <p:nvPr/>
-        </p:nvSpPr>
-        <p:spPr>
-          <a:xfrm>
-            <a:off x="7832252" y="4169664"/>
-            <a:ext cx="603504" cy="475488"/>
-          </a:xfrm>
-          <a:prstGeom prst="rect">
-            <a:avLst>
-              <a:gd name="adj" fmla="val 7692"/>
-            </a:avLst>
-          </a:prstGeom>
-          <a:solidFill>
-            <a:srgbClr val="FFFFFF"/>
-          </a:solidFill>
-          <a:ln w="12700">
-            <a:solidFill>
-              <a:srgbClr val="DB2777"/>
-            </a:solidFill>
-            <a:prstDash val="solid"/>
-          </a:ln>
-        </p:spPr>
-      </p:sp>
-      <p:sp>
-        <p:nvSpPr>
-          <p:cNvPr id="58" name="Text 56"/>
-          <p:cNvSpPr/>
-          <p:nvPr/>
-        </p:nvSpPr>
-        <p:spPr>
-          <a:xfrm>
-            <a:off x="7832252" y="4169664"/>
-            <a:ext cx="603504" cy="475488"/>
-          </a:xfrm>
-          <a:prstGeom prst="rect">
-            <a:avLst/>
-          </a:prstGeom>
-          <a:noFill/>
-          <a:ln/>
-        </p:spPr>
-        <p:txBody>
-          <a:bodyPr wrap="square" lIns="0" tIns="0" rIns="0" bIns="0" rtlCol="0" anchor="ctr"/>
-          <a:lstStyle/>
-          <a:p>
-            <a:pPr algn="ctr" indent="0" marL="0">
-              <a:buNone/>
-            </a:pPr>
-            <a:r>
-              <a:rPr lang="en-US" sz="900" b="1" dirty="0">
-                <a:solidFill>
-                  <a:srgbClr val="9D174D"/>
-                </a:solidFill>
-                <a:latin typeface="Trebuchet MS" pitchFamily="34" charset="0"/>
-                <a:ea typeface="Trebuchet MS" pitchFamily="34" charset="-122"/>
-                <a:cs typeface="Trebuchet MS" pitchFamily="34" charset="-120"/>
-              </a:rPr>
-              <a:t>t</a:t>
+              <a:t>ed</a:t>
             </a:r>
             <a:endParaRPr lang="en-US" sz="900" dirty="0"/>
           </a:p>
@@ -17829,7 +17823,7 @@
                 <a:ea typeface="Calibri" pitchFamily="34" charset="-122"/>
                 <a:cs typeface="Calibri" pitchFamily="34" charset="-120"/>
               </a:rPr>
-              <a:t>international</a:t>
+              <a:t>interviewer</a:t>
             </a:r>
             <a:pPr algn="l" indent="0" marL="0">
               <a:buNone/>
@@ -17843,7 +17837,7 @@
                 <a:ea typeface="Calibri" pitchFamily="34" charset="-122"/>
                 <a:cs typeface="Calibri" pitchFamily="34" charset="-120"/>
               </a:rPr>
-              <a:t> students had a chance to </a:t>
+              <a:t> asked the </a:t>
             </a:r>
             <a:pPr algn="l" indent="0" marL="0">
               <a:buNone/>
@@ -17860,7 +17854,7 @@
                 <a:ea typeface="Calibri" pitchFamily="34" charset="-122"/>
                 <a:cs typeface="Calibri" pitchFamily="34" charset="-120"/>
               </a:rPr>
-              <a:t>interact</a:t>
+              <a:t>international</a:t>
             </a:r>
             <a:pPr algn="l" indent="0" marL="0">
               <a:buNone/>
@@ -17874,7 +17868,7 @@
                 <a:ea typeface="Calibri" pitchFamily="34" charset="-122"/>
                 <a:cs typeface="Calibri" pitchFamily="34" charset="-120"/>
               </a:rPr>
-              <a:t> and share their ideas.</a:t>
+              <a:t> singer about her favourite songs.</a:t>
             </a:r>
             <a:endParaRPr lang="en-US" sz="1800" dirty="0"/>
           </a:p>
@@ -18157,7 +18151,7 @@
                 <a:ea typeface="Trebuchet MS" pitchFamily="34" charset="-122"/>
                 <a:cs typeface="Trebuchet MS" pitchFamily="34" charset="-120"/>
               </a:rPr>
-              <a:t>international</a:t>
+              <a:t>interviewer</a:t>
             </a:r>
             <a:endParaRPr lang="en-US" sz="1400" dirty="0"/>
           </a:p>
@@ -18285,7 +18279,7 @@
                 <a:ea typeface="Trebuchet MS" pitchFamily="34" charset="-122"/>
                 <a:cs typeface="Trebuchet MS" pitchFamily="34" charset="-120"/>
               </a:rPr>
-              <a:t>interact</a:t>
+              <a:t>international</a:t>
             </a:r>
             <a:endParaRPr lang="en-US" sz="1400" dirty="0"/>
           </a:p>
@@ -19760,7 +19754,7 @@
                 <a:ea typeface="Calibri" pitchFamily="34" charset="-122"/>
                 <a:cs typeface="Calibri" pitchFamily="34" charset="-120"/>
               </a:rPr>
-              <a:t>between, among</a:t>
+              <a:t>between</a:t>
             </a:r>
             <a:endParaRPr lang="en-US" sz="850" dirty="0"/>
           </a:p>
@@ -19872,7 +19866,7 @@
                 <a:ea typeface="Calibri" pitchFamily="34" charset="-122"/>
                 <a:cs typeface="Calibri" pitchFamily="34" charset="-120"/>
               </a:rPr>
-              <a:t>space, gap</a:t>
+              <a:t>space, value</a:t>
             </a:r>
             <a:endParaRPr lang="en-US" sz="850" dirty="0"/>
           </a:p>
@@ -20745,7 +20739,7 @@
                 <a:ea typeface="Calibri" pitchFamily="34" charset="-122"/>
                 <a:cs typeface="Calibri" pitchFamily="34" charset="-120"/>
               </a:rPr>
-              <a:t>between, among</a:t>
+              <a:t>between</a:t>
             </a:r>
             <a:endParaRPr lang="en-US" sz="850" dirty="0"/>
           </a:p>
@@ -20857,7 +20851,7 @@
                 <a:ea typeface="Calibri" pitchFamily="34" charset="-122"/>
                 <a:cs typeface="Calibri" pitchFamily="34" charset="-120"/>
               </a:rPr>
-              <a:t>space, gap</a:t>
+              <a:t>space, value</a:t>
             </a:r>
             <a:endParaRPr lang="en-US" sz="850" dirty="0"/>
           </a:p>
@@ -21967,7 +21961,7 @@
                 <a:ea typeface="Calibri" pitchFamily="34" charset="-122"/>
                 <a:cs typeface="Calibri" pitchFamily="34" charset="-120"/>
               </a:rPr>
-              <a:t>between, among</a:t>
+              <a:t>between</a:t>
             </a:r>
             <a:endParaRPr lang="en-US" sz="850" dirty="0"/>
           </a:p>
@@ -22079,7 +22073,7 @@
                 <a:ea typeface="Calibri" pitchFamily="34" charset="-122"/>
                 <a:cs typeface="Calibri" pitchFamily="34" charset="-120"/>
               </a:rPr>
-              <a:t>space, gap</a:t>
+              <a:t>space, value</a:t>
             </a:r>
             <a:endParaRPr lang="en-US" sz="850" dirty="0"/>
           </a:p>
@@ -23434,7 +23428,7 @@
                 <a:ea typeface="Trebuchet MS" pitchFamily="34" charset="-122"/>
                 <a:cs typeface="Trebuchet MS" pitchFamily="34" charset="-120"/>
               </a:rPr>
-              <a:t>international</a:t>
+              <a:t>interviewer</a:t>
             </a:r>
             <a:endParaRPr lang="en-US" sz="2800" dirty="0"/>
           </a:p>
@@ -24261,7 +24255,7 @@
                 <a:ea typeface="Trebuchet MS" pitchFamily="34" charset="-122"/>
                 <a:cs typeface="Trebuchet MS" pitchFamily="34" charset="-120"/>
               </a:rPr>
-              <a:t>international</a:t>
+              <a:t>interviewer</a:t>
             </a:r>
             <a:endParaRPr lang="en-US" sz="2800" dirty="0"/>
           </a:p>
@@ -24439,7 +24433,7 @@
                 <a:ea typeface="Calibri" pitchFamily="34" charset="-122"/>
                 <a:cs typeface="Calibri" pitchFamily="34" charset="-120"/>
               </a:rPr>
-              <a:t>between, among</a:t>
+              <a:t>between</a:t>
             </a:r>
             <a:endParaRPr lang="en-US" sz="850" dirty="0"/>
           </a:p>
@@ -24512,7 +24506,7 @@
                 <a:ea typeface="Trebuchet MS" pitchFamily="34" charset="-122"/>
                 <a:cs typeface="Trebuchet MS" pitchFamily="34" charset="-120"/>
               </a:rPr>
-              <a:t>nation</a:t>
+              <a:t>view</a:t>
             </a:r>
             <a:endParaRPr lang="en-US" sz="1300" dirty="0"/>
           </a:p>
@@ -24551,7 +24545,7 @@
                 <a:ea typeface="Calibri" pitchFamily="34" charset="-122"/>
                 <a:cs typeface="Calibri" pitchFamily="34" charset="-120"/>
               </a:rPr>
-              <a:t>country</a:t>
+              <a:t>see, look</a:t>
             </a:r>
             <a:endParaRPr lang="en-US" sz="850" dirty="0"/>
           </a:p>
@@ -24624,7 +24618,7 @@
                 <a:ea typeface="Trebuchet MS" pitchFamily="34" charset="-122"/>
                 <a:cs typeface="Trebuchet MS" pitchFamily="34" charset="-120"/>
               </a:rPr>
-              <a:t>al</a:t>
+              <a:t>er</a:t>
             </a:r>
             <a:endParaRPr lang="en-US" sz="1300" dirty="0"/>
           </a:p>
@@ -24663,7 +24657,7 @@
                 <a:ea typeface="Calibri" pitchFamily="34" charset="-122"/>
                 <a:cs typeface="Calibri" pitchFamily="34" charset="-120"/>
               </a:rPr>
-              <a:t>relating to</a:t>
+              <a:t>person who does</a:t>
             </a:r>
             <a:endParaRPr lang="en-US" sz="850" dirty="0"/>
           </a:p>
@@ -26077,7 +26071,7 @@
                 <a:ea typeface="Trebuchet MS" pitchFamily="34" charset="-122"/>
                 <a:cs typeface="Trebuchet MS" pitchFamily="34" charset="-120"/>
               </a:rPr>
-              <a:t>international</a:t>
+              <a:t>interviewer</a:t>
             </a:r>
             <a:endParaRPr lang="en-US" sz="2800" dirty="0"/>
           </a:p>
@@ -26255,7 +26249,7 @@
                 <a:ea typeface="Calibri" pitchFamily="34" charset="-122"/>
                 <a:cs typeface="Calibri" pitchFamily="34" charset="-120"/>
               </a:rPr>
-              <a:t>between, among</a:t>
+              <a:t>between</a:t>
             </a:r>
             <a:endParaRPr lang="en-US" sz="850" dirty="0"/>
           </a:p>
@@ -26328,7 +26322,7 @@
                 <a:ea typeface="Trebuchet MS" pitchFamily="34" charset="-122"/>
                 <a:cs typeface="Trebuchet MS" pitchFamily="34" charset="-120"/>
               </a:rPr>
-              <a:t>nation</a:t>
+              <a:t>view</a:t>
             </a:r>
             <a:endParaRPr lang="en-US" sz="1300" dirty="0"/>
           </a:p>
@@ -26367,7 +26361,7 @@
                 <a:ea typeface="Calibri" pitchFamily="34" charset="-122"/>
                 <a:cs typeface="Calibri" pitchFamily="34" charset="-120"/>
               </a:rPr>
-              <a:t>country</a:t>
+              <a:t>see, look</a:t>
             </a:r>
             <a:endParaRPr lang="en-US" sz="850" dirty="0"/>
           </a:p>
@@ -26440,7 +26434,7 @@
                 <a:ea typeface="Trebuchet MS" pitchFamily="34" charset="-122"/>
                 <a:cs typeface="Trebuchet MS" pitchFamily="34" charset="-120"/>
               </a:rPr>
-              <a:t>al</a:t>
+              <a:t>er</a:t>
             </a:r>
             <a:endParaRPr lang="en-US" sz="1300" dirty="0"/>
           </a:p>
@@ -26479,7 +26473,7 @@
                 <a:ea typeface="Calibri" pitchFamily="34" charset="-122"/>
                 <a:cs typeface="Calibri" pitchFamily="34" charset="-120"/>
               </a:rPr>
-              <a:t>relating to</a:t>
+              <a:t>person who does</a:t>
             </a:r>
             <a:endParaRPr lang="en-US" sz="850" dirty="0"/>
           </a:p>
@@ -26586,8 +26580,8 @@
         </p:nvSpPr>
         <p:spPr>
           <a:xfrm>
-            <a:off x="1978152" y="3364992"/>
-            <a:ext cx="1225296" cy="475488"/>
+            <a:off x="1975104" y="3364992"/>
+            <a:ext cx="1554480" cy="475488"/>
           </a:xfrm>
           <a:prstGeom prst="rect">
             <a:avLst>
@@ -26613,8 +26607,8 @@
         </p:nvSpPr>
         <p:spPr>
           <a:xfrm>
-            <a:off x="1978152" y="3364992"/>
-            <a:ext cx="1225296" cy="475488"/>
+            <a:off x="1975104" y="3364992"/>
+            <a:ext cx="1554480" cy="475488"/>
           </a:xfrm>
           <a:prstGeom prst="rect">
             <a:avLst/>
@@ -26652,8 +26646,8 @@
         </p:nvSpPr>
         <p:spPr>
           <a:xfrm>
-            <a:off x="3203448" y="3364992"/>
-            <a:ext cx="76200" cy="475488"/>
+            <a:off x="3529584" y="3364992"/>
+            <a:ext cx="73152" cy="475488"/>
           </a:xfrm>
           <a:prstGeom prst="rect">
             <a:avLst/>
@@ -26691,8 +26685,8 @@
         </p:nvSpPr>
         <p:spPr>
           <a:xfrm>
-            <a:off x="3279648" y="3364992"/>
-            <a:ext cx="1225296" cy="475488"/>
+            <a:off x="3602736" y="3364992"/>
+            <a:ext cx="1554480" cy="475488"/>
           </a:xfrm>
           <a:prstGeom prst="rect">
             <a:avLst>
@@ -26718,8 +26712,8 @@
         </p:nvSpPr>
         <p:spPr>
           <a:xfrm>
-            <a:off x="3279648" y="3364992"/>
-            <a:ext cx="1225296" cy="475488"/>
+            <a:off x="3602736" y="3364992"/>
+            <a:ext cx="1554480" cy="475488"/>
           </a:xfrm>
           <a:prstGeom prst="rect">
             <a:avLst/>
@@ -26757,8 +26751,8 @@
         </p:nvSpPr>
         <p:spPr>
           <a:xfrm>
-            <a:off x="4504944" y="3364992"/>
-            <a:ext cx="76200" cy="475488"/>
+            <a:off x="5157216" y="3364992"/>
+            <a:ext cx="73152" cy="475488"/>
           </a:xfrm>
           <a:prstGeom prst="rect">
             <a:avLst/>
@@ -26796,8 +26790,8 @@
         </p:nvSpPr>
         <p:spPr>
           <a:xfrm>
-            <a:off x="4581144" y="3364992"/>
-            <a:ext cx="1225296" cy="475488"/>
+            <a:off x="5230368" y="3364992"/>
+            <a:ext cx="1554480" cy="475488"/>
           </a:xfrm>
           <a:prstGeom prst="rect">
             <a:avLst>
@@ -26823,8 +26817,8 @@
         </p:nvSpPr>
         <p:spPr>
           <a:xfrm>
-            <a:off x="4581144" y="3364992"/>
-            <a:ext cx="1225296" cy="475488"/>
+            <a:off x="5230368" y="3364992"/>
+            <a:ext cx="1554480" cy="475488"/>
           </a:xfrm>
           <a:prstGeom prst="rect">
             <a:avLst/>
@@ -26848,7 +26842,7 @@
                 <a:ea typeface="Trebuchet MS" pitchFamily="34" charset="-122"/>
                 <a:cs typeface="Trebuchet MS" pitchFamily="34" charset="-120"/>
               </a:rPr>
-              <a:t>na</a:t>
+              <a:t>view</a:t>
             </a:r>
             <a:endParaRPr lang="en-US" sz="1400" dirty="0"/>
           </a:p>
@@ -26862,8 +26856,8 @@
         </p:nvSpPr>
         <p:spPr>
           <a:xfrm>
-            <a:off x="5806440" y="3364992"/>
-            <a:ext cx="76200" cy="475488"/>
+            <a:off x="6784848" y="3364992"/>
+            <a:ext cx="73152" cy="475488"/>
           </a:xfrm>
           <a:prstGeom prst="rect">
             <a:avLst/>
@@ -26901,8 +26895,8 @@
         </p:nvSpPr>
         <p:spPr>
           <a:xfrm>
-            <a:off x="5882640" y="3364992"/>
-            <a:ext cx="1225296" cy="475488"/>
+            <a:off x="6858000" y="3364992"/>
+            <a:ext cx="1554480" cy="475488"/>
           </a:xfrm>
           <a:prstGeom prst="rect">
             <a:avLst>
@@ -26928,8 +26922,8 @@
         </p:nvSpPr>
         <p:spPr>
           <a:xfrm>
-            <a:off x="5882640" y="3364992"/>
-            <a:ext cx="1225296" cy="475488"/>
+            <a:off x="6858000" y="3364992"/>
+            <a:ext cx="1554480" cy="475488"/>
           </a:xfrm>
           <a:prstGeom prst="rect">
             <a:avLst/>
@@ -26953,7 +26947,7 @@
                 <a:ea typeface="Trebuchet MS" pitchFamily="34" charset="-122"/>
                 <a:cs typeface="Trebuchet MS" pitchFamily="34" charset="-120"/>
               </a:rPr>
-              <a:t>tion</a:t>
+              <a:t>er</a:t>
             </a:r>
             <a:endParaRPr lang="en-US" sz="1400" dirty="0"/>
           </a:p>
@@ -26961,119 +26955,80 @@
       </p:sp>
       <p:sp>
         <p:nvSpPr>
-          <p:cNvPr id="39" name="Text 37"/>
-          <p:cNvSpPr/>
-          <p:nvPr/>
-        </p:nvSpPr>
-        <p:spPr>
-          <a:xfrm>
-            <a:off x="7107936" y="3364992"/>
-            <a:ext cx="76200" cy="475488"/>
-          </a:xfrm>
-          <a:prstGeom prst="rect">
-            <a:avLst/>
-          </a:prstGeom>
-          <a:noFill/>
-          <a:ln/>
-        </p:spPr>
-        <p:txBody>
-          <a:bodyPr wrap="square" lIns="0" tIns="0" rIns="0" bIns="0" rtlCol="0" anchor="ctr"/>
-          <a:lstStyle/>
-          <a:p>
-            <a:pPr algn="ctr" indent="0" marL="0">
-              <a:buNone/>
-            </a:pPr>
-            <a:r>
-              <a:rPr lang="en-US" sz="1600" b="1" dirty="0">
-                <a:solidFill>
-                  <a:srgbClr val="0D9488"/>
+          <p:cNvPr id="39" name="Shape 37"/>
+          <p:cNvSpPr/>
+          <p:nvPr/>
+        </p:nvSpPr>
+        <p:spPr>
+          <a:xfrm>
+            <a:off x="365760" y="4096512"/>
+            <a:ext cx="1371600" cy="804672"/>
+          </a:xfrm>
+          <a:prstGeom prst="rect">
+            <a:avLst>
+              <a:gd name="adj" fmla="val 6818"/>
+            </a:avLst>
+          </a:prstGeom>
+          <a:solidFill>
+            <a:srgbClr val="E2E8F0"/>
+          </a:solidFill>
+          <a:ln w="12700">
+            <a:solidFill>
+              <a:srgbClr val="E2E8F0"/>
+            </a:solidFill>
+            <a:prstDash val="solid"/>
+          </a:ln>
+        </p:spPr>
+      </p:sp>
+      <p:sp>
+        <p:nvSpPr>
+          <p:cNvPr id="40" name="Text 38"/>
+          <p:cNvSpPr/>
+          <p:nvPr/>
+        </p:nvSpPr>
+        <p:spPr>
+          <a:xfrm>
+            <a:off x="365760" y="4096512"/>
+            <a:ext cx="1371600" cy="804672"/>
+          </a:xfrm>
+          <a:prstGeom prst="rect">
+            <a:avLst/>
+          </a:prstGeom>
+          <a:noFill/>
+          <a:ln/>
+        </p:spPr>
+        <p:txBody>
+          <a:bodyPr wrap="square" lIns="0" tIns="0" rIns="0" bIns="0" rtlCol="0" anchor="ctr"/>
+          <a:lstStyle/>
+          <a:p>
+            <a:pPr algn="ctr" indent="0" marL="0">
+              <a:buNone/>
+            </a:pPr>
+            <a:r>
+              <a:rPr lang="en-US" sz="1100" b="1" dirty="0">
+                <a:solidFill>
+                  <a:srgbClr val="475569"/>
                 </a:solidFill>
                 <a:latin typeface="Trebuchet MS" pitchFamily="34" charset="0"/>
                 <a:ea typeface="Trebuchet MS" pitchFamily="34" charset="-122"/>
                 <a:cs typeface="Trebuchet MS" pitchFamily="34" charset="-120"/>
               </a:rPr>
-              <a:t>·</a:t>
-            </a:r>
-            <a:endParaRPr lang="en-US" sz="1600" dirty="0"/>
-          </a:p>
-        </p:txBody>
-      </p:sp>
-      <p:sp>
-        <p:nvSpPr>
-          <p:cNvPr id="40" name="Shape 38"/>
-          <p:cNvSpPr/>
-          <p:nvPr/>
-        </p:nvSpPr>
-        <p:spPr>
-          <a:xfrm>
-            <a:off x="7184136" y="3364992"/>
-            <a:ext cx="1225296" cy="475488"/>
-          </a:xfrm>
-          <a:prstGeom prst="rect">
-            <a:avLst>
-              <a:gd name="adj" fmla="val 9615"/>
-            </a:avLst>
-          </a:prstGeom>
-          <a:solidFill>
-            <a:srgbClr val="FFFFFF"/>
-          </a:solidFill>
-          <a:ln w="12700">
-            <a:solidFill>
-              <a:srgbClr val="0D9488"/>
-            </a:solidFill>
-            <a:prstDash val="solid"/>
-          </a:ln>
-        </p:spPr>
-      </p:sp>
-      <p:sp>
-        <p:nvSpPr>
-          <p:cNvPr id="41" name="Text 39"/>
-          <p:cNvSpPr/>
-          <p:nvPr/>
-        </p:nvSpPr>
-        <p:spPr>
-          <a:xfrm>
-            <a:off x="7184136" y="3364992"/>
-            <a:ext cx="1225296" cy="475488"/>
-          </a:xfrm>
-          <a:prstGeom prst="rect">
-            <a:avLst/>
-          </a:prstGeom>
-          <a:noFill/>
-          <a:ln/>
-        </p:spPr>
-        <p:txBody>
-          <a:bodyPr wrap="square" lIns="0" tIns="0" rIns="0" bIns="0" rtlCol="0" anchor="ctr"/>
-          <a:lstStyle/>
-          <a:p>
-            <a:pPr algn="ctr" indent="0" marL="0">
-              <a:buNone/>
-            </a:pPr>
-            <a:r>
-              <a:rPr lang="en-US" sz="1400" b="1" dirty="0">
-                <a:solidFill>
-                  <a:srgbClr val="0D9488"/>
-                </a:solidFill>
-                <a:latin typeface="Trebuchet MS" pitchFamily="34" charset="0"/>
-                <a:ea typeface="Trebuchet MS" pitchFamily="34" charset="-122"/>
-                <a:cs typeface="Trebuchet MS" pitchFamily="34" charset="-120"/>
-              </a:rPr>
-              <a:t>al</a:t>
-            </a:r>
-            <a:endParaRPr lang="en-US" sz="1400" dirty="0"/>
-          </a:p>
-        </p:txBody>
-      </p:sp>
-      <p:sp>
-        <p:nvSpPr>
-          <p:cNvPr id="42" name="Shape 40"/>
-          <p:cNvSpPr/>
-          <p:nvPr/>
-        </p:nvSpPr>
-        <p:spPr>
-          <a:xfrm>
-            <a:off x="365760" y="4096512"/>
-            <a:ext cx="1371600" cy="804672"/>
+              <a:t>Phonemes</a:t>
+            </a:r>
+            <a:endParaRPr lang="en-US" sz="1100" dirty="0"/>
+          </a:p>
+        </p:txBody>
+      </p:sp>
+      <p:sp>
+        <p:nvSpPr>
+          <p:cNvPr id="41" name="Shape 39"/>
+          <p:cNvSpPr/>
+          <p:nvPr/>
+        </p:nvSpPr>
+        <p:spPr>
+          <a:xfrm>
+            <a:off x="1874520" y="4096512"/>
+            <a:ext cx="6903720" cy="804672"/>
           </a:xfrm>
           <a:prstGeom prst="rect">
             <a:avLst>
@@ -27081,85 +27036,19 @@
             </a:avLst>
           </a:prstGeom>
           <a:solidFill>
-            <a:srgbClr val="E2E8F0"/>
+            <a:srgbClr val="F8FAFC"/>
           </a:solidFill>
           <a:ln w="12700">
             <a:solidFill>
               <a:srgbClr val="E2E8F0"/>
             </a:solidFill>
-            <a:prstDash val="solid"/>
-          </a:ln>
-        </p:spPr>
-      </p:sp>
-      <p:sp>
-        <p:nvSpPr>
-          <p:cNvPr id="43" name="Text 41"/>
-          <p:cNvSpPr/>
-          <p:nvPr/>
-        </p:nvSpPr>
-        <p:spPr>
-          <a:xfrm>
-            <a:off x="365760" y="4096512"/>
-            <a:ext cx="1371600" cy="804672"/>
-          </a:xfrm>
-          <a:prstGeom prst="rect">
-            <a:avLst/>
-          </a:prstGeom>
-          <a:noFill/>
-          <a:ln/>
-        </p:spPr>
-        <p:txBody>
-          <a:bodyPr wrap="square" lIns="0" tIns="0" rIns="0" bIns="0" rtlCol="0" anchor="ctr"/>
-          <a:lstStyle/>
-          <a:p>
-            <a:pPr algn="ctr" indent="0" marL="0">
-              <a:buNone/>
-            </a:pPr>
-            <a:r>
-              <a:rPr lang="en-US" sz="1100" b="1" dirty="0">
-                <a:solidFill>
-                  <a:srgbClr val="475569"/>
-                </a:solidFill>
-                <a:latin typeface="Trebuchet MS" pitchFamily="34" charset="0"/>
-                <a:ea typeface="Trebuchet MS" pitchFamily="34" charset="-122"/>
-                <a:cs typeface="Trebuchet MS" pitchFamily="34" charset="-120"/>
-              </a:rPr>
-              <a:t>Phonemes</a:t>
-            </a:r>
-            <a:endParaRPr lang="en-US" sz="1100" dirty="0"/>
-          </a:p>
-        </p:txBody>
-      </p:sp>
-      <p:sp>
-        <p:nvSpPr>
-          <p:cNvPr id="44" name="Shape 42"/>
-          <p:cNvSpPr/>
-          <p:nvPr/>
-        </p:nvSpPr>
-        <p:spPr>
-          <a:xfrm>
-            <a:off x="1874520" y="4096512"/>
-            <a:ext cx="6903720" cy="804672"/>
-          </a:xfrm>
-          <a:prstGeom prst="rect">
-            <a:avLst>
-              <a:gd name="adj" fmla="val 6818"/>
-            </a:avLst>
-          </a:prstGeom>
-          <a:solidFill>
-            <a:srgbClr val="F8FAFC"/>
-          </a:solidFill>
-          <a:ln w="12700">
-            <a:solidFill>
-              <a:srgbClr val="E2E8F0"/>
-            </a:solidFill>
             <a:prstDash val="dash"/>
           </a:ln>
         </p:spPr>
       </p:sp>
       <p:sp>
         <p:nvSpPr>
-          <p:cNvPr id="45" name="Text 43"/>
+          <p:cNvPr id="42" name="Text 40"/>
           <p:cNvSpPr/>
           <p:nvPr/>
         </p:nvSpPr>
@@ -27621,7 +27510,7 @@
                 <a:ea typeface="Trebuchet MS" pitchFamily="34" charset="-122"/>
                 <a:cs typeface="Trebuchet MS" pitchFamily="34" charset="-120"/>
               </a:rPr>
-              <a:t>international</a:t>
+              <a:t>interviewer</a:t>
             </a:r>
             <a:endParaRPr lang="en-US" sz="2800" dirty="0"/>
           </a:p>
@@ -27799,7 +27688,7 @@
                 <a:ea typeface="Calibri" pitchFamily="34" charset="-122"/>
                 <a:cs typeface="Calibri" pitchFamily="34" charset="-120"/>
               </a:rPr>
-              <a:t>between, among</a:t>
+              <a:t>between</a:t>
             </a:r>
             <a:endParaRPr lang="en-US" sz="850" dirty="0"/>
           </a:p>
@@ -27872,7 +27761,7 @@
                 <a:ea typeface="Trebuchet MS" pitchFamily="34" charset="-122"/>
                 <a:cs typeface="Trebuchet MS" pitchFamily="34" charset="-120"/>
               </a:rPr>
-              <a:t>nation</a:t>
+              <a:t>view</a:t>
             </a:r>
             <a:endParaRPr lang="en-US" sz="1300" dirty="0"/>
           </a:p>
@@ -27911,7 +27800,7 @@
                 <a:ea typeface="Calibri" pitchFamily="34" charset="-122"/>
                 <a:cs typeface="Calibri" pitchFamily="34" charset="-120"/>
               </a:rPr>
-              <a:t>country</a:t>
+              <a:t>see, look</a:t>
             </a:r>
             <a:endParaRPr lang="en-US" sz="850" dirty="0"/>
           </a:p>
@@ -27984,7 +27873,7 @@
                 <a:ea typeface="Trebuchet MS" pitchFamily="34" charset="-122"/>
                 <a:cs typeface="Trebuchet MS" pitchFamily="34" charset="-120"/>
               </a:rPr>
-              <a:t>al</a:t>
+              <a:t>er</a:t>
             </a:r>
             <a:endParaRPr lang="en-US" sz="1300" dirty="0"/>
           </a:p>
@@ -28023,7 +27912,7 @@
                 <a:ea typeface="Calibri" pitchFamily="34" charset="-122"/>
                 <a:cs typeface="Calibri" pitchFamily="34" charset="-120"/>
               </a:rPr>
-              <a:t>relating to</a:t>
+              <a:t>person who does</a:t>
             </a:r>
             <a:endParaRPr lang="en-US" sz="850" dirty="0"/>
           </a:p>
@@ -28130,8 +28019,8 @@
         </p:nvSpPr>
         <p:spPr>
           <a:xfrm>
-            <a:off x="1978152" y="3364992"/>
-            <a:ext cx="1225296" cy="475488"/>
+            <a:off x="1975104" y="3364992"/>
+            <a:ext cx="1554480" cy="475488"/>
           </a:xfrm>
           <a:prstGeom prst="rect">
             <a:avLst>
@@ -28157,8 +28046,8 @@
         </p:nvSpPr>
         <p:spPr>
           <a:xfrm>
-            <a:off x="1978152" y="3364992"/>
-            <a:ext cx="1225296" cy="475488"/>
+            <a:off x="1975104" y="3364992"/>
+            <a:ext cx="1554480" cy="475488"/>
           </a:xfrm>
           <a:prstGeom prst="rect">
             <a:avLst/>
@@ -28196,8 +28085,8 @@
         </p:nvSpPr>
         <p:spPr>
           <a:xfrm>
-            <a:off x="3203448" y="3364992"/>
-            <a:ext cx="76200" cy="475488"/>
+            <a:off x="3529584" y="3364992"/>
+            <a:ext cx="73152" cy="475488"/>
           </a:xfrm>
           <a:prstGeom prst="rect">
             <a:avLst/>
@@ -28235,8 +28124,8 @@
         </p:nvSpPr>
         <p:spPr>
           <a:xfrm>
-            <a:off x="3279648" y="3364992"/>
-            <a:ext cx="1225296" cy="475488"/>
+            <a:off x="3602736" y="3364992"/>
+            <a:ext cx="1554480" cy="475488"/>
           </a:xfrm>
           <a:prstGeom prst="rect">
             <a:avLst>
@@ -28262,8 +28151,8 @@
         </p:nvSpPr>
         <p:spPr>
           <a:xfrm>
-            <a:off x="3279648" y="3364992"/>
-            <a:ext cx="1225296" cy="475488"/>
+            <a:off x="3602736" y="3364992"/>
+            <a:ext cx="1554480" cy="475488"/>
           </a:xfrm>
           <a:prstGeom prst="rect">
             <a:avLst/>
@@ -28301,8 +28190,8 @@
         </p:nvSpPr>
         <p:spPr>
           <a:xfrm>
-            <a:off x="4504944" y="3364992"/>
-            <a:ext cx="76200" cy="475488"/>
+            <a:off x="5157216" y="3364992"/>
+            <a:ext cx="73152" cy="475488"/>
           </a:xfrm>
           <a:prstGeom prst="rect">
             <a:avLst/>
@@ -28340,8 +28229,8 @@
         </p:nvSpPr>
         <p:spPr>
           <a:xfrm>
-            <a:off x="4581144" y="3364992"/>
-            <a:ext cx="1225296" cy="475488"/>
+            <a:off x="5230368" y="3364992"/>
+            <a:ext cx="1554480" cy="475488"/>
           </a:xfrm>
           <a:prstGeom prst="rect">
             <a:avLst>
@@ -28367,8 +28256,8 @@
         </p:nvSpPr>
         <p:spPr>
           <a:xfrm>
-            <a:off x="4581144" y="3364992"/>
-            <a:ext cx="1225296" cy="475488"/>
+            <a:off x="5230368" y="3364992"/>
+            <a:ext cx="1554480" cy="475488"/>
           </a:xfrm>
           <a:prstGeom prst="rect">
             <a:avLst/>
@@ -28392,7 +28281,7 @@
                 <a:ea typeface="Trebuchet MS" pitchFamily="34" charset="-122"/>
                 <a:cs typeface="Trebuchet MS" pitchFamily="34" charset="-120"/>
               </a:rPr>
-              <a:t>na</a:t>
+              <a:t>view</a:t>
             </a:r>
             <a:endParaRPr lang="en-US" sz="1400" dirty="0"/>
           </a:p>
@@ -28406,8 +28295,8 @@
         </p:nvSpPr>
         <p:spPr>
           <a:xfrm>
-            <a:off x="5806440" y="3364992"/>
-            <a:ext cx="76200" cy="475488"/>
+            <a:off x="6784848" y="3364992"/>
+            <a:ext cx="73152" cy="475488"/>
           </a:xfrm>
           <a:prstGeom prst="rect">
             <a:avLst/>
@@ -28445,8 +28334,8 @@
         </p:nvSpPr>
         <p:spPr>
           <a:xfrm>
-            <a:off x="5882640" y="3364992"/>
-            <a:ext cx="1225296" cy="475488"/>
+            <a:off x="6858000" y="3364992"/>
+            <a:ext cx="1554480" cy="475488"/>
           </a:xfrm>
           <a:prstGeom prst="rect">
             <a:avLst>
@@ -28472,8 +28361,8 @@
         </p:nvSpPr>
         <p:spPr>
           <a:xfrm>
-            <a:off x="5882640" y="3364992"/>
-            <a:ext cx="1225296" cy="475488"/>
+            <a:off x="6858000" y="3364992"/>
+            <a:ext cx="1554480" cy="475488"/>
           </a:xfrm>
           <a:prstGeom prst="rect">
             <a:avLst/>
@@ -28497,7 +28386,7 @@
                 <a:ea typeface="Trebuchet MS" pitchFamily="34" charset="-122"/>
                 <a:cs typeface="Trebuchet MS" pitchFamily="34" charset="-120"/>
               </a:rPr>
-              <a:t>tion</a:t>
+              <a:t>er</a:t>
             </a:r>
             <a:endParaRPr lang="en-US" sz="1400" dirty="0"/>
           </a:p>
@@ -28505,193 +28394,247 @@
       </p:sp>
       <p:sp>
         <p:nvSpPr>
-          <p:cNvPr id="39" name="Text 37"/>
-          <p:cNvSpPr/>
-          <p:nvPr/>
-        </p:nvSpPr>
-        <p:spPr>
-          <a:xfrm>
-            <a:off x="7107936" y="3364992"/>
-            <a:ext cx="76200" cy="475488"/>
-          </a:xfrm>
-          <a:prstGeom prst="rect">
-            <a:avLst/>
-          </a:prstGeom>
-          <a:noFill/>
-          <a:ln/>
-        </p:spPr>
-        <p:txBody>
-          <a:bodyPr wrap="square" lIns="0" tIns="0" rIns="0" bIns="0" rtlCol="0" anchor="ctr"/>
-          <a:lstStyle/>
-          <a:p>
-            <a:pPr algn="ctr" indent="0" marL="0">
-              <a:buNone/>
-            </a:pPr>
-            <a:r>
-              <a:rPr lang="en-US" sz="1600" b="1" dirty="0">
-                <a:solidFill>
-                  <a:srgbClr val="0D9488"/>
+          <p:cNvPr id="39" name="Shape 37"/>
+          <p:cNvSpPr/>
+          <p:nvPr/>
+        </p:nvSpPr>
+        <p:spPr>
+          <a:xfrm>
+            <a:off x="365760" y="4096512"/>
+            <a:ext cx="1371600" cy="804672"/>
+          </a:xfrm>
+          <a:prstGeom prst="rect">
+            <a:avLst>
+              <a:gd name="adj" fmla="val 6818"/>
+            </a:avLst>
+          </a:prstGeom>
+          <a:solidFill>
+            <a:srgbClr val="E2E8F0"/>
+          </a:solidFill>
+          <a:ln w="12700">
+            <a:solidFill>
+              <a:srgbClr val="E2E8F0"/>
+            </a:solidFill>
+            <a:prstDash val="solid"/>
+          </a:ln>
+        </p:spPr>
+      </p:sp>
+      <p:sp>
+        <p:nvSpPr>
+          <p:cNvPr id="40" name="Text 38"/>
+          <p:cNvSpPr/>
+          <p:nvPr/>
+        </p:nvSpPr>
+        <p:spPr>
+          <a:xfrm>
+            <a:off x="365760" y="4096512"/>
+            <a:ext cx="1371600" cy="804672"/>
+          </a:xfrm>
+          <a:prstGeom prst="rect">
+            <a:avLst/>
+          </a:prstGeom>
+          <a:noFill/>
+          <a:ln/>
+        </p:spPr>
+        <p:txBody>
+          <a:bodyPr wrap="square" lIns="0" tIns="0" rIns="0" bIns="0" rtlCol="0" anchor="ctr"/>
+          <a:lstStyle/>
+          <a:p>
+            <a:pPr algn="ctr" indent="0" marL="0">
+              <a:buNone/>
+            </a:pPr>
+            <a:r>
+              <a:rPr lang="en-US" sz="1100" b="1" dirty="0">
+                <a:solidFill>
+                  <a:srgbClr val="475569"/>
                 </a:solidFill>
                 <a:latin typeface="Trebuchet MS" pitchFamily="34" charset="0"/>
                 <a:ea typeface="Trebuchet MS" pitchFamily="34" charset="-122"/>
                 <a:cs typeface="Trebuchet MS" pitchFamily="34" charset="-120"/>
               </a:rPr>
-              <a:t>·</a:t>
-            </a:r>
-            <a:endParaRPr lang="en-US" sz="1600" dirty="0"/>
-          </a:p>
-        </p:txBody>
-      </p:sp>
-      <p:sp>
-        <p:nvSpPr>
-          <p:cNvPr id="40" name="Shape 38"/>
-          <p:cNvSpPr/>
-          <p:nvPr/>
-        </p:nvSpPr>
-        <p:spPr>
-          <a:xfrm>
-            <a:off x="7184136" y="3364992"/>
-            <a:ext cx="1225296" cy="475488"/>
+              <a:t>Phonemes</a:t>
+            </a:r>
+            <a:endParaRPr lang="en-US" sz="1100" dirty="0"/>
+          </a:p>
+        </p:txBody>
+      </p:sp>
+      <p:sp>
+        <p:nvSpPr>
+          <p:cNvPr id="41" name="Shape 39"/>
+          <p:cNvSpPr/>
+          <p:nvPr/>
+        </p:nvSpPr>
+        <p:spPr>
+          <a:xfrm>
+            <a:off x="1874520" y="4096512"/>
+            <a:ext cx="6903720" cy="658368"/>
           </a:xfrm>
           <a:prstGeom prst="rect">
             <a:avLst>
-              <a:gd name="adj" fmla="val 9615"/>
+              <a:gd name="adj" fmla="val 8333"/>
             </a:avLst>
           </a:prstGeom>
           <a:solidFill>
+            <a:srgbClr val="FCE7F3"/>
+          </a:solidFill>
+          <a:ln w="12700">
+            <a:solidFill>
+              <a:srgbClr val="DB2777"/>
+            </a:solidFill>
+            <a:prstDash val="solid"/>
+          </a:ln>
+        </p:spPr>
+      </p:sp>
+      <p:sp>
+        <p:nvSpPr>
+          <p:cNvPr id="42" name="Shape 40"/>
+          <p:cNvSpPr/>
+          <p:nvPr/>
+        </p:nvSpPr>
+        <p:spPr>
+          <a:xfrm>
+            <a:off x="2023872" y="4169664"/>
+            <a:ext cx="685800" cy="475488"/>
+          </a:xfrm>
+          <a:prstGeom prst="rect">
+            <a:avLst>
+              <a:gd name="adj" fmla="val 7692"/>
+            </a:avLst>
+          </a:prstGeom>
+          <a:solidFill>
             <a:srgbClr val="FFFFFF"/>
           </a:solidFill>
           <a:ln w="12700">
             <a:solidFill>
-              <a:srgbClr val="0D9488"/>
-            </a:solidFill>
-            <a:prstDash val="solid"/>
-          </a:ln>
-        </p:spPr>
-      </p:sp>
-      <p:sp>
-        <p:nvSpPr>
-          <p:cNvPr id="41" name="Text 39"/>
-          <p:cNvSpPr/>
-          <p:nvPr/>
-        </p:nvSpPr>
-        <p:spPr>
-          <a:xfrm>
-            <a:off x="7184136" y="3364992"/>
-            <a:ext cx="1225296" cy="475488"/>
-          </a:xfrm>
-          <a:prstGeom prst="rect">
-            <a:avLst/>
-          </a:prstGeom>
-          <a:noFill/>
-          <a:ln/>
-        </p:spPr>
-        <p:txBody>
-          <a:bodyPr wrap="square" lIns="0" tIns="0" rIns="0" bIns="0" rtlCol="0" anchor="ctr"/>
-          <a:lstStyle/>
-          <a:p>
-            <a:pPr algn="ctr" indent="0" marL="0">
-              <a:buNone/>
-            </a:pPr>
-            <a:r>
-              <a:rPr lang="en-US" sz="1400" b="1" dirty="0">
-                <a:solidFill>
-                  <a:srgbClr val="0D9488"/>
+              <a:srgbClr val="DB2777"/>
+            </a:solidFill>
+            <a:prstDash val="solid"/>
+          </a:ln>
+        </p:spPr>
+      </p:sp>
+      <p:sp>
+        <p:nvSpPr>
+          <p:cNvPr id="43" name="Text 41"/>
+          <p:cNvSpPr/>
+          <p:nvPr/>
+        </p:nvSpPr>
+        <p:spPr>
+          <a:xfrm>
+            <a:off x="2023872" y="4169664"/>
+            <a:ext cx="685800" cy="475488"/>
+          </a:xfrm>
+          <a:prstGeom prst="rect">
+            <a:avLst/>
+          </a:prstGeom>
+          <a:noFill/>
+          <a:ln/>
+        </p:spPr>
+        <p:txBody>
+          <a:bodyPr wrap="square" lIns="0" tIns="0" rIns="0" bIns="0" rtlCol="0" anchor="ctr"/>
+          <a:lstStyle/>
+          <a:p>
+            <a:pPr algn="ctr" indent="0" marL="0">
+              <a:buNone/>
+            </a:pPr>
+            <a:r>
+              <a:rPr lang="en-US" sz="900" b="1" dirty="0">
+                <a:solidFill>
+                  <a:srgbClr val="9D174D"/>
                 </a:solidFill>
                 <a:latin typeface="Trebuchet MS" pitchFamily="34" charset="0"/>
                 <a:ea typeface="Trebuchet MS" pitchFamily="34" charset="-122"/>
                 <a:cs typeface="Trebuchet MS" pitchFamily="34" charset="-120"/>
               </a:rPr>
-              <a:t>al</a:t>
-            </a:r>
-            <a:endParaRPr lang="en-US" sz="1400" dirty="0"/>
-          </a:p>
-        </p:txBody>
-      </p:sp>
-      <p:sp>
-        <p:nvSpPr>
-          <p:cNvPr id="42" name="Shape 40"/>
-          <p:cNvSpPr/>
-          <p:nvPr/>
-        </p:nvSpPr>
-        <p:spPr>
-          <a:xfrm>
-            <a:off x="365760" y="4096512"/>
-            <a:ext cx="1371600" cy="804672"/>
+              <a:t>i</a:t>
+            </a:r>
+            <a:endParaRPr lang="en-US" sz="900" dirty="0"/>
+          </a:p>
+        </p:txBody>
+      </p:sp>
+      <p:sp>
+        <p:nvSpPr>
+          <p:cNvPr id="44" name="Shape 42"/>
+          <p:cNvSpPr/>
+          <p:nvPr/>
+        </p:nvSpPr>
+        <p:spPr>
+          <a:xfrm>
+            <a:off x="2831592" y="4169664"/>
+            <a:ext cx="685800" cy="475488"/>
           </a:xfrm>
           <a:prstGeom prst="rect">
             <a:avLst>
-              <a:gd name="adj" fmla="val 6818"/>
+              <a:gd name="adj" fmla="val 7692"/>
             </a:avLst>
           </a:prstGeom>
           <a:solidFill>
-            <a:srgbClr val="E2E8F0"/>
-          </a:solidFill>
-          <a:ln w="12700">
-            <a:solidFill>
-              <a:srgbClr val="E2E8F0"/>
-            </a:solidFill>
-            <a:prstDash val="solid"/>
-          </a:ln>
-        </p:spPr>
-      </p:sp>
-      <p:sp>
-        <p:nvSpPr>
-          <p:cNvPr id="43" name="Text 41"/>
-          <p:cNvSpPr/>
-          <p:nvPr/>
-        </p:nvSpPr>
-        <p:spPr>
-          <a:xfrm>
-            <a:off x="365760" y="4096512"/>
-            <a:ext cx="1371600" cy="804672"/>
-          </a:xfrm>
-          <a:prstGeom prst="rect">
-            <a:avLst/>
-          </a:prstGeom>
-          <a:noFill/>
-          <a:ln/>
-        </p:spPr>
-        <p:txBody>
-          <a:bodyPr wrap="square" lIns="0" tIns="0" rIns="0" bIns="0" rtlCol="0" anchor="ctr"/>
-          <a:lstStyle/>
-          <a:p>
-            <a:pPr algn="ctr" indent="0" marL="0">
-              <a:buNone/>
-            </a:pPr>
-            <a:r>
-              <a:rPr lang="en-US" sz="1100" b="1" dirty="0">
-                <a:solidFill>
-                  <a:srgbClr val="475569"/>
+            <a:srgbClr val="FFFFFF"/>
+          </a:solidFill>
+          <a:ln w="12700">
+            <a:solidFill>
+              <a:srgbClr val="DB2777"/>
+            </a:solidFill>
+            <a:prstDash val="solid"/>
+          </a:ln>
+        </p:spPr>
+      </p:sp>
+      <p:sp>
+        <p:nvSpPr>
+          <p:cNvPr id="45" name="Text 43"/>
+          <p:cNvSpPr/>
+          <p:nvPr/>
+        </p:nvSpPr>
+        <p:spPr>
+          <a:xfrm>
+            <a:off x="2831592" y="4169664"/>
+            <a:ext cx="685800" cy="475488"/>
+          </a:xfrm>
+          <a:prstGeom prst="rect">
+            <a:avLst/>
+          </a:prstGeom>
+          <a:noFill/>
+          <a:ln/>
+        </p:spPr>
+        <p:txBody>
+          <a:bodyPr wrap="square" lIns="0" tIns="0" rIns="0" bIns="0" rtlCol="0" anchor="ctr"/>
+          <a:lstStyle/>
+          <a:p>
+            <a:pPr algn="ctr" indent="0" marL="0">
+              <a:buNone/>
+            </a:pPr>
+            <a:r>
+              <a:rPr lang="en-US" sz="900" b="1" dirty="0">
+                <a:solidFill>
+                  <a:srgbClr val="9D174D"/>
                 </a:solidFill>
                 <a:latin typeface="Trebuchet MS" pitchFamily="34" charset="0"/>
                 <a:ea typeface="Trebuchet MS" pitchFamily="34" charset="-122"/>
                 <a:cs typeface="Trebuchet MS" pitchFamily="34" charset="-120"/>
               </a:rPr>
-              <a:t>Phonemes</a:t>
-            </a:r>
-            <a:endParaRPr lang="en-US" sz="1100" dirty="0"/>
-          </a:p>
-        </p:txBody>
-      </p:sp>
-      <p:sp>
-        <p:nvSpPr>
-          <p:cNvPr id="44" name="Shape 42"/>
-          <p:cNvSpPr/>
-          <p:nvPr/>
-        </p:nvSpPr>
-        <p:spPr>
-          <a:xfrm>
-            <a:off x="1874520" y="4096512"/>
-            <a:ext cx="6903720" cy="804672"/>
+              <a:t>n</a:t>
+            </a:r>
+            <a:endParaRPr lang="en-US" sz="900" dirty="0"/>
+          </a:p>
+        </p:txBody>
+      </p:sp>
+      <p:sp>
+        <p:nvSpPr>
+          <p:cNvPr id="46" name="Shape 44"/>
+          <p:cNvSpPr/>
+          <p:nvPr/>
+        </p:nvSpPr>
+        <p:spPr>
+          <a:xfrm>
+            <a:off x="3639312" y="4169664"/>
+            <a:ext cx="685800" cy="475488"/>
           </a:xfrm>
           <a:prstGeom prst="rect">
             <a:avLst>
-              <a:gd name="adj" fmla="val 6818"/>
+              <a:gd name="adj" fmla="val 7692"/>
             </a:avLst>
           </a:prstGeom>
           <a:solidFill>
-            <a:srgbClr val="FCE7F3"/>
+            <a:srgbClr val="FFFFFF"/>
           </a:solidFill>
           <a:ln w="12700">
             <a:solidFill>
@@ -28703,41 +28646,14 @@
       </p:sp>
       <p:sp>
         <p:nvSpPr>
-          <p:cNvPr id="45" name="Shape 43"/>
-          <p:cNvSpPr/>
-          <p:nvPr/>
-        </p:nvSpPr>
-        <p:spPr>
-          <a:xfrm>
-            <a:off x="1952244" y="4169664"/>
-            <a:ext cx="543652" cy="384048"/>
-          </a:xfrm>
-          <a:prstGeom prst="rect">
-            <a:avLst>
-              <a:gd name="adj" fmla="val 9524"/>
-            </a:avLst>
-          </a:prstGeom>
-          <a:solidFill>
-            <a:srgbClr val="FFFFFF"/>
-          </a:solidFill>
-          <a:ln w="12700">
-            <a:solidFill>
-              <a:srgbClr val="DB2777"/>
-            </a:solidFill>
-            <a:prstDash val="solid"/>
-          </a:ln>
-        </p:spPr>
-      </p:sp>
-      <p:sp>
-        <p:nvSpPr>
-          <p:cNvPr id="46" name="Text 44"/>
-          <p:cNvSpPr/>
-          <p:nvPr/>
-        </p:nvSpPr>
-        <p:spPr>
-          <a:xfrm>
-            <a:off x="1952244" y="4169664"/>
-            <a:ext cx="543652" cy="384048"/>
+          <p:cNvPr id="47" name="Text 45"/>
+          <p:cNvSpPr/>
+          <p:nvPr/>
+        </p:nvSpPr>
+        <p:spPr>
+          <a:xfrm>
+            <a:off x="3639312" y="4169664"/>
+            <a:ext cx="685800" cy="475488"/>
           </a:xfrm>
           <a:prstGeom prst="rect">
             <a:avLst/>
@@ -28761,7 +28677,7 @@
                 <a:ea typeface="Trebuchet MS" pitchFamily="34" charset="-122"/>
                 <a:cs typeface="Trebuchet MS" pitchFamily="34" charset="-120"/>
               </a:rPr>
-              <a:t>i</a:t>
+              <a:t>t</a:t>
             </a:r>
             <a:endParaRPr lang="en-US" sz="900" dirty="0"/>
           </a:p>
@@ -28769,18 +28685,18 @@
       </p:sp>
       <p:sp>
         <p:nvSpPr>
-          <p:cNvPr id="47" name="Shape 45"/>
-          <p:cNvSpPr/>
-          <p:nvPr/>
-        </p:nvSpPr>
-        <p:spPr>
-          <a:xfrm>
-            <a:off x="2546188" y="4169664"/>
-            <a:ext cx="543652" cy="384048"/>
+          <p:cNvPr id="48" name="Shape 46"/>
+          <p:cNvSpPr/>
+          <p:nvPr/>
+        </p:nvSpPr>
+        <p:spPr>
+          <a:xfrm>
+            <a:off x="4447032" y="4169664"/>
+            <a:ext cx="685800" cy="475488"/>
           </a:xfrm>
           <a:prstGeom prst="rect">
             <a:avLst>
-              <a:gd name="adj" fmla="val 9524"/>
+              <a:gd name="adj" fmla="val 7692"/>
             </a:avLst>
           </a:prstGeom>
           <a:solidFill>
@@ -28796,14 +28712,14 @@
       </p:sp>
       <p:sp>
         <p:nvSpPr>
-          <p:cNvPr id="48" name="Text 46"/>
-          <p:cNvSpPr/>
-          <p:nvPr/>
-        </p:nvSpPr>
-        <p:spPr>
-          <a:xfrm>
-            <a:off x="2546188" y="4169664"/>
-            <a:ext cx="543652" cy="384048"/>
+          <p:cNvPr id="49" name="Text 47"/>
+          <p:cNvSpPr/>
+          <p:nvPr/>
+        </p:nvSpPr>
+        <p:spPr>
+          <a:xfrm>
+            <a:off x="4447032" y="4169664"/>
+            <a:ext cx="685800" cy="475488"/>
           </a:xfrm>
           <a:prstGeom prst="rect">
             <a:avLst/>
@@ -28827,7 +28743,7 @@
                 <a:ea typeface="Trebuchet MS" pitchFamily="34" charset="-122"/>
                 <a:cs typeface="Trebuchet MS" pitchFamily="34" charset="-120"/>
               </a:rPr>
-              <a:t>n</a:t>
+              <a:t>er</a:t>
             </a:r>
             <a:endParaRPr lang="en-US" sz="900" dirty="0"/>
           </a:p>
@@ -28835,18 +28751,18 @@
       </p:sp>
       <p:sp>
         <p:nvSpPr>
-          <p:cNvPr id="49" name="Shape 47"/>
-          <p:cNvSpPr/>
-          <p:nvPr/>
-        </p:nvSpPr>
-        <p:spPr>
-          <a:xfrm>
-            <a:off x="3140133" y="4169664"/>
-            <a:ext cx="543652" cy="384048"/>
+          <p:cNvPr id="50" name="Shape 48"/>
+          <p:cNvSpPr/>
+          <p:nvPr/>
+        </p:nvSpPr>
+        <p:spPr>
+          <a:xfrm>
+            <a:off x="5254752" y="4169664"/>
+            <a:ext cx="685800" cy="475488"/>
           </a:xfrm>
           <a:prstGeom prst="rect">
             <a:avLst>
-              <a:gd name="adj" fmla="val 9524"/>
+              <a:gd name="adj" fmla="val 7692"/>
             </a:avLst>
           </a:prstGeom>
           <a:solidFill>
@@ -28862,14 +28778,14 @@
       </p:sp>
       <p:sp>
         <p:nvSpPr>
-          <p:cNvPr id="50" name="Text 48"/>
-          <p:cNvSpPr/>
-          <p:nvPr/>
-        </p:nvSpPr>
-        <p:spPr>
-          <a:xfrm>
-            <a:off x="3140133" y="4169664"/>
-            <a:ext cx="543652" cy="384048"/>
+          <p:cNvPr id="51" name="Text 49"/>
+          <p:cNvSpPr/>
+          <p:nvPr/>
+        </p:nvSpPr>
+        <p:spPr>
+          <a:xfrm>
+            <a:off x="5254752" y="4169664"/>
+            <a:ext cx="685800" cy="475488"/>
           </a:xfrm>
           <a:prstGeom prst="rect">
             <a:avLst/>
@@ -28893,7 +28809,7 @@
                 <a:ea typeface="Trebuchet MS" pitchFamily="34" charset="-122"/>
                 <a:cs typeface="Trebuchet MS" pitchFamily="34" charset="-120"/>
               </a:rPr>
-              <a:t>t</a:t>
+              <a:t>v</a:t>
             </a:r>
             <a:endParaRPr lang="en-US" sz="900" dirty="0"/>
           </a:p>
@@ -28901,18 +28817,18 @@
       </p:sp>
       <p:sp>
         <p:nvSpPr>
-          <p:cNvPr id="51" name="Shape 49"/>
-          <p:cNvSpPr/>
-          <p:nvPr/>
-        </p:nvSpPr>
-        <p:spPr>
-          <a:xfrm>
-            <a:off x="3734077" y="4169664"/>
-            <a:ext cx="543652" cy="384048"/>
+          <p:cNvPr id="52" name="Shape 50"/>
+          <p:cNvSpPr/>
+          <p:nvPr/>
+        </p:nvSpPr>
+        <p:spPr>
+          <a:xfrm>
+            <a:off x="6062472" y="4169664"/>
+            <a:ext cx="685800" cy="475488"/>
           </a:xfrm>
           <a:prstGeom prst="rect">
             <a:avLst>
-              <a:gd name="adj" fmla="val 9524"/>
+              <a:gd name="adj" fmla="val 7692"/>
             </a:avLst>
           </a:prstGeom>
           <a:solidFill>
@@ -28928,14 +28844,14 @@
       </p:sp>
       <p:sp>
         <p:nvSpPr>
-          <p:cNvPr id="52" name="Text 50"/>
-          <p:cNvSpPr/>
-          <p:nvPr/>
-        </p:nvSpPr>
-        <p:spPr>
-          <a:xfrm>
-            <a:off x="3734077" y="4169664"/>
-            <a:ext cx="543652" cy="384048"/>
+          <p:cNvPr id="53" name="Text 51"/>
+          <p:cNvSpPr/>
+          <p:nvPr/>
+        </p:nvSpPr>
+        <p:spPr>
+          <a:xfrm>
+            <a:off x="6062472" y="4169664"/>
+            <a:ext cx="685800" cy="475488"/>
           </a:xfrm>
           <a:prstGeom prst="rect">
             <a:avLst/>
@@ -28959,7 +28875,7 @@
                 <a:ea typeface="Trebuchet MS" pitchFamily="34" charset="-122"/>
                 <a:cs typeface="Trebuchet MS" pitchFamily="34" charset="-120"/>
               </a:rPr>
-              <a:t>er</a:t>
+              <a:t>i</a:t>
             </a:r>
             <a:endParaRPr lang="en-US" sz="900" dirty="0"/>
           </a:p>
@@ -28967,18 +28883,18 @@
       </p:sp>
       <p:sp>
         <p:nvSpPr>
-          <p:cNvPr id="53" name="Shape 51"/>
-          <p:cNvSpPr/>
-          <p:nvPr/>
-        </p:nvSpPr>
-        <p:spPr>
-          <a:xfrm>
-            <a:off x="4328021" y="4169664"/>
-            <a:ext cx="543652" cy="384048"/>
+          <p:cNvPr id="54" name="Shape 52"/>
+          <p:cNvSpPr/>
+          <p:nvPr/>
+        </p:nvSpPr>
+        <p:spPr>
+          <a:xfrm>
+            <a:off x="6870192" y="4169664"/>
+            <a:ext cx="685800" cy="475488"/>
           </a:xfrm>
           <a:prstGeom prst="rect">
             <a:avLst>
-              <a:gd name="adj" fmla="val 9524"/>
+              <a:gd name="adj" fmla="val 7692"/>
             </a:avLst>
           </a:prstGeom>
           <a:solidFill>
@@ -28994,14 +28910,14 @@
       </p:sp>
       <p:sp>
         <p:nvSpPr>
-          <p:cNvPr id="54" name="Text 52"/>
-          <p:cNvSpPr/>
-          <p:nvPr/>
-        </p:nvSpPr>
-        <p:spPr>
-          <a:xfrm>
-            <a:off x="4328021" y="4169664"/>
-            <a:ext cx="543652" cy="384048"/>
+          <p:cNvPr id="55" name="Text 53"/>
+          <p:cNvSpPr/>
+          <p:nvPr/>
+        </p:nvSpPr>
+        <p:spPr>
+          <a:xfrm>
+            <a:off x="6870192" y="4169664"/>
+            <a:ext cx="685800" cy="475488"/>
           </a:xfrm>
           <a:prstGeom prst="rect">
             <a:avLst/>
@@ -29025,7 +28941,7 @@
                 <a:ea typeface="Trebuchet MS" pitchFamily="34" charset="-122"/>
                 <a:cs typeface="Trebuchet MS" pitchFamily="34" charset="-120"/>
               </a:rPr>
-              <a:t>n</a:t>
+              <a:t>ew</a:t>
             </a:r>
             <a:endParaRPr lang="en-US" sz="900" dirty="0"/>
           </a:p>
@@ -29033,18 +28949,18 @@
       </p:sp>
       <p:sp>
         <p:nvSpPr>
-          <p:cNvPr id="55" name="Shape 53"/>
-          <p:cNvSpPr/>
-          <p:nvPr/>
-        </p:nvSpPr>
-        <p:spPr>
-          <a:xfrm>
-            <a:off x="4921966" y="4169664"/>
-            <a:ext cx="543652" cy="384048"/>
+          <p:cNvPr id="56" name="Shape 54"/>
+          <p:cNvSpPr/>
+          <p:nvPr/>
+        </p:nvSpPr>
+        <p:spPr>
+          <a:xfrm>
+            <a:off x="7677912" y="4169664"/>
+            <a:ext cx="685800" cy="475488"/>
           </a:xfrm>
           <a:prstGeom prst="rect">
             <a:avLst>
-              <a:gd name="adj" fmla="val 9524"/>
+              <a:gd name="adj" fmla="val 7692"/>
             </a:avLst>
           </a:prstGeom>
           <a:solidFill>
@@ -29060,14 +28976,14 @@
       </p:sp>
       <p:sp>
         <p:nvSpPr>
-          <p:cNvPr id="56" name="Text 54"/>
-          <p:cNvSpPr/>
-          <p:nvPr/>
-        </p:nvSpPr>
-        <p:spPr>
-          <a:xfrm>
-            <a:off x="4921966" y="4169664"/>
-            <a:ext cx="543652" cy="384048"/>
+          <p:cNvPr id="57" name="Text 55"/>
+          <p:cNvSpPr/>
+          <p:nvPr/>
+        </p:nvSpPr>
+        <p:spPr>
+          <a:xfrm>
+            <a:off x="7677912" y="4169664"/>
+            <a:ext cx="685800" cy="475488"/>
           </a:xfrm>
           <a:prstGeom prst="rect">
             <a:avLst/>
@@ -29091,376 +29007,7 @@
                 <a:ea typeface="Trebuchet MS" pitchFamily="34" charset="-122"/>
                 <a:cs typeface="Trebuchet MS" pitchFamily="34" charset="-120"/>
               </a:rPr>
-              <a:t>a</a:t>
-            </a:r>
-            <a:endParaRPr lang="en-US" sz="900" dirty="0"/>
-          </a:p>
-        </p:txBody>
-      </p:sp>
-      <p:sp>
-        <p:nvSpPr>
-          <p:cNvPr id="57" name="Shape 55"/>
-          <p:cNvSpPr/>
-          <p:nvPr/>
-        </p:nvSpPr>
-        <p:spPr>
-          <a:xfrm>
-            <a:off x="5515910" y="4169664"/>
-            <a:ext cx="543652" cy="384048"/>
-          </a:xfrm>
-          <a:prstGeom prst="rect">
-            <a:avLst>
-              <a:gd name="adj" fmla="val 9524"/>
-            </a:avLst>
-          </a:prstGeom>
-          <a:solidFill>
-            <a:srgbClr val="FFFFFF"/>
-          </a:solidFill>
-          <a:ln w="12700">
-            <a:solidFill>
-              <a:srgbClr val="DB2777"/>
-            </a:solidFill>
-            <a:prstDash val="solid"/>
-          </a:ln>
-        </p:spPr>
-      </p:sp>
-      <p:sp>
-        <p:nvSpPr>
-          <p:cNvPr id="58" name="Text 56"/>
-          <p:cNvSpPr/>
-          <p:nvPr/>
-        </p:nvSpPr>
-        <p:spPr>
-          <a:xfrm>
-            <a:off x="5515910" y="4169664"/>
-            <a:ext cx="543652" cy="384048"/>
-          </a:xfrm>
-          <a:prstGeom prst="rect">
-            <a:avLst/>
-          </a:prstGeom>
-          <a:noFill/>
-          <a:ln/>
-        </p:spPr>
-        <p:txBody>
-          <a:bodyPr wrap="square" lIns="0" tIns="0" rIns="0" bIns="0" rtlCol="0" anchor="ctr"/>
-          <a:lstStyle/>
-          <a:p>
-            <a:pPr algn="ctr" indent="0" marL="0">
-              <a:buNone/>
-            </a:pPr>
-            <a:r>
-              <a:rPr lang="en-US" sz="900" b="1" dirty="0">
-                <a:solidFill>
-                  <a:srgbClr val="9D174D"/>
-                </a:solidFill>
-                <a:latin typeface="Trebuchet MS" pitchFamily="34" charset="0"/>
-                <a:ea typeface="Trebuchet MS" pitchFamily="34" charset="-122"/>
-                <a:cs typeface="Trebuchet MS" pitchFamily="34" charset="-120"/>
-              </a:rPr>
-              <a:t>ti</a:t>
-            </a:r>
-            <a:endParaRPr lang="en-US" sz="900" dirty="0"/>
-          </a:p>
-        </p:txBody>
-      </p:sp>
-      <p:sp>
-        <p:nvSpPr>
-          <p:cNvPr id="59" name="Text 57"/>
-          <p:cNvSpPr/>
-          <p:nvPr/>
-        </p:nvSpPr>
-        <p:spPr>
-          <a:xfrm>
-            <a:off x="5515910" y="4572000"/>
-            <a:ext cx="543652" cy="219456"/>
-          </a:xfrm>
-          <a:prstGeom prst="rect">
-            <a:avLst/>
-          </a:prstGeom>
-          <a:noFill/>
-          <a:ln/>
-        </p:spPr>
-        <p:txBody>
-          <a:bodyPr wrap="square" lIns="0" tIns="0" rIns="0" bIns="0" rtlCol="0" anchor="t"/>
-          <a:lstStyle/>
-          <a:p>
-            <a:pPr algn="ctr" indent="0" marL="0">
-              <a:buNone/>
-            </a:pPr>
-            <a:r>
-              <a:rPr lang="en-US" sz="750" i="1" dirty="0">
-                <a:solidFill>
-                  <a:srgbClr val="94A3B8"/>
-                </a:solidFill>
-                <a:latin typeface="Calibri" pitchFamily="34" charset="0"/>
-                <a:ea typeface="Calibri" pitchFamily="34" charset="-122"/>
-                <a:cs typeface="Calibri" pitchFamily="34" charset="-120"/>
-              </a:rPr>
-              <a:t>/sh/</a:t>
-            </a:r>
-            <a:endParaRPr lang="en-US" sz="750" dirty="0"/>
-          </a:p>
-        </p:txBody>
-      </p:sp>
-      <p:sp>
-        <p:nvSpPr>
-          <p:cNvPr id="60" name="Shape 58"/>
-          <p:cNvSpPr/>
-          <p:nvPr/>
-        </p:nvSpPr>
-        <p:spPr>
-          <a:xfrm>
-            <a:off x="6109855" y="4169664"/>
-            <a:ext cx="543652" cy="384048"/>
-          </a:xfrm>
-          <a:prstGeom prst="rect">
-            <a:avLst>
-              <a:gd name="adj" fmla="val 9524"/>
-            </a:avLst>
-          </a:prstGeom>
-          <a:solidFill>
-            <a:srgbClr val="FFFFFF"/>
-          </a:solidFill>
-          <a:ln w="12700">
-            <a:solidFill>
-              <a:srgbClr val="DB2777"/>
-            </a:solidFill>
-            <a:prstDash val="solid"/>
-          </a:ln>
-        </p:spPr>
-      </p:sp>
-      <p:sp>
-        <p:nvSpPr>
-          <p:cNvPr id="61" name="Text 59"/>
-          <p:cNvSpPr/>
-          <p:nvPr/>
-        </p:nvSpPr>
-        <p:spPr>
-          <a:xfrm>
-            <a:off x="6109855" y="4169664"/>
-            <a:ext cx="543652" cy="384048"/>
-          </a:xfrm>
-          <a:prstGeom prst="rect">
-            <a:avLst/>
-          </a:prstGeom>
-          <a:noFill/>
-          <a:ln/>
-        </p:spPr>
-        <p:txBody>
-          <a:bodyPr wrap="square" lIns="0" tIns="0" rIns="0" bIns="0" rtlCol="0" anchor="ctr"/>
-          <a:lstStyle/>
-          <a:p>
-            <a:pPr algn="ctr" indent="0" marL="0">
-              <a:buNone/>
-            </a:pPr>
-            <a:r>
-              <a:rPr lang="en-US" sz="900" b="1" dirty="0">
-                <a:solidFill>
-                  <a:srgbClr val="9D174D"/>
-                </a:solidFill>
-                <a:latin typeface="Trebuchet MS" pitchFamily="34" charset="0"/>
-                <a:ea typeface="Trebuchet MS" pitchFamily="34" charset="-122"/>
-                <a:cs typeface="Trebuchet MS" pitchFamily="34" charset="-120"/>
-              </a:rPr>
-              <a:t>o</a:t>
-            </a:r>
-            <a:endParaRPr lang="en-US" sz="900" dirty="0"/>
-          </a:p>
-        </p:txBody>
-      </p:sp>
-      <p:sp>
-        <p:nvSpPr>
-          <p:cNvPr id="62" name="Shape 60"/>
-          <p:cNvSpPr/>
-          <p:nvPr/>
-        </p:nvSpPr>
-        <p:spPr>
-          <a:xfrm>
-            <a:off x="6703799" y="4169664"/>
-            <a:ext cx="543652" cy="384048"/>
-          </a:xfrm>
-          <a:prstGeom prst="rect">
-            <a:avLst>
-              <a:gd name="adj" fmla="val 9524"/>
-            </a:avLst>
-          </a:prstGeom>
-          <a:solidFill>
-            <a:srgbClr val="FFFFFF"/>
-          </a:solidFill>
-          <a:ln w="12700">
-            <a:solidFill>
-              <a:srgbClr val="DB2777"/>
-            </a:solidFill>
-            <a:prstDash val="solid"/>
-          </a:ln>
-        </p:spPr>
-      </p:sp>
-      <p:sp>
-        <p:nvSpPr>
-          <p:cNvPr id="63" name="Text 61"/>
-          <p:cNvSpPr/>
-          <p:nvPr/>
-        </p:nvSpPr>
-        <p:spPr>
-          <a:xfrm>
-            <a:off x="6703799" y="4169664"/>
-            <a:ext cx="543652" cy="384048"/>
-          </a:xfrm>
-          <a:prstGeom prst="rect">
-            <a:avLst/>
-          </a:prstGeom>
-          <a:noFill/>
-          <a:ln/>
-        </p:spPr>
-        <p:txBody>
-          <a:bodyPr wrap="square" lIns="0" tIns="0" rIns="0" bIns="0" rtlCol="0" anchor="ctr"/>
-          <a:lstStyle/>
-          <a:p>
-            <a:pPr algn="ctr" indent="0" marL="0">
-              <a:buNone/>
-            </a:pPr>
-            <a:r>
-              <a:rPr lang="en-US" sz="900" b="1" dirty="0">
-                <a:solidFill>
-                  <a:srgbClr val="9D174D"/>
-                </a:solidFill>
-                <a:latin typeface="Trebuchet MS" pitchFamily="34" charset="0"/>
-                <a:ea typeface="Trebuchet MS" pitchFamily="34" charset="-122"/>
-                <a:cs typeface="Trebuchet MS" pitchFamily="34" charset="-120"/>
-              </a:rPr>
-              <a:t>n</a:t>
-            </a:r>
-            <a:endParaRPr lang="en-US" sz="900" dirty="0"/>
-          </a:p>
-        </p:txBody>
-      </p:sp>
-      <p:sp>
-        <p:nvSpPr>
-          <p:cNvPr id="64" name="Shape 62"/>
-          <p:cNvSpPr/>
-          <p:nvPr/>
-        </p:nvSpPr>
-        <p:spPr>
-          <a:xfrm>
-            <a:off x="7297743" y="4169664"/>
-            <a:ext cx="543652" cy="384048"/>
-          </a:xfrm>
-          <a:prstGeom prst="rect">
-            <a:avLst>
-              <a:gd name="adj" fmla="val 9524"/>
-            </a:avLst>
-          </a:prstGeom>
-          <a:solidFill>
-            <a:srgbClr val="FFFFFF"/>
-          </a:solidFill>
-          <a:ln w="12700">
-            <a:solidFill>
-              <a:srgbClr val="DB2777"/>
-            </a:solidFill>
-            <a:prstDash val="solid"/>
-          </a:ln>
-        </p:spPr>
-      </p:sp>
-      <p:sp>
-        <p:nvSpPr>
-          <p:cNvPr id="65" name="Text 63"/>
-          <p:cNvSpPr/>
-          <p:nvPr/>
-        </p:nvSpPr>
-        <p:spPr>
-          <a:xfrm>
-            <a:off x="7297743" y="4169664"/>
-            <a:ext cx="543652" cy="384048"/>
-          </a:xfrm>
-          <a:prstGeom prst="rect">
-            <a:avLst/>
-          </a:prstGeom>
-          <a:noFill/>
-          <a:ln/>
-        </p:spPr>
-        <p:txBody>
-          <a:bodyPr wrap="square" lIns="0" tIns="0" rIns="0" bIns="0" rtlCol="0" anchor="ctr"/>
-          <a:lstStyle/>
-          <a:p>
-            <a:pPr algn="ctr" indent="0" marL="0">
-              <a:buNone/>
-            </a:pPr>
-            <a:r>
-              <a:rPr lang="en-US" sz="900" b="1" dirty="0">
-                <a:solidFill>
-                  <a:srgbClr val="9D174D"/>
-                </a:solidFill>
-                <a:latin typeface="Trebuchet MS" pitchFamily="34" charset="0"/>
-                <a:ea typeface="Trebuchet MS" pitchFamily="34" charset="-122"/>
-                <a:cs typeface="Trebuchet MS" pitchFamily="34" charset="-120"/>
-              </a:rPr>
-              <a:t>a</a:t>
-            </a:r>
-            <a:endParaRPr lang="en-US" sz="900" dirty="0"/>
-          </a:p>
-        </p:txBody>
-      </p:sp>
-      <p:sp>
-        <p:nvSpPr>
-          <p:cNvPr id="66" name="Shape 64"/>
-          <p:cNvSpPr/>
-          <p:nvPr/>
-        </p:nvSpPr>
-        <p:spPr>
-          <a:xfrm>
-            <a:off x="7891688" y="4169664"/>
-            <a:ext cx="543652" cy="384048"/>
-          </a:xfrm>
-          <a:prstGeom prst="rect">
-            <a:avLst>
-              <a:gd name="adj" fmla="val 9524"/>
-            </a:avLst>
-          </a:prstGeom>
-          <a:solidFill>
-            <a:srgbClr val="FFFFFF"/>
-          </a:solidFill>
-          <a:ln w="12700">
-            <a:solidFill>
-              <a:srgbClr val="DB2777"/>
-            </a:solidFill>
-            <a:prstDash val="solid"/>
-          </a:ln>
-        </p:spPr>
-      </p:sp>
-      <p:sp>
-        <p:nvSpPr>
-          <p:cNvPr id="67" name="Text 65"/>
-          <p:cNvSpPr/>
-          <p:nvPr/>
-        </p:nvSpPr>
-        <p:spPr>
-          <a:xfrm>
-            <a:off x="7891688" y="4169664"/>
-            <a:ext cx="543652" cy="384048"/>
-          </a:xfrm>
-          <a:prstGeom prst="rect">
-            <a:avLst/>
-          </a:prstGeom>
-          <a:noFill/>
-          <a:ln/>
-        </p:spPr>
-        <p:txBody>
-          <a:bodyPr wrap="square" lIns="0" tIns="0" rIns="0" bIns="0" rtlCol="0" anchor="ctr"/>
-          <a:lstStyle/>
-          <a:p>
-            <a:pPr algn="ctr" indent="0" marL="0">
-              <a:buNone/>
-            </a:pPr>
-            <a:r>
-              <a:rPr lang="en-US" sz="900" b="1" dirty="0">
-                <a:solidFill>
-                  <a:srgbClr val="9D174D"/>
-                </a:solidFill>
-                <a:latin typeface="Trebuchet MS" pitchFamily="34" charset="0"/>
-                <a:ea typeface="Trebuchet MS" pitchFamily="34" charset="-122"/>
-                <a:cs typeface="Trebuchet MS" pitchFamily="34" charset="-120"/>
-              </a:rPr>
-              <a:t>l</a:t>
+              <a:t>er</a:t>
             </a:r>
             <a:endParaRPr lang="en-US" sz="900" dirty="0"/>
           </a:p>
@@ -29891,7 +29438,7 @@
                 <a:ea typeface="Trebuchet MS" pitchFamily="34" charset="-122"/>
                 <a:cs typeface="Trebuchet MS" pitchFamily="34" charset="-120"/>
               </a:rPr>
-              <a:t>interact</a:t>
+              <a:t>international</a:t>
             </a:r>
             <a:endParaRPr lang="en-US" sz="2800" dirty="0"/>
           </a:p>
@@ -30718,7 +30265,7 @@
                 <a:ea typeface="Trebuchet MS" pitchFamily="34" charset="-122"/>
                 <a:cs typeface="Trebuchet MS" pitchFamily="34" charset="-120"/>
               </a:rPr>
-              <a:t>interact</a:t>
+              <a:t>international</a:t>
             </a:r>
             <a:endParaRPr lang="en-US" sz="2800" dirty="0"/>
           </a:p>
@@ -30798,7 +30345,7 @@
         </p:nvSpPr>
         <p:spPr>
           <a:xfrm>
-            <a:off x="2938272" y="2258568"/>
+            <a:off x="2221992" y="2258568"/>
             <a:ext cx="1828800" cy="292608"/>
           </a:xfrm>
           <a:prstGeom prst="rect">
@@ -30832,7 +30379,7 @@
         </p:nvSpPr>
         <p:spPr>
           <a:xfrm>
-            <a:off x="2938272" y="2258568"/>
+            <a:off x="2221992" y="2258568"/>
             <a:ext cx="1828800" cy="292608"/>
           </a:xfrm>
           <a:prstGeom prst="rect">
@@ -30871,7 +30418,7 @@
         </p:nvSpPr>
         <p:spPr>
           <a:xfrm>
-            <a:off x="2938272" y="2569464"/>
+            <a:off x="2221992" y="2569464"/>
             <a:ext cx="1828800" cy="201168"/>
           </a:xfrm>
           <a:prstGeom prst="rect">
@@ -30896,7 +30443,7 @@
                 <a:ea typeface="Calibri" pitchFamily="34" charset="-122"/>
                 <a:cs typeface="Calibri" pitchFamily="34" charset="-120"/>
               </a:rPr>
-              <a:t>between, among</a:t>
+              <a:t>between</a:t>
             </a:r>
             <a:endParaRPr lang="en-US" sz="850" dirty="0"/>
           </a:p>
@@ -30910,7 +30457,7 @@
         </p:nvSpPr>
         <p:spPr>
           <a:xfrm>
-            <a:off x="5803392" y="2258568"/>
+            <a:off x="4370832" y="2258568"/>
             <a:ext cx="1828800" cy="292608"/>
           </a:xfrm>
           <a:prstGeom prst="rect">
@@ -30944,7 +30491,7 @@
         </p:nvSpPr>
         <p:spPr>
           <a:xfrm>
-            <a:off x="5803392" y="2258568"/>
+            <a:off x="4370832" y="2258568"/>
             <a:ext cx="1828800" cy="292608"/>
           </a:xfrm>
           <a:prstGeom prst="rect">
@@ -30969,7 +30516,7 @@
                 <a:ea typeface="Trebuchet MS" pitchFamily="34" charset="-122"/>
                 <a:cs typeface="Trebuchet MS" pitchFamily="34" charset="-120"/>
               </a:rPr>
-              <a:t>act</a:t>
+              <a:t>nation</a:t>
             </a:r>
             <a:endParaRPr lang="en-US" sz="1300" dirty="0"/>
           </a:p>
@@ -30983,7 +30530,7 @@
         </p:nvSpPr>
         <p:spPr>
           <a:xfrm>
-            <a:off x="5803392" y="2569464"/>
+            <a:off x="4370832" y="2569464"/>
             <a:ext cx="1828800" cy="201168"/>
           </a:xfrm>
           <a:prstGeom prst="rect">
@@ -31008,7 +30555,7 @@
                 <a:ea typeface="Calibri" pitchFamily="34" charset="-122"/>
                 <a:cs typeface="Calibri" pitchFamily="34" charset="-120"/>
               </a:rPr>
-              <a:t>to do, to perform</a:t>
+              <a:t>country</a:t>
             </a:r>
             <a:endParaRPr lang="en-US" sz="850" dirty="0"/>
           </a:p>
@@ -31017,6 +30564,118 @@
       <p:sp>
         <p:nvSpPr>
           <p:cNvPr id="22" name="Shape 20"/>
+          <p:cNvSpPr/>
+          <p:nvPr/>
+        </p:nvSpPr>
+        <p:spPr>
+          <a:xfrm>
+            <a:off x="6519672" y="2258568"/>
+            <a:ext cx="1828800" cy="292608"/>
+          </a:xfrm>
+          <a:prstGeom prst="rect">
+            <a:avLst>
+              <a:gd name="adj" fmla="val 25000"/>
+            </a:avLst>
+          </a:prstGeom>
+          <a:solidFill>
+            <a:srgbClr val="FCE7F3"/>
+          </a:solidFill>
+          <a:ln w="19050">
+            <a:solidFill>
+              <a:srgbClr val="DB2777"/>
+            </a:solidFill>
+            <a:prstDash val="solid"/>
+          </a:ln>
+          <a:effectLst>
+            <a:outerShdw sx="100000" sy="100000" kx="0" ky="0" algn="bl" rotWithShape="0" blurRad="101600" dist="38100" dir="8100000">
+              <a:srgbClr val="000000">
+                <a:alpha val="12000"/>
+              </a:srgbClr>
+            </a:outerShdw>
+          </a:effectLst>
+        </p:spPr>
+      </p:sp>
+      <p:sp>
+        <p:nvSpPr>
+          <p:cNvPr id="23" name="Text 21"/>
+          <p:cNvSpPr/>
+          <p:nvPr/>
+        </p:nvSpPr>
+        <p:spPr>
+          <a:xfrm>
+            <a:off x="6519672" y="2258568"/>
+            <a:ext cx="1828800" cy="292608"/>
+          </a:xfrm>
+          <a:prstGeom prst="rect">
+            <a:avLst/>
+          </a:prstGeom>
+          <a:noFill/>
+          <a:ln/>
+        </p:spPr>
+        <p:txBody>
+          <a:bodyPr wrap="square" lIns="0" tIns="0" rIns="0" bIns="0" rtlCol="0" anchor="ctr"/>
+          <a:lstStyle/>
+          <a:p>
+            <a:pPr algn="ctr" indent="0" marL="0">
+              <a:buNone/>
+            </a:pPr>
+            <a:r>
+              <a:rPr lang="en-US" sz="1300" b="1" dirty="0">
+                <a:solidFill>
+                  <a:srgbClr val="9D174D"/>
+                </a:solidFill>
+                <a:latin typeface="Trebuchet MS" pitchFamily="34" charset="0"/>
+                <a:ea typeface="Trebuchet MS" pitchFamily="34" charset="-122"/>
+                <a:cs typeface="Trebuchet MS" pitchFamily="34" charset="-120"/>
+              </a:rPr>
+              <a:t>al</a:t>
+            </a:r>
+            <a:endParaRPr lang="en-US" sz="1300" dirty="0"/>
+          </a:p>
+        </p:txBody>
+      </p:sp>
+      <p:sp>
+        <p:nvSpPr>
+          <p:cNvPr id="24" name="Text 22"/>
+          <p:cNvSpPr/>
+          <p:nvPr/>
+        </p:nvSpPr>
+        <p:spPr>
+          <a:xfrm>
+            <a:off x="6519672" y="2569464"/>
+            <a:ext cx="1828800" cy="201168"/>
+          </a:xfrm>
+          <a:prstGeom prst="rect">
+            <a:avLst/>
+          </a:prstGeom>
+          <a:noFill/>
+          <a:ln/>
+        </p:spPr>
+        <p:txBody>
+          <a:bodyPr wrap="square" lIns="0" tIns="0" rIns="0" bIns="0" rtlCol="0" anchor="t"/>
+          <a:lstStyle/>
+          <a:p>
+            <a:pPr algn="ctr" indent="0" marL="0">
+              <a:buNone/>
+            </a:pPr>
+            <a:r>
+              <a:rPr lang="en-US" sz="850" dirty="0">
+                <a:solidFill>
+                  <a:srgbClr val="475569"/>
+                </a:solidFill>
+                <a:latin typeface="Calibri" pitchFamily="34" charset="0"/>
+                <a:ea typeface="Calibri" pitchFamily="34" charset="-122"/>
+                <a:cs typeface="Calibri" pitchFamily="34" charset="-120"/>
+              </a:rPr>
+              <a:t>relating to</a:t>
+            </a:r>
+            <a:endParaRPr lang="en-US" sz="850" dirty="0"/>
+          </a:p>
+        </p:txBody>
+      </p:sp>
+      <p:sp>
+        <p:nvSpPr>
+          <p:cNvPr id="25" name="Shape 23"/>
           <p:cNvSpPr/>
           <p:nvPr/>
         </p:nvSpPr>
@@ -31043,7 +30702,7 @@
       </p:sp>
       <p:sp>
         <p:nvSpPr>
-          <p:cNvPr id="23" name="Text 21"/>
+          <p:cNvPr id="26" name="Text 24"/>
           <p:cNvSpPr/>
           <p:nvPr/>
         </p:nvSpPr>
@@ -31082,7 +30741,7 @@
       </p:sp>
       <p:sp>
         <p:nvSpPr>
-          <p:cNvPr id="24" name="Shape 22"/>
+          <p:cNvPr id="27" name="Shape 25"/>
           <p:cNvSpPr/>
           <p:nvPr/>
         </p:nvSpPr>
@@ -31109,7 +30768,7 @@
       </p:sp>
       <p:sp>
         <p:nvSpPr>
-          <p:cNvPr id="25" name="Text 23"/>
+          <p:cNvPr id="28" name="Text 26"/>
           <p:cNvSpPr/>
           <p:nvPr/>
         </p:nvSpPr>
@@ -31148,7 +30807,7 @@
       </p:sp>
       <p:sp>
         <p:nvSpPr>
-          <p:cNvPr id="26" name="Shape 24"/>
+          <p:cNvPr id="29" name="Shape 27"/>
           <p:cNvSpPr/>
           <p:nvPr/>
         </p:nvSpPr>
@@ -31175,7 +30834,7 @@
       </p:sp>
       <p:sp>
         <p:nvSpPr>
-          <p:cNvPr id="27" name="Text 25"/>
+          <p:cNvPr id="30" name="Text 28"/>
           <p:cNvSpPr/>
           <p:nvPr/>
         </p:nvSpPr>
@@ -31214,7 +30873,7 @@
       </p:sp>
       <p:sp>
         <p:nvSpPr>
-          <p:cNvPr id="28" name="Shape 26"/>
+          <p:cNvPr id="31" name="Shape 29"/>
           <p:cNvSpPr/>
           <p:nvPr/>
         </p:nvSpPr>
@@ -31241,7 +30900,7 @@
       </p:sp>
       <p:sp>
         <p:nvSpPr>
-          <p:cNvPr id="29" name="Text 27"/>
+          <p:cNvPr id="32" name="Text 30"/>
           <p:cNvSpPr/>
           <p:nvPr/>
         </p:nvSpPr>
@@ -31703,7 +31362,7 @@
                 <a:ea typeface="Trebuchet MS" pitchFamily="34" charset="-122"/>
                 <a:cs typeface="Trebuchet MS" pitchFamily="34" charset="-120"/>
               </a:rPr>
-              <a:t>interact</a:t>
+              <a:t>international</a:t>
             </a:r>
             <a:endParaRPr lang="en-US" sz="2800" dirty="0"/>
           </a:p>
@@ -31783,7 +31442,7 @@
         </p:nvSpPr>
         <p:spPr>
           <a:xfrm>
-            <a:off x="2938272" y="2258568"/>
+            <a:off x="2221992" y="2258568"/>
             <a:ext cx="1828800" cy="292608"/>
           </a:xfrm>
           <a:prstGeom prst="rect">
@@ -31817,7 +31476,7 @@
         </p:nvSpPr>
         <p:spPr>
           <a:xfrm>
-            <a:off x="2938272" y="2258568"/>
+            <a:off x="2221992" y="2258568"/>
             <a:ext cx="1828800" cy="292608"/>
           </a:xfrm>
           <a:prstGeom prst="rect">
@@ -31856,7 +31515,7 @@
         </p:nvSpPr>
         <p:spPr>
           <a:xfrm>
-            <a:off x="2938272" y="2569464"/>
+            <a:off x="2221992" y="2569464"/>
             <a:ext cx="1828800" cy="201168"/>
           </a:xfrm>
           <a:prstGeom prst="rect">
@@ -31881,7 +31540,7 @@
                 <a:ea typeface="Calibri" pitchFamily="34" charset="-122"/>
                 <a:cs typeface="Calibri" pitchFamily="34" charset="-120"/>
               </a:rPr>
-              <a:t>between, among</a:t>
+              <a:t>between</a:t>
             </a:r>
             <a:endParaRPr lang="en-US" sz="850" dirty="0"/>
           </a:p>
@@ -31895,7 +31554,7 @@
         </p:nvSpPr>
         <p:spPr>
           <a:xfrm>
-            <a:off x="5803392" y="2258568"/>
+            <a:off x="4370832" y="2258568"/>
             <a:ext cx="1828800" cy="292608"/>
           </a:xfrm>
           <a:prstGeom prst="rect">
@@ -31929,7 +31588,7 @@
         </p:nvSpPr>
         <p:spPr>
           <a:xfrm>
-            <a:off x="5803392" y="2258568"/>
+            <a:off x="4370832" y="2258568"/>
             <a:ext cx="1828800" cy="292608"/>
           </a:xfrm>
           <a:prstGeom prst="rect">
@@ -31954,7 +31613,7 @@
                 <a:ea typeface="Trebuchet MS" pitchFamily="34" charset="-122"/>
                 <a:cs typeface="Trebuchet MS" pitchFamily="34" charset="-120"/>
               </a:rPr>
-              <a:t>act</a:t>
+              <a:t>nation</a:t>
             </a:r>
             <a:endParaRPr lang="en-US" sz="1300" dirty="0"/>
           </a:p>
@@ -31968,7 +31627,7 @@
         </p:nvSpPr>
         <p:spPr>
           <a:xfrm>
-            <a:off x="5803392" y="2569464"/>
+            <a:off x="4370832" y="2569464"/>
             <a:ext cx="1828800" cy="201168"/>
           </a:xfrm>
           <a:prstGeom prst="rect">
@@ -31993,7 +31652,7 @@
                 <a:ea typeface="Calibri" pitchFamily="34" charset="-122"/>
                 <a:cs typeface="Calibri" pitchFamily="34" charset="-120"/>
               </a:rPr>
-              <a:t>to do, to perform</a:t>
+              <a:t>country</a:t>
             </a:r>
             <a:endParaRPr lang="en-US" sz="850" dirty="0"/>
           </a:p>
@@ -32002,6 +31661,118 @@
       <p:sp>
         <p:nvSpPr>
           <p:cNvPr id="22" name="Shape 20"/>
+          <p:cNvSpPr/>
+          <p:nvPr/>
+        </p:nvSpPr>
+        <p:spPr>
+          <a:xfrm>
+            <a:off x="6519672" y="2258568"/>
+            <a:ext cx="1828800" cy="292608"/>
+          </a:xfrm>
+          <a:prstGeom prst="rect">
+            <a:avLst>
+              <a:gd name="adj" fmla="val 25000"/>
+            </a:avLst>
+          </a:prstGeom>
+          <a:solidFill>
+            <a:srgbClr val="FCE7F3"/>
+          </a:solidFill>
+          <a:ln w="19050">
+            <a:solidFill>
+              <a:srgbClr val="DB2777"/>
+            </a:solidFill>
+            <a:prstDash val="solid"/>
+          </a:ln>
+          <a:effectLst>
+            <a:outerShdw sx="100000" sy="100000" kx="0" ky="0" algn="bl" rotWithShape="0" blurRad="101600" dist="38100" dir="8100000">
+              <a:srgbClr val="000000">
+                <a:alpha val="12000"/>
+              </a:srgbClr>
+            </a:outerShdw>
+          </a:effectLst>
+        </p:spPr>
+      </p:sp>
+      <p:sp>
+        <p:nvSpPr>
+          <p:cNvPr id="23" name="Text 21"/>
+          <p:cNvSpPr/>
+          <p:nvPr/>
+        </p:nvSpPr>
+        <p:spPr>
+          <a:xfrm>
+            <a:off x="6519672" y="2258568"/>
+            <a:ext cx="1828800" cy="292608"/>
+          </a:xfrm>
+          <a:prstGeom prst="rect">
+            <a:avLst/>
+          </a:prstGeom>
+          <a:noFill/>
+          <a:ln/>
+        </p:spPr>
+        <p:txBody>
+          <a:bodyPr wrap="square" lIns="0" tIns="0" rIns="0" bIns="0" rtlCol="0" anchor="ctr"/>
+          <a:lstStyle/>
+          <a:p>
+            <a:pPr algn="ctr" indent="0" marL="0">
+              <a:buNone/>
+            </a:pPr>
+            <a:r>
+              <a:rPr lang="en-US" sz="1300" b="1" dirty="0">
+                <a:solidFill>
+                  <a:srgbClr val="9D174D"/>
+                </a:solidFill>
+                <a:latin typeface="Trebuchet MS" pitchFamily="34" charset="0"/>
+                <a:ea typeface="Trebuchet MS" pitchFamily="34" charset="-122"/>
+                <a:cs typeface="Trebuchet MS" pitchFamily="34" charset="-120"/>
+              </a:rPr>
+              <a:t>al</a:t>
+            </a:r>
+            <a:endParaRPr lang="en-US" sz="1300" dirty="0"/>
+          </a:p>
+        </p:txBody>
+      </p:sp>
+      <p:sp>
+        <p:nvSpPr>
+          <p:cNvPr id="24" name="Text 22"/>
+          <p:cNvSpPr/>
+          <p:nvPr/>
+        </p:nvSpPr>
+        <p:spPr>
+          <a:xfrm>
+            <a:off x="6519672" y="2569464"/>
+            <a:ext cx="1828800" cy="201168"/>
+          </a:xfrm>
+          <a:prstGeom prst="rect">
+            <a:avLst/>
+          </a:prstGeom>
+          <a:noFill/>
+          <a:ln/>
+        </p:spPr>
+        <p:txBody>
+          <a:bodyPr wrap="square" lIns="0" tIns="0" rIns="0" bIns="0" rtlCol="0" anchor="t"/>
+          <a:lstStyle/>
+          <a:p>
+            <a:pPr algn="ctr" indent="0" marL="0">
+              <a:buNone/>
+            </a:pPr>
+            <a:r>
+              <a:rPr lang="en-US" sz="850" dirty="0">
+                <a:solidFill>
+                  <a:srgbClr val="475569"/>
+                </a:solidFill>
+                <a:latin typeface="Calibri" pitchFamily="34" charset="0"/>
+                <a:ea typeface="Calibri" pitchFamily="34" charset="-122"/>
+                <a:cs typeface="Calibri" pitchFamily="34" charset="-120"/>
+              </a:rPr>
+              <a:t>relating to</a:t>
+            </a:r>
+            <a:endParaRPr lang="en-US" sz="850" dirty="0"/>
+          </a:p>
+        </p:txBody>
+      </p:sp>
+      <p:sp>
+        <p:nvSpPr>
+          <p:cNvPr id="25" name="Shape 23"/>
           <p:cNvSpPr/>
           <p:nvPr/>
         </p:nvSpPr>
@@ -32028,7 +31799,7 @@
       </p:sp>
       <p:sp>
         <p:nvSpPr>
-          <p:cNvPr id="23" name="Text 21"/>
+          <p:cNvPr id="26" name="Text 24"/>
           <p:cNvSpPr/>
           <p:nvPr/>
         </p:nvSpPr>
@@ -32067,7 +31838,7 @@
       </p:sp>
       <p:sp>
         <p:nvSpPr>
-          <p:cNvPr id="24" name="Shape 22"/>
+          <p:cNvPr id="27" name="Shape 25"/>
           <p:cNvSpPr/>
           <p:nvPr/>
         </p:nvSpPr>
@@ -32094,14 +31865,14 @@
       </p:sp>
       <p:sp>
         <p:nvSpPr>
-          <p:cNvPr id="25" name="Shape 23"/>
-          <p:cNvSpPr/>
-          <p:nvPr/>
-        </p:nvSpPr>
-        <p:spPr>
-          <a:xfrm>
-            <a:off x="2313432" y="3364992"/>
-            <a:ext cx="1645920" cy="475488"/>
+          <p:cNvPr id="28" name="Shape 26"/>
+          <p:cNvSpPr/>
+          <p:nvPr/>
+        </p:nvSpPr>
+        <p:spPr>
+          <a:xfrm>
+            <a:off x="1978152" y="3364992"/>
+            <a:ext cx="1225296" cy="475488"/>
           </a:xfrm>
           <a:prstGeom prst="rect">
             <a:avLst>
@@ -32121,14 +31892,14 @@
       </p:sp>
       <p:sp>
         <p:nvSpPr>
-          <p:cNvPr id="26" name="Text 24"/>
-          <p:cNvSpPr/>
-          <p:nvPr/>
-        </p:nvSpPr>
-        <p:spPr>
-          <a:xfrm>
-            <a:off x="2313432" y="3364992"/>
-            <a:ext cx="1645920" cy="475488"/>
+          <p:cNvPr id="29" name="Text 27"/>
+          <p:cNvSpPr/>
+          <p:nvPr/>
+        </p:nvSpPr>
+        <p:spPr>
+          <a:xfrm>
+            <a:off x="1978152" y="3364992"/>
+            <a:ext cx="1225296" cy="475488"/>
           </a:xfrm>
           <a:prstGeom prst="rect">
             <a:avLst/>
@@ -32160,14 +31931,14 @@
       </p:sp>
       <p:sp>
         <p:nvSpPr>
-          <p:cNvPr id="27" name="Text 25"/>
-          <p:cNvSpPr/>
-          <p:nvPr/>
-        </p:nvSpPr>
-        <p:spPr>
-          <a:xfrm>
-            <a:off x="3959352" y="3364992"/>
-            <a:ext cx="411480" cy="475488"/>
+          <p:cNvPr id="30" name="Text 28"/>
+          <p:cNvSpPr/>
+          <p:nvPr/>
+        </p:nvSpPr>
+        <p:spPr>
+          <a:xfrm>
+            <a:off x="3203448" y="3364992"/>
+            <a:ext cx="76200" cy="475488"/>
           </a:xfrm>
           <a:prstGeom prst="rect">
             <a:avLst/>
@@ -32199,14 +31970,14 @@
       </p:sp>
       <p:sp>
         <p:nvSpPr>
-          <p:cNvPr id="28" name="Shape 26"/>
-          <p:cNvSpPr/>
-          <p:nvPr/>
-        </p:nvSpPr>
-        <p:spPr>
-          <a:xfrm>
-            <a:off x="4370832" y="3364992"/>
-            <a:ext cx="1645920" cy="475488"/>
+          <p:cNvPr id="31" name="Shape 29"/>
+          <p:cNvSpPr/>
+          <p:nvPr/>
+        </p:nvSpPr>
+        <p:spPr>
+          <a:xfrm>
+            <a:off x="3279648" y="3364992"/>
+            <a:ext cx="1225296" cy="475488"/>
           </a:xfrm>
           <a:prstGeom prst="rect">
             <a:avLst>
@@ -32226,14 +31997,14 @@
       </p:sp>
       <p:sp>
         <p:nvSpPr>
-          <p:cNvPr id="29" name="Text 27"/>
-          <p:cNvSpPr/>
-          <p:nvPr/>
-        </p:nvSpPr>
-        <p:spPr>
-          <a:xfrm>
-            <a:off x="4370832" y="3364992"/>
-            <a:ext cx="1645920" cy="475488"/>
+          <p:cNvPr id="32" name="Text 30"/>
+          <p:cNvSpPr/>
+          <p:nvPr/>
+        </p:nvSpPr>
+        <p:spPr>
+          <a:xfrm>
+            <a:off x="3279648" y="3364992"/>
+            <a:ext cx="1225296" cy="475488"/>
           </a:xfrm>
           <a:prstGeom prst="rect">
             <a:avLst/>
@@ -32265,14 +32036,14 @@
       </p:sp>
       <p:sp>
         <p:nvSpPr>
-          <p:cNvPr id="30" name="Text 28"/>
-          <p:cNvSpPr/>
-          <p:nvPr/>
-        </p:nvSpPr>
-        <p:spPr>
-          <a:xfrm>
-            <a:off x="6016752" y="3364992"/>
-            <a:ext cx="411480" cy="475488"/>
+          <p:cNvPr id="33" name="Text 31"/>
+          <p:cNvSpPr/>
+          <p:nvPr/>
+        </p:nvSpPr>
+        <p:spPr>
+          <a:xfrm>
+            <a:off x="4504944" y="3364992"/>
+            <a:ext cx="76200" cy="475488"/>
           </a:xfrm>
           <a:prstGeom prst="rect">
             <a:avLst/>
@@ -32304,14 +32075,14 @@
       </p:sp>
       <p:sp>
         <p:nvSpPr>
-          <p:cNvPr id="31" name="Shape 29"/>
-          <p:cNvSpPr/>
-          <p:nvPr/>
-        </p:nvSpPr>
-        <p:spPr>
-          <a:xfrm>
-            <a:off x="6428232" y="3364992"/>
-            <a:ext cx="1645920" cy="475488"/>
+          <p:cNvPr id="34" name="Shape 32"/>
+          <p:cNvSpPr/>
+          <p:nvPr/>
+        </p:nvSpPr>
+        <p:spPr>
+          <a:xfrm>
+            <a:off x="4581144" y="3364992"/>
+            <a:ext cx="1225296" cy="475488"/>
           </a:xfrm>
           <a:prstGeom prst="rect">
             <a:avLst>
@@ -32331,14 +32102,14 @@
       </p:sp>
       <p:sp>
         <p:nvSpPr>
-          <p:cNvPr id="32" name="Text 30"/>
-          <p:cNvSpPr/>
-          <p:nvPr/>
-        </p:nvSpPr>
-        <p:spPr>
-          <a:xfrm>
-            <a:off x="6428232" y="3364992"/>
-            <a:ext cx="1645920" cy="475488"/>
+          <p:cNvPr id="35" name="Text 33"/>
+          <p:cNvSpPr/>
+          <p:nvPr/>
+        </p:nvSpPr>
+        <p:spPr>
+          <a:xfrm>
+            <a:off x="4581144" y="3364992"/>
+            <a:ext cx="1225296" cy="475488"/>
           </a:xfrm>
           <a:prstGeom prst="rect">
             <a:avLst/>
@@ -32362,7 +32133,7 @@
                 <a:ea typeface="Trebuchet MS" pitchFamily="34" charset="-122"/>
                 <a:cs typeface="Trebuchet MS" pitchFamily="34" charset="-120"/>
               </a:rPr>
-              <a:t>act</a:t>
+              <a:t>na</a:t>
             </a:r>
             <a:endParaRPr lang="en-US" sz="1400" dirty="0"/>
           </a:p>
@@ -32370,7 +32141,217 @@
       </p:sp>
       <p:sp>
         <p:nvSpPr>
-          <p:cNvPr id="33" name="Shape 31"/>
+          <p:cNvPr id="36" name="Text 34"/>
+          <p:cNvSpPr/>
+          <p:nvPr/>
+        </p:nvSpPr>
+        <p:spPr>
+          <a:xfrm>
+            <a:off x="5806440" y="3364992"/>
+            <a:ext cx="76200" cy="475488"/>
+          </a:xfrm>
+          <a:prstGeom prst="rect">
+            <a:avLst/>
+          </a:prstGeom>
+          <a:noFill/>
+          <a:ln/>
+        </p:spPr>
+        <p:txBody>
+          <a:bodyPr wrap="square" lIns="0" tIns="0" rIns="0" bIns="0" rtlCol="0" anchor="ctr"/>
+          <a:lstStyle/>
+          <a:p>
+            <a:pPr algn="ctr" indent="0" marL="0">
+              <a:buNone/>
+            </a:pPr>
+            <a:r>
+              <a:rPr lang="en-US" sz="1600" b="1" dirty="0">
+                <a:solidFill>
+                  <a:srgbClr val="0D9488"/>
+                </a:solidFill>
+                <a:latin typeface="Trebuchet MS" pitchFamily="34" charset="0"/>
+                <a:ea typeface="Trebuchet MS" pitchFamily="34" charset="-122"/>
+                <a:cs typeface="Trebuchet MS" pitchFamily="34" charset="-120"/>
+              </a:rPr>
+              <a:t>·</a:t>
+            </a:r>
+            <a:endParaRPr lang="en-US" sz="1600" dirty="0"/>
+          </a:p>
+        </p:txBody>
+      </p:sp>
+      <p:sp>
+        <p:nvSpPr>
+          <p:cNvPr id="37" name="Shape 35"/>
+          <p:cNvSpPr/>
+          <p:nvPr/>
+        </p:nvSpPr>
+        <p:spPr>
+          <a:xfrm>
+            <a:off x="5882640" y="3364992"/>
+            <a:ext cx="1225296" cy="475488"/>
+          </a:xfrm>
+          <a:prstGeom prst="rect">
+            <a:avLst>
+              <a:gd name="adj" fmla="val 9615"/>
+            </a:avLst>
+          </a:prstGeom>
+          <a:solidFill>
+            <a:srgbClr val="FFFFFF"/>
+          </a:solidFill>
+          <a:ln w="12700">
+            <a:solidFill>
+              <a:srgbClr val="0D9488"/>
+            </a:solidFill>
+            <a:prstDash val="solid"/>
+          </a:ln>
+        </p:spPr>
+      </p:sp>
+      <p:sp>
+        <p:nvSpPr>
+          <p:cNvPr id="38" name="Text 36"/>
+          <p:cNvSpPr/>
+          <p:nvPr/>
+        </p:nvSpPr>
+        <p:spPr>
+          <a:xfrm>
+            <a:off x="5882640" y="3364992"/>
+            <a:ext cx="1225296" cy="475488"/>
+          </a:xfrm>
+          <a:prstGeom prst="rect">
+            <a:avLst/>
+          </a:prstGeom>
+          <a:noFill/>
+          <a:ln/>
+        </p:spPr>
+        <p:txBody>
+          <a:bodyPr wrap="square" lIns="0" tIns="0" rIns="0" bIns="0" rtlCol="0" anchor="ctr"/>
+          <a:lstStyle/>
+          <a:p>
+            <a:pPr algn="ctr" indent="0" marL="0">
+              <a:buNone/>
+            </a:pPr>
+            <a:r>
+              <a:rPr lang="en-US" sz="1400" b="1" dirty="0">
+                <a:solidFill>
+                  <a:srgbClr val="0D9488"/>
+                </a:solidFill>
+                <a:latin typeface="Trebuchet MS" pitchFamily="34" charset="0"/>
+                <a:ea typeface="Trebuchet MS" pitchFamily="34" charset="-122"/>
+                <a:cs typeface="Trebuchet MS" pitchFamily="34" charset="-120"/>
+              </a:rPr>
+              <a:t>tion</a:t>
+            </a:r>
+            <a:endParaRPr lang="en-US" sz="1400" dirty="0"/>
+          </a:p>
+        </p:txBody>
+      </p:sp>
+      <p:sp>
+        <p:nvSpPr>
+          <p:cNvPr id="39" name="Text 37"/>
+          <p:cNvSpPr/>
+          <p:nvPr/>
+        </p:nvSpPr>
+        <p:spPr>
+          <a:xfrm>
+            <a:off x="7107936" y="3364992"/>
+            <a:ext cx="76200" cy="475488"/>
+          </a:xfrm>
+          <a:prstGeom prst="rect">
+            <a:avLst/>
+          </a:prstGeom>
+          <a:noFill/>
+          <a:ln/>
+        </p:spPr>
+        <p:txBody>
+          <a:bodyPr wrap="square" lIns="0" tIns="0" rIns="0" bIns="0" rtlCol="0" anchor="ctr"/>
+          <a:lstStyle/>
+          <a:p>
+            <a:pPr algn="ctr" indent="0" marL="0">
+              <a:buNone/>
+            </a:pPr>
+            <a:r>
+              <a:rPr lang="en-US" sz="1600" b="1" dirty="0">
+                <a:solidFill>
+                  <a:srgbClr val="0D9488"/>
+                </a:solidFill>
+                <a:latin typeface="Trebuchet MS" pitchFamily="34" charset="0"/>
+                <a:ea typeface="Trebuchet MS" pitchFamily="34" charset="-122"/>
+                <a:cs typeface="Trebuchet MS" pitchFamily="34" charset="-120"/>
+              </a:rPr>
+              <a:t>·</a:t>
+            </a:r>
+            <a:endParaRPr lang="en-US" sz="1600" dirty="0"/>
+          </a:p>
+        </p:txBody>
+      </p:sp>
+      <p:sp>
+        <p:nvSpPr>
+          <p:cNvPr id="40" name="Shape 38"/>
+          <p:cNvSpPr/>
+          <p:nvPr/>
+        </p:nvSpPr>
+        <p:spPr>
+          <a:xfrm>
+            <a:off x="7184136" y="3364992"/>
+            <a:ext cx="1225296" cy="475488"/>
+          </a:xfrm>
+          <a:prstGeom prst="rect">
+            <a:avLst>
+              <a:gd name="adj" fmla="val 9615"/>
+            </a:avLst>
+          </a:prstGeom>
+          <a:solidFill>
+            <a:srgbClr val="FFFFFF"/>
+          </a:solidFill>
+          <a:ln w="12700">
+            <a:solidFill>
+              <a:srgbClr val="0D9488"/>
+            </a:solidFill>
+            <a:prstDash val="solid"/>
+          </a:ln>
+        </p:spPr>
+      </p:sp>
+      <p:sp>
+        <p:nvSpPr>
+          <p:cNvPr id="41" name="Text 39"/>
+          <p:cNvSpPr/>
+          <p:nvPr/>
+        </p:nvSpPr>
+        <p:spPr>
+          <a:xfrm>
+            <a:off x="7184136" y="3364992"/>
+            <a:ext cx="1225296" cy="475488"/>
+          </a:xfrm>
+          <a:prstGeom prst="rect">
+            <a:avLst/>
+          </a:prstGeom>
+          <a:noFill/>
+          <a:ln/>
+        </p:spPr>
+        <p:txBody>
+          <a:bodyPr wrap="square" lIns="0" tIns="0" rIns="0" bIns="0" rtlCol="0" anchor="ctr"/>
+          <a:lstStyle/>
+          <a:p>
+            <a:pPr algn="ctr" indent="0" marL="0">
+              <a:buNone/>
+            </a:pPr>
+            <a:r>
+              <a:rPr lang="en-US" sz="1400" b="1" dirty="0">
+                <a:solidFill>
+                  <a:srgbClr val="0D9488"/>
+                </a:solidFill>
+                <a:latin typeface="Trebuchet MS" pitchFamily="34" charset="0"/>
+                <a:ea typeface="Trebuchet MS" pitchFamily="34" charset="-122"/>
+                <a:cs typeface="Trebuchet MS" pitchFamily="34" charset="-120"/>
+              </a:rPr>
+              <a:t>al</a:t>
+            </a:r>
+            <a:endParaRPr lang="en-US" sz="1400" dirty="0"/>
+          </a:p>
+        </p:txBody>
+      </p:sp>
+      <p:sp>
+        <p:nvSpPr>
+          <p:cNvPr id="42" name="Shape 40"/>
           <p:cNvSpPr/>
           <p:nvPr/>
         </p:nvSpPr>
@@ -32397,7 +32378,7 @@
       </p:sp>
       <p:sp>
         <p:nvSpPr>
-          <p:cNvPr id="34" name="Text 32"/>
+          <p:cNvPr id="43" name="Text 41"/>
           <p:cNvSpPr/>
           <p:nvPr/>
         </p:nvSpPr>
@@ -32436,7 +32417,7 @@
       </p:sp>
       <p:sp>
         <p:nvSpPr>
-          <p:cNvPr id="35" name="Shape 33"/>
+          <p:cNvPr id="44" name="Shape 42"/>
           <p:cNvSpPr/>
           <p:nvPr/>
         </p:nvSpPr>
@@ -32463,7 +32444,7 @@
       </p:sp>
       <p:sp>
         <p:nvSpPr>
-          <p:cNvPr id="36" name="Text 34"/>
+          <p:cNvPr id="45" name="Text 43"/>
           <p:cNvSpPr/>
           <p:nvPr/>
         </p:nvSpPr>
@@ -32925,7 +32906,7 @@
                 <a:ea typeface="Trebuchet MS" pitchFamily="34" charset="-122"/>
                 <a:cs typeface="Trebuchet MS" pitchFamily="34" charset="-120"/>
               </a:rPr>
-              <a:t>interact</a:t>
+              <a:t>international</a:t>
             </a:r>
             <a:endParaRPr lang="en-US" sz="2800" dirty="0"/>
           </a:p>
@@ -33005,7 +32986,7 @@
         </p:nvSpPr>
         <p:spPr>
           <a:xfrm>
-            <a:off x="2938272" y="2258568"/>
+            <a:off x="2221992" y="2258568"/>
             <a:ext cx="1828800" cy="292608"/>
           </a:xfrm>
           <a:prstGeom prst="rect">
@@ -33039,7 +33020,7 @@
         </p:nvSpPr>
         <p:spPr>
           <a:xfrm>
-            <a:off x="2938272" y="2258568"/>
+            <a:off x="2221992" y="2258568"/>
             <a:ext cx="1828800" cy="292608"/>
           </a:xfrm>
           <a:prstGeom prst="rect">
@@ -33078,7 +33059,7 @@
         </p:nvSpPr>
         <p:spPr>
           <a:xfrm>
-            <a:off x="2938272" y="2569464"/>
+            <a:off x="2221992" y="2569464"/>
             <a:ext cx="1828800" cy="201168"/>
           </a:xfrm>
           <a:prstGeom prst="rect">
@@ -33103,7 +33084,7 @@
                 <a:ea typeface="Calibri" pitchFamily="34" charset="-122"/>
                 <a:cs typeface="Calibri" pitchFamily="34" charset="-120"/>
               </a:rPr>
-              <a:t>between, among</a:t>
+              <a:t>between</a:t>
             </a:r>
             <a:endParaRPr lang="en-US" sz="850" dirty="0"/>
           </a:p>
@@ -33117,7 +33098,7 @@
         </p:nvSpPr>
         <p:spPr>
           <a:xfrm>
-            <a:off x="5803392" y="2258568"/>
+            <a:off x="4370832" y="2258568"/>
             <a:ext cx="1828800" cy="292608"/>
           </a:xfrm>
           <a:prstGeom prst="rect">
@@ -33151,7 +33132,7 @@
         </p:nvSpPr>
         <p:spPr>
           <a:xfrm>
-            <a:off x="5803392" y="2258568"/>
+            <a:off x="4370832" y="2258568"/>
             <a:ext cx="1828800" cy="292608"/>
           </a:xfrm>
           <a:prstGeom prst="rect">
@@ -33176,7 +33157,7 @@
                 <a:ea typeface="Trebuchet MS" pitchFamily="34" charset="-122"/>
                 <a:cs typeface="Trebuchet MS" pitchFamily="34" charset="-120"/>
               </a:rPr>
-              <a:t>act</a:t>
+              <a:t>nation</a:t>
             </a:r>
             <a:endParaRPr lang="en-US" sz="1300" dirty="0"/>
           </a:p>
@@ -33190,7 +33171,7 @@
         </p:nvSpPr>
         <p:spPr>
           <a:xfrm>
-            <a:off x="5803392" y="2569464"/>
+            <a:off x="4370832" y="2569464"/>
             <a:ext cx="1828800" cy="201168"/>
           </a:xfrm>
           <a:prstGeom prst="rect">
@@ -33215,7 +33196,7 @@
                 <a:ea typeface="Calibri" pitchFamily="34" charset="-122"/>
                 <a:cs typeface="Calibri" pitchFamily="34" charset="-120"/>
               </a:rPr>
-              <a:t>to do, to perform</a:t>
+              <a:t>country</a:t>
             </a:r>
             <a:endParaRPr lang="en-US" sz="850" dirty="0"/>
           </a:p>
@@ -33224,6 +33205,118 @@
       <p:sp>
         <p:nvSpPr>
           <p:cNvPr id="22" name="Shape 20"/>
+          <p:cNvSpPr/>
+          <p:nvPr/>
+        </p:nvSpPr>
+        <p:spPr>
+          <a:xfrm>
+            <a:off x="6519672" y="2258568"/>
+            <a:ext cx="1828800" cy="292608"/>
+          </a:xfrm>
+          <a:prstGeom prst="rect">
+            <a:avLst>
+              <a:gd name="adj" fmla="val 25000"/>
+            </a:avLst>
+          </a:prstGeom>
+          <a:solidFill>
+            <a:srgbClr val="FCE7F3"/>
+          </a:solidFill>
+          <a:ln w="19050">
+            <a:solidFill>
+              <a:srgbClr val="DB2777"/>
+            </a:solidFill>
+            <a:prstDash val="solid"/>
+          </a:ln>
+          <a:effectLst>
+            <a:outerShdw sx="100000" sy="100000" kx="0" ky="0" algn="bl" rotWithShape="0" blurRad="101600" dist="38100" dir="8100000">
+              <a:srgbClr val="000000">
+                <a:alpha val="12000"/>
+              </a:srgbClr>
+            </a:outerShdw>
+          </a:effectLst>
+        </p:spPr>
+      </p:sp>
+      <p:sp>
+        <p:nvSpPr>
+          <p:cNvPr id="23" name="Text 21"/>
+          <p:cNvSpPr/>
+          <p:nvPr/>
+        </p:nvSpPr>
+        <p:spPr>
+          <a:xfrm>
+            <a:off x="6519672" y="2258568"/>
+            <a:ext cx="1828800" cy="292608"/>
+          </a:xfrm>
+          <a:prstGeom prst="rect">
+            <a:avLst/>
+          </a:prstGeom>
+          <a:noFill/>
+          <a:ln/>
+        </p:spPr>
+        <p:txBody>
+          <a:bodyPr wrap="square" lIns="0" tIns="0" rIns="0" bIns="0" rtlCol="0" anchor="ctr"/>
+          <a:lstStyle/>
+          <a:p>
+            <a:pPr algn="ctr" indent="0" marL="0">
+              <a:buNone/>
+            </a:pPr>
+            <a:r>
+              <a:rPr lang="en-US" sz="1300" b="1" dirty="0">
+                <a:solidFill>
+                  <a:srgbClr val="9D174D"/>
+                </a:solidFill>
+                <a:latin typeface="Trebuchet MS" pitchFamily="34" charset="0"/>
+                <a:ea typeface="Trebuchet MS" pitchFamily="34" charset="-122"/>
+                <a:cs typeface="Trebuchet MS" pitchFamily="34" charset="-120"/>
+              </a:rPr>
+              <a:t>al</a:t>
+            </a:r>
+            <a:endParaRPr lang="en-US" sz="1300" dirty="0"/>
+          </a:p>
+        </p:txBody>
+      </p:sp>
+      <p:sp>
+        <p:nvSpPr>
+          <p:cNvPr id="24" name="Text 22"/>
+          <p:cNvSpPr/>
+          <p:nvPr/>
+        </p:nvSpPr>
+        <p:spPr>
+          <a:xfrm>
+            <a:off x="6519672" y="2569464"/>
+            <a:ext cx="1828800" cy="201168"/>
+          </a:xfrm>
+          <a:prstGeom prst="rect">
+            <a:avLst/>
+          </a:prstGeom>
+          <a:noFill/>
+          <a:ln/>
+        </p:spPr>
+        <p:txBody>
+          <a:bodyPr wrap="square" lIns="0" tIns="0" rIns="0" bIns="0" rtlCol="0" anchor="t"/>
+          <a:lstStyle/>
+          <a:p>
+            <a:pPr algn="ctr" indent="0" marL="0">
+              <a:buNone/>
+            </a:pPr>
+            <a:r>
+              <a:rPr lang="en-US" sz="850" dirty="0">
+                <a:solidFill>
+                  <a:srgbClr val="475569"/>
+                </a:solidFill>
+                <a:latin typeface="Calibri" pitchFamily="34" charset="0"/>
+                <a:ea typeface="Calibri" pitchFamily="34" charset="-122"/>
+                <a:cs typeface="Calibri" pitchFamily="34" charset="-120"/>
+              </a:rPr>
+              <a:t>relating to</a:t>
+            </a:r>
+            <a:endParaRPr lang="en-US" sz="850" dirty="0"/>
+          </a:p>
+        </p:txBody>
+      </p:sp>
+      <p:sp>
+        <p:nvSpPr>
+          <p:cNvPr id="25" name="Shape 23"/>
           <p:cNvSpPr/>
           <p:nvPr/>
         </p:nvSpPr>
@@ -33250,7 +33343,7 @@
       </p:sp>
       <p:sp>
         <p:nvSpPr>
-          <p:cNvPr id="23" name="Text 21"/>
+          <p:cNvPr id="26" name="Text 24"/>
           <p:cNvSpPr/>
           <p:nvPr/>
         </p:nvSpPr>
@@ -33289,7 +33382,7 @@
       </p:sp>
       <p:sp>
         <p:nvSpPr>
-          <p:cNvPr id="24" name="Shape 22"/>
+          <p:cNvPr id="27" name="Shape 25"/>
           <p:cNvSpPr/>
           <p:nvPr/>
         </p:nvSpPr>
@@ -33316,14 +33409,14 @@
       </p:sp>
       <p:sp>
         <p:nvSpPr>
-          <p:cNvPr id="25" name="Shape 23"/>
-          <p:cNvSpPr/>
-          <p:nvPr/>
-        </p:nvSpPr>
-        <p:spPr>
-          <a:xfrm>
-            <a:off x="2313432" y="3364992"/>
-            <a:ext cx="1645920" cy="475488"/>
+          <p:cNvPr id="28" name="Shape 26"/>
+          <p:cNvSpPr/>
+          <p:nvPr/>
+        </p:nvSpPr>
+        <p:spPr>
+          <a:xfrm>
+            <a:off x="1978152" y="3364992"/>
+            <a:ext cx="1225296" cy="475488"/>
           </a:xfrm>
           <a:prstGeom prst="rect">
             <a:avLst>
@@ -33343,14 +33436,14 @@
       </p:sp>
       <p:sp>
         <p:nvSpPr>
-          <p:cNvPr id="26" name="Text 24"/>
-          <p:cNvSpPr/>
-          <p:nvPr/>
-        </p:nvSpPr>
-        <p:spPr>
-          <a:xfrm>
-            <a:off x="2313432" y="3364992"/>
-            <a:ext cx="1645920" cy="475488"/>
+          <p:cNvPr id="29" name="Text 27"/>
+          <p:cNvSpPr/>
+          <p:nvPr/>
+        </p:nvSpPr>
+        <p:spPr>
+          <a:xfrm>
+            <a:off x="1978152" y="3364992"/>
+            <a:ext cx="1225296" cy="475488"/>
           </a:xfrm>
           <a:prstGeom prst="rect">
             <a:avLst/>
@@ -33382,14 +33475,14 @@
       </p:sp>
       <p:sp>
         <p:nvSpPr>
-          <p:cNvPr id="27" name="Text 25"/>
-          <p:cNvSpPr/>
-          <p:nvPr/>
-        </p:nvSpPr>
-        <p:spPr>
-          <a:xfrm>
-            <a:off x="3959352" y="3364992"/>
-            <a:ext cx="411480" cy="475488"/>
+          <p:cNvPr id="30" name="Text 28"/>
+          <p:cNvSpPr/>
+          <p:nvPr/>
+        </p:nvSpPr>
+        <p:spPr>
+          <a:xfrm>
+            <a:off x="3203448" y="3364992"/>
+            <a:ext cx="76200" cy="475488"/>
           </a:xfrm>
           <a:prstGeom prst="rect">
             <a:avLst/>
@@ -33421,14 +33514,14 @@
       </p:sp>
       <p:sp>
         <p:nvSpPr>
-          <p:cNvPr id="28" name="Shape 26"/>
-          <p:cNvSpPr/>
-          <p:nvPr/>
-        </p:nvSpPr>
-        <p:spPr>
-          <a:xfrm>
-            <a:off x="4370832" y="3364992"/>
-            <a:ext cx="1645920" cy="475488"/>
+          <p:cNvPr id="31" name="Shape 29"/>
+          <p:cNvSpPr/>
+          <p:nvPr/>
+        </p:nvSpPr>
+        <p:spPr>
+          <a:xfrm>
+            <a:off x="3279648" y="3364992"/>
+            <a:ext cx="1225296" cy="475488"/>
           </a:xfrm>
           <a:prstGeom prst="rect">
             <a:avLst>
@@ -33448,14 +33541,14 @@
       </p:sp>
       <p:sp>
         <p:nvSpPr>
-          <p:cNvPr id="29" name="Text 27"/>
-          <p:cNvSpPr/>
-          <p:nvPr/>
-        </p:nvSpPr>
-        <p:spPr>
-          <a:xfrm>
-            <a:off x="4370832" y="3364992"/>
-            <a:ext cx="1645920" cy="475488"/>
+          <p:cNvPr id="32" name="Text 30"/>
+          <p:cNvSpPr/>
+          <p:nvPr/>
+        </p:nvSpPr>
+        <p:spPr>
+          <a:xfrm>
+            <a:off x="3279648" y="3364992"/>
+            <a:ext cx="1225296" cy="475488"/>
           </a:xfrm>
           <a:prstGeom prst="rect">
             <a:avLst/>
@@ -33487,14 +33580,14 @@
       </p:sp>
       <p:sp>
         <p:nvSpPr>
-          <p:cNvPr id="30" name="Text 28"/>
-          <p:cNvSpPr/>
-          <p:nvPr/>
-        </p:nvSpPr>
-        <p:spPr>
-          <a:xfrm>
-            <a:off x="6016752" y="3364992"/>
-            <a:ext cx="411480" cy="475488"/>
+          <p:cNvPr id="33" name="Text 31"/>
+          <p:cNvSpPr/>
+          <p:nvPr/>
+        </p:nvSpPr>
+        <p:spPr>
+          <a:xfrm>
+            <a:off x="4504944" y="3364992"/>
+            <a:ext cx="76200" cy="475488"/>
           </a:xfrm>
           <a:prstGeom prst="rect">
             <a:avLst/>
@@ -33526,14 +33619,14 @@
       </p:sp>
       <p:sp>
         <p:nvSpPr>
-          <p:cNvPr id="31" name="Shape 29"/>
-          <p:cNvSpPr/>
-          <p:nvPr/>
-        </p:nvSpPr>
-        <p:spPr>
-          <a:xfrm>
-            <a:off x="6428232" y="3364992"/>
-            <a:ext cx="1645920" cy="475488"/>
+          <p:cNvPr id="34" name="Shape 32"/>
+          <p:cNvSpPr/>
+          <p:nvPr/>
+        </p:nvSpPr>
+        <p:spPr>
+          <a:xfrm>
+            <a:off x="4581144" y="3364992"/>
+            <a:ext cx="1225296" cy="475488"/>
           </a:xfrm>
           <a:prstGeom prst="rect">
             <a:avLst>
@@ -33553,14 +33646,14 @@
       </p:sp>
       <p:sp>
         <p:nvSpPr>
-          <p:cNvPr id="32" name="Text 30"/>
-          <p:cNvSpPr/>
-          <p:nvPr/>
-        </p:nvSpPr>
-        <p:spPr>
-          <a:xfrm>
-            <a:off x="6428232" y="3364992"/>
-            <a:ext cx="1645920" cy="475488"/>
+          <p:cNvPr id="35" name="Text 33"/>
+          <p:cNvSpPr/>
+          <p:nvPr/>
+        </p:nvSpPr>
+        <p:spPr>
+          <a:xfrm>
+            <a:off x="4581144" y="3364992"/>
+            <a:ext cx="1225296" cy="475488"/>
           </a:xfrm>
           <a:prstGeom prst="rect">
             <a:avLst/>
@@ -33584,7 +33677,7 @@
                 <a:ea typeface="Trebuchet MS" pitchFamily="34" charset="-122"/>
                 <a:cs typeface="Trebuchet MS" pitchFamily="34" charset="-120"/>
               </a:rPr>
-              <a:t>act</a:t>
+              <a:t>na</a:t>
             </a:r>
             <a:endParaRPr lang="en-US" sz="1400" dirty="0"/>
           </a:p>
@@ -33592,7 +33685,217 @@
       </p:sp>
       <p:sp>
         <p:nvSpPr>
-          <p:cNvPr id="33" name="Shape 31"/>
+          <p:cNvPr id="36" name="Text 34"/>
+          <p:cNvSpPr/>
+          <p:nvPr/>
+        </p:nvSpPr>
+        <p:spPr>
+          <a:xfrm>
+            <a:off x="5806440" y="3364992"/>
+            <a:ext cx="76200" cy="475488"/>
+          </a:xfrm>
+          <a:prstGeom prst="rect">
+            <a:avLst/>
+          </a:prstGeom>
+          <a:noFill/>
+          <a:ln/>
+        </p:spPr>
+        <p:txBody>
+          <a:bodyPr wrap="square" lIns="0" tIns="0" rIns="0" bIns="0" rtlCol="0" anchor="ctr"/>
+          <a:lstStyle/>
+          <a:p>
+            <a:pPr algn="ctr" indent="0" marL="0">
+              <a:buNone/>
+            </a:pPr>
+            <a:r>
+              <a:rPr lang="en-US" sz="1600" b="1" dirty="0">
+                <a:solidFill>
+                  <a:srgbClr val="0D9488"/>
+                </a:solidFill>
+                <a:latin typeface="Trebuchet MS" pitchFamily="34" charset="0"/>
+                <a:ea typeface="Trebuchet MS" pitchFamily="34" charset="-122"/>
+                <a:cs typeface="Trebuchet MS" pitchFamily="34" charset="-120"/>
+              </a:rPr>
+              <a:t>·</a:t>
+            </a:r>
+            <a:endParaRPr lang="en-US" sz="1600" dirty="0"/>
+          </a:p>
+        </p:txBody>
+      </p:sp>
+      <p:sp>
+        <p:nvSpPr>
+          <p:cNvPr id="37" name="Shape 35"/>
+          <p:cNvSpPr/>
+          <p:nvPr/>
+        </p:nvSpPr>
+        <p:spPr>
+          <a:xfrm>
+            <a:off x="5882640" y="3364992"/>
+            <a:ext cx="1225296" cy="475488"/>
+          </a:xfrm>
+          <a:prstGeom prst="rect">
+            <a:avLst>
+              <a:gd name="adj" fmla="val 9615"/>
+            </a:avLst>
+          </a:prstGeom>
+          <a:solidFill>
+            <a:srgbClr val="FFFFFF"/>
+          </a:solidFill>
+          <a:ln w="12700">
+            <a:solidFill>
+              <a:srgbClr val="0D9488"/>
+            </a:solidFill>
+            <a:prstDash val="solid"/>
+          </a:ln>
+        </p:spPr>
+      </p:sp>
+      <p:sp>
+        <p:nvSpPr>
+          <p:cNvPr id="38" name="Text 36"/>
+          <p:cNvSpPr/>
+          <p:nvPr/>
+        </p:nvSpPr>
+        <p:spPr>
+          <a:xfrm>
+            <a:off x="5882640" y="3364992"/>
+            <a:ext cx="1225296" cy="475488"/>
+          </a:xfrm>
+          <a:prstGeom prst="rect">
+            <a:avLst/>
+          </a:prstGeom>
+          <a:noFill/>
+          <a:ln/>
+        </p:spPr>
+        <p:txBody>
+          <a:bodyPr wrap="square" lIns="0" tIns="0" rIns="0" bIns="0" rtlCol="0" anchor="ctr"/>
+          <a:lstStyle/>
+          <a:p>
+            <a:pPr algn="ctr" indent="0" marL="0">
+              <a:buNone/>
+            </a:pPr>
+            <a:r>
+              <a:rPr lang="en-US" sz="1400" b="1" dirty="0">
+                <a:solidFill>
+                  <a:srgbClr val="0D9488"/>
+                </a:solidFill>
+                <a:latin typeface="Trebuchet MS" pitchFamily="34" charset="0"/>
+                <a:ea typeface="Trebuchet MS" pitchFamily="34" charset="-122"/>
+                <a:cs typeface="Trebuchet MS" pitchFamily="34" charset="-120"/>
+              </a:rPr>
+              <a:t>tion</a:t>
+            </a:r>
+            <a:endParaRPr lang="en-US" sz="1400" dirty="0"/>
+          </a:p>
+        </p:txBody>
+      </p:sp>
+      <p:sp>
+        <p:nvSpPr>
+          <p:cNvPr id="39" name="Text 37"/>
+          <p:cNvSpPr/>
+          <p:nvPr/>
+        </p:nvSpPr>
+        <p:spPr>
+          <a:xfrm>
+            <a:off x="7107936" y="3364992"/>
+            <a:ext cx="76200" cy="475488"/>
+          </a:xfrm>
+          <a:prstGeom prst="rect">
+            <a:avLst/>
+          </a:prstGeom>
+          <a:noFill/>
+          <a:ln/>
+        </p:spPr>
+        <p:txBody>
+          <a:bodyPr wrap="square" lIns="0" tIns="0" rIns="0" bIns="0" rtlCol="0" anchor="ctr"/>
+          <a:lstStyle/>
+          <a:p>
+            <a:pPr algn="ctr" indent="0" marL="0">
+              <a:buNone/>
+            </a:pPr>
+            <a:r>
+              <a:rPr lang="en-US" sz="1600" b="1" dirty="0">
+                <a:solidFill>
+                  <a:srgbClr val="0D9488"/>
+                </a:solidFill>
+                <a:latin typeface="Trebuchet MS" pitchFamily="34" charset="0"/>
+                <a:ea typeface="Trebuchet MS" pitchFamily="34" charset="-122"/>
+                <a:cs typeface="Trebuchet MS" pitchFamily="34" charset="-120"/>
+              </a:rPr>
+              <a:t>·</a:t>
+            </a:r>
+            <a:endParaRPr lang="en-US" sz="1600" dirty="0"/>
+          </a:p>
+        </p:txBody>
+      </p:sp>
+      <p:sp>
+        <p:nvSpPr>
+          <p:cNvPr id="40" name="Shape 38"/>
+          <p:cNvSpPr/>
+          <p:nvPr/>
+        </p:nvSpPr>
+        <p:spPr>
+          <a:xfrm>
+            <a:off x="7184136" y="3364992"/>
+            <a:ext cx="1225296" cy="475488"/>
+          </a:xfrm>
+          <a:prstGeom prst="rect">
+            <a:avLst>
+              <a:gd name="adj" fmla="val 9615"/>
+            </a:avLst>
+          </a:prstGeom>
+          <a:solidFill>
+            <a:srgbClr val="FFFFFF"/>
+          </a:solidFill>
+          <a:ln w="12700">
+            <a:solidFill>
+              <a:srgbClr val="0D9488"/>
+            </a:solidFill>
+            <a:prstDash val="solid"/>
+          </a:ln>
+        </p:spPr>
+      </p:sp>
+      <p:sp>
+        <p:nvSpPr>
+          <p:cNvPr id="41" name="Text 39"/>
+          <p:cNvSpPr/>
+          <p:nvPr/>
+        </p:nvSpPr>
+        <p:spPr>
+          <a:xfrm>
+            <a:off x="7184136" y="3364992"/>
+            <a:ext cx="1225296" cy="475488"/>
+          </a:xfrm>
+          <a:prstGeom prst="rect">
+            <a:avLst/>
+          </a:prstGeom>
+          <a:noFill/>
+          <a:ln/>
+        </p:spPr>
+        <p:txBody>
+          <a:bodyPr wrap="square" lIns="0" tIns="0" rIns="0" bIns="0" rtlCol="0" anchor="ctr"/>
+          <a:lstStyle/>
+          <a:p>
+            <a:pPr algn="ctr" indent="0" marL="0">
+              <a:buNone/>
+            </a:pPr>
+            <a:r>
+              <a:rPr lang="en-US" sz="1400" b="1" dirty="0">
+                <a:solidFill>
+                  <a:srgbClr val="0D9488"/>
+                </a:solidFill>
+                <a:latin typeface="Trebuchet MS" pitchFamily="34" charset="0"/>
+                <a:ea typeface="Trebuchet MS" pitchFamily="34" charset="-122"/>
+                <a:cs typeface="Trebuchet MS" pitchFamily="34" charset="-120"/>
+              </a:rPr>
+              <a:t>al</a:t>
+            </a:r>
+            <a:endParaRPr lang="en-US" sz="1400" dirty="0"/>
+          </a:p>
+        </p:txBody>
+      </p:sp>
+      <p:sp>
+        <p:nvSpPr>
+          <p:cNvPr id="42" name="Shape 40"/>
           <p:cNvSpPr/>
           <p:nvPr/>
         </p:nvSpPr>
@@ -33619,7 +33922,7 @@
       </p:sp>
       <p:sp>
         <p:nvSpPr>
-          <p:cNvPr id="34" name="Text 32"/>
+          <p:cNvPr id="43" name="Text 41"/>
           <p:cNvSpPr/>
           <p:nvPr/>
         </p:nvSpPr>
@@ -33658,18 +33961,18 @@
       </p:sp>
       <p:sp>
         <p:nvSpPr>
-          <p:cNvPr id="35" name="Shape 33"/>
+          <p:cNvPr id="44" name="Shape 42"/>
           <p:cNvSpPr/>
           <p:nvPr/>
         </p:nvSpPr>
         <p:spPr>
           <a:xfrm>
             <a:off x="1874520" y="4096512"/>
-            <a:ext cx="6903720" cy="658368"/>
+            <a:ext cx="6903720" cy="804672"/>
           </a:xfrm>
           <a:prstGeom prst="rect">
             <a:avLst>
-              <a:gd name="adj" fmla="val 8333"/>
+              <a:gd name="adj" fmla="val 6818"/>
             </a:avLst>
           </a:prstGeom>
           <a:solidFill>
@@ -33685,18 +33988,18 @@
       </p:sp>
       <p:sp>
         <p:nvSpPr>
-          <p:cNvPr id="36" name="Shape 34"/>
-          <p:cNvSpPr/>
-          <p:nvPr/>
-        </p:nvSpPr>
-        <p:spPr>
-          <a:xfrm>
-            <a:off x="2124837" y="4169664"/>
-            <a:ext cx="685800" cy="475488"/>
+          <p:cNvPr id="45" name="Shape 43"/>
+          <p:cNvSpPr/>
+          <p:nvPr/>
+        </p:nvSpPr>
+        <p:spPr>
+          <a:xfrm>
+            <a:off x="1952244" y="4169664"/>
+            <a:ext cx="543652" cy="384048"/>
           </a:xfrm>
           <a:prstGeom prst="rect">
             <a:avLst>
-              <a:gd name="adj" fmla="val 7692"/>
+              <a:gd name="adj" fmla="val 9524"/>
             </a:avLst>
           </a:prstGeom>
           <a:solidFill>
@@ -33712,14 +34015,14 @@
       </p:sp>
       <p:sp>
         <p:nvSpPr>
-          <p:cNvPr id="37" name="Text 35"/>
-          <p:cNvSpPr/>
-          <p:nvPr/>
-        </p:nvSpPr>
-        <p:spPr>
-          <a:xfrm>
-            <a:off x="2124837" y="4169664"/>
-            <a:ext cx="685800" cy="475488"/>
+          <p:cNvPr id="46" name="Text 44"/>
+          <p:cNvSpPr/>
+          <p:nvPr/>
+        </p:nvSpPr>
+        <p:spPr>
+          <a:xfrm>
+            <a:off x="1952244" y="4169664"/>
+            <a:ext cx="543652" cy="384048"/>
           </a:xfrm>
           <a:prstGeom prst="rect">
             <a:avLst/>
@@ -33751,18 +34054,18 @@
       </p:sp>
       <p:sp>
         <p:nvSpPr>
-          <p:cNvPr id="38" name="Shape 36"/>
-          <p:cNvSpPr/>
-          <p:nvPr/>
-        </p:nvSpPr>
-        <p:spPr>
-          <a:xfrm>
-            <a:off x="3033522" y="4169664"/>
-            <a:ext cx="685800" cy="475488"/>
+          <p:cNvPr id="47" name="Shape 45"/>
+          <p:cNvSpPr/>
+          <p:nvPr/>
+        </p:nvSpPr>
+        <p:spPr>
+          <a:xfrm>
+            <a:off x="2546188" y="4169664"/>
+            <a:ext cx="543652" cy="384048"/>
           </a:xfrm>
           <a:prstGeom prst="rect">
             <a:avLst>
-              <a:gd name="adj" fmla="val 7692"/>
+              <a:gd name="adj" fmla="val 9524"/>
             </a:avLst>
           </a:prstGeom>
           <a:solidFill>
@@ -33778,14 +34081,14 @@
       </p:sp>
       <p:sp>
         <p:nvSpPr>
-          <p:cNvPr id="39" name="Text 37"/>
-          <p:cNvSpPr/>
-          <p:nvPr/>
-        </p:nvSpPr>
-        <p:spPr>
-          <a:xfrm>
-            <a:off x="3033522" y="4169664"/>
-            <a:ext cx="685800" cy="475488"/>
+          <p:cNvPr id="48" name="Text 46"/>
+          <p:cNvSpPr/>
+          <p:nvPr/>
+        </p:nvSpPr>
+        <p:spPr>
+          <a:xfrm>
+            <a:off x="2546188" y="4169664"/>
+            <a:ext cx="543652" cy="384048"/>
           </a:xfrm>
           <a:prstGeom prst="rect">
             <a:avLst/>
@@ -33817,18 +34120,18 @@
       </p:sp>
       <p:sp>
         <p:nvSpPr>
-          <p:cNvPr id="40" name="Shape 38"/>
-          <p:cNvSpPr/>
-          <p:nvPr/>
-        </p:nvSpPr>
-        <p:spPr>
-          <a:xfrm>
-            <a:off x="3942207" y="4169664"/>
-            <a:ext cx="685800" cy="475488"/>
+          <p:cNvPr id="49" name="Shape 47"/>
+          <p:cNvSpPr/>
+          <p:nvPr/>
+        </p:nvSpPr>
+        <p:spPr>
+          <a:xfrm>
+            <a:off x="3140133" y="4169664"/>
+            <a:ext cx="543652" cy="384048"/>
           </a:xfrm>
           <a:prstGeom prst="rect">
             <a:avLst>
-              <a:gd name="adj" fmla="val 7692"/>
+              <a:gd name="adj" fmla="val 9524"/>
             </a:avLst>
           </a:prstGeom>
           <a:solidFill>
@@ -33844,14 +34147,14 @@
       </p:sp>
       <p:sp>
         <p:nvSpPr>
-          <p:cNvPr id="41" name="Text 39"/>
-          <p:cNvSpPr/>
-          <p:nvPr/>
-        </p:nvSpPr>
-        <p:spPr>
-          <a:xfrm>
-            <a:off x="3942207" y="4169664"/>
-            <a:ext cx="685800" cy="475488"/>
+          <p:cNvPr id="50" name="Text 48"/>
+          <p:cNvSpPr/>
+          <p:nvPr/>
+        </p:nvSpPr>
+        <p:spPr>
+          <a:xfrm>
+            <a:off x="3140133" y="4169664"/>
+            <a:ext cx="543652" cy="384048"/>
           </a:xfrm>
           <a:prstGeom prst="rect">
             <a:avLst/>
@@ -33883,18 +34186,18 @@
       </p:sp>
       <p:sp>
         <p:nvSpPr>
-          <p:cNvPr id="42" name="Shape 40"/>
-          <p:cNvSpPr/>
-          <p:nvPr/>
-        </p:nvSpPr>
-        <p:spPr>
-          <a:xfrm>
-            <a:off x="4850892" y="4169664"/>
-            <a:ext cx="685800" cy="475488"/>
+          <p:cNvPr id="51" name="Shape 49"/>
+          <p:cNvSpPr/>
+          <p:nvPr/>
+        </p:nvSpPr>
+        <p:spPr>
+          <a:xfrm>
+            <a:off x="3734077" y="4169664"/>
+            <a:ext cx="543652" cy="384048"/>
           </a:xfrm>
           <a:prstGeom prst="rect">
             <a:avLst>
-              <a:gd name="adj" fmla="val 7692"/>
+              <a:gd name="adj" fmla="val 9524"/>
             </a:avLst>
           </a:prstGeom>
           <a:solidFill>
@@ -33910,14 +34213,14 @@
       </p:sp>
       <p:sp>
         <p:nvSpPr>
-          <p:cNvPr id="43" name="Text 41"/>
-          <p:cNvSpPr/>
-          <p:nvPr/>
-        </p:nvSpPr>
-        <p:spPr>
-          <a:xfrm>
-            <a:off x="4850892" y="4169664"/>
-            <a:ext cx="685800" cy="475488"/>
+          <p:cNvPr id="52" name="Text 50"/>
+          <p:cNvSpPr/>
+          <p:nvPr/>
+        </p:nvSpPr>
+        <p:spPr>
+          <a:xfrm>
+            <a:off x="3734077" y="4169664"/>
+            <a:ext cx="543652" cy="384048"/>
           </a:xfrm>
           <a:prstGeom prst="rect">
             <a:avLst/>
@@ -33949,18 +34252,18 @@
       </p:sp>
       <p:sp>
         <p:nvSpPr>
-          <p:cNvPr id="44" name="Shape 42"/>
-          <p:cNvSpPr/>
-          <p:nvPr/>
-        </p:nvSpPr>
-        <p:spPr>
-          <a:xfrm>
-            <a:off x="5759577" y="4169664"/>
-            <a:ext cx="685800" cy="475488"/>
+          <p:cNvPr id="53" name="Shape 51"/>
+          <p:cNvSpPr/>
+          <p:nvPr/>
+        </p:nvSpPr>
+        <p:spPr>
+          <a:xfrm>
+            <a:off x="4328021" y="4169664"/>
+            <a:ext cx="543652" cy="384048"/>
           </a:xfrm>
           <a:prstGeom prst="rect">
             <a:avLst>
-              <a:gd name="adj" fmla="val 7692"/>
+              <a:gd name="adj" fmla="val 9524"/>
             </a:avLst>
           </a:prstGeom>
           <a:solidFill>
@@ -33976,14 +34279,14 @@
       </p:sp>
       <p:sp>
         <p:nvSpPr>
-          <p:cNvPr id="45" name="Text 43"/>
-          <p:cNvSpPr/>
-          <p:nvPr/>
-        </p:nvSpPr>
-        <p:spPr>
-          <a:xfrm>
-            <a:off x="5759577" y="4169664"/>
-            <a:ext cx="685800" cy="475488"/>
+          <p:cNvPr id="54" name="Text 52"/>
+          <p:cNvSpPr/>
+          <p:nvPr/>
+        </p:nvSpPr>
+        <p:spPr>
+          <a:xfrm>
+            <a:off x="4328021" y="4169664"/>
+            <a:ext cx="543652" cy="384048"/>
           </a:xfrm>
           <a:prstGeom prst="rect">
             <a:avLst/>
@@ -34007,7 +34310,7 @@
                 <a:ea typeface="Trebuchet MS" pitchFamily="34" charset="-122"/>
                 <a:cs typeface="Trebuchet MS" pitchFamily="34" charset="-120"/>
               </a:rPr>
-              <a:t>a</a:t>
+              <a:t>n</a:t>
             </a:r>
             <a:endParaRPr lang="en-US" sz="900" dirty="0"/>
           </a:p>
@@ -34015,18 +34318,18 @@
       </p:sp>
       <p:sp>
         <p:nvSpPr>
-          <p:cNvPr id="46" name="Shape 44"/>
-          <p:cNvSpPr/>
-          <p:nvPr/>
-        </p:nvSpPr>
-        <p:spPr>
-          <a:xfrm>
-            <a:off x="6668262" y="4169664"/>
-            <a:ext cx="685800" cy="475488"/>
+          <p:cNvPr id="55" name="Shape 53"/>
+          <p:cNvSpPr/>
+          <p:nvPr/>
+        </p:nvSpPr>
+        <p:spPr>
+          <a:xfrm>
+            <a:off x="4921966" y="4169664"/>
+            <a:ext cx="543652" cy="384048"/>
           </a:xfrm>
           <a:prstGeom prst="rect">
             <a:avLst>
-              <a:gd name="adj" fmla="val 7692"/>
+              <a:gd name="adj" fmla="val 9524"/>
             </a:avLst>
           </a:prstGeom>
           <a:solidFill>
@@ -34042,14 +34345,14 @@
       </p:sp>
       <p:sp>
         <p:nvSpPr>
-          <p:cNvPr id="47" name="Text 45"/>
-          <p:cNvSpPr/>
-          <p:nvPr/>
-        </p:nvSpPr>
-        <p:spPr>
-          <a:xfrm>
-            <a:off x="6668262" y="4169664"/>
-            <a:ext cx="685800" cy="475488"/>
+          <p:cNvPr id="56" name="Text 54"/>
+          <p:cNvSpPr/>
+          <p:nvPr/>
+        </p:nvSpPr>
+        <p:spPr>
+          <a:xfrm>
+            <a:off x="4921966" y="4169664"/>
+            <a:ext cx="543652" cy="384048"/>
           </a:xfrm>
           <a:prstGeom prst="rect">
             <a:avLst/>
@@ -34073,7 +34376,7 @@
                 <a:ea typeface="Trebuchet MS" pitchFamily="34" charset="-122"/>
                 <a:cs typeface="Trebuchet MS" pitchFamily="34" charset="-120"/>
               </a:rPr>
-              <a:t>c</a:t>
+              <a:t>a</a:t>
             </a:r>
             <a:endParaRPr lang="en-US" sz="900" dirty="0"/>
           </a:p>
@@ -34081,18 +34384,18 @@
       </p:sp>
       <p:sp>
         <p:nvSpPr>
-          <p:cNvPr id="48" name="Shape 46"/>
-          <p:cNvSpPr/>
-          <p:nvPr/>
-        </p:nvSpPr>
-        <p:spPr>
-          <a:xfrm>
-            <a:off x="7576947" y="4169664"/>
-            <a:ext cx="685800" cy="475488"/>
+          <p:cNvPr id="57" name="Shape 55"/>
+          <p:cNvSpPr/>
+          <p:nvPr/>
+        </p:nvSpPr>
+        <p:spPr>
+          <a:xfrm>
+            <a:off x="5515910" y="4169664"/>
+            <a:ext cx="543652" cy="384048"/>
           </a:xfrm>
           <a:prstGeom prst="rect">
             <a:avLst>
-              <a:gd name="adj" fmla="val 7692"/>
+              <a:gd name="adj" fmla="val 9524"/>
             </a:avLst>
           </a:prstGeom>
           <a:solidFill>
@@ -34108,14 +34411,14 @@
       </p:sp>
       <p:sp>
         <p:nvSpPr>
-          <p:cNvPr id="49" name="Text 47"/>
-          <p:cNvSpPr/>
-          <p:nvPr/>
-        </p:nvSpPr>
-        <p:spPr>
-          <a:xfrm>
-            <a:off x="7576947" y="4169664"/>
-            <a:ext cx="685800" cy="475488"/>
+          <p:cNvPr id="58" name="Text 56"/>
+          <p:cNvSpPr/>
+          <p:nvPr/>
+        </p:nvSpPr>
+        <p:spPr>
+          <a:xfrm>
+            <a:off x="5515910" y="4169664"/>
+            <a:ext cx="543652" cy="384048"/>
           </a:xfrm>
           <a:prstGeom prst="rect">
             <a:avLst/>
@@ -34139,7 +34442,310 @@
                 <a:ea typeface="Trebuchet MS" pitchFamily="34" charset="-122"/>
                 <a:cs typeface="Trebuchet MS" pitchFamily="34" charset="-120"/>
               </a:rPr>
-              <a:t>t</a:t>
+              <a:t>ti</a:t>
+            </a:r>
+            <a:endParaRPr lang="en-US" sz="900" dirty="0"/>
+          </a:p>
+        </p:txBody>
+      </p:sp>
+      <p:sp>
+        <p:nvSpPr>
+          <p:cNvPr id="59" name="Text 57"/>
+          <p:cNvSpPr/>
+          <p:nvPr/>
+        </p:nvSpPr>
+        <p:spPr>
+          <a:xfrm>
+            <a:off x="5515910" y="4572000"/>
+            <a:ext cx="543652" cy="219456"/>
+          </a:xfrm>
+          <a:prstGeom prst="rect">
+            <a:avLst/>
+          </a:prstGeom>
+          <a:noFill/>
+          <a:ln/>
+        </p:spPr>
+        <p:txBody>
+          <a:bodyPr wrap="square" lIns="0" tIns="0" rIns="0" bIns="0" rtlCol="0" anchor="t"/>
+          <a:lstStyle/>
+          <a:p>
+            <a:pPr algn="ctr" indent="0" marL="0">
+              <a:buNone/>
+            </a:pPr>
+            <a:r>
+              <a:rPr lang="en-US" sz="750" i="1" dirty="0">
+                <a:solidFill>
+                  <a:srgbClr val="94A3B8"/>
+                </a:solidFill>
+                <a:latin typeface="Calibri" pitchFamily="34" charset="0"/>
+                <a:ea typeface="Calibri" pitchFamily="34" charset="-122"/>
+                <a:cs typeface="Calibri" pitchFamily="34" charset="-120"/>
+              </a:rPr>
+              <a:t>/sh/</a:t>
+            </a:r>
+            <a:endParaRPr lang="en-US" sz="750" dirty="0"/>
+          </a:p>
+        </p:txBody>
+      </p:sp>
+      <p:sp>
+        <p:nvSpPr>
+          <p:cNvPr id="60" name="Shape 58"/>
+          <p:cNvSpPr/>
+          <p:nvPr/>
+        </p:nvSpPr>
+        <p:spPr>
+          <a:xfrm>
+            <a:off x="6109855" y="4169664"/>
+            <a:ext cx="543652" cy="384048"/>
+          </a:xfrm>
+          <a:prstGeom prst="rect">
+            <a:avLst>
+              <a:gd name="adj" fmla="val 9524"/>
+            </a:avLst>
+          </a:prstGeom>
+          <a:solidFill>
+            <a:srgbClr val="FFFFFF"/>
+          </a:solidFill>
+          <a:ln w="12700">
+            <a:solidFill>
+              <a:srgbClr val="DB2777"/>
+            </a:solidFill>
+            <a:prstDash val="solid"/>
+          </a:ln>
+        </p:spPr>
+      </p:sp>
+      <p:sp>
+        <p:nvSpPr>
+          <p:cNvPr id="61" name="Text 59"/>
+          <p:cNvSpPr/>
+          <p:nvPr/>
+        </p:nvSpPr>
+        <p:spPr>
+          <a:xfrm>
+            <a:off x="6109855" y="4169664"/>
+            <a:ext cx="543652" cy="384048"/>
+          </a:xfrm>
+          <a:prstGeom prst="rect">
+            <a:avLst/>
+          </a:prstGeom>
+          <a:noFill/>
+          <a:ln/>
+        </p:spPr>
+        <p:txBody>
+          <a:bodyPr wrap="square" lIns="0" tIns="0" rIns="0" bIns="0" rtlCol="0" anchor="ctr"/>
+          <a:lstStyle/>
+          <a:p>
+            <a:pPr algn="ctr" indent="0" marL="0">
+              <a:buNone/>
+            </a:pPr>
+            <a:r>
+              <a:rPr lang="en-US" sz="900" b="1" dirty="0">
+                <a:solidFill>
+                  <a:srgbClr val="9D174D"/>
+                </a:solidFill>
+                <a:latin typeface="Trebuchet MS" pitchFamily="34" charset="0"/>
+                <a:ea typeface="Trebuchet MS" pitchFamily="34" charset="-122"/>
+                <a:cs typeface="Trebuchet MS" pitchFamily="34" charset="-120"/>
+              </a:rPr>
+              <a:t>o</a:t>
+            </a:r>
+            <a:endParaRPr lang="en-US" sz="900" dirty="0"/>
+          </a:p>
+        </p:txBody>
+      </p:sp>
+      <p:sp>
+        <p:nvSpPr>
+          <p:cNvPr id="62" name="Shape 60"/>
+          <p:cNvSpPr/>
+          <p:nvPr/>
+        </p:nvSpPr>
+        <p:spPr>
+          <a:xfrm>
+            <a:off x="6703799" y="4169664"/>
+            <a:ext cx="543652" cy="384048"/>
+          </a:xfrm>
+          <a:prstGeom prst="rect">
+            <a:avLst>
+              <a:gd name="adj" fmla="val 9524"/>
+            </a:avLst>
+          </a:prstGeom>
+          <a:solidFill>
+            <a:srgbClr val="FFFFFF"/>
+          </a:solidFill>
+          <a:ln w="12700">
+            <a:solidFill>
+              <a:srgbClr val="DB2777"/>
+            </a:solidFill>
+            <a:prstDash val="solid"/>
+          </a:ln>
+        </p:spPr>
+      </p:sp>
+      <p:sp>
+        <p:nvSpPr>
+          <p:cNvPr id="63" name="Text 61"/>
+          <p:cNvSpPr/>
+          <p:nvPr/>
+        </p:nvSpPr>
+        <p:spPr>
+          <a:xfrm>
+            <a:off x="6703799" y="4169664"/>
+            <a:ext cx="543652" cy="384048"/>
+          </a:xfrm>
+          <a:prstGeom prst="rect">
+            <a:avLst/>
+          </a:prstGeom>
+          <a:noFill/>
+          <a:ln/>
+        </p:spPr>
+        <p:txBody>
+          <a:bodyPr wrap="square" lIns="0" tIns="0" rIns="0" bIns="0" rtlCol="0" anchor="ctr"/>
+          <a:lstStyle/>
+          <a:p>
+            <a:pPr algn="ctr" indent="0" marL="0">
+              <a:buNone/>
+            </a:pPr>
+            <a:r>
+              <a:rPr lang="en-US" sz="900" b="1" dirty="0">
+                <a:solidFill>
+                  <a:srgbClr val="9D174D"/>
+                </a:solidFill>
+                <a:latin typeface="Trebuchet MS" pitchFamily="34" charset="0"/>
+                <a:ea typeface="Trebuchet MS" pitchFamily="34" charset="-122"/>
+                <a:cs typeface="Trebuchet MS" pitchFamily="34" charset="-120"/>
+              </a:rPr>
+              <a:t>n</a:t>
+            </a:r>
+            <a:endParaRPr lang="en-US" sz="900" dirty="0"/>
+          </a:p>
+        </p:txBody>
+      </p:sp>
+      <p:sp>
+        <p:nvSpPr>
+          <p:cNvPr id="64" name="Shape 62"/>
+          <p:cNvSpPr/>
+          <p:nvPr/>
+        </p:nvSpPr>
+        <p:spPr>
+          <a:xfrm>
+            <a:off x="7297743" y="4169664"/>
+            <a:ext cx="543652" cy="384048"/>
+          </a:xfrm>
+          <a:prstGeom prst="rect">
+            <a:avLst>
+              <a:gd name="adj" fmla="val 9524"/>
+            </a:avLst>
+          </a:prstGeom>
+          <a:solidFill>
+            <a:srgbClr val="FFFFFF"/>
+          </a:solidFill>
+          <a:ln w="12700">
+            <a:solidFill>
+              <a:srgbClr val="DB2777"/>
+            </a:solidFill>
+            <a:prstDash val="solid"/>
+          </a:ln>
+        </p:spPr>
+      </p:sp>
+      <p:sp>
+        <p:nvSpPr>
+          <p:cNvPr id="65" name="Text 63"/>
+          <p:cNvSpPr/>
+          <p:nvPr/>
+        </p:nvSpPr>
+        <p:spPr>
+          <a:xfrm>
+            <a:off x="7297743" y="4169664"/>
+            <a:ext cx="543652" cy="384048"/>
+          </a:xfrm>
+          <a:prstGeom prst="rect">
+            <a:avLst/>
+          </a:prstGeom>
+          <a:noFill/>
+          <a:ln/>
+        </p:spPr>
+        <p:txBody>
+          <a:bodyPr wrap="square" lIns="0" tIns="0" rIns="0" bIns="0" rtlCol="0" anchor="ctr"/>
+          <a:lstStyle/>
+          <a:p>
+            <a:pPr algn="ctr" indent="0" marL="0">
+              <a:buNone/>
+            </a:pPr>
+            <a:r>
+              <a:rPr lang="en-US" sz="900" b="1" dirty="0">
+                <a:solidFill>
+                  <a:srgbClr val="9D174D"/>
+                </a:solidFill>
+                <a:latin typeface="Trebuchet MS" pitchFamily="34" charset="0"/>
+                <a:ea typeface="Trebuchet MS" pitchFamily="34" charset="-122"/>
+                <a:cs typeface="Trebuchet MS" pitchFamily="34" charset="-120"/>
+              </a:rPr>
+              <a:t>a</a:t>
+            </a:r>
+            <a:endParaRPr lang="en-US" sz="900" dirty="0"/>
+          </a:p>
+        </p:txBody>
+      </p:sp>
+      <p:sp>
+        <p:nvSpPr>
+          <p:cNvPr id="66" name="Shape 64"/>
+          <p:cNvSpPr/>
+          <p:nvPr/>
+        </p:nvSpPr>
+        <p:spPr>
+          <a:xfrm>
+            <a:off x="7891688" y="4169664"/>
+            <a:ext cx="543652" cy="384048"/>
+          </a:xfrm>
+          <a:prstGeom prst="rect">
+            <a:avLst>
+              <a:gd name="adj" fmla="val 9524"/>
+            </a:avLst>
+          </a:prstGeom>
+          <a:solidFill>
+            <a:srgbClr val="FFFFFF"/>
+          </a:solidFill>
+          <a:ln w="12700">
+            <a:solidFill>
+              <a:srgbClr val="DB2777"/>
+            </a:solidFill>
+            <a:prstDash val="solid"/>
+          </a:ln>
+        </p:spPr>
+      </p:sp>
+      <p:sp>
+        <p:nvSpPr>
+          <p:cNvPr id="67" name="Text 65"/>
+          <p:cNvSpPr/>
+          <p:nvPr/>
+        </p:nvSpPr>
+        <p:spPr>
+          <a:xfrm>
+            <a:off x="7891688" y="4169664"/>
+            <a:ext cx="543652" cy="384048"/>
+          </a:xfrm>
+          <a:prstGeom prst="rect">
+            <a:avLst/>
+          </a:prstGeom>
+          <a:noFill/>
+          <a:ln/>
+        </p:spPr>
+        <p:txBody>
+          <a:bodyPr wrap="square" lIns="0" tIns="0" rIns="0" bIns="0" rtlCol="0" anchor="ctr"/>
+          <a:lstStyle/>
+          <a:p>
+            <a:pPr algn="ctr" indent="0" marL="0">
+              <a:buNone/>
+            </a:pPr>
+            <a:r>
+              <a:rPr lang="en-US" sz="900" b="1" dirty="0">
+                <a:solidFill>
+                  <a:srgbClr val="9D174D"/>
+                </a:solidFill>
+                <a:latin typeface="Trebuchet MS" pitchFamily="34" charset="0"/>
+                <a:ea typeface="Trebuchet MS" pitchFamily="34" charset="-122"/>
+                <a:cs typeface="Trebuchet MS" pitchFamily="34" charset="-120"/>
+              </a:rPr>
+              <a:t>l</a:t>
             </a:r>
             <a:endParaRPr lang="en-US" sz="900" dirty="0"/>
           </a:p>
@@ -36118,7 +36724,7 @@
                 <a:ea typeface="Trebuchet MS" pitchFamily="34" charset="-122"/>
                 <a:cs typeface="Trebuchet MS" pitchFamily="34" charset="-120"/>
               </a:rPr>
-              <a:t>national</a:t>
+              <a:t>connect</a:t>
             </a:r>
             <a:endParaRPr lang="en-US" sz="1300" dirty="0"/>
           </a:p>
@@ -36424,7 +37030,7 @@
                 <a:ea typeface="Trebuchet MS" pitchFamily="34" charset="-122"/>
                 <a:cs typeface="Trebuchet MS" pitchFamily="34" charset="-120"/>
               </a:rPr>
-              <a:t>connect</a:t>
+              <a:t>view</a:t>
             </a:r>
             <a:endParaRPr lang="en-US" sz="1300" dirty="0"/>
           </a:p>
@@ -36577,7 +37183,7 @@
                 <a:ea typeface="Trebuchet MS" pitchFamily="34" charset="-122"/>
                 <a:cs typeface="Trebuchet MS" pitchFamily="34" charset="-120"/>
               </a:rPr>
-              <a:t>view</a:t>
+              <a:t>nation</a:t>
             </a:r>
             <a:endParaRPr lang="en-US" sz="1300" dirty="0"/>
           </a:p>
@@ -37142,7 +37748,7 @@
                 <a:ea typeface="Trebuchet MS" pitchFamily="34" charset="-122"/>
                 <a:cs typeface="Trebuchet MS" pitchFamily="34" charset="-120"/>
               </a:rPr>
-              <a:t>interchange</a:t>
+              <a:t>intercept</a:t>
             </a:r>
             <a:endParaRPr lang="en-US" sz="1200" dirty="0"/>
           </a:p>
@@ -38396,7 +39002,7 @@
                 <a:ea typeface="Calibri" pitchFamily="34" charset="-122"/>
                 <a:cs typeface="Calibri" pitchFamily="34" charset="-120"/>
               </a:rPr>
-              <a:t>1.  The prefix 'inter-' comes from Latin and means 'between' or 'among'.</a:t>
+              <a:t>1.  The prefix 'inter-' comes from Latin.</a:t>
             </a:r>
             <a:endParaRPr lang="en-US" sz="1300" dirty="0"/>
           </a:p>
@@ -38535,7 +39141,7 @@
                 <a:ea typeface="Calibri" pitchFamily="34" charset="-122"/>
                 <a:cs typeface="Calibri" pitchFamily="34" charset="-120"/>
               </a:rPr>
-              <a:t>2.  The word 'interesting' starts with the prefix 'inter-' meaning between.</a:t>
+              <a:t>2.  The word 'internet' does not contain the prefix 'inter-'.</a:t>
             </a:r>
             <a:endParaRPr lang="en-US" sz="1300" dirty="0"/>
           </a:p>
@@ -38674,7 +39280,7 @@
                 <a:ea typeface="Calibri" pitchFamily="34" charset="-122"/>
                 <a:cs typeface="Calibri" pitchFamily="34" charset="-120"/>
               </a:rPr>
-              <a:t>3.  An international event involves more than one country.</a:t>
+              <a:t>3.  The prefix 'inter-' means the same as the prefix 'un-'.</a:t>
             </a:r>
             <a:endParaRPr lang="en-US" sz="1300" dirty="0"/>
           </a:p>
@@ -38697,11 +39303,11 @@
             </a:avLst>
           </a:prstGeom>
           <a:solidFill>
-            <a:srgbClr val="DCFCE7"/>
-          </a:solidFill>
-          <a:ln w="12700">
-            <a:solidFill>
-              <a:srgbClr val="16A34A"/>
+            <a:srgbClr val="FEE2E2"/>
+          </a:solidFill>
+          <a:ln w="12700">
+            <a:solidFill>
+              <a:srgbClr val="DC2626"/>
             </a:solidFill>
             <a:prstDash val="solid"/>
           </a:ln>
@@ -38734,13 +39340,13 @@
             <a:r>
               <a:rPr lang="en-US" sz="1100" b="1" dirty="0">
                 <a:solidFill>
-                  <a:srgbClr val="16A34A"/>
+                  <a:srgbClr val="DC2626"/>
                 </a:solidFill>
                 <a:latin typeface="Trebuchet MS" pitchFamily="34" charset="0"/>
                 <a:ea typeface="Trebuchet MS" pitchFamily="34" charset="-122"/>
                 <a:cs typeface="Trebuchet MS" pitchFamily="34" charset="-120"/>
               </a:rPr>
-              <a:t>TRUE</a:t>
+              <a:t>FALSE</a:t>
             </a:r>
             <a:endParaRPr lang="en-US" sz="1100" dirty="0"/>
           </a:p>
@@ -38813,7 +39419,7 @@
                 <a:ea typeface="Calibri" pitchFamily="34" charset="-122"/>
                 <a:cs typeface="Calibri" pitchFamily="34" charset="-120"/>
               </a:rPr>
-              <a:t>4.  When you interrupt someone, you break into what they are doing.</a:t>
+              <a:t>4.  The prefix 'inter-' means between or among things.</a:t>
             </a:r>
             <a:endParaRPr lang="en-US" sz="1300" dirty="0"/>
           </a:p>
@@ -38952,7 +39558,7 @@
                 <a:ea typeface="Calibri" pitchFamily="34" charset="-122"/>
                 <a:cs typeface="Calibri" pitchFamily="34" charset="-120"/>
               </a:rPr>
-              <a:t>5.  The prefix 'inter-' means 'against' or 'opposite'.</a:t>
+              <a:t>5.  An international match involves more than one country.</a:t>
             </a:r>
             <a:endParaRPr lang="en-US" sz="1300" dirty="0"/>
           </a:p>
@@ -38975,11 +39581,11 @@
             </a:avLst>
           </a:prstGeom>
           <a:solidFill>
-            <a:srgbClr val="FEE2E2"/>
-          </a:solidFill>
-          <a:ln w="12700">
-            <a:solidFill>
-              <a:srgbClr val="DC2626"/>
+            <a:srgbClr val="DCFCE7"/>
+          </a:solidFill>
+          <a:ln w="12700">
+            <a:solidFill>
+              <a:srgbClr val="16A34A"/>
             </a:solidFill>
             <a:prstDash val="solid"/>
           </a:ln>
@@ -39012,13 +39618,13 @@
             <a:r>
               <a:rPr lang="en-US" sz="1100" b="1" dirty="0">
                 <a:solidFill>
-                  <a:srgbClr val="DC2626"/>
+                  <a:srgbClr val="16A34A"/>
                 </a:solidFill>
                 <a:latin typeface="Trebuchet MS" pitchFamily="34" charset="0"/>
                 <a:ea typeface="Trebuchet MS" pitchFamily="34" charset="-122"/>
                 <a:cs typeface="Trebuchet MS" pitchFamily="34" charset="-120"/>
               </a:rPr>
-              <a:t>FALSE</a:t>
+              <a:t>TRUE</a:t>
             </a:r>
             <a:endParaRPr lang="en-US" sz="1100" dirty="0"/>
           </a:p>
@@ -39987,7 +40593,7 @@
                 <a:ea typeface="Trebuchet MS" pitchFamily="34" charset="-122"/>
                 <a:cs typeface="Trebuchet MS" pitchFamily="34" charset="-120"/>
               </a:rPr>
-              <a:t>interchange</a:t>
+              <a:t>intercept</a:t>
             </a:r>
             <a:endParaRPr lang="en-US" sz="1300" dirty="0"/>
           </a:p>
@@ -40797,7 +41403,7 @@
                 <a:ea typeface="Trebuchet MS" pitchFamily="34" charset="-122"/>
                 <a:cs typeface="Trebuchet MS" pitchFamily="34" charset="-120"/>
               </a:rPr>
-              <a:t>national</a:t>
+              <a:t>connect</a:t>
             </a:r>
             <a:endParaRPr lang="en-US" sz="1300" dirty="0"/>
           </a:p>
@@ -41103,7 +41709,7 @@
                 <a:ea typeface="Trebuchet MS" pitchFamily="34" charset="-122"/>
                 <a:cs typeface="Trebuchet MS" pitchFamily="34" charset="-120"/>
               </a:rPr>
-              <a:t>connect</a:t>
+              <a:t>view</a:t>
             </a:r>
             <a:endParaRPr lang="en-US" sz="1300" dirty="0"/>
           </a:p>
@@ -41256,7 +41862,7 @@
                 <a:ea typeface="Trebuchet MS" pitchFamily="34" charset="-122"/>
                 <a:cs typeface="Trebuchet MS" pitchFamily="34" charset="-120"/>
               </a:rPr>
-              <a:t>view</a:t>
+              <a:t>nation</a:t>
             </a:r>
             <a:endParaRPr lang="en-US" sz="1300" dirty="0"/>
           </a:p>
@@ -42231,7 +42837,7 @@
                 <a:ea typeface="Calibri" pitchFamily="34" charset="-122"/>
                 <a:cs typeface="Calibri" pitchFamily="34" charset="-120"/>
               </a:rPr>
-              <a:t>To swap or exchange things between people or places.</a:t>
+              <a:t>To stop or catch something before it reaches its destination.</a:t>
             </a:r>
             <a:endParaRPr lang="en-US" sz="1200" dirty="0"/>
           </a:p>
@@ -42370,7 +42976,7 @@
                 <a:ea typeface="Calibri" pitchFamily="34" charset="-122"/>
                 <a:cs typeface="Calibri" pitchFamily="34" charset="-120"/>
               </a:rPr>
-              <a:t>To do things with other people or things, affecting each other.</a:t>
+              <a:t>To talk or do things with another person or group.</a:t>
             </a:r>
             <a:endParaRPr lang="en-US" sz="1200" dirty="0"/>
           </a:p>
@@ -42509,7 +43115,7 @@
                 <a:ea typeface="Calibri" pitchFamily="34" charset="-122"/>
                 <a:cs typeface="Calibri" pitchFamily="34" charset="-120"/>
               </a:rPr>
-              <a:t>A meeting where one person asks another person questions.</a:t>
+              <a:t>A meeting where someone asks another person questions.</a:t>
             </a:r>
             <a:endParaRPr lang="en-US" sz="1200" dirty="0"/>
           </a:p>
@@ -42648,7 +43254,7 @@
                 <a:ea typeface="Calibri" pitchFamily="34" charset="-122"/>
                 <a:cs typeface="Calibri" pitchFamily="34" charset="-120"/>
               </a:rPr>
-              <a:t>To link or join things together so they are all connected to each other.</a:t>
+              <a:t>To link or join things together so they work with each other.</a:t>
             </a:r>
             <a:endParaRPr lang="en-US" sz="1200" dirty="0"/>
           </a:p>
@@ -42787,7 +43393,7 @@
                 <a:ea typeface="Calibri" pitchFamily="34" charset="-122"/>
                 <a:cs typeface="Calibri" pitchFamily="34" charset="-120"/>
               </a:rPr>
-              <a:t>A break or gap between two events or parts of something, like a show.</a:t>
+              <a:t>A pause or gap between two events or parts of something.</a:t>
             </a:r>
             <a:endParaRPr lang="en-US" sz="1200" dirty="0"/>
           </a:p>
@@ -42926,7 +43532,7 @@
                 <a:ea typeface="Calibri" pitchFamily="34" charset="-122"/>
                 <a:cs typeface="Calibri" pitchFamily="34" charset="-120"/>
               </a:rPr>
-              <a:t>To break into a conversation or activity and stop it for a moment.</a:t>
+              <a:t>To break into someone's conversation or activity suddenly.</a:t>
             </a:r>
             <a:endParaRPr lang="en-US" sz="1200" dirty="0"/>
           </a:p>
@@ -42999,7 +43605,7 @@
                 <a:ea typeface="Trebuchet MS" pitchFamily="34" charset="-122"/>
                 <a:cs typeface="Trebuchet MS" pitchFamily="34" charset="-120"/>
               </a:rPr>
-              <a:t>interchange</a:t>
+              <a:t>intercept</a:t>
             </a:r>
             <a:endParaRPr lang="en-US" sz="1200" dirty="0"/>
           </a:p>
@@ -43560,7 +44166,7 @@
                 <a:ea typeface="Calibri" pitchFamily="34" charset="-122"/>
                 <a:cs typeface="Calibri" pitchFamily="34" charset="-120"/>
               </a:rPr>
-              <a:t>The students were excited to interact with children from the international school.</a:t>
+              <a:t>The students were excited to interact with children from another school during the excursion.</a:t>
             </a:r>
             <a:endParaRPr lang="en-US" sz="1500" dirty="0"/>
           </a:p>
@@ -43724,7 +44330,7 @@
                 <a:ea typeface="Calibri" pitchFamily="34" charset="-122"/>
                 <a:cs typeface="Calibri" pitchFamily="34" charset="-120"/>
               </a:rPr>
-              <a:t>Please do not interrupt when your teacher is giving instructions.</a:t>
+              <a:t>The referee blew the whistle so that the players could have an interval and drink some water.</a:t>
             </a:r>
             <a:endParaRPr lang="en-US" sz="1500" dirty="0"/>
           </a:p>
@@ -43888,7 +44494,7 @@
                 <a:ea typeface="Calibri" pitchFamily="34" charset="-122"/>
                 <a:cs typeface="Calibri" pitchFamily="34" charset="-120"/>
               </a:rPr>
-              <a:t>We watched the interview with the famous Australian scientist on television.</a:t>
+              <a:t>Our teacher asked us not to interrupt while she was explaining the new maths activity.</a:t>
             </a:r>
             <a:endParaRPr lang="en-US" sz="1500" dirty="0"/>
           </a:p>

--- a/output/wordlabs-inter-prefix-3day.pptx
+++ b/output/wordlabs-inter-prefix-3day.pptx
@@ -4240,7 +4240,7 @@
                 <a:ea typeface="Calibri" pitchFamily="34" charset="-122"/>
                 <a:cs typeface="Calibri" pitchFamily="34" charset="-120"/>
               </a:rPr>
-              <a:t>"between, among, together"</a:t>
+              <a:t>"between"</a:t>
             </a:r>
             <a:endParaRPr lang="en-US" sz="2200" dirty="0"/>
           </a:p>
@@ -4279,7 +4279,7 @@
                 <a:ea typeface="Calibri" pitchFamily="34" charset="-122"/>
                 <a:cs typeface="Calibri" pitchFamily="34" charset="-120"/>
               </a:rPr>
-              <a:t>Origin: Latin: inter</a:t>
+              <a:t>Origin: Prefix</a:t>
             </a:r>
             <a:endParaRPr lang="en-US" sz="1300" dirty="0"/>
           </a:p>
@@ -5288,7 +5288,7 @@
                 <a:ea typeface="Calibri" pitchFamily="34" charset="-122"/>
                 <a:cs typeface="Calibri" pitchFamily="34" charset="-120"/>
               </a:rPr>
-              <a:t>Word Labs  •  wordlabs.app  •  Prefix: 'inter-' = between, among, together</a:t>
+              <a:t>Word Labs  •  wordlabs.app  •  Prefix: 'inter-' = between</a:t>
             </a:r>
             <a:endParaRPr lang="en-US" sz="800" dirty="0"/>
           </a:p>
@@ -5622,7 +5622,7 @@
                 <a:ea typeface="Trebuchet MS" pitchFamily="34" charset="-122"/>
                 <a:cs typeface="Trebuchet MS" pitchFamily="34" charset="-120"/>
               </a:rPr>
-              <a:t>1</a:t>
+              <a:t>0</a:t>
             </a:r>
             <a:pPr algn="ctr" indent="0" marL="0">
               <a:buNone/>
@@ -5928,7 +5928,7 @@
                 <a:ea typeface="Calibri" pitchFamily="34" charset="-122"/>
                 <a:cs typeface="Calibri" pitchFamily="34" charset="-120"/>
               </a:rPr>
-              <a:t>Word Labs  •  wordlabs.app  •  Prefix: 'inter-' = between, among, together</a:t>
+              <a:t>Word Labs  •  wordlabs.app  •  Prefix: 'inter-' = between</a:t>
             </a:r>
             <a:endParaRPr lang="en-US" sz="800" dirty="0"/>
           </a:p>
@@ -6040,7 +6040,7 @@
                 <a:ea typeface="Calibri" pitchFamily="34" charset="-122"/>
                 <a:cs typeface="Calibri" pitchFamily="34" charset="-120"/>
               </a:rPr>
-              <a:t>The police managed to </a:t>
+              <a:t>Please don't </a:t>
             </a:r>
             <a:pPr algn="l" indent="0" marL="0">
               <a:buNone/>
@@ -6057,7 +6057,7 @@
                 <a:ea typeface="Calibri" pitchFamily="34" charset="-122"/>
                 <a:cs typeface="Calibri" pitchFamily="34" charset="-120"/>
               </a:rPr>
-              <a:t>intercept</a:t>
+              <a:t>interrupt</a:t>
             </a:r>
             <a:pPr algn="l" indent="0" marL="0">
               <a:buNone/>
@@ -6071,7 +6071,7 @@
                 <a:ea typeface="Calibri" pitchFamily="34" charset="-122"/>
                 <a:cs typeface="Calibri" pitchFamily="34" charset="-120"/>
               </a:rPr>
-              <a:t> the message before it was </a:t>
+              <a:t> while I'm reading. The phone call </a:t>
             </a:r>
             <a:pPr algn="l" indent="0" marL="0">
               <a:buNone/>
@@ -6088,7 +6088,7 @@
                 <a:ea typeface="Calibri" pitchFamily="34" charset="-122"/>
                 <a:cs typeface="Calibri" pitchFamily="34" charset="-120"/>
               </a:rPr>
-              <a:t>delivered</a:t>
+              <a:t>interrupted</a:t>
             </a:r>
             <a:pPr algn="l" indent="0" marL="0">
               <a:buNone/>
@@ -6102,7 +6102,7 @@
                 <a:ea typeface="Calibri" pitchFamily="34" charset="-122"/>
                 <a:cs typeface="Calibri" pitchFamily="34" charset="-120"/>
               </a:rPr>
-              <a:t> to the wrong person.</a:t>
+              <a:t> our dinner.</a:t>
             </a:r>
             <a:endParaRPr lang="en-US" sz="1800" dirty="0"/>
           </a:p>
@@ -6257,7 +6257,7 @@
                 <a:ea typeface="Trebuchet MS" pitchFamily="34" charset="-122"/>
                 <a:cs typeface="Trebuchet MS" pitchFamily="34" charset="-120"/>
               </a:rPr>
-              <a:t>intercept</a:t>
+              <a:t>interrupt</a:t>
             </a:r>
             <a:endParaRPr lang="en-US" sz="1400" dirty="0"/>
           </a:p>
@@ -6385,7 +6385,7 @@
                 <a:ea typeface="Trebuchet MS" pitchFamily="34" charset="-122"/>
                 <a:cs typeface="Trebuchet MS" pitchFamily="34" charset="-120"/>
               </a:rPr>
-              <a:t>delivered</a:t>
+              <a:t>interrupted</a:t>
             </a:r>
             <a:endParaRPr lang="en-US" sz="1400" dirty="0"/>
           </a:p>
@@ -6716,7 +6716,7 @@
                 <a:ea typeface="Calibri" pitchFamily="34" charset="-122"/>
                 <a:cs typeface="Calibri" pitchFamily="34" charset="-120"/>
               </a:rPr>
-              <a:t>Word Labs  •  wordlabs.app  •  Prefix: 'inter-' = between, among, together</a:t>
+              <a:t>Word Labs  •  wordlabs.app  •  Prefix: 'inter-' = between</a:t>
             </a:r>
             <a:endParaRPr lang="en-US" sz="800" dirty="0"/>
           </a:p>
@@ -6855,7 +6855,7 @@
                 <a:ea typeface="Trebuchet MS" pitchFamily="34" charset="-122"/>
                 <a:cs typeface="Trebuchet MS" pitchFamily="34" charset="-120"/>
               </a:rPr>
-              <a:t>intercept</a:t>
+              <a:t>interrupt</a:t>
             </a:r>
             <a:endParaRPr lang="en-US" sz="2800" dirty="0"/>
           </a:p>
@@ -7543,7 +7543,7 @@
                 <a:ea typeface="Calibri" pitchFamily="34" charset="-122"/>
                 <a:cs typeface="Calibri" pitchFamily="34" charset="-120"/>
               </a:rPr>
-              <a:t>Word Labs  •  wordlabs.app  •  Prefix: 'inter-' = between, among, together</a:t>
+              <a:t>Word Labs  •  wordlabs.app  •  Prefix: 'inter-' = between</a:t>
             </a:r>
             <a:endParaRPr lang="en-US" sz="800" dirty="0"/>
           </a:p>
@@ -7682,7 +7682,7 @@
                 <a:ea typeface="Trebuchet MS" pitchFamily="34" charset="-122"/>
                 <a:cs typeface="Trebuchet MS" pitchFamily="34" charset="-120"/>
               </a:rPr>
-              <a:t>intercept</a:t>
+              <a:t>interrupt</a:t>
             </a:r>
             <a:endParaRPr lang="en-US" sz="2800" dirty="0"/>
           </a:p>
@@ -7933,7 +7933,7 @@
                 <a:ea typeface="Trebuchet MS" pitchFamily="34" charset="-122"/>
                 <a:cs typeface="Trebuchet MS" pitchFamily="34" charset="-120"/>
               </a:rPr>
-              <a:t>cept</a:t>
+              <a:t>rupt</a:t>
             </a:r>
             <a:endParaRPr lang="en-US" sz="1300" dirty="0"/>
           </a:p>
@@ -7972,7 +7972,7 @@
                 <a:ea typeface="Calibri" pitchFamily="34" charset="-122"/>
                 <a:cs typeface="Calibri" pitchFamily="34" charset="-120"/>
               </a:rPr>
-              <a:t>take, seize</a:t>
+              <a:t>break</a:t>
             </a:r>
             <a:endParaRPr lang="en-US" sz="850" dirty="0"/>
           </a:p>
@@ -8528,7 +8528,7 @@
                 <a:ea typeface="Calibri" pitchFamily="34" charset="-122"/>
                 <a:cs typeface="Calibri" pitchFamily="34" charset="-120"/>
               </a:rPr>
-              <a:t>Word Labs  •  wordlabs.app  •  Prefix: 'inter-' = between, among, together</a:t>
+              <a:t>Word Labs  •  wordlabs.app  •  Prefix: 'inter-' = between</a:t>
             </a:r>
             <a:endParaRPr lang="en-US" sz="800" dirty="0"/>
           </a:p>
@@ -8667,7 +8667,7 @@
                 <a:ea typeface="Trebuchet MS" pitchFamily="34" charset="-122"/>
                 <a:cs typeface="Trebuchet MS" pitchFamily="34" charset="-120"/>
               </a:rPr>
-              <a:t>intercept</a:t>
+              <a:t>interrupt</a:t>
             </a:r>
             <a:endParaRPr lang="en-US" sz="2800" dirty="0"/>
           </a:p>
@@ -8918,7 +8918,7 @@
                 <a:ea typeface="Trebuchet MS" pitchFamily="34" charset="-122"/>
                 <a:cs typeface="Trebuchet MS" pitchFamily="34" charset="-120"/>
               </a:rPr>
-              <a:t>cept</a:t>
+              <a:t>rupt</a:t>
             </a:r>
             <a:endParaRPr lang="en-US" sz="1300" dirty="0"/>
           </a:p>
@@ -8957,7 +8957,7 @@
                 <a:ea typeface="Calibri" pitchFamily="34" charset="-122"/>
                 <a:cs typeface="Calibri" pitchFamily="34" charset="-120"/>
               </a:rPr>
-              <a:t>take, seize</a:t>
+              <a:t>break</a:t>
             </a:r>
             <a:endParaRPr lang="en-US" sz="850" dirty="0"/>
           </a:p>
@@ -9326,7 +9326,7 @@
                 <a:ea typeface="Trebuchet MS" pitchFamily="34" charset="-122"/>
                 <a:cs typeface="Trebuchet MS" pitchFamily="34" charset="-120"/>
               </a:rPr>
-              <a:t>cept</a:t>
+              <a:t>rupt</a:t>
             </a:r>
             <a:endParaRPr lang="en-US" sz="1400" dirty="0"/>
           </a:p>
@@ -9750,7 +9750,7 @@
                 <a:ea typeface="Calibri" pitchFamily="34" charset="-122"/>
                 <a:cs typeface="Calibri" pitchFamily="34" charset="-120"/>
               </a:rPr>
-              <a:t>Word Labs  •  wordlabs.app  •  Prefix: 'inter-' = between, among, together</a:t>
+              <a:t>Word Labs  •  wordlabs.app  •  Prefix: 'inter-' = between</a:t>
             </a:r>
             <a:endParaRPr lang="en-US" sz="800" dirty="0"/>
           </a:p>
@@ -9889,7 +9889,7 @@
                 <a:ea typeface="Trebuchet MS" pitchFamily="34" charset="-122"/>
                 <a:cs typeface="Trebuchet MS" pitchFamily="34" charset="-120"/>
               </a:rPr>
-              <a:t>intercept</a:t>
+              <a:t>interrupt</a:t>
             </a:r>
             <a:endParaRPr lang="en-US" sz="2800" dirty="0"/>
           </a:p>
@@ -10140,7 +10140,7 @@
                 <a:ea typeface="Trebuchet MS" pitchFamily="34" charset="-122"/>
                 <a:cs typeface="Trebuchet MS" pitchFamily="34" charset="-120"/>
               </a:rPr>
-              <a:t>cept</a:t>
+              <a:t>rupt</a:t>
             </a:r>
             <a:endParaRPr lang="en-US" sz="1300" dirty="0"/>
           </a:p>
@@ -10179,7 +10179,7 @@
                 <a:ea typeface="Calibri" pitchFamily="34" charset="-122"/>
                 <a:cs typeface="Calibri" pitchFamily="34" charset="-120"/>
               </a:rPr>
-              <a:t>take, seize</a:t>
+              <a:t>break</a:t>
             </a:r>
             <a:endParaRPr lang="en-US" sz="850" dirty="0"/>
           </a:p>
@@ -10548,7 +10548,7 @@
                 <a:ea typeface="Trebuchet MS" pitchFamily="34" charset="-122"/>
                 <a:cs typeface="Trebuchet MS" pitchFamily="34" charset="-120"/>
               </a:rPr>
-              <a:t>cept</a:t>
+              <a:t>rupt</a:t>
             </a:r>
             <a:endParaRPr lang="en-US" sz="1400" dirty="0"/>
           </a:p>
@@ -10971,7 +10971,7 @@
                 <a:ea typeface="Trebuchet MS" pitchFamily="34" charset="-122"/>
                 <a:cs typeface="Trebuchet MS" pitchFamily="34" charset="-120"/>
               </a:rPr>
-              <a:t>c</a:t>
+              <a:t>r</a:t>
             </a:r>
             <a:endParaRPr lang="en-US" sz="900" dirty="0"/>
           </a:p>
@@ -11037,7 +11037,7 @@
                 <a:ea typeface="Trebuchet MS" pitchFamily="34" charset="-122"/>
                 <a:cs typeface="Trebuchet MS" pitchFamily="34" charset="-120"/>
               </a:rPr>
-              <a:t>e</a:t>
+              <a:t>u</a:t>
             </a:r>
             <a:endParaRPr lang="en-US" sz="900" dirty="0"/>
           </a:p>
@@ -11461,7 +11461,7 @@
                 <a:ea typeface="Calibri" pitchFamily="34" charset="-122"/>
                 <a:cs typeface="Calibri" pitchFamily="34" charset="-120"/>
               </a:rPr>
-              <a:t>Word Labs  •  wordlabs.app  •  Prefix: 'inter-' = between, among, together</a:t>
+              <a:t>Word Labs  •  wordlabs.app  •  Prefix: 'inter-' = between</a:t>
             </a:r>
             <a:endParaRPr lang="en-US" sz="800" dirty="0"/>
           </a:p>
@@ -11600,7 +11600,7 @@
                 <a:ea typeface="Trebuchet MS" pitchFamily="34" charset="-122"/>
                 <a:cs typeface="Trebuchet MS" pitchFamily="34" charset="-120"/>
               </a:rPr>
-              <a:t>delivered</a:t>
+              <a:t>interrupted</a:t>
             </a:r>
             <a:endParaRPr lang="en-US" sz="2800" dirty="0"/>
           </a:p>
@@ -12288,7 +12288,7 @@
                 <a:ea typeface="Calibri" pitchFamily="34" charset="-122"/>
                 <a:cs typeface="Calibri" pitchFamily="34" charset="-120"/>
               </a:rPr>
-              <a:t>Word Labs  •  wordlabs.app  •  Prefix: 'inter-' = between, among, together</a:t>
+              <a:t>Word Labs  •  wordlabs.app  •  Prefix: 'inter-' = between</a:t>
             </a:r>
             <a:endParaRPr lang="en-US" sz="800" dirty="0"/>
           </a:p>
@@ -12427,7 +12427,7 @@
                 <a:ea typeface="Trebuchet MS" pitchFamily="34" charset="-122"/>
                 <a:cs typeface="Trebuchet MS" pitchFamily="34" charset="-120"/>
               </a:rPr>
-              <a:t>delivered</a:t>
+              <a:t>interrupted</a:t>
             </a:r>
             <a:endParaRPr lang="en-US" sz="2800" dirty="0"/>
           </a:p>
@@ -12516,11 +12516,11 @@
             </a:avLst>
           </a:prstGeom>
           <a:solidFill>
-            <a:srgbClr val="DDD6FE"/>
+            <a:srgbClr val="CCFBF1"/>
           </a:solidFill>
           <a:ln w="19050">
             <a:solidFill>
-              <a:srgbClr val="7C3AED"/>
+              <a:srgbClr val="0D9488"/>
             </a:solidFill>
             <a:prstDash val="solid"/>
           </a:ln>
@@ -12560,13 +12560,13 @@
             <a:r>
               <a:rPr lang="en-US" sz="1300" b="1" dirty="0">
                 <a:solidFill>
-                  <a:srgbClr val="4C1D95"/>
+                  <a:srgbClr val="0F766E"/>
                 </a:solidFill>
                 <a:latin typeface="Trebuchet MS" pitchFamily="34" charset="0"/>
                 <a:ea typeface="Trebuchet MS" pitchFamily="34" charset="-122"/>
                 <a:cs typeface="Trebuchet MS" pitchFamily="34" charset="-120"/>
               </a:rPr>
-              <a:t>de</a:t>
+              <a:t>inter</a:t>
             </a:r>
             <a:endParaRPr lang="en-US" sz="1300" dirty="0"/>
           </a:p>
@@ -12605,7 +12605,7 @@
                 <a:ea typeface="Calibri" pitchFamily="34" charset="-122"/>
                 <a:cs typeface="Calibri" pitchFamily="34" charset="-120"/>
               </a:rPr>
-              <a:t>away, from</a:t>
+              <a:t>between</a:t>
             </a:r>
             <a:endParaRPr lang="en-US" sz="850" dirty="0"/>
           </a:p>
@@ -12678,7 +12678,7 @@
                 <a:ea typeface="Trebuchet MS" pitchFamily="34" charset="-122"/>
                 <a:cs typeface="Trebuchet MS" pitchFamily="34" charset="-120"/>
               </a:rPr>
-              <a:t>liver</a:t>
+              <a:t>rupt</a:t>
             </a:r>
             <a:endParaRPr lang="en-US" sz="1300" dirty="0"/>
           </a:p>
@@ -12717,7 +12717,7 @@
                 <a:ea typeface="Calibri" pitchFamily="34" charset="-122"/>
                 <a:cs typeface="Calibri" pitchFamily="34" charset="-120"/>
               </a:rPr>
-              <a:t>carry, free</a:t>
+              <a:t>break</a:t>
             </a:r>
             <a:endParaRPr lang="en-US" sz="850" dirty="0"/>
           </a:p>
@@ -13385,7 +13385,7 @@
                 <a:ea typeface="Calibri" pitchFamily="34" charset="-122"/>
                 <a:cs typeface="Calibri" pitchFamily="34" charset="-120"/>
               </a:rPr>
-              <a:t>Word Labs  •  wordlabs.app  •  Prefix: 'inter-' = between, among, together</a:t>
+              <a:t>Word Labs  •  wordlabs.app  •  Prefix: 'inter-' = between</a:t>
             </a:r>
             <a:endParaRPr lang="en-US" sz="800" dirty="0"/>
           </a:p>
@@ -13524,7 +13524,7 @@
                 <a:ea typeface="Trebuchet MS" pitchFamily="34" charset="-122"/>
                 <a:cs typeface="Trebuchet MS" pitchFamily="34" charset="-120"/>
               </a:rPr>
-              <a:t>delivered</a:t>
+              <a:t>interrupted</a:t>
             </a:r>
             <a:endParaRPr lang="en-US" sz="2800" dirty="0"/>
           </a:p>
@@ -13613,11 +13613,11 @@
             </a:avLst>
           </a:prstGeom>
           <a:solidFill>
-            <a:srgbClr val="DDD6FE"/>
+            <a:srgbClr val="CCFBF1"/>
           </a:solidFill>
           <a:ln w="19050">
             <a:solidFill>
-              <a:srgbClr val="7C3AED"/>
+              <a:srgbClr val="0D9488"/>
             </a:solidFill>
             <a:prstDash val="solid"/>
           </a:ln>
@@ -13657,13 +13657,13 @@
             <a:r>
               <a:rPr lang="en-US" sz="1300" b="1" dirty="0">
                 <a:solidFill>
-                  <a:srgbClr val="4C1D95"/>
+                  <a:srgbClr val="0F766E"/>
                 </a:solidFill>
                 <a:latin typeface="Trebuchet MS" pitchFamily="34" charset="0"/>
                 <a:ea typeface="Trebuchet MS" pitchFamily="34" charset="-122"/>
                 <a:cs typeface="Trebuchet MS" pitchFamily="34" charset="-120"/>
               </a:rPr>
-              <a:t>de</a:t>
+              <a:t>inter</a:t>
             </a:r>
             <a:endParaRPr lang="en-US" sz="1300" dirty="0"/>
           </a:p>
@@ -13702,7 +13702,7 @@
                 <a:ea typeface="Calibri" pitchFamily="34" charset="-122"/>
                 <a:cs typeface="Calibri" pitchFamily="34" charset="-120"/>
               </a:rPr>
-              <a:t>away, from</a:t>
+              <a:t>between</a:t>
             </a:r>
             <a:endParaRPr lang="en-US" sz="850" dirty="0"/>
           </a:p>
@@ -13775,7 +13775,7 @@
                 <a:ea typeface="Trebuchet MS" pitchFamily="34" charset="-122"/>
                 <a:cs typeface="Trebuchet MS" pitchFamily="34" charset="-120"/>
               </a:rPr>
-              <a:t>liver</a:t>
+              <a:t>rupt</a:t>
             </a:r>
             <a:endParaRPr lang="en-US" sz="1300" dirty="0"/>
           </a:p>
@@ -13814,7 +13814,7 @@
                 <a:ea typeface="Calibri" pitchFamily="34" charset="-122"/>
                 <a:cs typeface="Calibri" pitchFamily="34" charset="-120"/>
               </a:rPr>
-              <a:t>carry, free</a:t>
+              <a:t>break</a:t>
             </a:r>
             <a:endParaRPr lang="en-US" sz="850" dirty="0"/>
           </a:p>
@@ -14033,8 +14033,8 @@
         </p:nvSpPr>
         <p:spPr>
           <a:xfrm>
-            <a:off x="2313432" y="3364992"/>
-            <a:ext cx="1645920" cy="475488"/>
+            <a:off x="1975104" y="3364992"/>
+            <a:ext cx="1554480" cy="475488"/>
           </a:xfrm>
           <a:prstGeom prst="rect">
             <a:avLst>
@@ -14060,8 +14060,8 @@
         </p:nvSpPr>
         <p:spPr>
           <a:xfrm>
-            <a:off x="2313432" y="3364992"/>
-            <a:ext cx="1645920" cy="475488"/>
+            <a:off x="1975104" y="3364992"/>
+            <a:ext cx="1554480" cy="475488"/>
           </a:xfrm>
           <a:prstGeom prst="rect">
             <a:avLst/>
@@ -14085,7 +14085,7 @@
                 <a:ea typeface="Trebuchet MS" pitchFamily="34" charset="-122"/>
                 <a:cs typeface="Trebuchet MS" pitchFamily="34" charset="-120"/>
               </a:rPr>
-              <a:t>de</a:t>
+              <a:t>in</a:t>
             </a:r>
             <a:endParaRPr lang="en-US" sz="1400" dirty="0"/>
           </a:p>
@@ -14099,8 +14099,8 @@
         </p:nvSpPr>
         <p:spPr>
           <a:xfrm>
-            <a:off x="3959352" y="3364992"/>
-            <a:ext cx="411480" cy="475488"/>
+            <a:off x="3529584" y="3364992"/>
+            <a:ext cx="73152" cy="475488"/>
           </a:xfrm>
           <a:prstGeom prst="rect">
             <a:avLst/>
@@ -14138,8 +14138,8 @@
         </p:nvSpPr>
         <p:spPr>
           <a:xfrm>
-            <a:off x="4370832" y="3364992"/>
-            <a:ext cx="1645920" cy="475488"/>
+            <a:off x="3602736" y="3364992"/>
+            <a:ext cx="1554480" cy="475488"/>
           </a:xfrm>
           <a:prstGeom prst="rect">
             <a:avLst>
@@ -14165,8 +14165,8 @@
         </p:nvSpPr>
         <p:spPr>
           <a:xfrm>
-            <a:off x="4370832" y="3364992"/>
-            <a:ext cx="1645920" cy="475488"/>
+            <a:off x="3602736" y="3364992"/>
+            <a:ext cx="1554480" cy="475488"/>
           </a:xfrm>
           <a:prstGeom prst="rect">
             <a:avLst/>
@@ -14190,7 +14190,7 @@
                 <a:ea typeface="Trebuchet MS" pitchFamily="34" charset="-122"/>
                 <a:cs typeface="Trebuchet MS" pitchFamily="34" charset="-120"/>
               </a:rPr>
-              <a:t>liv</a:t>
+              <a:t>ter</a:t>
             </a:r>
             <a:endParaRPr lang="en-US" sz="1400" dirty="0"/>
           </a:p>
@@ -14204,8 +14204,8 @@
         </p:nvSpPr>
         <p:spPr>
           <a:xfrm>
-            <a:off x="6016752" y="3364992"/>
-            <a:ext cx="411480" cy="475488"/>
+            <a:off x="5157216" y="3364992"/>
+            <a:ext cx="73152" cy="475488"/>
           </a:xfrm>
           <a:prstGeom prst="rect">
             <a:avLst/>
@@ -14243,8 +14243,8 @@
         </p:nvSpPr>
         <p:spPr>
           <a:xfrm>
-            <a:off x="6428232" y="3364992"/>
-            <a:ext cx="1645920" cy="475488"/>
+            <a:off x="5230368" y="3364992"/>
+            <a:ext cx="1554480" cy="475488"/>
           </a:xfrm>
           <a:prstGeom prst="rect">
             <a:avLst>
@@ -14270,8 +14270,8 @@
         </p:nvSpPr>
         <p:spPr>
           <a:xfrm>
-            <a:off x="6428232" y="3364992"/>
-            <a:ext cx="1645920" cy="475488"/>
+            <a:off x="5230368" y="3364992"/>
+            <a:ext cx="1554480" cy="475488"/>
           </a:xfrm>
           <a:prstGeom prst="rect">
             <a:avLst/>
@@ -14295,7 +14295,7 @@
                 <a:ea typeface="Trebuchet MS" pitchFamily="34" charset="-122"/>
                 <a:cs typeface="Trebuchet MS" pitchFamily="34" charset="-120"/>
               </a:rPr>
-              <a:t>ered</a:t>
+              <a:t>rupt</a:t>
             </a:r>
             <a:endParaRPr lang="en-US" sz="1400" dirty="0"/>
           </a:p>
@@ -14303,7 +14303,112 @@
       </p:sp>
       <p:sp>
         <p:nvSpPr>
-          <p:cNvPr id="36" name="Shape 34"/>
+          <p:cNvPr id="36" name="Text 34"/>
+          <p:cNvSpPr/>
+          <p:nvPr/>
+        </p:nvSpPr>
+        <p:spPr>
+          <a:xfrm>
+            <a:off x="6784848" y="3364992"/>
+            <a:ext cx="73152" cy="475488"/>
+          </a:xfrm>
+          <a:prstGeom prst="rect">
+            <a:avLst/>
+          </a:prstGeom>
+          <a:noFill/>
+          <a:ln/>
+        </p:spPr>
+        <p:txBody>
+          <a:bodyPr wrap="square" lIns="0" tIns="0" rIns="0" bIns="0" rtlCol="0" anchor="ctr"/>
+          <a:lstStyle/>
+          <a:p>
+            <a:pPr algn="ctr" indent="0" marL="0">
+              <a:buNone/>
+            </a:pPr>
+            <a:r>
+              <a:rPr lang="en-US" sz="1600" b="1" dirty="0">
+                <a:solidFill>
+                  <a:srgbClr val="0D9488"/>
+                </a:solidFill>
+                <a:latin typeface="Trebuchet MS" pitchFamily="34" charset="0"/>
+                <a:ea typeface="Trebuchet MS" pitchFamily="34" charset="-122"/>
+                <a:cs typeface="Trebuchet MS" pitchFamily="34" charset="-120"/>
+              </a:rPr>
+              <a:t>·</a:t>
+            </a:r>
+            <a:endParaRPr lang="en-US" sz="1600" dirty="0"/>
+          </a:p>
+        </p:txBody>
+      </p:sp>
+      <p:sp>
+        <p:nvSpPr>
+          <p:cNvPr id="37" name="Shape 35"/>
+          <p:cNvSpPr/>
+          <p:nvPr/>
+        </p:nvSpPr>
+        <p:spPr>
+          <a:xfrm>
+            <a:off x="6858000" y="3364992"/>
+            <a:ext cx="1554480" cy="475488"/>
+          </a:xfrm>
+          <a:prstGeom prst="rect">
+            <a:avLst>
+              <a:gd name="adj" fmla="val 9615"/>
+            </a:avLst>
+          </a:prstGeom>
+          <a:solidFill>
+            <a:srgbClr val="FFFFFF"/>
+          </a:solidFill>
+          <a:ln w="12700">
+            <a:solidFill>
+              <a:srgbClr val="0D9488"/>
+            </a:solidFill>
+            <a:prstDash val="solid"/>
+          </a:ln>
+        </p:spPr>
+      </p:sp>
+      <p:sp>
+        <p:nvSpPr>
+          <p:cNvPr id="38" name="Text 36"/>
+          <p:cNvSpPr/>
+          <p:nvPr/>
+        </p:nvSpPr>
+        <p:spPr>
+          <a:xfrm>
+            <a:off x="6858000" y="3364992"/>
+            <a:ext cx="1554480" cy="475488"/>
+          </a:xfrm>
+          <a:prstGeom prst="rect">
+            <a:avLst/>
+          </a:prstGeom>
+          <a:noFill/>
+          <a:ln/>
+        </p:spPr>
+        <p:txBody>
+          <a:bodyPr wrap="square" lIns="0" tIns="0" rIns="0" bIns="0" rtlCol="0" anchor="ctr"/>
+          <a:lstStyle/>
+          <a:p>
+            <a:pPr algn="ctr" indent="0" marL="0">
+              <a:buNone/>
+            </a:pPr>
+            <a:r>
+              <a:rPr lang="en-US" sz="1400" b="1" dirty="0">
+                <a:solidFill>
+                  <a:srgbClr val="0D9488"/>
+                </a:solidFill>
+                <a:latin typeface="Trebuchet MS" pitchFamily="34" charset="0"/>
+                <a:ea typeface="Trebuchet MS" pitchFamily="34" charset="-122"/>
+                <a:cs typeface="Trebuchet MS" pitchFamily="34" charset="-120"/>
+              </a:rPr>
+              <a:t>ed</a:t>
+            </a:r>
+            <a:endParaRPr lang="en-US" sz="1400" dirty="0"/>
+          </a:p>
+        </p:txBody>
+      </p:sp>
+      <p:sp>
+        <p:nvSpPr>
+          <p:cNvPr id="39" name="Shape 37"/>
           <p:cNvSpPr/>
           <p:nvPr/>
         </p:nvSpPr>
@@ -14330,7 +14435,7 @@
       </p:sp>
       <p:sp>
         <p:nvSpPr>
-          <p:cNvPr id="37" name="Text 35"/>
+          <p:cNvPr id="40" name="Text 38"/>
           <p:cNvSpPr/>
           <p:nvPr/>
         </p:nvSpPr>
@@ -14369,7 +14474,7 @@
       </p:sp>
       <p:sp>
         <p:nvSpPr>
-          <p:cNvPr id="38" name="Shape 36"/>
+          <p:cNvPr id="41" name="Shape 39"/>
           <p:cNvSpPr/>
           <p:nvPr/>
         </p:nvSpPr>
@@ -14396,7 +14501,7 @@
       </p:sp>
       <p:sp>
         <p:nvSpPr>
-          <p:cNvPr id="39" name="Text 37"/>
+          <p:cNvPr id="42" name="Text 40"/>
           <p:cNvSpPr/>
           <p:nvPr/>
         </p:nvSpPr>
@@ -14628,7 +14733,7 @@
                 <a:ea typeface="Calibri" pitchFamily="34" charset="-122"/>
                 <a:cs typeface="Calibri" pitchFamily="34" charset="-120"/>
               </a:rPr>
-              <a:t>Prefix 'inter-' — between, among, together</a:t>
+              <a:t>Prefix 'inter-' — between</a:t>
             </a:r>
             <a:endParaRPr lang="en-US" sz="1600" dirty="0"/>
           </a:p>
@@ -14984,7 +15089,7 @@
                 <a:ea typeface="Calibri" pitchFamily="34" charset="-122"/>
                 <a:cs typeface="Calibri" pitchFamily="34" charset="-120"/>
               </a:rPr>
-              <a:t>Word Labs  •  wordlabs.app  •  Prefix: 'inter-' = between, among, together</a:t>
+              <a:t>Word Labs  •  wordlabs.app  •  Prefix: 'inter-' = between</a:t>
             </a:r>
             <a:endParaRPr lang="en-US" sz="800" dirty="0"/>
           </a:p>
@@ -15123,7 +15228,7 @@
                 <a:ea typeface="Trebuchet MS" pitchFamily="34" charset="-122"/>
                 <a:cs typeface="Trebuchet MS" pitchFamily="34" charset="-120"/>
               </a:rPr>
-              <a:t>delivered</a:t>
+              <a:t>interrupted</a:t>
             </a:r>
             <a:endParaRPr lang="en-US" sz="2800" dirty="0"/>
           </a:p>
@@ -15212,11 +15317,11 @@
             </a:avLst>
           </a:prstGeom>
           <a:solidFill>
-            <a:srgbClr val="DDD6FE"/>
+            <a:srgbClr val="CCFBF1"/>
           </a:solidFill>
           <a:ln w="19050">
             <a:solidFill>
-              <a:srgbClr val="7C3AED"/>
+              <a:srgbClr val="0D9488"/>
             </a:solidFill>
             <a:prstDash val="solid"/>
           </a:ln>
@@ -15256,13 +15361,13 @@
             <a:r>
               <a:rPr lang="en-US" sz="1300" b="1" dirty="0">
                 <a:solidFill>
-                  <a:srgbClr val="4C1D95"/>
+                  <a:srgbClr val="0F766E"/>
                 </a:solidFill>
                 <a:latin typeface="Trebuchet MS" pitchFamily="34" charset="0"/>
                 <a:ea typeface="Trebuchet MS" pitchFamily="34" charset="-122"/>
                 <a:cs typeface="Trebuchet MS" pitchFamily="34" charset="-120"/>
               </a:rPr>
-              <a:t>de</a:t>
+              <a:t>inter</a:t>
             </a:r>
             <a:endParaRPr lang="en-US" sz="1300" dirty="0"/>
           </a:p>
@@ -15301,7 +15406,7 @@
                 <a:ea typeface="Calibri" pitchFamily="34" charset="-122"/>
                 <a:cs typeface="Calibri" pitchFamily="34" charset="-120"/>
               </a:rPr>
-              <a:t>away, from</a:t>
+              <a:t>between</a:t>
             </a:r>
             <a:endParaRPr lang="en-US" sz="850" dirty="0"/>
           </a:p>
@@ -15374,7 +15479,7 @@
                 <a:ea typeface="Trebuchet MS" pitchFamily="34" charset="-122"/>
                 <a:cs typeface="Trebuchet MS" pitchFamily="34" charset="-120"/>
               </a:rPr>
-              <a:t>liver</a:t>
+              <a:t>rupt</a:t>
             </a:r>
             <a:endParaRPr lang="en-US" sz="1300" dirty="0"/>
           </a:p>
@@ -15413,7 +15518,7 @@
                 <a:ea typeface="Calibri" pitchFamily="34" charset="-122"/>
                 <a:cs typeface="Calibri" pitchFamily="34" charset="-120"/>
               </a:rPr>
-              <a:t>carry, free</a:t>
+              <a:t>break</a:t>
             </a:r>
             <a:endParaRPr lang="en-US" sz="850" dirty="0"/>
           </a:p>
@@ -15632,8 +15737,8 @@
         </p:nvSpPr>
         <p:spPr>
           <a:xfrm>
-            <a:off x="2313432" y="3364992"/>
-            <a:ext cx="1645920" cy="475488"/>
+            <a:off x="1975104" y="3364992"/>
+            <a:ext cx="1554480" cy="475488"/>
           </a:xfrm>
           <a:prstGeom prst="rect">
             <a:avLst>
@@ -15659,8 +15764,8 @@
         </p:nvSpPr>
         <p:spPr>
           <a:xfrm>
-            <a:off x="2313432" y="3364992"/>
-            <a:ext cx="1645920" cy="475488"/>
+            <a:off x="1975104" y="3364992"/>
+            <a:ext cx="1554480" cy="475488"/>
           </a:xfrm>
           <a:prstGeom prst="rect">
             <a:avLst/>
@@ -15684,7 +15789,7 @@
                 <a:ea typeface="Trebuchet MS" pitchFamily="34" charset="-122"/>
                 <a:cs typeface="Trebuchet MS" pitchFamily="34" charset="-120"/>
               </a:rPr>
-              <a:t>de</a:t>
+              <a:t>in</a:t>
             </a:r>
             <a:endParaRPr lang="en-US" sz="1400" dirty="0"/>
           </a:p>
@@ -15698,8 +15803,8 @@
         </p:nvSpPr>
         <p:spPr>
           <a:xfrm>
-            <a:off x="3959352" y="3364992"/>
-            <a:ext cx="411480" cy="475488"/>
+            <a:off x="3529584" y="3364992"/>
+            <a:ext cx="73152" cy="475488"/>
           </a:xfrm>
           <a:prstGeom prst="rect">
             <a:avLst/>
@@ -15737,8 +15842,8 @@
         </p:nvSpPr>
         <p:spPr>
           <a:xfrm>
-            <a:off x="4370832" y="3364992"/>
-            <a:ext cx="1645920" cy="475488"/>
+            <a:off x="3602736" y="3364992"/>
+            <a:ext cx="1554480" cy="475488"/>
           </a:xfrm>
           <a:prstGeom prst="rect">
             <a:avLst>
@@ -15764,8 +15869,8 @@
         </p:nvSpPr>
         <p:spPr>
           <a:xfrm>
-            <a:off x="4370832" y="3364992"/>
-            <a:ext cx="1645920" cy="475488"/>
+            <a:off x="3602736" y="3364992"/>
+            <a:ext cx="1554480" cy="475488"/>
           </a:xfrm>
           <a:prstGeom prst="rect">
             <a:avLst/>
@@ -15789,7 +15894,7 @@
                 <a:ea typeface="Trebuchet MS" pitchFamily="34" charset="-122"/>
                 <a:cs typeface="Trebuchet MS" pitchFamily="34" charset="-120"/>
               </a:rPr>
-              <a:t>liv</a:t>
+              <a:t>ter</a:t>
             </a:r>
             <a:endParaRPr lang="en-US" sz="1400" dirty="0"/>
           </a:p>
@@ -15803,8 +15908,8 @@
         </p:nvSpPr>
         <p:spPr>
           <a:xfrm>
-            <a:off x="6016752" y="3364992"/>
-            <a:ext cx="411480" cy="475488"/>
+            <a:off x="5157216" y="3364992"/>
+            <a:ext cx="73152" cy="475488"/>
           </a:xfrm>
           <a:prstGeom prst="rect">
             <a:avLst/>
@@ -15842,8 +15947,8 @@
         </p:nvSpPr>
         <p:spPr>
           <a:xfrm>
-            <a:off x="6428232" y="3364992"/>
-            <a:ext cx="1645920" cy="475488"/>
+            <a:off x="5230368" y="3364992"/>
+            <a:ext cx="1554480" cy="475488"/>
           </a:xfrm>
           <a:prstGeom prst="rect">
             <a:avLst>
@@ -15869,8 +15974,8 @@
         </p:nvSpPr>
         <p:spPr>
           <a:xfrm>
-            <a:off x="6428232" y="3364992"/>
-            <a:ext cx="1645920" cy="475488"/>
+            <a:off x="5230368" y="3364992"/>
+            <a:ext cx="1554480" cy="475488"/>
           </a:xfrm>
           <a:prstGeom prst="rect">
             <a:avLst/>
@@ -15894,7 +15999,7 @@
                 <a:ea typeface="Trebuchet MS" pitchFamily="34" charset="-122"/>
                 <a:cs typeface="Trebuchet MS" pitchFamily="34" charset="-120"/>
               </a:rPr>
-              <a:t>ered</a:t>
+              <a:t>rupt</a:t>
             </a:r>
             <a:endParaRPr lang="en-US" sz="1400" dirty="0"/>
           </a:p>
@@ -15902,7 +16007,112 @@
       </p:sp>
       <p:sp>
         <p:nvSpPr>
-          <p:cNvPr id="36" name="Shape 34"/>
+          <p:cNvPr id="36" name="Text 34"/>
+          <p:cNvSpPr/>
+          <p:nvPr/>
+        </p:nvSpPr>
+        <p:spPr>
+          <a:xfrm>
+            <a:off x="6784848" y="3364992"/>
+            <a:ext cx="73152" cy="475488"/>
+          </a:xfrm>
+          <a:prstGeom prst="rect">
+            <a:avLst/>
+          </a:prstGeom>
+          <a:noFill/>
+          <a:ln/>
+        </p:spPr>
+        <p:txBody>
+          <a:bodyPr wrap="square" lIns="0" tIns="0" rIns="0" bIns="0" rtlCol="0" anchor="ctr"/>
+          <a:lstStyle/>
+          <a:p>
+            <a:pPr algn="ctr" indent="0" marL="0">
+              <a:buNone/>
+            </a:pPr>
+            <a:r>
+              <a:rPr lang="en-US" sz="1600" b="1" dirty="0">
+                <a:solidFill>
+                  <a:srgbClr val="0D9488"/>
+                </a:solidFill>
+                <a:latin typeface="Trebuchet MS" pitchFamily="34" charset="0"/>
+                <a:ea typeface="Trebuchet MS" pitchFamily="34" charset="-122"/>
+                <a:cs typeface="Trebuchet MS" pitchFamily="34" charset="-120"/>
+              </a:rPr>
+              <a:t>·</a:t>
+            </a:r>
+            <a:endParaRPr lang="en-US" sz="1600" dirty="0"/>
+          </a:p>
+        </p:txBody>
+      </p:sp>
+      <p:sp>
+        <p:nvSpPr>
+          <p:cNvPr id="37" name="Shape 35"/>
+          <p:cNvSpPr/>
+          <p:nvPr/>
+        </p:nvSpPr>
+        <p:spPr>
+          <a:xfrm>
+            <a:off x="6858000" y="3364992"/>
+            <a:ext cx="1554480" cy="475488"/>
+          </a:xfrm>
+          <a:prstGeom prst="rect">
+            <a:avLst>
+              <a:gd name="adj" fmla="val 9615"/>
+            </a:avLst>
+          </a:prstGeom>
+          <a:solidFill>
+            <a:srgbClr val="FFFFFF"/>
+          </a:solidFill>
+          <a:ln w="12700">
+            <a:solidFill>
+              <a:srgbClr val="0D9488"/>
+            </a:solidFill>
+            <a:prstDash val="solid"/>
+          </a:ln>
+        </p:spPr>
+      </p:sp>
+      <p:sp>
+        <p:nvSpPr>
+          <p:cNvPr id="38" name="Text 36"/>
+          <p:cNvSpPr/>
+          <p:nvPr/>
+        </p:nvSpPr>
+        <p:spPr>
+          <a:xfrm>
+            <a:off x="6858000" y="3364992"/>
+            <a:ext cx="1554480" cy="475488"/>
+          </a:xfrm>
+          <a:prstGeom prst="rect">
+            <a:avLst/>
+          </a:prstGeom>
+          <a:noFill/>
+          <a:ln/>
+        </p:spPr>
+        <p:txBody>
+          <a:bodyPr wrap="square" lIns="0" tIns="0" rIns="0" bIns="0" rtlCol="0" anchor="ctr"/>
+          <a:lstStyle/>
+          <a:p>
+            <a:pPr algn="ctr" indent="0" marL="0">
+              <a:buNone/>
+            </a:pPr>
+            <a:r>
+              <a:rPr lang="en-US" sz="1400" b="1" dirty="0">
+                <a:solidFill>
+                  <a:srgbClr val="0D9488"/>
+                </a:solidFill>
+                <a:latin typeface="Trebuchet MS" pitchFamily="34" charset="0"/>
+                <a:ea typeface="Trebuchet MS" pitchFamily="34" charset="-122"/>
+                <a:cs typeface="Trebuchet MS" pitchFamily="34" charset="-120"/>
+              </a:rPr>
+              <a:t>ed</a:t>
+            </a:r>
+            <a:endParaRPr lang="en-US" sz="1400" dirty="0"/>
+          </a:p>
+        </p:txBody>
+      </p:sp>
+      <p:sp>
+        <p:nvSpPr>
+          <p:cNvPr id="39" name="Shape 37"/>
           <p:cNvSpPr/>
           <p:nvPr/>
         </p:nvSpPr>
@@ -15929,7 +16139,7 @@
       </p:sp>
       <p:sp>
         <p:nvSpPr>
-          <p:cNvPr id="37" name="Text 35"/>
+          <p:cNvPr id="40" name="Text 38"/>
           <p:cNvSpPr/>
           <p:nvPr/>
         </p:nvSpPr>
@@ -15968,7 +16178,7 @@
       </p:sp>
       <p:sp>
         <p:nvSpPr>
-          <p:cNvPr id="38" name="Shape 36"/>
+          <p:cNvPr id="41" name="Shape 39"/>
           <p:cNvSpPr/>
           <p:nvPr/>
         </p:nvSpPr>
@@ -15995,14 +16205,14 @@
       </p:sp>
       <p:sp>
         <p:nvSpPr>
-          <p:cNvPr id="39" name="Shape 37"/>
-          <p:cNvSpPr/>
-          <p:nvPr/>
-        </p:nvSpPr>
-        <p:spPr>
-          <a:xfrm>
-            <a:off x="2124837" y="4169664"/>
-            <a:ext cx="685800" cy="475488"/>
+          <p:cNvPr id="42" name="Shape 40"/>
+          <p:cNvSpPr/>
+          <p:nvPr/>
+        </p:nvSpPr>
+        <p:spPr>
+          <a:xfrm>
+            <a:off x="1951828" y="4169664"/>
+            <a:ext cx="603504" cy="475488"/>
           </a:xfrm>
           <a:prstGeom prst="rect">
             <a:avLst>
@@ -16022,14 +16232,14 @@
       </p:sp>
       <p:sp>
         <p:nvSpPr>
-          <p:cNvPr id="40" name="Text 38"/>
-          <p:cNvSpPr/>
-          <p:nvPr/>
-        </p:nvSpPr>
-        <p:spPr>
-          <a:xfrm>
-            <a:off x="2124837" y="4169664"/>
-            <a:ext cx="685800" cy="475488"/>
+          <p:cNvPr id="43" name="Text 41"/>
+          <p:cNvSpPr/>
+          <p:nvPr/>
+        </p:nvSpPr>
+        <p:spPr>
+          <a:xfrm>
+            <a:off x="1951828" y="4169664"/>
+            <a:ext cx="603504" cy="475488"/>
           </a:xfrm>
           <a:prstGeom prst="rect">
             <a:avLst/>
@@ -16053,7 +16263,7 @@
                 <a:ea typeface="Trebuchet MS" pitchFamily="34" charset="-122"/>
                 <a:cs typeface="Trebuchet MS" pitchFamily="34" charset="-120"/>
               </a:rPr>
-              <a:t>d</a:t>
+              <a:t>i</a:t>
             </a:r>
             <a:endParaRPr lang="en-US" sz="900" dirty="0"/>
           </a:p>
@@ -16061,14 +16271,14 @@
       </p:sp>
       <p:sp>
         <p:nvSpPr>
-          <p:cNvPr id="41" name="Shape 39"/>
-          <p:cNvSpPr/>
-          <p:nvPr/>
-        </p:nvSpPr>
-        <p:spPr>
-          <a:xfrm>
-            <a:off x="3033522" y="4169664"/>
-            <a:ext cx="685800" cy="475488"/>
+          <p:cNvPr id="44" name="Shape 42"/>
+          <p:cNvSpPr/>
+          <p:nvPr/>
+        </p:nvSpPr>
+        <p:spPr>
+          <a:xfrm>
+            <a:off x="2605209" y="4169664"/>
+            <a:ext cx="603504" cy="475488"/>
           </a:xfrm>
           <a:prstGeom prst="rect">
             <a:avLst>
@@ -16088,14 +16298,14 @@
       </p:sp>
       <p:sp>
         <p:nvSpPr>
-          <p:cNvPr id="42" name="Text 40"/>
-          <p:cNvSpPr/>
-          <p:nvPr/>
-        </p:nvSpPr>
-        <p:spPr>
-          <a:xfrm>
-            <a:off x="3033522" y="4169664"/>
-            <a:ext cx="685800" cy="475488"/>
+          <p:cNvPr id="45" name="Text 43"/>
+          <p:cNvSpPr/>
+          <p:nvPr/>
+        </p:nvSpPr>
+        <p:spPr>
+          <a:xfrm>
+            <a:off x="2605209" y="4169664"/>
+            <a:ext cx="603504" cy="475488"/>
           </a:xfrm>
           <a:prstGeom prst="rect">
             <a:avLst/>
@@ -16119,7 +16329,7 @@
                 <a:ea typeface="Trebuchet MS" pitchFamily="34" charset="-122"/>
                 <a:cs typeface="Trebuchet MS" pitchFamily="34" charset="-120"/>
               </a:rPr>
-              <a:t>e</a:t>
+              <a:t>n</a:t>
             </a:r>
             <a:endParaRPr lang="en-US" sz="900" dirty="0"/>
           </a:p>
@@ -16127,14 +16337,14 @@
       </p:sp>
       <p:sp>
         <p:nvSpPr>
-          <p:cNvPr id="43" name="Shape 41"/>
-          <p:cNvSpPr/>
-          <p:nvPr/>
-        </p:nvSpPr>
-        <p:spPr>
-          <a:xfrm>
-            <a:off x="3942207" y="4169664"/>
-            <a:ext cx="685800" cy="475488"/>
+          <p:cNvPr id="46" name="Shape 44"/>
+          <p:cNvSpPr/>
+          <p:nvPr/>
+        </p:nvSpPr>
+        <p:spPr>
+          <a:xfrm>
+            <a:off x="3258589" y="4169664"/>
+            <a:ext cx="603504" cy="475488"/>
           </a:xfrm>
           <a:prstGeom prst="rect">
             <a:avLst>
@@ -16154,14 +16364,14 @@
       </p:sp>
       <p:sp>
         <p:nvSpPr>
-          <p:cNvPr id="44" name="Text 42"/>
-          <p:cNvSpPr/>
-          <p:nvPr/>
-        </p:nvSpPr>
-        <p:spPr>
-          <a:xfrm>
-            <a:off x="3942207" y="4169664"/>
-            <a:ext cx="685800" cy="475488"/>
+          <p:cNvPr id="47" name="Text 45"/>
+          <p:cNvSpPr/>
+          <p:nvPr/>
+        </p:nvSpPr>
+        <p:spPr>
+          <a:xfrm>
+            <a:off x="3258589" y="4169664"/>
+            <a:ext cx="603504" cy="475488"/>
           </a:xfrm>
           <a:prstGeom prst="rect">
             <a:avLst/>
@@ -16185,7 +16395,7 @@
                 <a:ea typeface="Trebuchet MS" pitchFamily="34" charset="-122"/>
                 <a:cs typeface="Trebuchet MS" pitchFamily="34" charset="-120"/>
               </a:rPr>
-              <a:t>l</a:t>
+              <a:t>t</a:t>
             </a:r>
             <a:endParaRPr lang="en-US" sz="900" dirty="0"/>
           </a:p>
@@ -16193,14 +16403,14 @@
       </p:sp>
       <p:sp>
         <p:nvSpPr>
-          <p:cNvPr id="45" name="Shape 43"/>
-          <p:cNvSpPr/>
-          <p:nvPr/>
-        </p:nvSpPr>
-        <p:spPr>
-          <a:xfrm>
-            <a:off x="4850892" y="4169664"/>
-            <a:ext cx="685800" cy="475488"/>
+          <p:cNvPr id="48" name="Shape 46"/>
+          <p:cNvSpPr/>
+          <p:nvPr/>
+        </p:nvSpPr>
+        <p:spPr>
+          <a:xfrm>
+            <a:off x="3911969" y="4169664"/>
+            <a:ext cx="603504" cy="475488"/>
           </a:xfrm>
           <a:prstGeom prst="rect">
             <a:avLst>
@@ -16220,14 +16430,14 @@
       </p:sp>
       <p:sp>
         <p:nvSpPr>
-          <p:cNvPr id="46" name="Text 44"/>
-          <p:cNvSpPr/>
-          <p:nvPr/>
-        </p:nvSpPr>
-        <p:spPr>
-          <a:xfrm>
-            <a:off x="4850892" y="4169664"/>
-            <a:ext cx="685800" cy="475488"/>
+          <p:cNvPr id="49" name="Text 47"/>
+          <p:cNvSpPr/>
+          <p:nvPr/>
+        </p:nvSpPr>
+        <p:spPr>
+          <a:xfrm>
+            <a:off x="3911969" y="4169664"/>
+            <a:ext cx="603504" cy="475488"/>
           </a:xfrm>
           <a:prstGeom prst="rect">
             <a:avLst/>
@@ -16251,7 +16461,7 @@
                 <a:ea typeface="Trebuchet MS" pitchFamily="34" charset="-122"/>
                 <a:cs typeface="Trebuchet MS" pitchFamily="34" charset="-120"/>
               </a:rPr>
-              <a:t>i</a:t>
+              <a:t>er</a:t>
             </a:r>
             <a:endParaRPr lang="en-US" sz="900" dirty="0"/>
           </a:p>
@@ -16259,14 +16469,14 @@
       </p:sp>
       <p:sp>
         <p:nvSpPr>
-          <p:cNvPr id="47" name="Shape 45"/>
-          <p:cNvSpPr/>
-          <p:nvPr/>
-        </p:nvSpPr>
-        <p:spPr>
-          <a:xfrm>
-            <a:off x="5759577" y="4169664"/>
-            <a:ext cx="685800" cy="475488"/>
+          <p:cNvPr id="50" name="Shape 48"/>
+          <p:cNvSpPr/>
+          <p:nvPr/>
+        </p:nvSpPr>
+        <p:spPr>
+          <a:xfrm>
+            <a:off x="4565350" y="4169664"/>
+            <a:ext cx="603504" cy="475488"/>
           </a:xfrm>
           <a:prstGeom prst="rect">
             <a:avLst>
@@ -16286,14 +16496,14 @@
       </p:sp>
       <p:sp>
         <p:nvSpPr>
-          <p:cNvPr id="48" name="Text 46"/>
-          <p:cNvSpPr/>
-          <p:nvPr/>
-        </p:nvSpPr>
-        <p:spPr>
-          <a:xfrm>
-            <a:off x="5759577" y="4169664"/>
-            <a:ext cx="685800" cy="475488"/>
+          <p:cNvPr id="51" name="Text 49"/>
+          <p:cNvSpPr/>
+          <p:nvPr/>
+        </p:nvSpPr>
+        <p:spPr>
+          <a:xfrm>
+            <a:off x="4565350" y="4169664"/>
+            <a:ext cx="603504" cy="475488"/>
           </a:xfrm>
           <a:prstGeom prst="rect">
             <a:avLst/>
@@ -16317,7 +16527,7 @@
                 <a:ea typeface="Trebuchet MS" pitchFamily="34" charset="-122"/>
                 <a:cs typeface="Trebuchet MS" pitchFamily="34" charset="-120"/>
               </a:rPr>
-              <a:t>v</a:t>
+              <a:t>r</a:t>
             </a:r>
             <a:endParaRPr lang="en-US" sz="900" dirty="0"/>
           </a:p>
@@ -16325,14 +16535,14 @@
       </p:sp>
       <p:sp>
         <p:nvSpPr>
-          <p:cNvPr id="49" name="Shape 47"/>
-          <p:cNvSpPr/>
-          <p:nvPr/>
-        </p:nvSpPr>
-        <p:spPr>
-          <a:xfrm>
-            <a:off x="6668262" y="4169664"/>
-            <a:ext cx="685800" cy="475488"/>
+          <p:cNvPr id="52" name="Shape 50"/>
+          <p:cNvSpPr/>
+          <p:nvPr/>
+        </p:nvSpPr>
+        <p:spPr>
+          <a:xfrm>
+            <a:off x="5218730" y="4169664"/>
+            <a:ext cx="603504" cy="475488"/>
           </a:xfrm>
           <a:prstGeom prst="rect">
             <a:avLst>
@@ -16352,14 +16562,14 @@
       </p:sp>
       <p:sp>
         <p:nvSpPr>
-          <p:cNvPr id="50" name="Text 48"/>
-          <p:cNvSpPr/>
-          <p:nvPr/>
-        </p:nvSpPr>
-        <p:spPr>
-          <a:xfrm>
-            <a:off x="6668262" y="4169664"/>
-            <a:ext cx="685800" cy="475488"/>
+          <p:cNvPr id="53" name="Text 51"/>
+          <p:cNvSpPr/>
+          <p:nvPr/>
+        </p:nvSpPr>
+        <p:spPr>
+          <a:xfrm>
+            <a:off x="5218730" y="4169664"/>
+            <a:ext cx="603504" cy="475488"/>
           </a:xfrm>
           <a:prstGeom prst="rect">
             <a:avLst/>
@@ -16383,7 +16593,7 @@
                 <a:ea typeface="Trebuchet MS" pitchFamily="34" charset="-122"/>
                 <a:cs typeface="Trebuchet MS" pitchFamily="34" charset="-120"/>
               </a:rPr>
-              <a:t>er</a:t>
+              <a:t>u</a:t>
             </a:r>
             <a:endParaRPr lang="en-US" sz="900" dirty="0"/>
           </a:p>
@@ -16391,14 +16601,14 @@
       </p:sp>
       <p:sp>
         <p:nvSpPr>
-          <p:cNvPr id="51" name="Shape 49"/>
-          <p:cNvSpPr/>
-          <p:nvPr/>
-        </p:nvSpPr>
-        <p:spPr>
-          <a:xfrm>
-            <a:off x="7576947" y="4169664"/>
-            <a:ext cx="685800" cy="475488"/>
+          <p:cNvPr id="54" name="Shape 52"/>
+          <p:cNvSpPr/>
+          <p:nvPr/>
+        </p:nvSpPr>
+        <p:spPr>
+          <a:xfrm>
+            <a:off x="5872111" y="4169664"/>
+            <a:ext cx="603504" cy="475488"/>
           </a:xfrm>
           <a:prstGeom prst="rect">
             <a:avLst>
@@ -16418,14 +16628,14 @@
       </p:sp>
       <p:sp>
         <p:nvSpPr>
-          <p:cNvPr id="52" name="Text 50"/>
-          <p:cNvSpPr/>
-          <p:nvPr/>
-        </p:nvSpPr>
-        <p:spPr>
-          <a:xfrm>
-            <a:off x="7576947" y="4169664"/>
-            <a:ext cx="685800" cy="475488"/>
+          <p:cNvPr id="55" name="Text 53"/>
+          <p:cNvSpPr/>
+          <p:nvPr/>
+        </p:nvSpPr>
+        <p:spPr>
+          <a:xfrm>
+            <a:off x="5872111" y="4169664"/>
+            <a:ext cx="603504" cy="475488"/>
           </a:xfrm>
           <a:prstGeom prst="rect">
             <a:avLst/>
@@ -16449,7 +16659,205 @@
                 <a:ea typeface="Trebuchet MS" pitchFamily="34" charset="-122"/>
                 <a:cs typeface="Trebuchet MS" pitchFamily="34" charset="-120"/>
               </a:rPr>
-              <a:t>ed</a:t>
+              <a:t>p</a:t>
+            </a:r>
+            <a:endParaRPr lang="en-US" sz="900" dirty="0"/>
+          </a:p>
+        </p:txBody>
+      </p:sp>
+      <p:sp>
+        <p:nvSpPr>
+          <p:cNvPr id="56" name="Shape 54"/>
+          <p:cNvSpPr/>
+          <p:nvPr/>
+        </p:nvSpPr>
+        <p:spPr>
+          <a:xfrm>
+            <a:off x="6525491" y="4169664"/>
+            <a:ext cx="603504" cy="475488"/>
+          </a:xfrm>
+          <a:prstGeom prst="rect">
+            <a:avLst>
+              <a:gd name="adj" fmla="val 7692"/>
+            </a:avLst>
+          </a:prstGeom>
+          <a:solidFill>
+            <a:srgbClr val="FFFFFF"/>
+          </a:solidFill>
+          <a:ln w="12700">
+            <a:solidFill>
+              <a:srgbClr val="DB2777"/>
+            </a:solidFill>
+            <a:prstDash val="solid"/>
+          </a:ln>
+        </p:spPr>
+      </p:sp>
+      <p:sp>
+        <p:nvSpPr>
+          <p:cNvPr id="57" name="Text 55"/>
+          <p:cNvSpPr/>
+          <p:nvPr/>
+        </p:nvSpPr>
+        <p:spPr>
+          <a:xfrm>
+            <a:off x="6525491" y="4169664"/>
+            <a:ext cx="603504" cy="475488"/>
+          </a:xfrm>
+          <a:prstGeom prst="rect">
+            <a:avLst/>
+          </a:prstGeom>
+          <a:noFill/>
+          <a:ln/>
+        </p:spPr>
+        <p:txBody>
+          <a:bodyPr wrap="square" lIns="0" tIns="0" rIns="0" bIns="0" rtlCol="0" anchor="ctr"/>
+          <a:lstStyle/>
+          <a:p>
+            <a:pPr algn="ctr" indent="0" marL="0">
+              <a:buNone/>
+            </a:pPr>
+            <a:r>
+              <a:rPr lang="en-US" sz="900" b="1" dirty="0">
+                <a:solidFill>
+                  <a:srgbClr val="9D174D"/>
+                </a:solidFill>
+                <a:latin typeface="Trebuchet MS" pitchFamily="34" charset="0"/>
+                <a:ea typeface="Trebuchet MS" pitchFamily="34" charset="-122"/>
+                <a:cs typeface="Trebuchet MS" pitchFamily="34" charset="-120"/>
+              </a:rPr>
+              <a:t>t</a:t>
+            </a:r>
+            <a:endParaRPr lang="en-US" sz="900" dirty="0"/>
+          </a:p>
+        </p:txBody>
+      </p:sp>
+      <p:sp>
+        <p:nvSpPr>
+          <p:cNvPr id="58" name="Shape 56"/>
+          <p:cNvSpPr/>
+          <p:nvPr/>
+        </p:nvSpPr>
+        <p:spPr>
+          <a:xfrm>
+            <a:off x="7178871" y="4169664"/>
+            <a:ext cx="603504" cy="475488"/>
+          </a:xfrm>
+          <a:prstGeom prst="rect">
+            <a:avLst>
+              <a:gd name="adj" fmla="val 7692"/>
+            </a:avLst>
+          </a:prstGeom>
+          <a:solidFill>
+            <a:srgbClr val="FFFFFF"/>
+          </a:solidFill>
+          <a:ln w="12700">
+            <a:solidFill>
+              <a:srgbClr val="DB2777"/>
+            </a:solidFill>
+            <a:prstDash val="solid"/>
+          </a:ln>
+        </p:spPr>
+      </p:sp>
+      <p:sp>
+        <p:nvSpPr>
+          <p:cNvPr id="59" name="Text 57"/>
+          <p:cNvSpPr/>
+          <p:nvPr/>
+        </p:nvSpPr>
+        <p:spPr>
+          <a:xfrm>
+            <a:off x="7178871" y="4169664"/>
+            <a:ext cx="603504" cy="475488"/>
+          </a:xfrm>
+          <a:prstGeom prst="rect">
+            <a:avLst/>
+          </a:prstGeom>
+          <a:noFill/>
+          <a:ln/>
+        </p:spPr>
+        <p:txBody>
+          <a:bodyPr wrap="square" lIns="0" tIns="0" rIns="0" bIns="0" rtlCol="0" anchor="ctr"/>
+          <a:lstStyle/>
+          <a:p>
+            <a:pPr algn="ctr" indent="0" marL="0">
+              <a:buNone/>
+            </a:pPr>
+            <a:r>
+              <a:rPr lang="en-US" sz="900" b="1" dirty="0">
+                <a:solidFill>
+                  <a:srgbClr val="9D174D"/>
+                </a:solidFill>
+                <a:latin typeface="Trebuchet MS" pitchFamily="34" charset="0"/>
+                <a:ea typeface="Trebuchet MS" pitchFamily="34" charset="-122"/>
+                <a:cs typeface="Trebuchet MS" pitchFamily="34" charset="-120"/>
+              </a:rPr>
+              <a:t>e</a:t>
+            </a:r>
+            <a:endParaRPr lang="en-US" sz="900" dirty="0"/>
+          </a:p>
+        </p:txBody>
+      </p:sp>
+      <p:sp>
+        <p:nvSpPr>
+          <p:cNvPr id="60" name="Shape 58"/>
+          <p:cNvSpPr/>
+          <p:nvPr/>
+        </p:nvSpPr>
+        <p:spPr>
+          <a:xfrm>
+            <a:off x="7832252" y="4169664"/>
+            <a:ext cx="603504" cy="475488"/>
+          </a:xfrm>
+          <a:prstGeom prst="rect">
+            <a:avLst>
+              <a:gd name="adj" fmla="val 7692"/>
+            </a:avLst>
+          </a:prstGeom>
+          <a:solidFill>
+            <a:srgbClr val="FFFFFF"/>
+          </a:solidFill>
+          <a:ln w="12700">
+            <a:solidFill>
+              <a:srgbClr val="DB2777"/>
+            </a:solidFill>
+            <a:prstDash val="solid"/>
+          </a:ln>
+        </p:spPr>
+      </p:sp>
+      <p:sp>
+        <p:nvSpPr>
+          <p:cNvPr id="61" name="Text 59"/>
+          <p:cNvSpPr/>
+          <p:nvPr/>
+        </p:nvSpPr>
+        <p:spPr>
+          <a:xfrm>
+            <a:off x="7832252" y="4169664"/>
+            <a:ext cx="603504" cy="475488"/>
+          </a:xfrm>
+          <a:prstGeom prst="rect">
+            <a:avLst/>
+          </a:prstGeom>
+          <a:noFill/>
+          <a:ln/>
+        </p:spPr>
+        <p:txBody>
+          <a:bodyPr wrap="square" lIns="0" tIns="0" rIns="0" bIns="0" rtlCol="0" anchor="ctr"/>
+          <a:lstStyle/>
+          <a:p>
+            <a:pPr algn="ctr" indent="0" marL="0">
+              <a:buNone/>
+            </a:pPr>
+            <a:r>
+              <a:rPr lang="en-US" sz="900" b="1" dirty="0">
+                <a:solidFill>
+                  <a:srgbClr val="9D174D"/>
+                </a:solidFill>
+                <a:latin typeface="Trebuchet MS" pitchFamily="34" charset="0"/>
+                <a:ea typeface="Trebuchet MS" pitchFamily="34" charset="-122"/>
+                <a:cs typeface="Trebuchet MS" pitchFamily="34" charset="-120"/>
+              </a:rPr>
+              <a:t>d</a:t>
             </a:r>
             <a:endParaRPr lang="en-US" sz="900" dirty="0"/>
           </a:p>
@@ -17023,7 +17431,7 @@
                 <a:ea typeface="Calibri" pitchFamily="34" charset="-122"/>
                 <a:cs typeface="Calibri" pitchFamily="34" charset="-120"/>
               </a:rPr>
-              <a:t>Word Labs  •  wordlabs.app  •  Prefix: 'inter-' = between, among, together</a:t>
+              <a:t>Word Labs  •  wordlabs.app  •  Prefix: 'inter-' = between</a:t>
             </a:r>
             <a:endParaRPr lang="en-US" sz="800" dirty="0"/>
           </a:p>
@@ -17357,7 +17765,7 @@
                 <a:ea typeface="Trebuchet MS" pitchFamily="34" charset="-122"/>
                 <a:cs typeface="Trebuchet MS" pitchFamily="34" charset="-120"/>
               </a:rPr>
-              <a:t>2</a:t>
+              <a:t>0</a:t>
             </a:r>
             <a:pPr algn="ctr" indent="0" marL="0">
               <a:buNone/>
@@ -17371,7 +17779,7 @@
                 <a:ea typeface="Trebuchet MS" pitchFamily="34" charset="-122"/>
                 <a:cs typeface="Trebuchet MS" pitchFamily="34" charset="-120"/>
               </a:rPr>
-              <a:t>  punctuation marks</a:t>
+              <a:t>  punctuation mark</a:t>
             </a:r>
             <a:endParaRPr lang="en-US" sz="2800" dirty="0"/>
           </a:p>
@@ -17663,7 +18071,7 @@
                 <a:ea typeface="Calibri" pitchFamily="34" charset="-122"/>
                 <a:cs typeface="Calibri" pitchFamily="34" charset="-120"/>
               </a:rPr>
-              <a:t>Word Labs  •  wordlabs.app  •  Prefix: 'inter-' = between, among, together</a:t>
+              <a:t>Word Labs  •  wordlabs.app  •  Prefix: 'inter-' = between</a:t>
             </a:r>
             <a:endParaRPr lang="en-US" sz="800" dirty="0"/>
           </a:p>
@@ -17775,7 +18183,7 @@
                 <a:ea typeface="Calibri" pitchFamily="34" charset="-122"/>
                 <a:cs typeface="Calibri" pitchFamily="34" charset="-120"/>
               </a:rPr>
-              <a:t>During the </a:t>
+              <a:t>The meeting continued after a short </a:t>
             </a:r>
             <a:pPr algn="l" indent="0" marL="0">
               <a:buNone/>
@@ -17792,7 +18200,7 @@
                 <a:ea typeface="Calibri" pitchFamily="34" charset="-122"/>
                 <a:cs typeface="Calibri" pitchFamily="34" charset="-120"/>
               </a:rPr>
-              <a:t>interval</a:t>
+              <a:t>interruption</a:t>
             </a:r>
             <a:pPr algn="l" indent="0" marL="0">
               <a:buNone/>
@@ -17806,7 +18214,7 @@
                 <a:ea typeface="Calibri" pitchFamily="34" charset="-122"/>
                 <a:cs typeface="Calibri" pitchFamily="34" charset="-120"/>
               </a:rPr>
-              <a:t>, the </a:t>
+              <a:t>. Early </a:t>
             </a:r>
             <a:pPr algn="l" indent="0" marL="0">
               <a:buNone/>
@@ -17823,7 +18231,7 @@
                 <a:ea typeface="Calibri" pitchFamily="34" charset="-122"/>
                 <a:cs typeface="Calibri" pitchFamily="34" charset="-120"/>
               </a:rPr>
-              <a:t>interviewer</a:t>
+              <a:t>intervention</a:t>
             </a:r>
             <a:pPr algn="l" indent="0" marL="0">
               <a:buNone/>
@@ -17837,7 +18245,7 @@
                 <a:ea typeface="Calibri" pitchFamily="34" charset="-122"/>
                 <a:cs typeface="Calibri" pitchFamily="34" charset="-120"/>
               </a:rPr>
-              <a:t> asked the </a:t>
+              <a:t> helped the student catch up in reading. The school introduced several </a:t>
             </a:r>
             <a:pPr algn="l" indent="0" marL="0">
               <a:buNone/>
@@ -17854,7 +18262,7 @@
                 <a:ea typeface="Calibri" pitchFamily="34" charset="-122"/>
                 <a:cs typeface="Calibri" pitchFamily="34" charset="-120"/>
               </a:rPr>
-              <a:t>international</a:t>
+              <a:t>interventions</a:t>
             </a:r>
             <a:pPr algn="l" indent="0" marL="0">
               <a:buNone/>
@@ -17868,7 +18276,7 @@
                 <a:ea typeface="Calibri" pitchFamily="34" charset="-122"/>
                 <a:cs typeface="Calibri" pitchFamily="34" charset="-120"/>
               </a:rPr>
-              <a:t> singer about her favourite songs.</a:t>
+              <a:t> to support struggling readers.</a:t>
             </a:r>
             <a:endParaRPr lang="en-US" sz="1800" dirty="0"/>
           </a:p>
@@ -18023,7 +18431,7 @@
                 <a:ea typeface="Trebuchet MS" pitchFamily="34" charset="-122"/>
                 <a:cs typeface="Trebuchet MS" pitchFamily="34" charset="-120"/>
               </a:rPr>
-              <a:t>interval</a:t>
+              <a:t>interruption</a:t>
             </a:r>
             <a:endParaRPr lang="en-US" sz="1400" dirty="0"/>
           </a:p>
@@ -18151,7 +18559,7 @@
                 <a:ea typeface="Trebuchet MS" pitchFamily="34" charset="-122"/>
                 <a:cs typeface="Trebuchet MS" pitchFamily="34" charset="-120"/>
               </a:rPr>
-              <a:t>interviewer</a:t>
+              <a:t>intervention</a:t>
             </a:r>
             <a:endParaRPr lang="en-US" sz="1400" dirty="0"/>
           </a:p>
@@ -18279,7 +18687,7 @@
                 <a:ea typeface="Trebuchet MS" pitchFamily="34" charset="-122"/>
                 <a:cs typeface="Trebuchet MS" pitchFamily="34" charset="-120"/>
               </a:rPr>
-              <a:t>international</a:t>
+              <a:t>interventions</a:t>
             </a:r>
             <a:endParaRPr lang="en-US" sz="1400" dirty="0"/>
           </a:p>
@@ -18610,7 +19018,7 @@
                 <a:ea typeface="Calibri" pitchFamily="34" charset="-122"/>
                 <a:cs typeface="Calibri" pitchFamily="34" charset="-120"/>
               </a:rPr>
-              <a:t>Word Labs  •  wordlabs.app  •  Prefix: 'inter-' = between, among, together</a:t>
+              <a:t>Word Labs  •  wordlabs.app  •  Prefix: 'inter-' = between</a:t>
             </a:r>
             <a:endParaRPr lang="en-US" sz="800" dirty="0"/>
           </a:p>
@@ -18749,7 +19157,7 @@
                 <a:ea typeface="Trebuchet MS" pitchFamily="34" charset="-122"/>
                 <a:cs typeface="Trebuchet MS" pitchFamily="34" charset="-120"/>
               </a:rPr>
-              <a:t>interval</a:t>
+              <a:t>interruption</a:t>
             </a:r>
             <a:endParaRPr lang="en-US" sz="2800" dirty="0"/>
           </a:p>
@@ -19437,7 +19845,7 @@
                 <a:ea typeface="Calibri" pitchFamily="34" charset="-122"/>
                 <a:cs typeface="Calibri" pitchFamily="34" charset="-120"/>
               </a:rPr>
-              <a:t>Word Labs  •  wordlabs.app  •  Prefix: 'inter-' = between, among, together</a:t>
+              <a:t>Word Labs  •  wordlabs.app  •  Prefix: 'inter-' = between</a:t>
             </a:r>
             <a:endParaRPr lang="en-US" sz="800" dirty="0"/>
           </a:p>
@@ -19576,7 +19984,7 @@
                 <a:ea typeface="Trebuchet MS" pitchFamily="34" charset="-122"/>
                 <a:cs typeface="Trebuchet MS" pitchFamily="34" charset="-120"/>
               </a:rPr>
-              <a:t>interval</a:t>
+              <a:t>interruption</a:t>
             </a:r>
             <a:endParaRPr lang="en-US" sz="2800" dirty="0"/>
           </a:p>
@@ -19656,7 +20064,7 @@
         </p:nvSpPr>
         <p:spPr>
           <a:xfrm>
-            <a:off x="2938272" y="2258568"/>
+            <a:off x="2221992" y="2258568"/>
             <a:ext cx="1828800" cy="292608"/>
           </a:xfrm>
           <a:prstGeom prst="rect">
@@ -19690,7 +20098,7 @@
         </p:nvSpPr>
         <p:spPr>
           <a:xfrm>
-            <a:off x="2938272" y="2258568"/>
+            <a:off x="2221992" y="2258568"/>
             <a:ext cx="1828800" cy="292608"/>
           </a:xfrm>
           <a:prstGeom prst="rect">
@@ -19729,7 +20137,7 @@
         </p:nvSpPr>
         <p:spPr>
           <a:xfrm>
-            <a:off x="2938272" y="2569464"/>
+            <a:off x="2221992" y="2569464"/>
             <a:ext cx="1828800" cy="201168"/>
           </a:xfrm>
           <a:prstGeom prst="rect">
@@ -19768,7 +20176,7 @@
         </p:nvSpPr>
         <p:spPr>
           <a:xfrm>
-            <a:off x="5803392" y="2258568"/>
+            <a:off x="4370832" y="2258568"/>
             <a:ext cx="1828800" cy="292608"/>
           </a:xfrm>
           <a:prstGeom prst="rect">
@@ -19802,7 +20210,7 @@
         </p:nvSpPr>
         <p:spPr>
           <a:xfrm>
-            <a:off x="5803392" y="2258568"/>
+            <a:off x="4370832" y="2258568"/>
             <a:ext cx="1828800" cy="292608"/>
           </a:xfrm>
           <a:prstGeom prst="rect">
@@ -19827,7 +20235,7 @@
                 <a:ea typeface="Trebuchet MS" pitchFamily="34" charset="-122"/>
                 <a:cs typeface="Trebuchet MS" pitchFamily="34" charset="-120"/>
               </a:rPr>
-              <a:t>val</a:t>
+              <a:t>rupt</a:t>
             </a:r>
             <a:endParaRPr lang="en-US" sz="1300" dirty="0"/>
           </a:p>
@@ -19841,7 +20249,7 @@
         </p:nvSpPr>
         <p:spPr>
           <a:xfrm>
-            <a:off x="5803392" y="2569464"/>
+            <a:off x="4370832" y="2569464"/>
             <a:ext cx="1828800" cy="201168"/>
           </a:xfrm>
           <a:prstGeom prst="rect">
@@ -19866,7 +20274,7 @@
                 <a:ea typeface="Calibri" pitchFamily="34" charset="-122"/>
                 <a:cs typeface="Calibri" pitchFamily="34" charset="-120"/>
               </a:rPr>
-              <a:t>space, value</a:t>
+              <a:t>break</a:t>
             </a:r>
             <a:endParaRPr lang="en-US" sz="850" dirty="0"/>
           </a:p>
@@ -19875,6 +20283,118 @@
       <p:sp>
         <p:nvSpPr>
           <p:cNvPr id="22" name="Shape 20"/>
+          <p:cNvSpPr/>
+          <p:nvPr/>
+        </p:nvSpPr>
+        <p:spPr>
+          <a:xfrm>
+            <a:off x="6519672" y="2258568"/>
+            <a:ext cx="1828800" cy="292608"/>
+          </a:xfrm>
+          <a:prstGeom prst="rect">
+            <a:avLst>
+              <a:gd name="adj" fmla="val 25000"/>
+            </a:avLst>
+          </a:prstGeom>
+          <a:solidFill>
+            <a:srgbClr val="FCE7F3"/>
+          </a:solidFill>
+          <a:ln w="19050">
+            <a:solidFill>
+              <a:srgbClr val="DB2777"/>
+            </a:solidFill>
+            <a:prstDash val="solid"/>
+          </a:ln>
+          <a:effectLst>
+            <a:outerShdw sx="100000" sy="100000" kx="0" ky="0" algn="bl" rotWithShape="0" blurRad="101600" dist="38100" dir="8100000">
+              <a:srgbClr val="000000">
+                <a:alpha val="12000"/>
+              </a:srgbClr>
+            </a:outerShdw>
+          </a:effectLst>
+        </p:spPr>
+      </p:sp>
+      <p:sp>
+        <p:nvSpPr>
+          <p:cNvPr id="23" name="Text 21"/>
+          <p:cNvSpPr/>
+          <p:nvPr/>
+        </p:nvSpPr>
+        <p:spPr>
+          <a:xfrm>
+            <a:off x="6519672" y="2258568"/>
+            <a:ext cx="1828800" cy="292608"/>
+          </a:xfrm>
+          <a:prstGeom prst="rect">
+            <a:avLst/>
+          </a:prstGeom>
+          <a:noFill/>
+          <a:ln/>
+        </p:spPr>
+        <p:txBody>
+          <a:bodyPr wrap="square" lIns="0" tIns="0" rIns="0" bIns="0" rtlCol="0" anchor="ctr"/>
+          <a:lstStyle/>
+          <a:p>
+            <a:pPr algn="ctr" indent="0" marL="0">
+              <a:buNone/>
+            </a:pPr>
+            <a:r>
+              <a:rPr lang="en-US" sz="1300" b="1" dirty="0">
+                <a:solidFill>
+                  <a:srgbClr val="9D174D"/>
+                </a:solidFill>
+                <a:latin typeface="Trebuchet MS" pitchFamily="34" charset="0"/>
+                <a:ea typeface="Trebuchet MS" pitchFamily="34" charset="-122"/>
+                <a:cs typeface="Trebuchet MS" pitchFamily="34" charset="-120"/>
+              </a:rPr>
+              <a:t>ion</a:t>
+            </a:r>
+            <a:endParaRPr lang="en-US" sz="1300" dirty="0"/>
+          </a:p>
+        </p:txBody>
+      </p:sp>
+      <p:sp>
+        <p:nvSpPr>
+          <p:cNvPr id="24" name="Text 22"/>
+          <p:cNvSpPr/>
+          <p:nvPr/>
+        </p:nvSpPr>
+        <p:spPr>
+          <a:xfrm>
+            <a:off x="6519672" y="2569464"/>
+            <a:ext cx="1828800" cy="201168"/>
+          </a:xfrm>
+          <a:prstGeom prst="rect">
+            <a:avLst/>
+          </a:prstGeom>
+          <a:noFill/>
+          <a:ln/>
+        </p:spPr>
+        <p:txBody>
+          <a:bodyPr wrap="square" lIns="0" tIns="0" rIns="0" bIns="0" rtlCol="0" anchor="t"/>
+          <a:lstStyle/>
+          <a:p>
+            <a:pPr algn="ctr" indent="0" marL="0">
+              <a:buNone/>
+            </a:pPr>
+            <a:r>
+              <a:rPr lang="en-US" sz="850" dirty="0">
+                <a:solidFill>
+                  <a:srgbClr val="475569"/>
+                </a:solidFill>
+                <a:latin typeface="Calibri" pitchFamily="34" charset="0"/>
+                <a:ea typeface="Calibri" pitchFamily="34" charset="-122"/>
+                <a:cs typeface="Calibri" pitchFamily="34" charset="-120"/>
+              </a:rPr>
+              <a:t>act or result of</a:t>
+            </a:r>
+            <a:endParaRPr lang="en-US" sz="850" dirty="0"/>
+          </a:p>
+        </p:txBody>
+      </p:sp>
+      <p:sp>
+        <p:nvSpPr>
+          <p:cNvPr id="25" name="Shape 23"/>
           <p:cNvSpPr/>
           <p:nvPr/>
         </p:nvSpPr>
@@ -19901,7 +20421,7 @@
       </p:sp>
       <p:sp>
         <p:nvSpPr>
-          <p:cNvPr id="23" name="Text 21"/>
+          <p:cNvPr id="26" name="Text 24"/>
           <p:cNvSpPr/>
           <p:nvPr/>
         </p:nvSpPr>
@@ -19940,7 +20460,7 @@
       </p:sp>
       <p:sp>
         <p:nvSpPr>
-          <p:cNvPr id="24" name="Shape 22"/>
+          <p:cNvPr id="27" name="Shape 25"/>
           <p:cNvSpPr/>
           <p:nvPr/>
         </p:nvSpPr>
@@ -19967,7 +20487,7 @@
       </p:sp>
       <p:sp>
         <p:nvSpPr>
-          <p:cNvPr id="25" name="Text 23"/>
+          <p:cNvPr id="28" name="Text 26"/>
           <p:cNvSpPr/>
           <p:nvPr/>
         </p:nvSpPr>
@@ -20006,7 +20526,7 @@
       </p:sp>
       <p:sp>
         <p:nvSpPr>
-          <p:cNvPr id="26" name="Shape 24"/>
+          <p:cNvPr id="29" name="Shape 27"/>
           <p:cNvSpPr/>
           <p:nvPr/>
         </p:nvSpPr>
@@ -20033,7 +20553,7 @@
       </p:sp>
       <p:sp>
         <p:nvSpPr>
-          <p:cNvPr id="27" name="Text 25"/>
+          <p:cNvPr id="30" name="Text 28"/>
           <p:cNvSpPr/>
           <p:nvPr/>
         </p:nvSpPr>
@@ -20072,7 +20592,7 @@
       </p:sp>
       <p:sp>
         <p:nvSpPr>
-          <p:cNvPr id="28" name="Shape 26"/>
+          <p:cNvPr id="31" name="Shape 29"/>
           <p:cNvSpPr/>
           <p:nvPr/>
         </p:nvSpPr>
@@ -20099,7 +20619,7 @@
       </p:sp>
       <p:sp>
         <p:nvSpPr>
-          <p:cNvPr id="29" name="Text 27"/>
+          <p:cNvPr id="32" name="Text 30"/>
           <p:cNvSpPr/>
           <p:nvPr/>
         </p:nvSpPr>
@@ -20422,7 +20942,7 @@
                 <a:ea typeface="Calibri" pitchFamily="34" charset="-122"/>
                 <a:cs typeface="Calibri" pitchFamily="34" charset="-120"/>
               </a:rPr>
-              <a:t>Word Labs  •  wordlabs.app  •  Prefix: 'inter-' = between, among, together</a:t>
+              <a:t>Word Labs  •  wordlabs.app  •  Prefix: 'inter-' = between</a:t>
             </a:r>
             <a:endParaRPr lang="en-US" sz="800" dirty="0"/>
           </a:p>
@@ -20561,7 +21081,7 @@
                 <a:ea typeface="Trebuchet MS" pitchFamily="34" charset="-122"/>
                 <a:cs typeface="Trebuchet MS" pitchFamily="34" charset="-120"/>
               </a:rPr>
-              <a:t>interval</a:t>
+              <a:t>interruption</a:t>
             </a:r>
             <a:endParaRPr lang="en-US" sz="2800" dirty="0"/>
           </a:p>
@@ -20641,7 +21161,7 @@
         </p:nvSpPr>
         <p:spPr>
           <a:xfrm>
-            <a:off x="2938272" y="2258568"/>
+            <a:off x="2221992" y="2258568"/>
             <a:ext cx="1828800" cy="292608"/>
           </a:xfrm>
           <a:prstGeom prst="rect">
@@ -20675,7 +21195,7 @@
         </p:nvSpPr>
         <p:spPr>
           <a:xfrm>
-            <a:off x="2938272" y="2258568"/>
+            <a:off x="2221992" y="2258568"/>
             <a:ext cx="1828800" cy="292608"/>
           </a:xfrm>
           <a:prstGeom prst="rect">
@@ -20714,7 +21234,7 @@
         </p:nvSpPr>
         <p:spPr>
           <a:xfrm>
-            <a:off x="2938272" y="2569464"/>
+            <a:off x="2221992" y="2569464"/>
             <a:ext cx="1828800" cy="201168"/>
           </a:xfrm>
           <a:prstGeom prst="rect">
@@ -20753,7 +21273,7 @@
         </p:nvSpPr>
         <p:spPr>
           <a:xfrm>
-            <a:off x="5803392" y="2258568"/>
+            <a:off x="4370832" y="2258568"/>
             <a:ext cx="1828800" cy="292608"/>
           </a:xfrm>
           <a:prstGeom prst="rect">
@@ -20787,7 +21307,7 @@
         </p:nvSpPr>
         <p:spPr>
           <a:xfrm>
-            <a:off x="5803392" y="2258568"/>
+            <a:off x="4370832" y="2258568"/>
             <a:ext cx="1828800" cy="292608"/>
           </a:xfrm>
           <a:prstGeom prst="rect">
@@ -20812,7 +21332,7 @@
                 <a:ea typeface="Trebuchet MS" pitchFamily="34" charset="-122"/>
                 <a:cs typeface="Trebuchet MS" pitchFamily="34" charset="-120"/>
               </a:rPr>
-              <a:t>val</a:t>
+              <a:t>rupt</a:t>
             </a:r>
             <a:endParaRPr lang="en-US" sz="1300" dirty="0"/>
           </a:p>
@@ -20826,7 +21346,7 @@
         </p:nvSpPr>
         <p:spPr>
           <a:xfrm>
-            <a:off x="5803392" y="2569464"/>
+            <a:off x="4370832" y="2569464"/>
             <a:ext cx="1828800" cy="201168"/>
           </a:xfrm>
           <a:prstGeom prst="rect">
@@ -20851,7 +21371,7 @@
                 <a:ea typeface="Calibri" pitchFamily="34" charset="-122"/>
                 <a:cs typeface="Calibri" pitchFamily="34" charset="-120"/>
               </a:rPr>
-              <a:t>space, value</a:t>
+              <a:t>break</a:t>
             </a:r>
             <a:endParaRPr lang="en-US" sz="850" dirty="0"/>
           </a:p>
@@ -20860,6 +21380,118 @@
       <p:sp>
         <p:nvSpPr>
           <p:cNvPr id="22" name="Shape 20"/>
+          <p:cNvSpPr/>
+          <p:nvPr/>
+        </p:nvSpPr>
+        <p:spPr>
+          <a:xfrm>
+            <a:off x="6519672" y="2258568"/>
+            <a:ext cx="1828800" cy="292608"/>
+          </a:xfrm>
+          <a:prstGeom prst="rect">
+            <a:avLst>
+              <a:gd name="adj" fmla="val 25000"/>
+            </a:avLst>
+          </a:prstGeom>
+          <a:solidFill>
+            <a:srgbClr val="FCE7F3"/>
+          </a:solidFill>
+          <a:ln w="19050">
+            <a:solidFill>
+              <a:srgbClr val="DB2777"/>
+            </a:solidFill>
+            <a:prstDash val="solid"/>
+          </a:ln>
+          <a:effectLst>
+            <a:outerShdw sx="100000" sy="100000" kx="0" ky="0" algn="bl" rotWithShape="0" blurRad="101600" dist="38100" dir="8100000">
+              <a:srgbClr val="000000">
+                <a:alpha val="12000"/>
+              </a:srgbClr>
+            </a:outerShdw>
+          </a:effectLst>
+        </p:spPr>
+      </p:sp>
+      <p:sp>
+        <p:nvSpPr>
+          <p:cNvPr id="23" name="Text 21"/>
+          <p:cNvSpPr/>
+          <p:nvPr/>
+        </p:nvSpPr>
+        <p:spPr>
+          <a:xfrm>
+            <a:off x="6519672" y="2258568"/>
+            <a:ext cx="1828800" cy="292608"/>
+          </a:xfrm>
+          <a:prstGeom prst="rect">
+            <a:avLst/>
+          </a:prstGeom>
+          <a:noFill/>
+          <a:ln/>
+        </p:spPr>
+        <p:txBody>
+          <a:bodyPr wrap="square" lIns="0" tIns="0" rIns="0" bIns="0" rtlCol="0" anchor="ctr"/>
+          <a:lstStyle/>
+          <a:p>
+            <a:pPr algn="ctr" indent="0" marL="0">
+              <a:buNone/>
+            </a:pPr>
+            <a:r>
+              <a:rPr lang="en-US" sz="1300" b="1" dirty="0">
+                <a:solidFill>
+                  <a:srgbClr val="9D174D"/>
+                </a:solidFill>
+                <a:latin typeface="Trebuchet MS" pitchFamily="34" charset="0"/>
+                <a:ea typeface="Trebuchet MS" pitchFamily="34" charset="-122"/>
+                <a:cs typeface="Trebuchet MS" pitchFamily="34" charset="-120"/>
+              </a:rPr>
+              <a:t>ion</a:t>
+            </a:r>
+            <a:endParaRPr lang="en-US" sz="1300" dirty="0"/>
+          </a:p>
+        </p:txBody>
+      </p:sp>
+      <p:sp>
+        <p:nvSpPr>
+          <p:cNvPr id="24" name="Text 22"/>
+          <p:cNvSpPr/>
+          <p:nvPr/>
+        </p:nvSpPr>
+        <p:spPr>
+          <a:xfrm>
+            <a:off x="6519672" y="2569464"/>
+            <a:ext cx="1828800" cy="201168"/>
+          </a:xfrm>
+          <a:prstGeom prst="rect">
+            <a:avLst/>
+          </a:prstGeom>
+          <a:noFill/>
+          <a:ln/>
+        </p:spPr>
+        <p:txBody>
+          <a:bodyPr wrap="square" lIns="0" tIns="0" rIns="0" bIns="0" rtlCol="0" anchor="t"/>
+          <a:lstStyle/>
+          <a:p>
+            <a:pPr algn="ctr" indent="0" marL="0">
+              <a:buNone/>
+            </a:pPr>
+            <a:r>
+              <a:rPr lang="en-US" sz="850" dirty="0">
+                <a:solidFill>
+                  <a:srgbClr val="475569"/>
+                </a:solidFill>
+                <a:latin typeface="Calibri" pitchFamily="34" charset="0"/>
+                <a:ea typeface="Calibri" pitchFamily="34" charset="-122"/>
+                <a:cs typeface="Calibri" pitchFamily="34" charset="-120"/>
+              </a:rPr>
+              <a:t>act or result of</a:t>
+            </a:r>
+            <a:endParaRPr lang="en-US" sz="850" dirty="0"/>
+          </a:p>
+        </p:txBody>
+      </p:sp>
+      <p:sp>
+        <p:nvSpPr>
+          <p:cNvPr id="25" name="Shape 23"/>
           <p:cNvSpPr/>
           <p:nvPr/>
         </p:nvSpPr>
@@ -20886,7 +21518,7 @@
       </p:sp>
       <p:sp>
         <p:nvSpPr>
-          <p:cNvPr id="23" name="Text 21"/>
+          <p:cNvPr id="26" name="Text 24"/>
           <p:cNvSpPr/>
           <p:nvPr/>
         </p:nvSpPr>
@@ -20925,7 +21557,7 @@
       </p:sp>
       <p:sp>
         <p:nvSpPr>
-          <p:cNvPr id="24" name="Shape 22"/>
+          <p:cNvPr id="27" name="Shape 25"/>
           <p:cNvSpPr/>
           <p:nvPr/>
         </p:nvSpPr>
@@ -20952,14 +21584,14 @@
       </p:sp>
       <p:sp>
         <p:nvSpPr>
-          <p:cNvPr id="25" name="Shape 23"/>
-          <p:cNvSpPr/>
-          <p:nvPr/>
-        </p:nvSpPr>
-        <p:spPr>
-          <a:xfrm>
-            <a:off x="2313432" y="3364992"/>
-            <a:ext cx="1645920" cy="475488"/>
+          <p:cNvPr id="28" name="Shape 26"/>
+          <p:cNvSpPr/>
+          <p:nvPr/>
+        </p:nvSpPr>
+        <p:spPr>
+          <a:xfrm>
+            <a:off x="1975104" y="3364992"/>
+            <a:ext cx="1554480" cy="475488"/>
           </a:xfrm>
           <a:prstGeom prst="rect">
             <a:avLst>
@@ -20979,14 +21611,14 @@
       </p:sp>
       <p:sp>
         <p:nvSpPr>
-          <p:cNvPr id="26" name="Text 24"/>
-          <p:cNvSpPr/>
-          <p:nvPr/>
-        </p:nvSpPr>
-        <p:spPr>
-          <a:xfrm>
-            <a:off x="2313432" y="3364992"/>
-            <a:ext cx="1645920" cy="475488"/>
+          <p:cNvPr id="29" name="Text 27"/>
+          <p:cNvSpPr/>
+          <p:nvPr/>
+        </p:nvSpPr>
+        <p:spPr>
+          <a:xfrm>
+            <a:off x="1975104" y="3364992"/>
+            <a:ext cx="1554480" cy="475488"/>
           </a:xfrm>
           <a:prstGeom prst="rect">
             <a:avLst/>
@@ -21018,14 +21650,14 @@
       </p:sp>
       <p:sp>
         <p:nvSpPr>
-          <p:cNvPr id="27" name="Text 25"/>
-          <p:cNvSpPr/>
-          <p:nvPr/>
-        </p:nvSpPr>
-        <p:spPr>
-          <a:xfrm>
-            <a:off x="3959352" y="3364992"/>
-            <a:ext cx="411480" cy="475488"/>
+          <p:cNvPr id="30" name="Text 28"/>
+          <p:cNvSpPr/>
+          <p:nvPr/>
+        </p:nvSpPr>
+        <p:spPr>
+          <a:xfrm>
+            <a:off x="3529584" y="3364992"/>
+            <a:ext cx="73152" cy="475488"/>
           </a:xfrm>
           <a:prstGeom prst="rect">
             <a:avLst/>
@@ -21057,14 +21689,14 @@
       </p:sp>
       <p:sp>
         <p:nvSpPr>
-          <p:cNvPr id="28" name="Shape 26"/>
-          <p:cNvSpPr/>
-          <p:nvPr/>
-        </p:nvSpPr>
-        <p:spPr>
-          <a:xfrm>
-            <a:off x="4370832" y="3364992"/>
-            <a:ext cx="1645920" cy="475488"/>
+          <p:cNvPr id="31" name="Shape 29"/>
+          <p:cNvSpPr/>
+          <p:nvPr/>
+        </p:nvSpPr>
+        <p:spPr>
+          <a:xfrm>
+            <a:off x="3602736" y="3364992"/>
+            <a:ext cx="1554480" cy="475488"/>
           </a:xfrm>
           <a:prstGeom prst="rect">
             <a:avLst>
@@ -21084,14 +21716,14 @@
       </p:sp>
       <p:sp>
         <p:nvSpPr>
-          <p:cNvPr id="29" name="Text 27"/>
-          <p:cNvSpPr/>
-          <p:nvPr/>
-        </p:nvSpPr>
-        <p:spPr>
-          <a:xfrm>
-            <a:off x="4370832" y="3364992"/>
-            <a:ext cx="1645920" cy="475488"/>
+          <p:cNvPr id="32" name="Text 30"/>
+          <p:cNvSpPr/>
+          <p:nvPr/>
+        </p:nvSpPr>
+        <p:spPr>
+          <a:xfrm>
+            <a:off x="3602736" y="3364992"/>
+            <a:ext cx="1554480" cy="475488"/>
           </a:xfrm>
           <a:prstGeom prst="rect">
             <a:avLst/>
@@ -21123,14 +21755,14 @@
       </p:sp>
       <p:sp>
         <p:nvSpPr>
-          <p:cNvPr id="30" name="Text 28"/>
-          <p:cNvSpPr/>
-          <p:nvPr/>
-        </p:nvSpPr>
-        <p:spPr>
-          <a:xfrm>
-            <a:off x="6016752" y="3364992"/>
-            <a:ext cx="411480" cy="475488"/>
+          <p:cNvPr id="33" name="Text 31"/>
+          <p:cNvSpPr/>
+          <p:nvPr/>
+        </p:nvSpPr>
+        <p:spPr>
+          <a:xfrm>
+            <a:off x="5157216" y="3364992"/>
+            <a:ext cx="73152" cy="475488"/>
           </a:xfrm>
           <a:prstGeom prst="rect">
             <a:avLst/>
@@ -21162,14 +21794,14 @@
       </p:sp>
       <p:sp>
         <p:nvSpPr>
-          <p:cNvPr id="31" name="Shape 29"/>
-          <p:cNvSpPr/>
-          <p:nvPr/>
-        </p:nvSpPr>
-        <p:spPr>
-          <a:xfrm>
-            <a:off x="6428232" y="3364992"/>
-            <a:ext cx="1645920" cy="475488"/>
+          <p:cNvPr id="34" name="Shape 32"/>
+          <p:cNvSpPr/>
+          <p:nvPr/>
+        </p:nvSpPr>
+        <p:spPr>
+          <a:xfrm>
+            <a:off x="5230368" y="3364992"/>
+            <a:ext cx="1554480" cy="475488"/>
           </a:xfrm>
           <a:prstGeom prst="rect">
             <a:avLst>
@@ -21189,14 +21821,14 @@
       </p:sp>
       <p:sp>
         <p:nvSpPr>
-          <p:cNvPr id="32" name="Text 30"/>
-          <p:cNvSpPr/>
-          <p:nvPr/>
-        </p:nvSpPr>
-        <p:spPr>
-          <a:xfrm>
-            <a:off x="6428232" y="3364992"/>
-            <a:ext cx="1645920" cy="475488"/>
+          <p:cNvPr id="35" name="Text 33"/>
+          <p:cNvSpPr/>
+          <p:nvPr/>
+        </p:nvSpPr>
+        <p:spPr>
+          <a:xfrm>
+            <a:off x="5230368" y="3364992"/>
+            <a:ext cx="1554480" cy="475488"/>
           </a:xfrm>
           <a:prstGeom prst="rect">
             <a:avLst/>
@@ -21220,7 +21852,7 @@
                 <a:ea typeface="Trebuchet MS" pitchFamily="34" charset="-122"/>
                 <a:cs typeface="Trebuchet MS" pitchFamily="34" charset="-120"/>
               </a:rPr>
-              <a:t>val</a:t>
+              <a:t>rup</a:t>
             </a:r>
             <a:endParaRPr lang="en-US" sz="1400" dirty="0"/>
           </a:p>
@@ -21228,7 +21860,112 @@
       </p:sp>
       <p:sp>
         <p:nvSpPr>
-          <p:cNvPr id="33" name="Shape 31"/>
+          <p:cNvPr id="36" name="Text 34"/>
+          <p:cNvSpPr/>
+          <p:nvPr/>
+        </p:nvSpPr>
+        <p:spPr>
+          <a:xfrm>
+            <a:off x="6784848" y="3364992"/>
+            <a:ext cx="73152" cy="475488"/>
+          </a:xfrm>
+          <a:prstGeom prst="rect">
+            <a:avLst/>
+          </a:prstGeom>
+          <a:noFill/>
+          <a:ln/>
+        </p:spPr>
+        <p:txBody>
+          <a:bodyPr wrap="square" lIns="0" tIns="0" rIns="0" bIns="0" rtlCol="0" anchor="ctr"/>
+          <a:lstStyle/>
+          <a:p>
+            <a:pPr algn="ctr" indent="0" marL="0">
+              <a:buNone/>
+            </a:pPr>
+            <a:r>
+              <a:rPr lang="en-US" sz="1600" b="1" dirty="0">
+                <a:solidFill>
+                  <a:srgbClr val="0D9488"/>
+                </a:solidFill>
+                <a:latin typeface="Trebuchet MS" pitchFamily="34" charset="0"/>
+                <a:ea typeface="Trebuchet MS" pitchFamily="34" charset="-122"/>
+                <a:cs typeface="Trebuchet MS" pitchFamily="34" charset="-120"/>
+              </a:rPr>
+              <a:t>·</a:t>
+            </a:r>
+            <a:endParaRPr lang="en-US" sz="1600" dirty="0"/>
+          </a:p>
+        </p:txBody>
+      </p:sp>
+      <p:sp>
+        <p:nvSpPr>
+          <p:cNvPr id="37" name="Shape 35"/>
+          <p:cNvSpPr/>
+          <p:nvPr/>
+        </p:nvSpPr>
+        <p:spPr>
+          <a:xfrm>
+            <a:off x="6858000" y="3364992"/>
+            <a:ext cx="1554480" cy="475488"/>
+          </a:xfrm>
+          <a:prstGeom prst="rect">
+            <a:avLst>
+              <a:gd name="adj" fmla="val 9615"/>
+            </a:avLst>
+          </a:prstGeom>
+          <a:solidFill>
+            <a:srgbClr val="FFFFFF"/>
+          </a:solidFill>
+          <a:ln w="12700">
+            <a:solidFill>
+              <a:srgbClr val="0D9488"/>
+            </a:solidFill>
+            <a:prstDash val="solid"/>
+          </a:ln>
+        </p:spPr>
+      </p:sp>
+      <p:sp>
+        <p:nvSpPr>
+          <p:cNvPr id="38" name="Text 36"/>
+          <p:cNvSpPr/>
+          <p:nvPr/>
+        </p:nvSpPr>
+        <p:spPr>
+          <a:xfrm>
+            <a:off x="6858000" y="3364992"/>
+            <a:ext cx="1554480" cy="475488"/>
+          </a:xfrm>
+          <a:prstGeom prst="rect">
+            <a:avLst/>
+          </a:prstGeom>
+          <a:noFill/>
+          <a:ln/>
+        </p:spPr>
+        <p:txBody>
+          <a:bodyPr wrap="square" lIns="0" tIns="0" rIns="0" bIns="0" rtlCol="0" anchor="ctr"/>
+          <a:lstStyle/>
+          <a:p>
+            <a:pPr algn="ctr" indent="0" marL="0">
+              <a:buNone/>
+            </a:pPr>
+            <a:r>
+              <a:rPr lang="en-US" sz="1400" b="1" dirty="0">
+                <a:solidFill>
+                  <a:srgbClr val="0D9488"/>
+                </a:solidFill>
+                <a:latin typeface="Trebuchet MS" pitchFamily="34" charset="0"/>
+                <a:ea typeface="Trebuchet MS" pitchFamily="34" charset="-122"/>
+                <a:cs typeface="Trebuchet MS" pitchFamily="34" charset="-120"/>
+              </a:rPr>
+              <a:t>tion</a:t>
+            </a:r>
+            <a:endParaRPr lang="en-US" sz="1400" dirty="0"/>
+          </a:p>
+        </p:txBody>
+      </p:sp>
+      <p:sp>
+        <p:nvSpPr>
+          <p:cNvPr id="39" name="Shape 37"/>
           <p:cNvSpPr/>
           <p:nvPr/>
         </p:nvSpPr>
@@ -21255,7 +21992,7 @@
       </p:sp>
       <p:sp>
         <p:nvSpPr>
-          <p:cNvPr id="34" name="Text 32"/>
+          <p:cNvPr id="40" name="Text 38"/>
           <p:cNvSpPr/>
           <p:nvPr/>
         </p:nvSpPr>
@@ -21294,7 +22031,7 @@
       </p:sp>
       <p:sp>
         <p:nvSpPr>
-          <p:cNvPr id="35" name="Shape 33"/>
+          <p:cNvPr id="41" name="Shape 39"/>
           <p:cNvSpPr/>
           <p:nvPr/>
         </p:nvSpPr>
@@ -21321,7 +22058,7 @@
       </p:sp>
       <p:sp>
         <p:nvSpPr>
-          <p:cNvPr id="36" name="Text 34"/>
+          <p:cNvPr id="42" name="Text 40"/>
           <p:cNvSpPr/>
           <p:nvPr/>
         </p:nvSpPr>
@@ -21644,7 +22381,7 @@
                 <a:ea typeface="Calibri" pitchFamily="34" charset="-122"/>
                 <a:cs typeface="Calibri" pitchFamily="34" charset="-120"/>
               </a:rPr>
-              <a:t>Word Labs  •  wordlabs.app  •  Prefix: 'inter-' = between, among, together</a:t>
+              <a:t>Word Labs  •  wordlabs.app  •  Prefix: 'inter-' = between</a:t>
             </a:r>
             <a:endParaRPr lang="en-US" sz="800" dirty="0"/>
           </a:p>
@@ -21783,7 +22520,7 @@
                 <a:ea typeface="Trebuchet MS" pitchFamily="34" charset="-122"/>
                 <a:cs typeface="Trebuchet MS" pitchFamily="34" charset="-120"/>
               </a:rPr>
-              <a:t>interval</a:t>
+              <a:t>interruption</a:t>
             </a:r>
             <a:endParaRPr lang="en-US" sz="2800" dirty="0"/>
           </a:p>
@@ -21863,7 +22600,7 @@
         </p:nvSpPr>
         <p:spPr>
           <a:xfrm>
-            <a:off x="2938272" y="2258568"/>
+            <a:off x="2221992" y="2258568"/>
             <a:ext cx="1828800" cy="292608"/>
           </a:xfrm>
           <a:prstGeom prst="rect">
@@ -21897,7 +22634,7 @@
         </p:nvSpPr>
         <p:spPr>
           <a:xfrm>
-            <a:off x="2938272" y="2258568"/>
+            <a:off x="2221992" y="2258568"/>
             <a:ext cx="1828800" cy="292608"/>
           </a:xfrm>
           <a:prstGeom prst="rect">
@@ -21936,7 +22673,7 @@
         </p:nvSpPr>
         <p:spPr>
           <a:xfrm>
-            <a:off x="2938272" y="2569464"/>
+            <a:off x="2221992" y="2569464"/>
             <a:ext cx="1828800" cy="201168"/>
           </a:xfrm>
           <a:prstGeom prst="rect">
@@ -21975,7 +22712,7 @@
         </p:nvSpPr>
         <p:spPr>
           <a:xfrm>
-            <a:off x="5803392" y="2258568"/>
+            <a:off x="4370832" y="2258568"/>
             <a:ext cx="1828800" cy="292608"/>
           </a:xfrm>
           <a:prstGeom prst="rect">
@@ -22009,7 +22746,7 @@
         </p:nvSpPr>
         <p:spPr>
           <a:xfrm>
-            <a:off x="5803392" y="2258568"/>
+            <a:off x="4370832" y="2258568"/>
             <a:ext cx="1828800" cy="292608"/>
           </a:xfrm>
           <a:prstGeom prst="rect">
@@ -22034,7 +22771,7 @@
                 <a:ea typeface="Trebuchet MS" pitchFamily="34" charset="-122"/>
                 <a:cs typeface="Trebuchet MS" pitchFamily="34" charset="-120"/>
               </a:rPr>
-              <a:t>val</a:t>
+              <a:t>rupt</a:t>
             </a:r>
             <a:endParaRPr lang="en-US" sz="1300" dirty="0"/>
           </a:p>
@@ -22048,7 +22785,7 @@
         </p:nvSpPr>
         <p:spPr>
           <a:xfrm>
-            <a:off x="5803392" y="2569464"/>
+            <a:off x="4370832" y="2569464"/>
             <a:ext cx="1828800" cy="201168"/>
           </a:xfrm>
           <a:prstGeom prst="rect">
@@ -22073,7 +22810,7 @@
                 <a:ea typeface="Calibri" pitchFamily="34" charset="-122"/>
                 <a:cs typeface="Calibri" pitchFamily="34" charset="-120"/>
               </a:rPr>
-              <a:t>space, value</a:t>
+              <a:t>break</a:t>
             </a:r>
             <a:endParaRPr lang="en-US" sz="850" dirty="0"/>
           </a:p>
@@ -22082,6 +22819,118 @@
       <p:sp>
         <p:nvSpPr>
           <p:cNvPr id="22" name="Shape 20"/>
+          <p:cNvSpPr/>
+          <p:nvPr/>
+        </p:nvSpPr>
+        <p:spPr>
+          <a:xfrm>
+            <a:off x="6519672" y="2258568"/>
+            <a:ext cx="1828800" cy="292608"/>
+          </a:xfrm>
+          <a:prstGeom prst="rect">
+            <a:avLst>
+              <a:gd name="adj" fmla="val 25000"/>
+            </a:avLst>
+          </a:prstGeom>
+          <a:solidFill>
+            <a:srgbClr val="FCE7F3"/>
+          </a:solidFill>
+          <a:ln w="19050">
+            <a:solidFill>
+              <a:srgbClr val="DB2777"/>
+            </a:solidFill>
+            <a:prstDash val="solid"/>
+          </a:ln>
+          <a:effectLst>
+            <a:outerShdw sx="100000" sy="100000" kx="0" ky="0" algn="bl" rotWithShape="0" blurRad="101600" dist="38100" dir="8100000">
+              <a:srgbClr val="000000">
+                <a:alpha val="12000"/>
+              </a:srgbClr>
+            </a:outerShdw>
+          </a:effectLst>
+        </p:spPr>
+      </p:sp>
+      <p:sp>
+        <p:nvSpPr>
+          <p:cNvPr id="23" name="Text 21"/>
+          <p:cNvSpPr/>
+          <p:nvPr/>
+        </p:nvSpPr>
+        <p:spPr>
+          <a:xfrm>
+            <a:off x="6519672" y="2258568"/>
+            <a:ext cx="1828800" cy="292608"/>
+          </a:xfrm>
+          <a:prstGeom prst="rect">
+            <a:avLst/>
+          </a:prstGeom>
+          <a:noFill/>
+          <a:ln/>
+        </p:spPr>
+        <p:txBody>
+          <a:bodyPr wrap="square" lIns="0" tIns="0" rIns="0" bIns="0" rtlCol="0" anchor="ctr"/>
+          <a:lstStyle/>
+          <a:p>
+            <a:pPr algn="ctr" indent="0" marL="0">
+              <a:buNone/>
+            </a:pPr>
+            <a:r>
+              <a:rPr lang="en-US" sz="1300" b="1" dirty="0">
+                <a:solidFill>
+                  <a:srgbClr val="9D174D"/>
+                </a:solidFill>
+                <a:latin typeface="Trebuchet MS" pitchFamily="34" charset="0"/>
+                <a:ea typeface="Trebuchet MS" pitchFamily="34" charset="-122"/>
+                <a:cs typeface="Trebuchet MS" pitchFamily="34" charset="-120"/>
+              </a:rPr>
+              <a:t>ion</a:t>
+            </a:r>
+            <a:endParaRPr lang="en-US" sz="1300" dirty="0"/>
+          </a:p>
+        </p:txBody>
+      </p:sp>
+      <p:sp>
+        <p:nvSpPr>
+          <p:cNvPr id="24" name="Text 22"/>
+          <p:cNvSpPr/>
+          <p:nvPr/>
+        </p:nvSpPr>
+        <p:spPr>
+          <a:xfrm>
+            <a:off x="6519672" y="2569464"/>
+            <a:ext cx="1828800" cy="201168"/>
+          </a:xfrm>
+          <a:prstGeom prst="rect">
+            <a:avLst/>
+          </a:prstGeom>
+          <a:noFill/>
+          <a:ln/>
+        </p:spPr>
+        <p:txBody>
+          <a:bodyPr wrap="square" lIns="0" tIns="0" rIns="0" bIns="0" rtlCol="0" anchor="t"/>
+          <a:lstStyle/>
+          <a:p>
+            <a:pPr algn="ctr" indent="0" marL="0">
+              <a:buNone/>
+            </a:pPr>
+            <a:r>
+              <a:rPr lang="en-US" sz="850" dirty="0">
+                <a:solidFill>
+                  <a:srgbClr val="475569"/>
+                </a:solidFill>
+                <a:latin typeface="Calibri" pitchFamily="34" charset="0"/>
+                <a:ea typeface="Calibri" pitchFamily="34" charset="-122"/>
+                <a:cs typeface="Calibri" pitchFamily="34" charset="-120"/>
+              </a:rPr>
+              <a:t>act or result of</a:t>
+            </a:r>
+            <a:endParaRPr lang="en-US" sz="850" dirty="0"/>
+          </a:p>
+        </p:txBody>
+      </p:sp>
+      <p:sp>
+        <p:nvSpPr>
+          <p:cNvPr id="25" name="Shape 23"/>
           <p:cNvSpPr/>
           <p:nvPr/>
         </p:nvSpPr>
@@ -22108,7 +22957,7 @@
       </p:sp>
       <p:sp>
         <p:nvSpPr>
-          <p:cNvPr id="23" name="Text 21"/>
+          <p:cNvPr id="26" name="Text 24"/>
           <p:cNvSpPr/>
           <p:nvPr/>
         </p:nvSpPr>
@@ -22147,7 +22996,7 @@
       </p:sp>
       <p:sp>
         <p:nvSpPr>
-          <p:cNvPr id="24" name="Shape 22"/>
+          <p:cNvPr id="27" name="Shape 25"/>
           <p:cNvSpPr/>
           <p:nvPr/>
         </p:nvSpPr>
@@ -22174,14 +23023,14 @@
       </p:sp>
       <p:sp>
         <p:nvSpPr>
-          <p:cNvPr id="25" name="Shape 23"/>
-          <p:cNvSpPr/>
-          <p:nvPr/>
-        </p:nvSpPr>
-        <p:spPr>
-          <a:xfrm>
-            <a:off x="2313432" y="3364992"/>
-            <a:ext cx="1645920" cy="475488"/>
+          <p:cNvPr id="28" name="Shape 26"/>
+          <p:cNvSpPr/>
+          <p:nvPr/>
+        </p:nvSpPr>
+        <p:spPr>
+          <a:xfrm>
+            <a:off x="1975104" y="3364992"/>
+            <a:ext cx="1554480" cy="475488"/>
           </a:xfrm>
           <a:prstGeom prst="rect">
             <a:avLst>
@@ -22201,14 +23050,14 @@
       </p:sp>
       <p:sp>
         <p:nvSpPr>
-          <p:cNvPr id="26" name="Text 24"/>
-          <p:cNvSpPr/>
-          <p:nvPr/>
-        </p:nvSpPr>
-        <p:spPr>
-          <a:xfrm>
-            <a:off x="2313432" y="3364992"/>
-            <a:ext cx="1645920" cy="475488"/>
+          <p:cNvPr id="29" name="Text 27"/>
+          <p:cNvSpPr/>
+          <p:nvPr/>
+        </p:nvSpPr>
+        <p:spPr>
+          <a:xfrm>
+            <a:off x="1975104" y="3364992"/>
+            <a:ext cx="1554480" cy="475488"/>
           </a:xfrm>
           <a:prstGeom prst="rect">
             <a:avLst/>
@@ -22240,14 +23089,14 @@
       </p:sp>
       <p:sp>
         <p:nvSpPr>
-          <p:cNvPr id="27" name="Text 25"/>
-          <p:cNvSpPr/>
-          <p:nvPr/>
-        </p:nvSpPr>
-        <p:spPr>
-          <a:xfrm>
-            <a:off x="3959352" y="3364992"/>
-            <a:ext cx="411480" cy="475488"/>
+          <p:cNvPr id="30" name="Text 28"/>
+          <p:cNvSpPr/>
+          <p:nvPr/>
+        </p:nvSpPr>
+        <p:spPr>
+          <a:xfrm>
+            <a:off x="3529584" y="3364992"/>
+            <a:ext cx="73152" cy="475488"/>
           </a:xfrm>
           <a:prstGeom prst="rect">
             <a:avLst/>
@@ -22279,14 +23128,14 @@
       </p:sp>
       <p:sp>
         <p:nvSpPr>
-          <p:cNvPr id="28" name="Shape 26"/>
-          <p:cNvSpPr/>
-          <p:nvPr/>
-        </p:nvSpPr>
-        <p:spPr>
-          <a:xfrm>
-            <a:off x="4370832" y="3364992"/>
-            <a:ext cx="1645920" cy="475488"/>
+          <p:cNvPr id="31" name="Shape 29"/>
+          <p:cNvSpPr/>
+          <p:nvPr/>
+        </p:nvSpPr>
+        <p:spPr>
+          <a:xfrm>
+            <a:off x="3602736" y="3364992"/>
+            <a:ext cx="1554480" cy="475488"/>
           </a:xfrm>
           <a:prstGeom prst="rect">
             <a:avLst>
@@ -22306,14 +23155,14 @@
       </p:sp>
       <p:sp>
         <p:nvSpPr>
-          <p:cNvPr id="29" name="Text 27"/>
-          <p:cNvSpPr/>
-          <p:nvPr/>
-        </p:nvSpPr>
-        <p:spPr>
-          <a:xfrm>
-            <a:off x="4370832" y="3364992"/>
-            <a:ext cx="1645920" cy="475488"/>
+          <p:cNvPr id="32" name="Text 30"/>
+          <p:cNvSpPr/>
+          <p:nvPr/>
+        </p:nvSpPr>
+        <p:spPr>
+          <a:xfrm>
+            <a:off x="3602736" y="3364992"/>
+            <a:ext cx="1554480" cy="475488"/>
           </a:xfrm>
           <a:prstGeom prst="rect">
             <a:avLst/>
@@ -22345,14 +23194,14 @@
       </p:sp>
       <p:sp>
         <p:nvSpPr>
-          <p:cNvPr id="30" name="Text 28"/>
-          <p:cNvSpPr/>
-          <p:nvPr/>
-        </p:nvSpPr>
-        <p:spPr>
-          <a:xfrm>
-            <a:off x="6016752" y="3364992"/>
-            <a:ext cx="411480" cy="475488"/>
+          <p:cNvPr id="33" name="Text 31"/>
+          <p:cNvSpPr/>
+          <p:nvPr/>
+        </p:nvSpPr>
+        <p:spPr>
+          <a:xfrm>
+            <a:off x="5157216" y="3364992"/>
+            <a:ext cx="73152" cy="475488"/>
           </a:xfrm>
           <a:prstGeom prst="rect">
             <a:avLst/>
@@ -22384,14 +23233,14 @@
       </p:sp>
       <p:sp>
         <p:nvSpPr>
-          <p:cNvPr id="31" name="Shape 29"/>
-          <p:cNvSpPr/>
-          <p:nvPr/>
-        </p:nvSpPr>
-        <p:spPr>
-          <a:xfrm>
-            <a:off x="6428232" y="3364992"/>
-            <a:ext cx="1645920" cy="475488"/>
+          <p:cNvPr id="34" name="Shape 32"/>
+          <p:cNvSpPr/>
+          <p:nvPr/>
+        </p:nvSpPr>
+        <p:spPr>
+          <a:xfrm>
+            <a:off x="5230368" y="3364992"/>
+            <a:ext cx="1554480" cy="475488"/>
           </a:xfrm>
           <a:prstGeom prst="rect">
             <a:avLst>
@@ -22411,14 +23260,14 @@
       </p:sp>
       <p:sp>
         <p:nvSpPr>
-          <p:cNvPr id="32" name="Text 30"/>
-          <p:cNvSpPr/>
-          <p:nvPr/>
-        </p:nvSpPr>
-        <p:spPr>
-          <a:xfrm>
-            <a:off x="6428232" y="3364992"/>
-            <a:ext cx="1645920" cy="475488"/>
+          <p:cNvPr id="35" name="Text 33"/>
+          <p:cNvSpPr/>
+          <p:nvPr/>
+        </p:nvSpPr>
+        <p:spPr>
+          <a:xfrm>
+            <a:off x="5230368" y="3364992"/>
+            <a:ext cx="1554480" cy="475488"/>
           </a:xfrm>
           <a:prstGeom prst="rect">
             <a:avLst/>
@@ -22442,7 +23291,7 @@
                 <a:ea typeface="Trebuchet MS" pitchFamily="34" charset="-122"/>
                 <a:cs typeface="Trebuchet MS" pitchFamily="34" charset="-120"/>
               </a:rPr>
-              <a:t>val</a:t>
+              <a:t>rup</a:t>
             </a:r>
             <a:endParaRPr lang="en-US" sz="1400" dirty="0"/>
           </a:p>
@@ -22450,7 +23299,112 @@
       </p:sp>
       <p:sp>
         <p:nvSpPr>
-          <p:cNvPr id="33" name="Shape 31"/>
+          <p:cNvPr id="36" name="Text 34"/>
+          <p:cNvSpPr/>
+          <p:nvPr/>
+        </p:nvSpPr>
+        <p:spPr>
+          <a:xfrm>
+            <a:off x="6784848" y="3364992"/>
+            <a:ext cx="73152" cy="475488"/>
+          </a:xfrm>
+          <a:prstGeom prst="rect">
+            <a:avLst/>
+          </a:prstGeom>
+          <a:noFill/>
+          <a:ln/>
+        </p:spPr>
+        <p:txBody>
+          <a:bodyPr wrap="square" lIns="0" tIns="0" rIns="0" bIns="0" rtlCol="0" anchor="ctr"/>
+          <a:lstStyle/>
+          <a:p>
+            <a:pPr algn="ctr" indent="0" marL="0">
+              <a:buNone/>
+            </a:pPr>
+            <a:r>
+              <a:rPr lang="en-US" sz="1600" b="1" dirty="0">
+                <a:solidFill>
+                  <a:srgbClr val="0D9488"/>
+                </a:solidFill>
+                <a:latin typeface="Trebuchet MS" pitchFamily="34" charset="0"/>
+                <a:ea typeface="Trebuchet MS" pitchFamily="34" charset="-122"/>
+                <a:cs typeface="Trebuchet MS" pitchFamily="34" charset="-120"/>
+              </a:rPr>
+              <a:t>·</a:t>
+            </a:r>
+            <a:endParaRPr lang="en-US" sz="1600" dirty="0"/>
+          </a:p>
+        </p:txBody>
+      </p:sp>
+      <p:sp>
+        <p:nvSpPr>
+          <p:cNvPr id="37" name="Shape 35"/>
+          <p:cNvSpPr/>
+          <p:nvPr/>
+        </p:nvSpPr>
+        <p:spPr>
+          <a:xfrm>
+            <a:off x="6858000" y="3364992"/>
+            <a:ext cx="1554480" cy="475488"/>
+          </a:xfrm>
+          <a:prstGeom prst="rect">
+            <a:avLst>
+              <a:gd name="adj" fmla="val 9615"/>
+            </a:avLst>
+          </a:prstGeom>
+          <a:solidFill>
+            <a:srgbClr val="FFFFFF"/>
+          </a:solidFill>
+          <a:ln w="12700">
+            <a:solidFill>
+              <a:srgbClr val="0D9488"/>
+            </a:solidFill>
+            <a:prstDash val="solid"/>
+          </a:ln>
+        </p:spPr>
+      </p:sp>
+      <p:sp>
+        <p:nvSpPr>
+          <p:cNvPr id="38" name="Text 36"/>
+          <p:cNvSpPr/>
+          <p:nvPr/>
+        </p:nvSpPr>
+        <p:spPr>
+          <a:xfrm>
+            <a:off x="6858000" y="3364992"/>
+            <a:ext cx="1554480" cy="475488"/>
+          </a:xfrm>
+          <a:prstGeom prst="rect">
+            <a:avLst/>
+          </a:prstGeom>
+          <a:noFill/>
+          <a:ln/>
+        </p:spPr>
+        <p:txBody>
+          <a:bodyPr wrap="square" lIns="0" tIns="0" rIns="0" bIns="0" rtlCol="0" anchor="ctr"/>
+          <a:lstStyle/>
+          <a:p>
+            <a:pPr algn="ctr" indent="0" marL="0">
+              <a:buNone/>
+            </a:pPr>
+            <a:r>
+              <a:rPr lang="en-US" sz="1400" b="1" dirty="0">
+                <a:solidFill>
+                  <a:srgbClr val="0D9488"/>
+                </a:solidFill>
+                <a:latin typeface="Trebuchet MS" pitchFamily="34" charset="0"/>
+                <a:ea typeface="Trebuchet MS" pitchFamily="34" charset="-122"/>
+                <a:cs typeface="Trebuchet MS" pitchFamily="34" charset="-120"/>
+              </a:rPr>
+              <a:t>tion</a:t>
+            </a:r>
+            <a:endParaRPr lang="en-US" sz="1400" dirty="0"/>
+          </a:p>
+        </p:txBody>
+      </p:sp>
+      <p:sp>
+        <p:nvSpPr>
+          <p:cNvPr id="39" name="Shape 37"/>
           <p:cNvSpPr/>
           <p:nvPr/>
         </p:nvSpPr>
@@ -22477,7 +23431,7 @@
       </p:sp>
       <p:sp>
         <p:nvSpPr>
-          <p:cNvPr id="34" name="Text 32"/>
+          <p:cNvPr id="40" name="Text 38"/>
           <p:cNvSpPr/>
           <p:nvPr/>
         </p:nvSpPr>
@@ -22516,7 +23470,7 @@
       </p:sp>
       <p:sp>
         <p:nvSpPr>
-          <p:cNvPr id="35" name="Shape 33"/>
+          <p:cNvPr id="41" name="Shape 39"/>
           <p:cNvSpPr/>
           <p:nvPr/>
         </p:nvSpPr>
@@ -22543,14 +23497,14 @@
       </p:sp>
       <p:sp>
         <p:nvSpPr>
-          <p:cNvPr id="36" name="Shape 34"/>
-          <p:cNvSpPr/>
-          <p:nvPr/>
-        </p:nvSpPr>
-        <p:spPr>
-          <a:xfrm>
-            <a:off x="2124837" y="4169664"/>
-            <a:ext cx="685800" cy="475488"/>
+          <p:cNvPr id="42" name="Shape 40"/>
+          <p:cNvSpPr/>
+          <p:nvPr/>
+        </p:nvSpPr>
+        <p:spPr>
+          <a:xfrm>
+            <a:off x="1951828" y="4169664"/>
+            <a:ext cx="603504" cy="475488"/>
           </a:xfrm>
           <a:prstGeom prst="rect">
             <a:avLst>
@@ -22570,14 +23524,14 @@
       </p:sp>
       <p:sp>
         <p:nvSpPr>
-          <p:cNvPr id="37" name="Text 35"/>
-          <p:cNvSpPr/>
-          <p:nvPr/>
-        </p:nvSpPr>
-        <p:spPr>
-          <a:xfrm>
-            <a:off x="2124837" y="4169664"/>
-            <a:ext cx="685800" cy="475488"/>
+          <p:cNvPr id="43" name="Text 41"/>
+          <p:cNvSpPr/>
+          <p:nvPr/>
+        </p:nvSpPr>
+        <p:spPr>
+          <a:xfrm>
+            <a:off x="1951828" y="4169664"/>
+            <a:ext cx="603504" cy="475488"/>
           </a:xfrm>
           <a:prstGeom prst="rect">
             <a:avLst/>
@@ -22609,14 +23563,14 @@
       </p:sp>
       <p:sp>
         <p:nvSpPr>
-          <p:cNvPr id="38" name="Shape 36"/>
-          <p:cNvSpPr/>
-          <p:nvPr/>
-        </p:nvSpPr>
-        <p:spPr>
-          <a:xfrm>
-            <a:off x="3033522" y="4169664"/>
-            <a:ext cx="685800" cy="475488"/>
+          <p:cNvPr id="44" name="Shape 42"/>
+          <p:cNvSpPr/>
+          <p:nvPr/>
+        </p:nvSpPr>
+        <p:spPr>
+          <a:xfrm>
+            <a:off x="2605209" y="4169664"/>
+            <a:ext cx="603504" cy="475488"/>
           </a:xfrm>
           <a:prstGeom prst="rect">
             <a:avLst>
@@ -22636,14 +23590,14 @@
       </p:sp>
       <p:sp>
         <p:nvSpPr>
-          <p:cNvPr id="39" name="Text 37"/>
-          <p:cNvSpPr/>
-          <p:nvPr/>
-        </p:nvSpPr>
-        <p:spPr>
-          <a:xfrm>
-            <a:off x="3033522" y="4169664"/>
-            <a:ext cx="685800" cy="475488"/>
+          <p:cNvPr id="45" name="Text 43"/>
+          <p:cNvSpPr/>
+          <p:nvPr/>
+        </p:nvSpPr>
+        <p:spPr>
+          <a:xfrm>
+            <a:off x="2605209" y="4169664"/>
+            <a:ext cx="603504" cy="475488"/>
           </a:xfrm>
           <a:prstGeom prst="rect">
             <a:avLst/>
@@ -22675,14 +23629,14 @@
       </p:sp>
       <p:sp>
         <p:nvSpPr>
-          <p:cNvPr id="40" name="Shape 38"/>
-          <p:cNvSpPr/>
-          <p:nvPr/>
-        </p:nvSpPr>
-        <p:spPr>
-          <a:xfrm>
-            <a:off x="3942207" y="4169664"/>
-            <a:ext cx="685800" cy="475488"/>
+          <p:cNvPr id="46" name="Shape 44"/>
+          <p:cNvSpPr/>
+          <p:nvPr/>
+        </p:nvSpPr>
+        <p:spPr>
+          <a:xfrm>
+            <a:off x="3258589" y="4169664"/>
+            <a:ext cx="603504" cy="475488"/>
           </a:xfrm>
           <a:prstGeom prst="rect">
             <a:avLst>
@@ -22702,14 +23656,14 @@
       </p:sp>
       <p:sp>
         <p:nvSpPr>
-          <p:cNvPr id="41" name="Text 39"/>
-          <p:cNvSpPr/>
-          <p:nvPr/>
-        </p:nvSpPr>
-        <p:spPr>
-          <a:xfrm>
-            <a:off x="3942207" y="4169664"/>
-            <a:ext cx="685800" cy="475488"/>
+          <p:cNvPr id="47" name="Text 45"/>
+          <p:cNvSpPr/>
+          <p:nvPr/>
+        </p:nvSpPr>
+        <p:spPr>
+          <a:xfrm>
+            <a:off x="3258589" y="4169664"/>
+            <a:ext cx="603504" cy="475488"/>
           </a:xfrm>
           <a:prstGeom prst="rect">
             <a:avLst/>
@@ -22741,14 +23695,14 @@
       </p:sp>
       <p:sp>
         <p:nvSpPr>
-          <p:cNvPr id="42" name="Shape 40"/>
-          <p:cNvSpPr/>
-          <p:nvPr/>
-        </p:nvSpPr>
-        <p:spPr>
-          <a:xfrm>
-            <a:off x="4850892" y="4169664"/>
-            <a:ext cx="685800" cy="475488"/>
+          <p:cNvPr id="48" name="Shape 46"/>
+          <p:cNvSpPr/>
+          <p:nvPr/>
+        </p:nvSpPr>
+        <p:spPr>
+          <a:xfrm>
+            <a:off x="3911969" y="4169664"/>
+            <a:ext cx="603504" cy="475488"/>
           </a:xfrm>
           <a:prstGeom prst="rect">
             <a:avLst>
@@ -22768,14 +23722,14 @@
       </p:sp>
       <p:sp>
         <p:nvSpPr>
-          <p:cNvPr id="43" name="Text 41"/>
-          <p:cNvSpPr/>
-          <p:nvPr/>
-        </p:nvSpPr>
-        <p:spPr>
-          <a:xfrm>
-            <a:off x="4850892" y="4169664"/>
-            <a:ext cx="685800" cy="475488"/>
+          <p:cNvPr id="49" name="Text 47"/>
+          <p:cNvSpPr/>
+          <p:nvPr/>
+        </p:nvSpPr>
+        <p:spPr>
+          <a:xfrm>
+            <a:off x="3911969" y="4169664"/>
+            <a:ext cx="603504" cy="475488"/>
           </a:xfrm>
           <a:prstGeom prst="rect">
             <a:avLst/>
@@ -22807,14 +23761,14 @@
       </p:sp>
       <p:sp>
         <p:nvSpPr>
-          <p:cNvPr id="44" name="Shape 42"/>
-          <p:cNvSpPr/>
-          <p:nvPr/>
-        </p:nvSpPr>
-        <p:spPr>
-          <a:xfrm>
-            <a:off x="5759577" y="4169664"/>
-            <a:ext cx="685800" cy="475488"/>
+          <p:cNvPr id="50" name="Shape 48"/>
+          <p:cNvSpPr/>
+          <p:nvPr/>
+        </p:nvSpPr>
+        <p:spPr>
+          <a:xfrm>
+            <a:off x="4565350" y="4169664"/>
+            <a:ext cx="603504" cy="475488"/>
           </a:xfrm>
           <a:prstGeom prst="rect">
             <a:avLst>
@@ -22834,14 +23788,14 @@
       </p:sp>
       <p:sp>
         <p:nvSpPr>
-          <p:cNvPr id="45" name="Text 43"/>
-          <p:cNvSpPr/>
-          <p:nvPr/>
-        </p:nvSpPr>
-        <p:spPr>
-          <a:xfrm>
-            <a:off x="5759577" y="4169664"/>
-            <a:ext cx="685800" cy="475488"/>
+          <p:cNvPr id="51" name="Text 49"/>
+          <p:cNvSpPr/>
+          <p:nvPr/>
+        </p:nvSpPr>
+        <p:spPr>
+          <a:xfrm>
+            <a:off x="4565350" y="4169664"/>
+            <a:ext cx="603504" cy="475488"/>
           </a:xfrm>
           <a:prstGeom prst="rect">
             <a:avLst/>
@@ -22865,7 +23819,7 @@
                 <a:ea typeface="Trebuchet MS" pitchFamily="34" charset="-122"/>
                 <a:cs typeface="Trebuchet MS" pitchFamily="34" charset="-120"/>
               </a:rPr>
-              <a:t>v</a:t>
+              <a:t>r</a:t>
             </a:r>
             <a:endParaRPr lang="en-US" sz="900" dirty="0"/>
           </a:p>
@@ -22873,14 +23827,14 @@
       </p:sp>
       <p:sp>
         <p:nvSpPr>
-          <p:cNvPr id="46" name="Shape 44"/>
-          <p:cNvSpPr/>
-          <p:nvPr/>
-        </p:nvSpPr>
-        <p:spPr>
-          <a:xfrm>
-            <a:off x="6668262" y="4169664"/>
-            <a:ext cx="685800" cy="475488"/>
+          <p:cNvPr id="52" name="Shape 50"/>
+          <p:cNvSpPr/>
+          <p:nvPr/>
+        </p:nvSpPr>
+        <p:spPr>
+          <a:xfrm>
+            <a:off x="5218730" y="4169664"/>
+            <a:ext cx="603504" cy="475488"/>
           </a:xfrm>
           <a:prstGeom prst="rect">
             <a:avLst>
@@ -22900,14 +23854,14 @@
       </p:sp>
       <p:sp>
         <p:nvSpPr>
-          <p:cNvPr id="47" name="Text 45"/>
-          <p:cNvSpPr/>
-          <p:nvPr/>
-        </p:nvSpPr>
-        <p:spPr>
-          <a:xfrm>
-            <a:off x="6668262" y="4169664"/>
-            <a:ext cx="685800" cy="475488"/>
+          <p:cNvPr id="53" name="Text 51"/>
+          <p:cNvSpPr/>
+          <p:nvPr/>
+        </p:nvSpPr>
+        <p:spPr>
+          <a:xfrm>
+            <a:off x="5218730" y="4169664"/>
+            <a:ext cx="603504" cy="475488"/>
           </a:xfrm>
           <a:prstGeom prst="rect">
             <a:avLst/>
@@ -22931,7 +23885,7 @@
                 <a:ea typeface="Trebuchet MS" pitchFamily="34" charset="-122"/>
                 <a:cs typeface="Trebuchet MS" pitchFamily="34" charset="-120"/>
               </a:rPr>
-              <a:t>a</a:t>
+              <a:t>u</a:t>
             </a:r>
             <a:endParaRPr lang="en-US" sz="900" dirty="0"/>
           </a:p>
@@ -22939,14 +23893,14 @@
       </p:sp>
       <p:sp>
         <p:nvSpPr>
-          <p:cNvPr id="48" name="Shape 46"/>
-          <p:cNvSpPr/>
-          <p:nvPr/>
-        </p:nvSpPr>
-        <p:spPr>
-          <a:xfrm>
-            <a:off x="7576947" y="4169664"/>
-            <a:ext cx="685800" cy="475488"/>
+          <p:cNvPr id="54" name="Shape 52"/>
+          <p:cNvSpPr/>
+          <p:nvPr/>
+        </p:nvSpPr>
+        <p:spPr>
+          <a:xfrm>
+            <a:off x="5872111" y="4169664"/>
+            <a:ext cx="603504" cy="475488"/>
           </a:xfrm>
           <a:prstGeom prst="rect">
             <a:avLst>
@@ -22966,14 +23920,14 @@
       </p:sp>
       <p:sp>
         <p:nvSpPr>
-          <p:cNvPr id="49" name="Text 47"/>
-          <p:cNvSpPr/>
-          <p:nvPr/>
-        </p:nvSpPr>
-        <p:spPr>
-          <a:xfrm>
-            <a:off x="7576947" y="4169664"/>
-            <a:ext cx="685800" cy="475488"/>
+          <p:cNvPr id="55" name="Text 53"/>
+          <p:cNvSpPr/>
+          <p:nvPr/>
+        </p:nvSpPr>
+        <p:spPr>
+          <a:xfrm>
+            <a:off x="5872111" y="4169664"/>
+            <a:ext cx="603504" cy="475488"/>
           </a:xfrm>
           <a:prstGeom prst="rect">
             <a:avLst/>
@@ -22997,7 +23951,205 @@
                 <a:ea typeface="Trebuchet MS" pitchFamily="34" charset="-122"/>
                 <a:cs typeface="Trebuchet MS" pitchFamily="34" charset="-120"/>
               </a:rPr>
-              <a:t>l</a:t>
+              <a:t>p</a:t>
+            </a:r>
+            <a:endParaRPr lang="en-US" sz="900" dirty="0"/>
+          </a:p>
+        </p:txBody>
+      </p:sp>
+      <p:sp>
+        <p:nvSpPr>
+          <p:cNvPr id="56" name="Shape 54"/>
+          <p:cNvSpPr/>
+          <p:nvPr/>
+        </p:nvSpPr>
+        <p:spPr>
+          <a:xfrm>
+            <a:off x="6525491" y="4169664"/>
+            <a:ext cx="603504" cy="475488"/>
+          </a:xfrm>
+          <a:prstGeom prst="rect">
+            <a:avLst>
+              <a:gd name="adj" fmla="val 7692"/>
+            </a:avLst>
+          </a:prstGeom>
+          <a:solidFill>
+            <a:srgbClr val="FFFFFF"/>
+          </a:solidFill>
+          <a:ln w="12700">
+            <a:solidFill>
+              <a:srgbClr val="DB2777"/>
+            </a:solidFill>
+            <a:prstDash val="solid"/>
+          </a:ln>
+        </p:spPr>
+      </p:sp>
+      <p:sp>
+        <p:nvSpPr>
+          <p:cNvPr id="57" name="Text 55"/>
+          <p:cNvSpPr/>
+          <p:nvPr/>
+        </p:nvSpPr>
+        <p:spPr>
+          <a:xfrm>
+            <a:off x="6525491" y="4169664"/>
+            <a:ext cx="603504" cy="475488"/>
+          </a:xfrm>
+          <a:prstGeom prst="rect">
+            <a:avLst/>
+          </a:prstGeom>
+          <a:noFill/>
+          <a:ln/>
+        </p:spPr>
+        <p:txBody>
+          <a:bodyPr wrap="square" lIns="0" tIns="0" rIns="0" bIns="0" rtlCol="0" anchor="ctr"/>
+          <a:lstStyle/>
+          <a:p>
+            <a:pPr algn="ctr" indent="0" marL="0">
+              <a:buNone/>
+            </a:pPr>
+            <a:r>
+              <a:rPr lang="en-US" sz="900" b="1" dirty="0">
+                <a:solidFill>
+                  <a:srgbClr val="9D174D"/>
+                </a:solidFill>
+                <a:latin typeface="Trebuchet MS" pitchFamily="34" charset="0"/>
+                <a:ea typeface="Trebuchet MS" pitchFamily="34" charset="-122"/>
+                <a:cs typeface="Trebuchet MS" pitchFamily="34" charset="-120"/>
+              </a:rPr>
+              <a:t>ti</a:t>
+            </a:r>
+            <a:endParaRPr lang="en-US" sz="900" dirty="0"/>
+          </a:p>
+        </p:txBody>
+      </p:sp>
+      <p:sp>
+        <p:nvSpPr>
+          <p:cNvPr id="58" name="Shape 56"/>
+          <p:cNvSpPr/>
+          <p:nvPr/>
+        </p:nvSpPr>
+        <p:spPr>
+          <a:xfrm>
+            <a:off x="7178871" y="4169664"/>
+            <a:ext cx="603504" cy="475488"/>
+          </a:xfrm>
+          <a:prstGeom prst="rect">
+            <a:avLst>
+              <a:gd name="adj" fmla="val 7692"/>
+            </a:avLst>
+          </a:prstGeom>
+          <a:solidFill>
+            <a:srgbClr val="FFFFFF"/>
+          </a:solidFill>
+          <a:ln w="12700">
+            <a:solidFill>
+              <a:srgbClr val="DB2777"/>
+            </a:solidFill>
+            <a:prstDash val="solid"/>
+          </a:ln>
+        </p:spPr>
+      </p:sp>
+      <p:sp>
+        <p:nvSpPr>
+          <p:cNvPr id="59" name="Text 57"/>
+          <p:cNvSpPr/>
+          <p:nvPr/>
+        </p:nvSpPr>
+        <p:spPr>
+          <a:xfrm>
+            <a:off x="7178871" y="4169664"/>
+            <a:ext cx="603504" cy="475488"/>
+          </a:xfrm>
+          <a:prstGeom prst="rect">
+            <a:avLst/>
+          </a:prstGeom>
+          <a:noFill/>
+          <a:ln/>
+        </p:spPr>
+        <p:txBody>
+          <a:bodyPr wrap="square" lIns="0" tIns="0" rIns="0" bIns="0" rtlCol="0" anchor="ctr"/>
+          <a:lstStyle/>
+          <a:p>
+            <a:pPr algn="ctr" indent="0" marL="0">
+              <a:buNone/>
+            </a:pPr>
+            <a:r>
+              <a:rPr lang="en-US" sz="900" b="1" dirty="0">
+                <a:solidFill>
+                  <a:srgbClr val="9D174D"/>
+                </a:solidFill>
+                <a:latin typeface="Trebuchet MS" pitchFamily="34" charset="0"/>
+                <a:ea typeface="Trebuchet MS" pitchFamily="34" charset="-122"/>
+                <a:cs typeface="Trebuchet MS" pitchFamily="34" charset="-120"/>
+              </a:rPr>
+              <a:t>o</a:t>
+            </a:r>
+            <a:endParaRPr lang="en-US" sz="900" dirty="0"/>
+          </a:p>
+        </p:txBody>
+      </p:sp>
+      <p:sp>
+        <p:nvSpPr>
+          <p:cNvPr id="60" name="Shape 58"/>
+          <p:cNvSpPr/>
+          <p:nvPr/>
+        </p:nvSpPr>
+        <p:spPr>
+          <a:xfrm>
+            <a:off x="7832252" y="4169664"/>
+            <a:ext cx="603504" cy="475488"/>
+          </a:xfrm>
+          <a:prstGeom prst="rect">
+            <a:avLst>
+              <a:gd name="adj" fmla="val 7692"/>
+            </a:avLst>
+          </a:prstGeom>
+          <a:solidFill>
+            <a:srgbClr val="FFFFFF"/>
+          </a:solidFill>
+          <a:ln w="12700">
+            <a:solidFill>
+              <a:srgbClr val="DB2777"/>
+            </a:solidFill>
+            <a:prstDash val="solid"/>
+          </a:ln>
+        </p:spPr>
+      </p:sp>
+      <p:sp>
+        <p:nvSpPr>
+          <p:cNvPr id="61" name="Text 59"/>
+          <p:cNvSpPr/>
+          <p:nvPr/>
+        </p:nvSpPr>
+        <p:spPr>
+          <a:xfrm>
+            <a:off x="7832252" y="4169664"/>
+            <a:ext cx="603504" cy="475488"/>
+          </a:xfrm>
+          <a:prstGeom prst="rect">
+            <a:avLst/>
+          </a:prstGeom>
+          <a:noFill/>
+          <a:ln/>
+        </p:spPr>
+        <p:txBody>
+          <a:bodyPr wrap="square" lIns="0" tIns="0" rIns="0" bIns="0" rtlCol="0" anchor="ctr"/>
+          <a:lstStyle/>
+          <a:p>
+            <a:pPr algn="ctr" indent="0" marL="0">
+              <a:buNone/>
+            </a:pPr>
+            <a:r>
+              <a:rPr lang="en-US" sz="900" b="1" dirty="0">
+                <a:solidFill>
+                  <a:srgbClr val="9D174D"/>
+                </a:solidFill>
+                <a:latin typeface="Trebuchet MS" pitchFamily="34" charset="0"/>
+                <a:ea typeface="Trebuchet MS" pitchFamily="34" charset="-122"/>
+                <a:cs typeface="Trebuchet MS" pitchFamily="34" charset="-120"/>
+              </a:rPr>
+              <a:t>n</a:t>
             </a:r>
             <a:endParaRPr lang="en-US" sz="900" dirty="0"/>
           </a:p>
@@ -23289,7 +24441,7 @@
                 <a:ea typeface="Calibri" pitchFamily="34" charset="-122"/>
                 <a:cs typeface="Calibri" pitchFamily="34" charset="-120"/>
               </a:rPr>
-              <a:t>Word Labs  •  wordlabs.app  •  Prefix: 'inter-' = between, among, together</a:t>
+              <a:t>Word Labs  •  wordlabs.app  •  Prefix: 'inter-' = between</a:t>
             </a:r>
             <a:endParaRPr lang="en-US" sz="800" dirty="0"/>
           </a:p>
@@ -23428,7 +24580,7 @@
                 <a:ea typeface="Trebuchet MS" pitchFamily="34" charset="-122"/>
                 <a:cs typeface="Trebuchet MS" pitchFamily="34" charset="-120"/>
               </a:rPr>
-              <a:t>interviewer</a:t>
+              <a:t>intervention</a:t>
             </a:r>
             <a:endParaRPr lang="en-US" sz="2800" dirty="0"/>
           </a:p>
@@ -24116,7 +25268,7 @@
                 <a:ea typeface="Calibri" pitchFamily="34" charset="-122"/>
                 <a:cs typeface="Calibri" pitchFamily="34" charset="-120"/>
               </a:rPr>
-              <a:t>Word Labs  •  wordlabs.app  •  Prefix: 'inter-' = between, among, together</a:t>
+              <a:t>Word Labs  •  wordlabs.app  •  Prefix: 'inter-' = between</a:t>
             </a:r>
             <a:endParaRPr lang="en-US" sz="800" dirty="0"/>
           </a:p>
@@ -24255,7 +25407,7 @@
                 <a:ea typeface="Trebuchet MS" pitchFamily="34" charset="-122"/>
                 <a:cs typeface="Trebuchet MS" pitchFamily="34" charset="-120"/>
               </a:rPr>
-              <a:t>interviewer</a:t>
+              <a:t>intervention</a:t>
             </a:r>
             <a:endParaRPr lang="en-US" sz="2800" dirty="0"/>
           </a:p>
@@ -24506,7 +25658,7 @@
                 <a:ea typeface="Trebuchet MS" pitchFamily="34" charset="-122"/>
                 <a:cs typeface="Trebuchet MS" pitchFamily="34" charset="-120"/>
               </a:rPr>
-              <a:t>view</a:t>
+              <a:t>ven</a:t>
             </a:r>
             <a:endParaRPr lang="en-US" sz="1300" dirty="0"/>
           </a:p>
@@ -24545,7 +25697,7 @@
                 <a:ea typeface="Calibri" pitchFamily="34" charset="-122"/>
                 <a:cs typeface="Calibri" pitchFamily="34" charset="-120"/>
               </a:rPr>
-              <a:t>see, look</a:t>
+              <a:t>come</a:t>
             </a:r>
             <a:endParaRPr lang="en-US" sz="850" dirty="0"/>
           </a:p>
@@ -24618,7 +25770,7 @@
                 <a:ea typeface="Trebuchet MS" pitchFamily="34" charset="-122"/>
                 <a:cs typeface="Trebuchet MS" pitchFamily="34" charset="-120"/>
               </a:rPr>
-              <a:t>er</a:t>
+              <a:t>tion</a:t>
             </a:r>
             <a:endParaRPr lang="en-US" sz="1300" dirty="0"/>
           </a:p>
@@ -24657,7 +25809,7 @@
                 <a:ea typeface="Calibri" pitchFamily="34" charset="-122"/>
                 <a:cs typeface="Calibri" pitchFamily="34" charset="-120"/>
               </a:rPr>
-              <a:t>person who does</a:t>
+              <a:t>act or process of</a:t>
             </a:r>
             <a:endParaRPr lang="en-US" sz="850" dirty="0"/>
           </a:p>
@@ -25213,7 +26365,7 @@
                 <a:ea typeface="Calibri" pitchFamily="34" charset="-122"/>
                 <a:cs typeface="Calibri" pitchFamily="34" charset="-120"/>
               </a:rPr>
-              <a:t>Word Labs  •  wordlabs.app  •  Prefix: 'inter-' = between, among, together</a:t>
+              <a:t>Word Labs  •  wordlabs.app  •  Prefix: 'inter-' = between</a:t>
             </a:r>
             <a:endParaRPr lang="en-US" sz="800" dirty="0"/>
           </a:p>
@@ -25286,7 +26438,7 @@
                 <a:ea typeface="Trebuchet MS" pitchFamily="34" charset="-122"/>
                 <a:cs typeface="Trebuchet MS" pitchFamily="34" charset="-120"/>
               </a:rPr>
-              <a:t>We are learning that the prefix 'inter-' means 'between, among, together'.</a:t>
+              <a:t>We are learning that the prefix 'inter-' means 'between'.</a:t>
             </a:r>
             <a:endParaRPr lang="en-US" sz="2000" dirty="0"/>
           </a:p>
@@ -25932,7 +27084,7 @@
                 <a:ea typeface="Calibri" pitchFamily="34" charset="-122"/>
                 <a:cs typeface="Calibri" pitchFamily="34" charset="-120"/>
               </a:rPr>
-              <a:t>Word Labs  •  wordlabs.app  •  Prefix: 'inter-' = between, among, together</a:t>
+              <a:t>Word Labs  •  wordlabs.app  •  Prefix: 'inter-' = between</a:t>
             </a:r>
             <a:endParaRPr lang="en-US" sz="800" dirty="0"/>
           </a:p>
@@ -26071,7 +27223,7 @@
                 <a:ea typeface="Trebuchet MS" pitchFamily="34" charset="-122"/>
                 <a:cs typeface="Trebuchet MS" pitchFamily="34" charset="-120"/>
               </a:rPr>
-              <a:t>interviewer</a:t>
+              <a:t>intervention</a:t>
             </a:r>
             <a:endParaRPr lang="en-US" sz="2800" dirty="0"/>
           </a:p>
@@ -26322,7 +27474,7 @@
                 <a:ea typeface="Trebuchet MS" pitchFamily="34" charset="-122"/>
                 <a:cs typeface="Trebuchet MS" pitchFamily="34" charset="-120"/>
               </a:rPr>
-              <a:t>view</a:t>
+              <a:t>ven</a:t>
             </a:r>
             <a:endParaRPr lang="en-US" sz="1300" dirty="0"/>
           </a:p>
@@ -26361,7 +27513,7 @@
                 <a:ea typeface="Calibri" pitchFamily="34" charset="-122"/>
                 <a:cs typeface="Calibri" pitchFamily="34" charset="-120"/>
               </a:rPr>
-              <a:t>see, look</a:t>
+              <a:t>come</a:t>
             </a:r>
             <a:endParaRPr lang="en-US" sz="850" dirty="0"/>
           </a:p>
@@ -26434,7 +27586,7 @@
                 <a:ea typeface="Trebuchet MS" pitchFamily="34" charset="-122"/>
                 <a:cs typeface="Trebuchet MS" pitchFamily="34" charset="-120"/>
               </a:rPr>
-              <a:t>er</a:t>
+              <a:t>tion</a:t>
             </a:r>
             <a:endParaRPr lang="en-US" sz="1300" dirty="0"/>
           </a:p>
@@ -26473,7 +27625,7 @@
                 <a:ea typeface="Calibri" pitchFamily="34" charset="-122"/>
                 <a:cs typeface="Calibri" pitchFamily="34" charset="-120"/>
               </a:rPr>
-              <a:t>person who does</a:t>
+              <a:t>act or process of</a:t>
             </a:r>
             <a:endParaRPr lang="en-US" sz="850" dirty="0"/>
           </a:p>
@@ -26842,7 +27994,7 @@
                 <a:ea typeface="Trebuchet MS" pitchFamily="34" charset="-122"/>
                 <a:cs typeface="Trebuchet MS" pitchFamily="34" charset="-120"/>
               </a:rPr>
-              <a:t>view</a:t>
+              <a:t>ven</a:t>
             </a:r>
             <a:endParaRPr lang="en-US" sz="1400" dirty="0"/>
           </a:p>
@@ -26947,7 +28099,7 @@
                 <a:ea typeface="Trebuchet MS" pitchFamily="34" charset="-122"/>
                 <a:cs typeface="Trebuchet MS" pitchFamily="34" charset="-120"/>
               </a:rPr>
-              <a:t>er</a:t>
+              <a:t>tion</a:t>
             </a:r>
             <a:endParaRPr lang="en-US" sz="1400" dirty="0"/>
           </a:p>
@@ -27371,7 +28523,7 @@
                 <a:ea typeface="Calibri" pitchFamily="34" charset="-122"/>
                 <a:cs typeface="Calibri" pitchFamily="34" charset="-120"/>
               </a:rPr>
-              <a:t>Word Labs  •  wordlabs.app  •  Prefix: 'inter-' = between, among, together</a:t>
+              <a:t>Word Labs  •  wordlabs.app  •  Prefix: 'inter-' = between</a:t>
             </a:r>
             <a:endParaRPr lang="en-US" sz="800" dirty="0"/>
           </a:p>
@@ -27510,7 +28662,7 @@
                 <a:ea typeface="Trebuchet MS" pitchFamily="34" charset="-122"/>
                 <a:cs typeface="Trebuchet MS" pitchFamily="34" charset="-120"/>
               </a:rPr>
-              <a:t>interviewer</a:t>
+              <a:t>intervention</a:t>
             </a:r>
             <a:endParaRPr lang="en-US" sz="2800" dirty="0"/>
           </a:p>
@@ -27761,7 +28913,7 @@
                 <a:ea typeface="Trebuchet MS" pitchFamily="34" charset="-122"/>
                 <a:cs typeface="Trebuchet MS" pitchFamily="34" charset="-120"/>
               </a:rPr>
-              <a:t>view</a:t>
+              <a:t>ven</a:t>
             </a:r>
             <a:endParaRPr lang="en-US" sz="1300" dirty="0"/>
           </a:p>
@@ -27800,7 +28952,7 @@
                 <a:ea typeface="Calibri" pitchFamily="34" charset="-122"/>
                 <a:cs typeface="Calibri" pitchFamily="34" charset="-120"/>
               </a:rPr>
-              <a:t>see, look</a:t>
+              <a:t>come</a:t>
             </a:r>
             <a:endParaRPr lang="en-US" sz="850" dirty="0"/>
           </a:p>
@@ -27873,7 +29025,7 @@
                 <a:ea typeface="Trebuchet MS" pitchFamily="34" charset="-122"/>
                 <a:cs typeface="Trebuchet MS" pitchFamily="34" charset="-120"/>
               </a:rPr>
-              <a:t>er</a:t>
+              <a:t>tion</a:t>
             </a:r>
             <a:endParaRPr lang="en-US" sz="1300" dirty="0"/>
           </a:p>
@@ -27912,7 +29064,7 @@
                 <a:ea typeface="Calibri" pitchFamily="34" charset="-122"/>
                 <a:cs typeface="Calibri" pitchFamily="34" charset="-120"/>
               </a:rPr>
-              <a:t>person who does</a:t>
+              <a:t>act or process of</a:t>
             </a:r>
             <a:endParaRPr lang="en-US" sz="850" dirty="0"/>
           </a:p>
@@ -28281,7 +29433,7 @@
                 <a:ea typeface="Trebuchet MS" pitchFamily="34" charset="-122"/>
                 <a:cs typeface="Trebuchet MS" pitchFamily="34" charset="-120"/>
               </a:rPr>
-              <a:t>view</a:t>
+              <a:t>ven</a:t>
             </a:r>
             <a:endParaRPr lang="en-US" sz="1400" dirty="0"/>
           </a:p>
@@ -28386,7 +29538,7 @@
                 <a:ea typeface="Trebuchet MS" pitchFamily="34" charset="-122"/>
                 <a:cs typeface="Trebuchet MS" pitchFamily="34" charset="-120"/>
               </a:rPr>
-              <a:t>er</a:t>
+              <a:t>tion</a:t>
             </a:r>
             <a:endParaRPr lang="en-US" sz="1400" dirty="0"/>
           </a:p>
@@ -28493,8 +29645,8 @@
         </p:nvSpPr>
         <p:spPr>
           <a:xfrm>
-            <a:off x="2023872" y="4169664"/>
-            <a:ext cx="685800" cy="475488"/>
+            <a:off x="1951828" y="4169664"/>
+            <a:ext cx="603504" cy="475488"/>
           </a:xfrm>
           <a:prstGeom prst="rect">
             <a:avLst>
@@ -28520,8 +29672,8 @@
         </p:nvSpPr>
         <p:spPr>
           <a:xfrm>
-            <a:off x="2023872" y="4169664"/>
-            <a:ext cx="685800" cy="475488"/>
+            <a:off x="1951828" y="4169664"/>
+            <a:ext cx="603504" cy="475488"/>
           </a:xfrm>
           <a:prstGeom prst="rect">
             <a:avLst/>
@@ -28559,8 +29711,8 @@
         </p:nvSpPr>
         <p:spPr>
           <a:xfrm>
-            <a:off x="2831592" y="4169664"/>
-            <a:ext cx="685800" cy="475488"/>
+            <a:off x="2605209" y="4169664"/>
+            <a:ext cx="603504" cy="475488"/>
           </a:xfrm>
           <a:prstGeom prst="rect">
             <a:avLst>
@@ -28586,8 +29738,8 @@
         </p:nvSpPr>
         <p:spPr>
           <a:xfrm>
-            <a:off x="2831592" y="4169664"/>
-            <a:ext cx="685800" cy="475488"/>
+            <a:off x="2605209" y="4169664"/>
+            <a:ext cx="603504" cy="475488"/>
           </a:xfrm>
           <a:prstGeom prst="rect">
             <a:avLst/>
@@ -28625,8 +29777,8 @@
         </p:nvSpPr>
         <p:spPr>
           <a:xfrm>
-            <a:off x="3639312" y="4169664"/>
-            <a:ext cx="685800" cy="475488"/>
+            <a:off x="3258589" y="4169664"/>
+            <a:ext cx="603504" cy="475488"/>
           </a:xfrm>
           <a:prstGeom prst="rect">
             <a:avLst>
@@ -28652,8 +29804,8 @@
         </p:nvSpPr>
         <p:spPr>
           <a:xfrm>
-            <a:off x="3639312" y="4169664"/>
-            <a:ext cx="685800" cy="475488"/>
+            <a:off x="3258589" y="4169664"/>
+            <a:ext cx="603504" cy="475488"/>
           </a:xfrm>
           <a:prstGeom prst="rect">
             <a:avLst/>
@@ -28691,8 +29843,8 @@
         </p:nvSpPr>
         <p:spPr>
           <a:xfrm>
-            <a:off x="4447032" y="4169664"/>
-            <a:ext cx="685800" cy="475488"/>
+            <a:off x="3911969" y="4169664"/>
+            <a:ext cx="603504" cy="475488"/>
           </a:xfrm>
           <a:prstGeom prst="rect">
             <a:avLst>
@@ -28718,8 +29870,8 @@
         </p:nvSpPr>
         <p:spPr>
           <a:xfrm>
-            <a:off x="4447032" y="4169664"/>
-            <a:ext cx="685800" cy="475488"/>
+            <a:off x="3911969" y="4169664"/>
+            <a:ext cx="603504" cy="475488"/>
           </a:xfrm>
           <a:prstGeom prst="rect">
             <a:avLst/>
@@ -28757,8 +29909,8 @@
         </p:nvSpPr>
         <p:spPr>
           <a:xfrm>
-            <a:off x="5254752" y="4169664"/>
-            <a:ext cx="685800" cy="475488"/>
+            <a:off x="4565350" y="4169664"/>
+            <a:ext cx="603504" cy="475488"/>
           </a:xfrm>
           <a:prstGeom prst="rect">
             <a:avLst>
@@ -28784,8 +29936,8 @@
         </p:nvSpPr>
         <p:spPr>
           <a:xfrm>
-            <a:off x="5254752" y="4169664"/>
-            <a:ext cx="685800" cy="475488"/>
+            <a:off x="4565350" y="4169664"/>
+            <a:ext cx="603504" cy="475488"/>
           </a:xfrm>
           <a:prstGeom prst="rect">
             <a:avLst/>
@@ -28823,8 +29975,8 @@
         </p:nvSpPr>
         <p:spPr>
           <a:xfrm>
-            <a:off x="6062472" y="4169664"/>
-            <a:ext cx="685800" cy="475488"/>
+            <a:off x="5218730" y="4169664"/>
+            <a:ext cx="603504" cy="475488"/>
           </a:xfrm>
           <a:prstGeom prst="rect">
             <a:avLst>
@@ -28850,8 +30002,8 @@
         </p:nvSpPr>
         <p:spPr>
           <a:xfrm>
-            <a:off x="6062472" y="4169664"/>
-            <a:ext cx="685800" cy="475488"/>
+            <a:off x="5218730" y="4169664"/>
+            <a:ext cx="603504" cy="475488"/>
           </a:xfrm>
           <a:prstGeom prst="rect">
             <a:avLst/>
@@ -28875,7 +30027,7 @@
                 <a:ea typeface="Trebuchet MS" pitchFamily="34" charset="-122"/>
                 <a:cs typeface="Trebuchet MS" pitchFamily="34" charset="-120"/>
               </a:rPr>
-              <a:t>i</a:t>
+              <a:t>e</a:t>
             </a:r>
             <a:endParaRPr lang="en-US" sz="900" dirty="0"/>
           </a:p>
@@ -28889,8 +30041,8 @@
         </p:nvSpPr>
         <p:spPr>
           <a:xfrm>
-            <a:off x="6870192" y="4169664"/>
-            <a:ext cx="685800" cy="475488"/>
+            <a:off x="5872111" y="4169664"/>
+            <a:ext cx="603504" cy="475488"/>
           </a:xfrm>
           <a:prstGeom prst="rect">
             <a:avLst>
@@ -28916,8 +30068,8 @@
         </p:nvSpPr>
         <p:spPr>
           <a:xfrm>
-            <a:off x="6870192" y="4169664"/>
-            <a:ext cx="685800" cy="475488"/>
+            <a:off x="5872111" y="4169664"/>
+            <a:ext cx="603504" cy="475488"/>
           </a:xfrm>
           <a:prstGeom prst="rect">
             <a:avLst/>
@@ -28941,7 +30093,7 @@
                 <a:ea typeface="Trebuchet MS" pitchFamily="34" charset="-122"/>
                 <a:cs typeface="Trebuchet MS" pitchFamily="34" charset="-120"/>
               </a:rPr>
-              <a:t>ew</a:t>
+              <a:t>n</a:t>
             </a:r>
             <a:endParaRPr lang="en-US" sz="900" dirty="0"/>
           </a:p>
@@ -28955,8 +30107,8 @@
         </p:nvSpPr>
         <p:spPr>
           <a:xfrm>
-            <a:off x="7677912" y="4169664"/>
-            <a:ext cx="685800" cy="475488"/>
+            <a:off x="6525491" y="4169664"/>
+            <a:ext cx="603504" cy="475488"/>
           </a:xfrm>
           <a:prstGeom prst="rect">
             <a:avLst>
@@ -28982,8 +30134,8 @@
         </p:nvSpPr>
         <p:spPr>
           <a:xfrm>
-            <a:off x="7677912" y="4169664"/>
-            <a:ext cx="685800" cy="475488"/>
+            <a:off x="6525491" y="4169664"/>
+            <a:ext cx="603504" cy="475488"/>
           </a:xfrm>
           <a:prstGeom prst="rect">
             <a:avLst/>
@@ -29007,7 +30159,139 @@
                 <a:ea typeface="Trebuchet MS" pitchFamily="34" charset="-122"/>
                 <a:cs typeface="Trebuchet MS" pitchFamily="34" charset="-120"/>
               </a:rPr>
-              <a:t>er</a:t>
+              <a:t>ti</a:t>
+            </a:r>
+            <a:endParaRPr lang="en-US" sz="900" dirty="0"/>
+          </a:p>
+        </p:txBody>
+      </p:sp>
+      <p:sp>
+        <p:nvSpPr>
+          <p:cNvPr id="58" name="Shape 56"/>
+          <p:cNvSpPr/>
+          <p:nvPr/>
+        </p:nvSpPr>
+        <p:spPr>
+          <a:xfrm>
+            <a:off x="7178871" y="4169664"/>
+            <a:ext cx="603504" cy="475488"/>
+          </a:xfrm>
+          <a:prstGeom prst="rect">
+            <a:avLst>
+              <a:gd name="adj" fmla="val 7692"/>
+            </a:avLst>
+          </a:prstGeom>
+          <a:solidFill>
+            <a:srgbClr val="FFFFFF"/>
+          </a:solidFill>
+          <a:ln w="12700">
+            <a:solidFill>
+              <a:srgbClr val="DB2777"/>
+            </a:solidFill>
+            <a:prstDash val="solid"/>
+          </a:ln>
+        </p:spPr>
+      </p:sp>
+      <p:sp>
+        <p:nvSpPr>
+          <p:cNvPr id="59" name="Text 57"/>
+          <p:cNvSpPr/>
+          <p:nvPr/>
+        </p:nvSpPr>
+        <p:spPr>
+          <a:xfrm>
+            <a:off x="7178871" y="4169664"/>
+            <a:ext cx="603504" cy="475488"/>
+          </a:xfrm>
+          <a:prstGeom prst="rect">
+            <a:avLst/>
+          </a:prstGeom>
+          <a:noFill/>
+          <a:ln/>
+        </p:spPr>
+        <p:txBody>
+          <a:bodyPr wrap="square" lIns="0" tIns="0" rIns="0" bIns="0" rtlCol="0" anchor="ctr"/>
+          <a:lstStyle/>
+          <a:p>
+            <a:pPr algn="ctr" indent="0" marL="0">
+              <a:buNone/>
+            </a:pPr>
+            <a:r>
+              <a:rPr lang="en-US" sz="900" b="1" dirty="0">
+                <a:solidFill>
+                  <a:srgbClr val="9D174D"/>
+                </a:solidFill>
+                <a:latin typeface="Trebuchet MS" pitchFamily="34" charset="0"/>
+                <a:ea typeface="Trebuchet MS" pitchFamily="34" charset="-122"/>
+                <a:cs typeface="Trebuchet MS" pitchFamily="34" charset="-120"/>
+              </a:rPr>
+              <a:t>o</a:t>
+            </a:r>
+            <a:endParaRPr lang="en-US" sz="900" dirty="0"/>
+          </a:p>
+        </p:txBody>
+      </p:sp>
+      <p:sp>
+        <p:nvSpPr>
+          <p:cNvPr id="60" name="Shape 58"/>
+          <p:cNvSpPr/>
+          <p:nvPr/>
+        </p:nvSpPr>
+        <p:spPr>
+          <a:xfrm>
+            <a:off x="7832252" y="4169664"/>
+            <a:ext cx="603504" cy="475488"/>
+          </a:xfrm>
+          <a:prstGeom prst="rect">
+            <a:avLst>
+              <a:gd name="adj" fmla="val 7692"/>
+            </a:avLst>
+          </a:prstGeom>
+          <a:solidFill>
+            <a:srgbClr val="FFFFFF"/>
+          </a:solidFill>
+          <a:ln w="12700">
+            <a:solidFill>
+              <a:srgbClr val="DB2777"/>
+            </a:solidFill>
+            <a:prstDash val="solid"/>
+          </a:ln>
+        </p:spPr>
+      </p:sp>
+      <p:sp>
+        <p:nvSpPr>
+          <p:cNvPr id="61" name="Text 59"/>
+          <p:cNvSpPr/>
+          <p:nvPr/>
+        </p:nvSpPr>
+        <p:spPr>
+          <a:xfrm>
+            <a:off x="7832252" y="4169664"/>
+            <a:ext cx="603504" cy="475488"/>
+          </a:xfrm>
+          <a:prstGeom prst="rect">
+            <a:avLst/>
+          </a:prstGeom>
+          <a:noFill/>
+          <a:ln/>
+        </p:spPr>
+        <p:txBody>
+          <a:bodyPr wrap="square" lIns="0" tIns="0" rIns="0" bIns="0" rtlCol="0" anchor="ctr"/>
+          <a:lstStyle/>
+          <a:p>
+            <a:pPr algn="ctr" indent="0" marL="0">
+              <a:buNone/>
+            </a:pPr>
+            <a:r>
+              <a:rPr lang="en-US" sz="900" b="1" dirty="0">
+                <a:solidFill>
+                  <a:srgbClr val="9D174D"/>
+                </a:solidFill>
+                <a:latin typeface="Trebuchet MS" pitchFamily="34" charset="0"/>
+                <a:ea typeface="Trebuchet MS" pitchFamily="34" charset="-122"/>
+                <a:cs typeface="Trebuchet MS" pitchFamily="34" charset="-120"/>
+              </a:rPr>
+              <a:t>n</a:t>
             </a:r>
             <a:endParaRPr lang="en-US" sz="900" dirty="0"/>
           </a:p>
@@ -29299,7 +30583,7 @@
                 <a:ea typeface="Calibri" pitchFamily="34" charset="-122"/>
                 <a:cs typeface="Calibri" pitchFamily="34" charset="-120"/>
               </a:rPr>
-              <a:t>Word Labs  •  wordlabs.app  •  Prefix: 'inter-' = between, among, together</a:t>
+              <a:t>Word Labs  •  wordlabs.app  •  Prefix: 'inter-' = between</a:t>
             </a:r>
             <a:endParaRPr lang="en-US" sz="800" dirty="0"/>
           </a:p>
@@ -29438,7 +30722,7 @@
                 <a:ea typeface="Trebuchet MS" pitchFamily="34" charset="-122"/>
                 <a:cs typeface="Trebuchet MS" pitchFamily="34" charset="-120"/>
               </a:rPr>
-              <a:t>international</a:t>
+              <a:t>interventions</a:t>
             </a:r>
             <a:endParaRPr lang="en-US" sz="2800" dirty="0"/>
           </a:p>
@@ -30126,7 +31410,7 @@
                 <a:ea typeface="Calibri" pitchFamily="34" charset="-122"/>
                 <a:cs typeface="Calibri" pitchFamily="34" charset="-120"/>
               </a:rPr>
-              <a:t>Word Labs  •  wordlabs.app  •  Prefix: 'inter-' = between, among, together</a:t>
+              <a:t>Word Labs  •  wordlabs.app  •  Prefix: 'inter-' = between</a:t>
             </a:r>
             <a:endParaRPr lang="en-US" sz="800" dirty="0"/>
           </a:p>
@@ -30265,7 +31549,7 @@
                 <a:ea typeface="Trebuchet MS" pitchFamily="34" charset="-122"/>
                 <a:cs typeface="Trebuchet MS" pitchFamily="34" charset="-120"/>
               </a:rPr>
-              <a:t>international</a:t>
+              <a:t>interventions</a:t>
             </a:r>
             <a:endParaRPr lang="en-US" sz="2800" dirty="0"/>
           </a:p>
@@ -30345,8 +31629,8 @@
         </p:nvSpPr>
         <p:spPr>
           <a:xfrm>
-            <a:off x="2221992" y="2258568"/>
-            <a:ext cx="1828800" cy="292608"/>
+            <a:off x="1989734" y="2258568"/>
+            <a:ext cx="1581912" cy="292608"/>
           </a:xfrm>
           <a:prstGeom prst="rect">
             <a:avLst>
@@ -30379,8 +31663,8 @@
         </p:nvSpPr>
         <p:spPr>
           <a:xfrm>
-            <a:off x="2221992" y="2258568"/>
-            <a:ext cx="1828800" cy="292608"/>
+            <a:off x="1989734" y="2258568"/>
+            <a:ext cx="1581912" cy="292608"/>
           </a:xfrm>
           <a:prstGeom prst="rect">
             <a:avLst/>
@@ -30418,8 +31702,8 @@
         </p:nvSpPr>
         <p:spPr>
           <a:xfrm>
-            <a:off x="2221992" y="2569464"/>
-            <a:ext cx="1828800" cy="201168"/>
+            <a:off x="1989734" y="2569464"/>
+            <a:ext cx="1581912" cy="201168"/>
           </a:xfrm>
           <a:prstGeom prst="rect">
             <a:avLst/>
@@ -30457,8 +31741,8 @@
         </p:nvSpPr>
         <p:spPr>
           <a:xfrm>
-            <a:off x="4370832" y="2258568"/>
-            <a:ext cx="1828800" cy="292608"/>
+            <a:off x="3659429" y="2258568"/>
+            <a:ext cx="1581912" cy="292608"/>
           </a:xfrm>
           <a:prstGeom prst="rect">
             <a:avLst>
@@ -30491,8 +31775,8 @@
         </p:nvSpPr>
         <p:spPr>
           <a:xfrm>
-            <a:off x="4370832" y="2258568"/>
-            <a:ext cx="1828800" cy="292608"/>
+            <a:off x="3659429" y="2258568"/>
+            <a:ext cx="1581912" cy="292608"/>
           </a:xfrm>
           <a:prstGeom prst="rect">
             <a:avLst/>
@@ -30516,7 +31800,7 @@
                 <a:ea typeface="Trebuchet MS" pitchFamily="34" charset="-122"/>
                 <a:cs typeface="Trebuchet MS" pitchFamily="34" charset="-120"/>
               </a:rPr>
-              <a:t>nation</a:t>
+              <a:t>ven</a:t>
             </a:r>
             <a:endParaRPr lang="en-US" sz="1300" dirty="0"/>
           </a:p>
@@ -30530,8 +31814,8 @@
         </p:nvSpPr>
         <p:spPr>
           <a:xfrm>
-            <a:off x="4370832" y="2569464"/>
-            <a:ext cx="1828800" cy="201168"/>
+            <a:off x="3659429" y="2569464"/>
+            <a:ext cx="1581912" cy="201168"/>
           </a:xfrm>
           <a:prstGeom prst="rect">
             <a:avLst/>
@@ -30555,7 +31839,7 @@
                 <a:ea typeface="Calibri" pitchFamily="34" charset="-122"/>
                 <a:cs typeface="Calibri" pitchFamily="34" charset="-120"/>
               </a:rPr>
-              <a:t>country</a:t>
+              <a:t>come</a:t>
             </a:r>
             <a:endParaRPr lang="en-US" sz="850" dirty="0"/>
           </a:p>
@@ -30569,8 +31853,8 @@
         </p:nvSpPr>
         <p:spPr>
           <a:xfrm>
-            <a:off x="6519672" y="2258568"/>
-            <a:ext cx="1828800" cy="292608"/>
+            <a:off x="5329123" y="2258568"/>
+            <a:ext cx="1581912" cy="292608"/>
           </a:xfrm>
           <a:prstGeom prst="rect">
             <a:avLst>
@@ -30603,8 +31887,8 @@
         </p:nvSpPr>
         <p:spPr>
           <a:xfrm>
-            <a:off x="6519672" y="2258568"/>
-            <a:ext cx="1828800" cy="292608"/>
+            <a:off x="5329123" y="2258568"/>
+            <a:ext cx="1581912" cy="292608"/>
           </a:xfrm>
           <a:prstGeom prst="rect">
             <a:avLst/>
@@ -30628,7 +31912,7 @@
                 <a:ea typeface="Trebuchet MS" pitchFamily="34" charset="-122"/>
                 <a:cs typeface="Trebuchet MS" pitchFamily="34" charset="-120"/>
               </a:rPr>
-              <a:t>al</a:t>
+              <a:t>tion</a:t>
             </a:r>
             <a:endParaRPr lang="en-US" sz="1300" dirty="0"/>
           </a:p>
@@ -30642,8 +31926,8 @@
         </p:nvSpPr>
         <p:spPr>
           <a:xfrm>
-            <a:off x="6519672" y="2569464"/>
-            <a:ext cx="1828800" cy="201168"/>
+            <a:off x="5329123" y="2569464"/>
+            <a:ext cx="1581912" cy="201168"/>
           </a:xfrm>
           <a:prstGeom prst="rect">
             <a:avLst/>
@@ -30667,7 +31951,7 @@
                 <a:ea typeface="Calibri" pitchFamily="34" charset="-122"/>
                 <a:cs typeface="Calibri" pitchFamily="34" charset="-120"/>
               </a:rPr>
-              <a:t>relating to</a:t>
+              <a:t>act or process of</a:t>
             </a:r>
             <a:endParaRPr lang="en-US" sz="850" dirty="0"/>
           </a:p>
@@ -30676,6 +31960,118 @@
       <p:sp>
         <p:nvSpPr>
           <p:cNvPr id="25" name="Shape 23"/>
+          <p:cNvSpPr/>
+          <p:nvPr/>
+        </p:nvSpPr>
+        <p:spPr>
+          <a:xfrm>
+            <a:off x="6998818" y="2258568"/>
+            <a:ext cx="1581912" cy="292608"/>
+          </a:xfrm>
+          <a:prstGeom prst="rect">
+            <a:avLst>
+              <a:gd name="adj" fmla="val 25000"/>
+            </a:avLst>
+          </a:prstGeom>
+          <a:solidFill>
+            <a:srgbClr val="FCE7F3"/>
+          </a:solidFill>
+          <a:ln w="19050">
+            <a:solidFill>
+              <a:srgbClr val="DB2777"/>
+            </a:solidFill>
+            <a:prstDash val="solid"/>
+          </a:ln>
+          <a:effectLst>
+            <a:outerShdw sx="100000" sy="100000" kx="0" ky="0" algn="bl" rotWithShape="0" blurRad="101600" dist="38100" dir="8100000">
+              <a:srgbClr val="000000">
+                <a:alpha val="12000"/>
+              </a:srgbClr>
+            </a:outerShdw>
+          </a:effectLst>
+        </p:spPr>
+      </p:sp>
+      <p:sp>
+        <p:nvSpPr>
+          <p:cNvPr id="26" name="Text 24"/>
+          <p:cNvSpPr/>
+          <p:nvPr/>
+        </p:nvSpPr>
+        <p:spPr>
+          <a:xfrm>
+            <a:off x="6998818" y="2258568"/>
+            <a:ext cx="1581912" cy="292608"/>
+          </a:xfrm>
+          <a:prstGeom prst="rect">
+            <a:avLst/>
+          </a:prstGeom>
+          <a:noFill/>
+          <a:ln/>
+        </p:spPr>
+        <p:txBody>
+          <a:bodyPr wrap="square" lIns="0" tIns="0" rIns="0" bIns="0" rtlCol="0" anchor="ctr"/>
+          <a:lstStyle/>
+          <a:p>
+            <a:pPr algn="ctr" indent="0" marL="0">
+              <a:buNone/>
+            </a:pPr>
+            <a:r>
+              <a:rPr lang="en-US" sz="1300" b="1" dirty="0">
+                <a:solidFill>
+                  <a:srgbClr val="9D174D"/>
+                </a:solidFill>
+                <a:latin typeface="Trebuchet MS" pitchFamily="34" charset="0"/>
+                <a:ea typeface="Trebuchet MS" pitchFamily="34" charset="-122"/>
+                <a:cs typeface="Trebuchet MS" pitchFamily="34" charset="-120"/>
+              </a:rPr>
+              <a:t>s</a:t>
+            </a:r>
+            <a:endParaRPr lang="en-US" sz="1300" dirty="0"/>
+          </a:p>
+        </p:txBody>
+      </p:sp>
+      <p:sp>
+        <p:nvSpPr>
+          <p:cNvPr id="27" name="Text 25"/>
+          <p:cNvSpPr/>
+          <p:nvPr/>
+        </p:nvSpPr>
+        <p:spPr>
+          <a:xfrm>
+            <a:off x="6998818" y="2569464"/>
+            <a:ext cx="1581912" cy="201168"/>
+          </a:xfrm>
+          <a:prstGeom prst="rect">
+            <a:avLst/>
+          </a:prstGeom>
+          <a:noFill/>
+          <a:ln/>
+        </p:spPr>
+        <p:txBody>
+          <a:bodyPr wrap="square" lIns="0" tIns="0" rIns="0" bIns="0" rtlCol="0" anchor="t"/>
+          <a:lstStyle/>
+          <a:p>
+            <a:pPr algn="ctr" indent="0" marL="0">
+              <a:buNone/>
+            </a:pPr>
+            <a:r>
+              <a:rPr lang="en-US" sz="850" dirty="0">
+                <a:solidFill>
+                  <a:srgbClr val="475569"/>
+                </a:solidFill>
+                <a:latin typeface="Calibri" pitchFamily="34" charset="0"/>
+                <a:ea typeface="Calibri" pitchFamily="34" charset="-122"/>
+                <a:cs typeface="Calibri" pitchFamily="34" charset="-120"/>
+              </a:rPr>
+              <a:t>plural or present tense</a:t>
+            </a:r>
+            <a:endParaRPr lang="en-US" sz="850" dirty="0"/>
+          </a:p>
+        </p:txBody>
+      </p:sp>
+      <p:sp>
+        <p:nvSpPr>
+          <p:cNvPr id="28" name="Shape 26"/>
           <p:cNvSpPr/>
           <p:nvPr/>
         </p:nvSpPr>
@@ -30702,7 +32098,7 @@
       </p:sp>
       <p:sp>
         <p:nvSpPr>
-          <p:cNvPr id="26" name="Text 24"/>
+          <p:cNvPr id="29" name="Text 27"/>
           <p:cNvSpPr/>
           <p:nvPr/>
         </p:nvSpPr>
@@ -30741,7 +32137,7 @@
       </p:sp>
       <p:sp>
         <p:nvSpPr>
-          <p:cNvPr id="27" name="Shape 25"/>
+          <p:cNvPr id="30" name="Shape 28"/>
           <p:cNvSpPr/>
           <p:nvPr/>
         </p:nvSpPr>
@@ -30768,7 +32164,7 @@
       </p:sp>
       <p:sp>
         <p:nvSpPr>
-          <p:cNvPr id="28" name="Text 26"/>
+          <p:cNvPr id="31" name="Text 29"/>
           <p:cNvSpPr/>
           <p:nvPr/>
         </p:nvSpPr>
@@ -30807,7 +32203,7 @@
       </p:sp>
       <p:sp>
         <p:nvSpPr>
-          <p:cNvPr id="29" name="Shape 27"/>
+          <p:cNvPr id="32" name="Shape 30"/>
           <p:cNvSpPr/>
           <p:nvPr/>
         </p:nvSpPr>
@@ -30834,7 +32230,7 @@
       </p:sp>
       <p:sp>
         <p:nvSpPr>
-          <p:cNvPr id="30" name="Text 28"/>
+          <p:cNvPr id="33" name="Text 31"/>
           <p:cNvSpPr/>
           <p:nvPr/>
         </p:nvSpPr>
@@ -30873,7 +32269,7 @@
       </p:sp>
       <p:sp>
         <p:nvSpPr>
-          <p:cNvPr id="31" name="Shape 29"/>
+          <p:cNvPr id="34" name="Shape 32"/>
           <p:cNvSpPr/>
           <p:nvPr/>
         </p:nvSpPr>
@@ -30900,7 +32296,7 @@
       </p:sp>
       <p:sp>
         <p:nvSpPr>
-          <p:cNvPr id="32" name="Text 30"/>
+          <p:cNvPr id="35" name="Text 33"/>
           <p:cNvSpPr/>
           <p:nvPr/>
         </p:nvSpPr>
@@ -31223,7 +32619,7 @@
                 <a:ea typeface="Calibri" pitchFamily="34" charset="-122"/>
                 <a:cs typeface="Calibri" pitchFamily="34" charset="-120"/>
               </a:rPr>
-              <a:t>Word Labs  •  wordlabs.app  •  Prefix: 'inter-' = between, among, together</a:t>
+              <a:t>Word Labs  •  wordlabs.app  •  Prefix: 'inter-' = between</a:t>
             </a:r>
             <a:endParaRPr lang="en-US" sz="800" dirty="0"/>
           </a:p>
@@ -31362,7 +32758,7 @@
                 <a:ea typeface="Trebuchet MS" pitchFamily="34" charset="-122"/>
                 <a:cs typeface="Trebuchet MS" pitchFamily="34" charset="-120"/>
               </a:rPr>
-              <a:t>international</a:t>
+              <a:t>interventions</a:t>
             </a:r>
             <a:endParaRPr lang="en-US" sz="2800" dirty="0"/>
           </a:p>
@@ -31442,8 +32838,8 @@
         </p:nvSpPr>
         <p:spPr>
           <a:xfrm>
-            <a:off x="2221992" y="2258568"/>
-            <a:ext cx="1828800" cy="292608"/>
+            <a:off x="1989734" y="2258568"/>
+            <a:ext cx="1581912" cy="292608"/>
           </a:xfrm>
           <a:prstGeom prst="rect">
             <a:avLst>
@@ -31476,8 +32872,8 @@
         </p:nvSpPr>
         <p:spPr>
           <a:xfrm>
-            <a:off x="2221992" y="2258568"/>
-            <a:ext cx="1828800" cy="292608"/>
+            <a:off x="1989734" y="2258568"/>
+            <a:ext cx="1581912" cy="292608"/>
           </a:xfrm>
           <a:prstGeom prst="rect">
             <a:avLst/>
@@ -31515,8 +32911,8 @@
         </p:nvSpPr>
         <p:spPr>
           <a:xfrm>
-            <a:off x="2221992" y="2569464"/>
-            <a:ext cx="1828800" cy="201168"/>
+            <a:off x="1989734" y="2569464"/>
+            <a:ext cx="1581912" cy="201168"/>
           </a:xfrm>
           <a:prstGeom prst="rect">
             <a:avLst/>
@@ -31554,8 +32950,8 @@
         </p:nvSpPr>
         <p:spPr>
           <a:xfrm>
-            <a:off x="4370832" y="2258568"/>
-            <a:ext cx="1828800" cy="292608"/>
+            <a:off x="3659429" y="2258568"/>
+            <a:ext cx="1581912" cy="292608"/>
           </a:xfrm>
           <a:prstGeom prst="rect">
             <a:avLst>
@@ -31588,8 +32984,8 @@
         </p:nvSpPr>
         <p:spPr>
           <a:xfrm>
-            <a:off x="4370832" y="2258568"/>
-            <a:ext cx="1828800" cy="292608"/>
+            <a:off x="3659429" y="2258568"/>
+            <a:ext cx="1581912" cy="292608"/>
           </a:xfrm>
           <a:prstGeom prst="rect">
             <a:avLst/>
@@ -31613,7 +33009,7 @@
                 <a:ea typeface="Trebuchet MS" pitchFamily="34" charset="-122"/>
                 <a:cs typeface="Trebuchet MS" pitchFamily="34" charset="-120"/>
               </a:rPr>
-              <a:t>nation</a:t>
+              <a:t>ven</a:t>
             </a:r>
             <a:endParaRPr lang="en-US" sz="1300" dirty="0"/>
           </a:p>
@@ -31627,8 +33023,8 @@
         </p:nvSpPr>
         <p:spPr>
           <a:xfrm>
-            <a:off x="4370832" y="2569464"/>
-            <a:ext cx="1828800" cy="201168"/>
+            <a:off x="3659429" y="2569464"/>
+            <a:ext cx="1581912" cy="201168"/>
           </a:xfrm>
           <a:prstGeom prst="rect">
             <a:avLst/>
@@ -31652,7 +33048,7 @@
                 <a:ea typeface="Calibri" pitchFamily="34" charset="-122"/>
                 <a:cs typeface="Calibri" pitchFamily="34" charset="-120"/>
               </a:rPr>
-              <a:t>country</a:t>
+              <a:t>come</a:t>
             </a:r>
             <a:endParaRPr lang="en-US" sz="850" dirty="0"/>
           </a:p>
@@ -31666,8 +33062,8 @@
         </p:nvSpPr>
         <p:spPr>
           <a:xfrm>
-            <a:off x="6519672" y="2258568"/>
-            <a:ext cx="1828800" cy="292608"/>
+            <a:off x="5329123" y="2258568"/>
+            <a:ext cx="1581912" cy="292608"/>
           </a:xfrm>
           <a:prstGeom prst="rect">
             <a:avLst>
@@ -31700,8 +33096,8 @@
         </p:nvSpPr>
         <p:spPr>
           <a:xfrm>
-            <a:off x="6519672" y="2258568"/>
-            <a:ext cx="1828800" cy="292608"/>
+            <a:off x="5329123" y="2258568"/>
+            <a:ext cx="1581912" cy="292608"/>
           </a:xfrm>
           <a:prstGeom prst="rect">
             <a:avLst/>
@@ -31725,7 +33121,7 @@
                 <a:ea typeface="Trebuchet MS" pitchFamily="34" charset="-122"/>
                 <a:cs typeface="Trebuchet MS" pitchFamily="34" charset="-120"/>
               </a:rPr>
-              <a:t>al</a:t>
+              <a:t>tion</a:t>
             </a:r>
             <a:endParaRPr lang="en-US" sz="1300" dirty="0"/>
           </a:p>
@@ -31739,8 +33135,8 @@
         </p:nvSpPr>
         <p:spPr>
           <a:xfrm>
-            <a:off x="6519672" y="2569464"/>
-            <a:ext cx="1828800" cy="201168"/>
+            <a:off x="5329123" y="2569464"/>
+            <a:ext cx="1581912" cy="201168"/>
           </a:xfrm>
           <a:prstGeom prst="rect">
             <a:avLst/>
@@ -31764,7 +33160,7 @@
                 <a:ea typeface="Calibri" pitchFamily="34" charset="-122"/>
                 <a:cs typeface="Calibri" pitchFamily="34" charset="-120"/>
               </a:rPr>
-              <a:t>relating to</a:t>
+              <a:t>act or process of</a:t>
             </a:r>
             <a:endParaRPr lang="en-US" sz="850" dirty="0"/>
           </a:p>
@@ -31773,6 +33169,118 @@
       <p:sp>
         <p:nvSpPr>
           <p:cNvPr id="25" name="Shape 23"/>
+          <p:cNvSpPr/>
+          <p:nvPr/>
+        </p:nvSpPr>
+        <p:spPr>
+          <a:xfrm>
+            <a:off x="6998818" y="2258568"/>
+            <a:ext cx="1581912" cy="292608"/>
+          </a:xfrm>
+          <a:prstGeom prst="rect">
+            <a:avLst>
+              <a:gd name="adj" fmla="val 25000"/>
+            </a:avLst>
+          </a:prstGeom>
+          <a:solidFill>
+            <a:srgbClr val="FCE7F3"/>
+          </a:solidFill>
+          <a:ln w="19050">
+            <a:solidFill>
+              <a:srgbClr val="DB2777"/>
+            </a:solidFill>
+            <a:prstDash val="solid"/>
+          </a:ln>
+          <a:effectLst>
+            <a:outerShdw sx="100000" sy="100000" kx="0" ky="0" algn="bl" rotWithShape="0" blurRad="101600" dist="38100" dir="8100000">
+              <a:srgbClr val="000000">
+                <a:alpha val="12000"/>
+              </a:srgbClr>
+            </a:outerShdw>
+          </a:effectLst>
+        </p:spPr>
+      </p:sp>
+      <p:sp>
+        <p:nvSpPr>
+          <p:cNvPr id="26" name="Text 24"/>
+          <p:cNvSpPr/>
+          <p:nvPr/>
+        </p:nvSpPr>
+        <p:spPr>
+          <a:xfrm>
+            <a:off x="6998818" y="2258568"/>
+            <a:ext cx="1581912" cy="292608"/>
+          </a:xfrm>
+          <a:prstGeom prst="rect">
+            <a:avLst/>
+          </a:prstGeom>
+          <a:noFill/>
+          <a:ln/>
+        </p:spPr>
+        <p:txBody>
+          <a:bodyPr wrap="square" lIns="0" tIns="0" rIns="0" bIns="0" rtlCol="0" anchor="ctr"/>
+          <a:lstStyle/>
+          <a:p>
+            <a:pPr algn="ctr" indent="0" marL="0">
+              <a:buNone/>
+            </a:pPr>
+            <a:r>
+              <a:rPr lang="en-US" sz="1300" b="1" dirty="0">
+                <a:solidFill>
+                  <a:srgbClr val="9D174D"/>
+                </a:solidFill>
+                <a:latin typeface="Trebuchet MS" pitchFamily="34" charset="0"/>
+                <a:ea typeface="Trebuchet MS" pitchFamily="34" charset="-122"/>
+                <a:cs typeface="Trebuchet MS" pitchFamily="34" charset="-120"/>
+              </a:rPr>
+              <a:t>s</a:t>
+            </a:r>
+            <a:endParaRPr lang="en-US" sz="1300" dirty="0"/>
+          </a:p>
+        </p:txBody>
+      </p:sp>
+      <p:sp>
+        <p:nvSpPr>
+          <p:cNvPr id="27" name="Text 25"/>
+          <p:cNvSpPr/>
+          <p:nvPr/>
+        </p:nvSpPr>
+        <p:spPr>
+          <a:xfrm>
+            <a:off x="6998818" y="2569464"/>
+            <a:ext cx="1581912" cy="201168"/>
+          </a:xfrm>
+          <a:prstGeom prst="rect">
+            <a:avLst/>
+          </a:prstGeom>
+          <a:noFill/>
+          <a:ln/>
+        </p:spPr>
+        <p:txBody>
+          <a:bodyPr wrap="square" lIns="0" tIns="0" rIns="0" bIns="0" rtlCol="0" anchor="t"/>
+          <a:lstStyle/>
+          <a:p>
+            <a:pPr algn="ctr" indent="0" marL="0">
+              <a:buNone/>
+            </a:pPr>
+            <a:r>
+              <a:rPr lang="en-US" sz="850" dirty="0">
+                <a:solidFill>
+                  <a:srgbClr val="475569"/>
+                </a:solidFill>
+                <a:latin typeface="Calibri" pitchFamily="34" charset="0"/>
+                <a:ea typeface="Calibri" pitchFamily="34" charset="-122"/>
+                <a:cs typeface="Calibri" pitchFamily="34" charset="-120"/>
+              </a:rPr>
+              <a:t>plural or present tense</a:t>
+            </a:r>
+            <a:endParaRPr lang="en-US" sz="850" dirty="0"/>
+          </a:p>
+        </p:txBody>
+      </p:sp>
+      <p:sp>
+        <p:nvSpPr>
+          <p:cNvPr id="28" name="Shape 26"/>
           <p:cNvSpPr/>
           <p:nvPr/>
         </p:nvSpPr>
@@ -31799,7 +33307,7 @@
       </p:sp>
       <p:sp>
         <p:nvSpPr>
-          <p:cNvPr id="26" name="Text 24"/>
+          <p:cNvPr id="29" name="Text 27"/>
           <p:cNvSpPr/>
           <p:nvPr/>
         </p:nvSpPr>
@@ -31838,7 +33346,7 @@
       </p:sp>
       <p:sp>
         <p:nvSpPr>
-          <p:cNvPr id="27" name="Shape 25"/>
+          <p:cNvPr id="30" name="Shape 28"/>
           <p:cNvSpPr/>
           <p:nvPr/>
         </p:nvSpPr>
@@ -31865,14 +33373,14 @@
       </p:sp>
       <p:sp>
         <p:nvSpPr>
-          <p:cNvPr id="28" name="Shape 26"/>
-          <p:cNvSpPr/>
-          <p:nvPr/>
-        </p:nvSpPr>
-        <p:spPr>
-          <a:xfrm>
-            <a:off x="1978152" y="3364992"/>
-            <a:ext cx="1225296" cy="475488"/>
+          <p:cNvPr id="31" name="Shape 29"/>
+          <p:cNvSpPr/>
+          <p:nvPr/>
+        </p:nvSpPr>
+        <p:spPr>
+          <a:xfrm>
+            <a:off x="1975104" y="3364992"/>
+            <a:ext cx="1554480" cy="475488"/>
           </a:xfrm>
           <a:prstGeom prst="rect">
             <a:avLst>
@@ -31892,14 +33400,14 @@
       </p:sp>
       <p:sp>
         <p:nvSpPr>
-          <p:cNvPr id="29" name="Text 27"/>
-          <p:cNvSpPr/>
-          <p:nvPr/>
-        </p:nvSpPr>
-        <p:spPr>
-          <a:xfrm>
-            <a:off x="1978152" y="3364992"/>
-            <a:ext cx="1225296" cy="475488"/>
+          <p:cNvPr id="32" name="Text 30"/>
+          <p:cNvSpPr/>
+          <p:nvPr/>
+        </p:nvSpPr>
+        <p:spPr>
+          <a:xfrm>
+            <a:off x="1975104" y="3364992"/>
+            <a:ext cx="1554480" cy="475488"/>
           </a:xfrm>
           <a:prstGeom prst="rect">
             <a:avLst/>
@@ -31931,14 +33439,14 @@
       </p:sp>
       <p:sp>
         <p:nvSpPr>
-          <p:cNvPr id="30" name="Text 28"/>
-          <p:cNvSpPr/>
-          <p:nvPr/>
-        </p:nvSpPr>
-        <p:spPr>
-          <a:xfrm>
-            <a:off x="3203448" y="3364992"/>
-            <a:ext cx="76200" cy="475488"/>
+          <p:cNvPr id="33" name="Text 31"/>
+          <p:cNvSpPr/>
+          <p:nvPr/>
+        </p:nvSpPr>
+        <p:spPr>
+          <a:xfrm>
+            <a:off x="3529584" y="3364992"/>
+            <a:ext cx="73152" cy="475488"/>
           </a:xfrm>
           <a:prstGeom prst="rect">
             <a:avLst/>
@@ -31970,14 +33478,14 @@
       </p:sp>
       <p:sp>
         <p:nvSpPr>
-          <p:cNvPr id="31" name="Shape 29"/>
-          <p:cNvSpPr/>
-          <p:nvPr/>
-        </p:nvSpPr>
-        <p:spPr>
-          <a:xfrm>
-            <a:off x="3279648" y="3364992"/>
-            <a:ext cx="1225296" cy="475488"/>
+          <p:cNvPr id="34" name="Shape 32"/>
+          <p:cNvSpPr/>
+          <p:nvPr/>
+        </p:nvSpPr>
+        <p:spPr>
+          <a:xfrm>
+            <a:off x="3602736" y="3364992"/>
+            <a:ext cx="1554480" cy="475488"/>
           </a:xfrm>
           <a:prstGeom prst="rect">
             <a:avLst>
@@ -31997,14 +33505,14 @@
       </p:sp>
       <p:sp>
         <p:nvSpPr>
-          <p:cNvPr id="32" name="Text 30"/>
-          <p:cNvSpPr/>
-          <p:nvPr/>
-        </p:nvSpPr>
-        <p:spPr>
-          <a:xfrm>
-            <a:off x="3279648" y="3364992"/>
-            <a:ext cx="1225296" cy="475488"/>
+          <p:cNvPr id="35" name="Text 33"/>
+          <p:cNvSpPr/>
+          <p:nvPr/>
+        </p:nvSpPr>
+        <p:spPr>
+          <a:xfrm>
+            <a:off x="3602736" y="3364992"/>
+            <a:ext cx="1554480" cy="475488"/>
           </a:xfrm>
           <a:prstGeom prst="rect">
             <a:avLst/>
@@ -32036,14 +33544,14 @@
       </p:sp>
       <p:sp>
         <p:nvSpPr>
-          <p:cNvPr id="33" name="Text 31"/>
-          <p:cNvSpPr/>
-          <p:nvPr/>
-        </p:nvSpPr>
-        <p:spPr>
-          <a:xfrm>
-            <a:off x="4504944" y="3364992"/>
-            <a:ext cx="76200" cy="475488"/>
+          <p:cNvPr id="36" name="Text 34"/>
+          <p:cNvSpPr/>
+          <p:nvPr/>
+        </p:nvSpPr>
+        <p:spPr>
+          <a:xfrm>
+            <a:off x="5157216" y="3364992"/>
+            <a:ext cx="73152" cy="475488"/>
           </a:xfrm>
           <a:prstGeom prst="rect">
             <a:avLst/>
@@ -32075,14 +33583,14 @@
       </p:sp>
       <p:sp>
         <p:nvSpPr>
-          <p:cNvPr id="34" name="Shape 32"/>
-          <p:cNvSpPr/>
-          <p:nvPr/>
-        </p:nvSpPr>
-        <p:spPr>
-          <a:xfrm>
-            <a:off x="4581144" y="3364992"/>
-            <a:ext cx="1225296" cy="475488"/>
+          <p:cNvPr id="37" name="Shape 35"/>
+          <p:cNvSpPr/>
+          <p:nvPr/>
+        </p:nvSpPr>
+        <p:spPr>
+          <a:xfrm>
+            <a:off x="5230368" y="3364992"/>
+            <a:ext cx="1554480" cy="475488"/>
           </a:xfrm>
           <a:prstGeom prst="rect">
             <a:avLst>
@@ -32102,14 +33610,14 @@
       </p:sp>
       <p:sp>
         <p:nvSpPr>
-          <p:cNvPr id="35" name="Text 33"/>
-          <p:cNvSpPr/>
-          <p:nvPr/>
-        </p:nvSpPr>
-        <p:spPr>
-          <a:xfrm>
-            <a:off x="4581144" y="3364992"/>
-            <a:ext cx="1225296" cy="475488"/>
+          <p:cNvPr id="38" name="Text 36"/>
+          <p:cNvSpPr/>
+          <p:nvPr/>
+        </p:nvSpPr>
+        <p:spPr>
+          <a:xfrm>
+            <a:off x="5230368" y="3364992"/>
+            <a:ext cx="1554480" cy="475488"/>
           </a:xfrm>
           <a:prstGeom prst="rect">
             <a:avLst/>
@@ -32133,7 +33641,7 @@
                 <a:ea typeface="Trebuchet MS" pitchFamily="34" charset="-122"/>
                 <a:cs typeface="Trebuchet MS" pitchFamily="34" charset="-120"/>
               </a:rPr>
-              <a:t>na</a:t>
+              <a:t>ven</a:t>
             </a:r>
             <a:endParaRPr lang="en-US" sz="1400" dirty="0"/>
           </a:p>
@@ -32141,14 +33649,14 @@
       </p:sp>
       <p:sp>
         <p:nvSpPr>
-          <p:cNvPr id="36" name="Text 34"/>
-          <p:cNvSpPr/>
-          <p:nvPr/>
-        </p:nvSpPr>
-        <p:spPr>
-          <a:xfrm>
-            <a:off x="5806440" y="3364992"/>
-            <a:ext cx="76200" cy="475488"/>
+          <p:cNvPr id="39" name="Text 37"/>
+          <p:cNvSpPr/>
+          <p:nvPr/>
+        </p:nvSpPr>
+        <p:spPr>
+          <a:xfrm>
+            <a:off x="6784848" y="3364992"/>
+            <a:ext cx="73152" cy="475488"/>
           </a:xfrm>
           <a:prstGeom prst="rect">
             <a:avLst/>
@@ -32180,14 +33688,14 @@
       </p:sp>
       <p:sp>
         <p:nvSpPr>
-          <p:cNvPr id="37" name="Shape 35"/>
-          <p:cNvSpPr/>
-          <p:nvPr/>
-        </p:nvSpPr>
-        <p:spPr>
-          <a:xfrm>
-            <a:off x="5882640" y="3364992"/>
-            <a:ext cx="1225296" cy="475488"/>
+          <p:cNvPr id="40" name="Shape 38"/>
+          <p:cNvSpPr/>
+          <p:nvPr/>
+        </p:nvSpPr>
+        <p:spPr>
+          <a:xfrm>
+            <a:off x="6858000" y="3364992"/>
+            <a:ext cx="1554480" cy="475488"/>
           </a:xfrm>
           <a:prstGeom prst="rect">
             <a:avLst>
@@ -32207,14 +33715,14 @@
       </p:sp>
       <p:sp>
         <p:nvSpPr>
-          <p:cNvPr id="38" name="Text 36"/>
-          <p:cNvSpPr/>
-          <p:nvPr/>
-        </p:nvSpPr>
-        <p:spPr>
-          <a:xfrm>
-            <a:off x="5882640" y="3364992"/>
-            <a:ext cx="1225296" cy="475488"/>
+          <p:cNvPr id="41" name="Text 39"/>
+          <p:cNvSpPr/>
+          <p:nvPr/>
+        </p:nvSpPr>
+        <p:spPr>
+          <a:xfrm>
+            <a:off x="6858000" y="3364992"/>
+            <a:ext cx="1554480" cy="475488"/>
           </a:xfrm>
           <a:prstGeom prst="rect">
             <a:avLst/>
@@ -32238,112 +33746,7 @@
                 <a:ea typeface="Trebuchet MS" pitchFamily="34" charset="-122"/>
                 <a:cs typeface="Trebuchet MS" pitchFamily="34" charset="-120"/>
               </a:rPr>
-              <a:t>tion</a:t>
-            </a:r>
-            <a:endParaRPr lang="en-US" sz="1400" dirty="0"/>
-          </a:p>
-        </p:txBody>
-      </p:sp>
-      <p:sp>
-        <p:nvSpPr>
-          <p:cNvPr id="39" name="Text 37"/>
-          <p:cNvSpPr/>
-          <p:nvPr/>
-        </p:nvSpPr>
-        <p:spPr>
-          <a:xfrm>
-            <a:off x="7107936" y="3364992"/>
-            <a:ext cx="76200" cy="475488"/>
-          </a:xfrm>
-          <a:prstGeom prst="rect">
-            <a:avLst/>
-          </a:prstGeom>
-          <a:noFill/>
-          <a:ln/>
-        </p:spPr>
-        <p:txBody>
-          <a:bodyPr wrap="square" lIns="0" tIns="0" rIns="0" bIns="0" rtlCol="0" anchor="ctr"/>
-          <a:lstStyle/>
-          <a:p>
-            <a:pPr algn="ctr" indent="0" marL="0">
-              <a:buNone/>
-            </a:pPr>
-            <a:r>
-              <a:rPr lang="en-US" sz="1600" b="1" dirty="0">
-                <a:solidFill>
-                  <a:srgbClr val="0D9488"/>
-                </a:solidFill>
-                <a:latin typeface="Trebuchet MS" pitchFamily="34" charset="0"/>
-                <a:ea typeface="Trebuchet MS" pitchFamily="34" charset="-122"/>
-                <a:cs typeface="Trebuchet MS" pitchFamily="34" charset="-120"/>
-              </a:rPr>
-              <a:t>·</a:t>
-            </a:r>
-            <a:endParaRPr lang="en-US" sz="1600" dirty="0"/>
-          </a:p>
-        </p:txBody>
-      </p:sp>
-      <p:sp>
-        <p:nvSpPr>
-          <p:cNvPr id="40" name="Shape 38"/>
-          <p:cNvSpPr/>
-          <p:nvPr/>
-        </p:nvSpPr>
-        <p:spPr>
-          <a:xfrm>
-            <a:off x="7184136" y="3364992"/>
-            <a:ext cx="1225296" cy="475488"/>
-          </a:xfrm>
-          <a:prstGeom prst="rect">
-            <a:avLst>
-              <a:gd name="adj" fmla="val 9615"/>
-            </a:avLst>
-          </a:prstGeom>
-          <a:solidFill>
-            <a:srgbClr val="FFFFFF"/>
-          </a:solidFill>
-          <a:ln w="12700">
-            <a:solidFill>
-              <a:srgbClr val="0D9488"/>
-            </a:solidFill>
-            <a:prstDash val="solid"/>
-          </a:ln>
-        </p:spPr>
-      </p:sp>
-      <p:sp>
-        <p:nvSpPr>
-          <p:cNvPr id="41" name="Text 39"/>
-          <p:cNvSpPr/>
-          <p:nvPr/>
-        </p:nvSpPr>
-        <p:spPr>
-          <a:xfrm>
-            <a:off x="7184136" y="3364992"/>
-            <a:ext cx="1225296" cy="475488"/>
-          </a:xfrm>
-          <a:prstGeom prst="rect">
-            <a:avLst/>
-          </a:prstGeom>
-          <a:noFill/>
-          <a:ln/>
-        </p:spPr>
-        <p:txBody>
-          <a:bodyPr wrap="square" lIns="0" tIns="0" rIns="0" bIns="0" rtlCol="0" anchor="ctr"/>
-          <a:lstStyle/>
-          <a:p>
-            <a:pPr algn="ctr" indent="0" marL="0">
-              <a:buNone/>
-            </a:pPr>
-            <a:r>
-              <a:rPr lang="en-US" sz="1400" b="1" dirty="0">
-                <a:solidFill>
-                  <a:srgbClr val="0D9488"/>
-                </a:solidFill>
-                <a:latin typeface="Trebuchet MS" pitchFamily="34" charset="0"/>
-                <a:ea typeface="Trebuchet MS" pitchFamily="34" charset="-122"/>
-                <a:cs typeface="Trebuchet MS" pitchFamily="34" charset="-120"/>
-              </a:rPr>
-              <a:t>al</a:t>
+              <a:t>tions</a:t>
             </a:r>
             <a:endParaRPr lang="en-US" sz="1400" dirty="0"/>
           </a:p>
@@ -32767,7 +34170,7 @@
                 <a:ea typeface="Calibri" pitchFamily="34" charset="-122"/>
                 <a:cs typeface="Calibri" pitchFamily="34" charset="-120"/>
               </a:rPr>
-              <a:t>Word Labs  •  wordlabs.app  •  Prefix: 'inter-' = between, among, together</a:t>
+              <a:t>Word Labs  •  wordlabs.app  •  Prefix: 'inter-' = between</a:t>
             </a:r>
             <a:endParaRPr lang="en-US" sz="800" dirty="0"/>
           </a:p>
@@ -32906,7 +34309,7 @@
                 <a:ea typeface="Trebuchet MS" pitchFamily="34" charset="-122"/>
                 <a:cs typeface="Trebuchet MS" pitchFamily="34" charset="-120"/>
               </a:rPr>
-              <a:t>international</a:t>
+              <a:t>interventions</a:t>
             </a:r>
             <a:endParaRPr lang="en-US" sz="2800" dirty="0"/>
           </a:p>
@@ -32986,8 +34389,8 @@
         </p:nvSpPr>
         <p:spPr>
           <a:xfrm>
-            <a:off x="2221992" y="2258568"/>
-            <a:ext cx="1828800" cy="292608"/>
+            <a:off x="1989734" y="2258568"/>
+            <a:ext cx="1581912" cy="292608"/>
           </a:xfrm>
           <a:prstGeom prst="rect">
             <a:avLst>
@@ -33020,8 +34423,8 @@
         </p:nvSpPr>
         <p:spPr>
           <a:xfrm>
-            <a:off x="2221992" y="2258568"/>
-            <a:ext cx="1828800" cy="292608"/>
+            <a:off x="1989734" y="2258568"/>
+            <a:ext cx="1581912" cy="292608"/>
           </a:xfrm>
           <a:prstGeom prst="rect">
             <a:avLst/>
@@ -33059,8 +34462,8 @@
         </p:nvSpPr>
         <p:spPr>
           <a:xfrm>
-            <a:off x="2221992" y="2569464"/>
-            <a:ext cx="1828800" cy="201168"/>
+            <a:off x="1989734" y="2569464"/>
+            <a:ext cx="1581912" cy="201168"/>
           </a:xfrm>
           <a:prstGeom prst="rect">
             <a:avLst/>
@@ -33098,8 +34501,8 @@
         </p:nvSpPr>
         <p:spPr>
           <a:xfrm>
-            <a:off x="4370832" y="2258568"/>
-            <a:ext cx="1828800" cy="292608"/>
+            <a:off x="3659429" y="2258568"/>
+            <a:ext cx="1581912" cy="292608"/>
           </a:xfrm>
           <a:prstGeom prst="rect">
             <a:avLst>
@@ -33132,8 +34535,8 @@
         </p:nvSpPr>
         <p:spPr>
           <a:xfrm>
-            <a:off x="4370832" y="2258568"/>
-            <a:ext cx="1828800" cy="292608"/>
+            <a:off x="3659429" y="2258568"/>
+            <a:ext cx="1581912" cy="292608"/>
           </a:xfrm>
           <a:prstGeom prst="rect">
             <a:avLst/>
@@ -33157,7 +34560,7 @@
                 <a:ea typeface="Trebuchet MS" pitchFamily="34" charset="-122"/>
                 <a:cs typeface="Trebuchet MS" pitchFamily="34" charset="-120"/>
               </a:rPr>
-              <a:t>nation</a:t>
+              <a:t>ven</a:t>
             </a:r>
             <a:endParaRPr lang="en-US" sz="1300" dirty="0"/>
           </a:p>
@@ -33171,8 +34574,8 @@
         </p:nvSpPr>
         <p:spPr>
           <a:xfrm>
-            <a:off x="4370832" y="2569464"/>
-            <a:ext cx="1828800" cy="201168"/>
+            <a:off x="3659429" y="2569464"/>
+            <a:ext cx="1581912" cy="201168"/>
           </a:xfrm>
           <a:prstGeom prst="rect">
             <a:avLst/>
@@ -33196,7 +34599,7 @@
                 <a:ea typeface="Calibri" pitchFamily="34" charset="-122"/>
                 <a:cs typeface="Calibri" pitchFamily="34" charset="-120"/>
               </a:rPr>
-              <a:t>country</a:t>
+              <a:t>come</a:t>
             </a:r>
             <a:endParaRPr lang="en-US" sz="850" dirty="0"/>
           </a:p>
@@ -33210,8 +34613,8 @@
         </p:nvSpPr>
         <p:spPr>
           <a:xfrm>
-            <a:off x="6519672" y="2258568"/>
-            <a:ext cx="1828800" cy="292608"/>
+            <a:off x="5329123" y="2258568"/>
+            <a:ext cx="1581912" cy="292608"/>
           </a:xfrm>
           <a:prstGeom prst="rect">
             <a:avLst>
@@ -33244,8 +34647,8 @@
         </p:nvSpPr>
         <p:spPr>
           <a:xfrm>
-            <a:off x="6519672" y="2258568"/>
-            <a:ext cx="1828800" cy="292608"/>
+            <a:off x="5329123" y="2258568"/>
+            <a:ext cx="1581912" cy="292608"/>
           </a:xfrm>
           <a:prstGeom prst="rect">
             <a:avLst/>
@@ -33269,7 +34672,7 @@
                 <a:ea typeface="Trebuchet MS" pitchFamily="34" charset="-122"/>
                 <a:cs typeface="Trebuchet MS" pitchFamily="34" charset="-120"/>
               </a:rPr>
-              <a:t>al</a:t>
+              <a:t>tion</a:t>
             </a:r>
             <a:endParaRPr lang="en-US" sz="1300" dirty="0"/>
           </a:p>
@@ -33283,8 +34686,8 @@
         </p:nvSpPr>
         <p:spPr>
           <a:xfrm>
-            <a:off x="6519672" y="2569464"/>
-            <a:ext cx="1828800" cy="201168"/>
+            <a:off x="5329123" y="2569464"/>
+            <a:ext cx="1581912" cy="201168"/>
           </a:xfrm>
           <a:prstGeom prst="rect">
             <a:avLst/>
@@ -33308,7 +34711,7 @@
                 <a:ea typeface="Calibri" pitchFamily="34" charset="-122"/>
                 <a:cs typeface="Calibri" pitchFamily="34" charset="-120"/>
               </a:rPr>
-              <a:t>relating to</a:t>
+              <a:t>act or process of</a:t>
             </a:r>
             <a:endParaRPr lang="en-US" sz="850" dirty="0"/>
           </a:p>
@@ -33317,6 +34720,118 @@
       <p:sp>
         <p:nvSpPr>
           <p:cNvPr id="25" name="Shape 23"/>
+          <p:cNvSpPr/>
+          <p:nvPr/>
+        </p:nvSpPr>
+        <p:spPr>
+          <a:xfrm>
+            <a:off x="6998818" y="2258568"/>
+            <a:ext cx="1581912" cy="292608"/>
+          </a:xfrm>
+          <a:prstGeom prst="rect">
+            <a:avLst>
+              <a:gd name="adj" fmla="val 25000"/>
+            </a:avLst>
+          </a:prstGeom>
+          <a:solidFill>
+            <a:srgbClr val="FCE7F3"/>
+          </a:solidFill>
+          <a:ln w="19050">
+            <a:solidFill>
+              <a:srgbClr val="DB2777"/>
+            </a:solidFill>
+            <a:prstDash val="solid"/>
+          </a:ln>
+          <a:effectLst>
+            <a:outerShdw sx="100000" sy="100000" kx="0" ky="0" algn="bl" rotWithShape="0" blurRad="101600" dist="38100" dir="8100000">
+              <a:srgbClr val="000000">
+                <a:alpha val="12000"/>
+              </a:srgbClr>
+            </a:outerShdw>
+          </a:effectLst>
+        </p:spPr>
+      </p:sp>
+      <p:sp>
+        <p:nvSpPr>
+          <p:cNvPr id="26" name="Text 24"/>
+          <p:cNvSpPr/>
+          <p:nvPr/>
+        </p:nvSpPr>
+        <p:spPr>
+          <a:xfrm>
+            <a:off x="6998818" y="2258568"/>
+            <a:ext cx="1581912" cy="292608"/>
+          </a:xfrm>
+          <a:prstGeom prst="rect">
+            <a:avLst/>
+          </a:prstGeom>
+          <a:noFill/>
+          <a:ln/>
+        </p:spPr>
+        <p:txBody>
+          <a:bodyPr wrap="square" lIns="0" tIns="0" rIns="0" bIns="0" rtlCol="0" anchor="ctr"/>
+          <a:lstStyle/>
+          <a:p>
+            <a:pPr algn="ctr" indent="0" marL="0">
+              <a:buNone/>
+            </a:pPr>
+            <a:r>
+              <a:rPr lang="en-US" sz="1300" b="1" dirty="0">
+                <a:solidFill>
+                  <a:srgbClr val="9D174D"/>
+                </a:solidFill>
+                <a:latin typeface="Trebuchet MS" pitchFamily="34" charset="0"/>
+                <a:ea typeface="Trebuchet MS" pitchFamily="34" charset="-122"/>
+                <a:cs typeface="Trebuchet MS" pitchFamily="34" charset="-120"/>
+              </a:rPr>
+              <a:t>s</a:t>
+            </a:r>
+            <a:endParaRPr lang="en-US" sz="1300" dirty="0"/>
+          </a:p>
+        </p:txBody>
+      </p:sp>
+      <p:sp>
+        <p:nvSpPr>
+          <p:cNvPr id="27" name="Text 25"/>
+          <p:cNvSpPr/>
+          <p:nvPr/>
+        </p:nvSpPr>
+        <p:spPr>
+          <a:xfrm>
+            <a:off x="6998818" y="2569464"/>
+            <a:ext cx="1581912" cy="201168"/>
+          </a:xfrm>
+          <a:prstGeom prst="rect">
+            <a:avLst/>
+          </a:prstGeom>
+          <a:noFill/>
+          <a:ln/>
+        </p:spPr>
+        <p:txBody>
+          <a:bodyPr wrap="square" lIns="0" tIns="0" rIns="0" bIns="0" rtlCol="0" anchor="t"/>
+          <a:lstStyle/>
+          <a:p>
+            <a:pPr algn="ctr" indent="0" marL="0">
+              <a:buNone/>
+            </a:pPr>
+            <a:r>
+              <a:rPr lang="en-US" sz="850" dirty="0">
+                <a:solidFill>
+                  <a:srgbClr val="475569"/>
+                </a:solidFill>
+                <a:latin typeface="Calibri" pitchFamily="34" charset="0"/>
+                <a:ea typeface="Calibri" pitchFamily="34" charset="-122"/>
+                <a:cs typeface="Calibri" pitchFamily="34" charset="-120"/>
+              </a:rPr>
+              <a:t>plural or present tense</a:t>
+            </a:r>
+            <a:endParaRPr lang="en-US" sz="850" dirty="0"/>
+          </a:p>
+        </p:txBody>
+      </p:sp>
+      <p:sp>
+        <p:nvSpPr>
+          <p:cNvPr id="28" name="Shape 26"/>
           <p:cNvSpPr/>
           <p:nvPr/>
         </p:nvSpPr>
@@ -33343,7 +34858,7 @@
       </p:sp>
       <p:sp>
         <p:nvSpPr>
-          <p:cNvPr id="26" name="Text 24"/>
+          <p:cNvPr id="29" name="Text 27"/>
           <p:cNvSpPr/>
           <p:nvPr/>
         </p:nvSpPr>
@@ -33382,7 +34897,7 @@
       </p:sp>
       <p:sp>
         <p:nvSpPr>
-          <p:cNvPr id="27" name="Shape 25"/>
+          <p:cNvPr id="30" name="Shape 28"/>
           <p:cNvSpPr/>
           <p:nvPr/>
         </p:nvSpPr>
@@ -33409,14 +34924,14 @@
       </p:sp>
       <p:sp>
         <p:nvSpPr>
-          <p:cNvPr id="28" name="Shape 26"/>
-          <p:cNvSpPr/>
-          <p:nvPr/>
-        </p:nvSpPr>
-        <p:spPr>
-          <a:xfrm>
-            <a:off x="1978152" y="3364992"/>
-            <a:ext cx="1225296" cy="475488"/>
+          <p:cNvPr id="31" name="Shape 29"/>
+          <p:cNvSpPr/>
+          <p:nvPr/>
+        </p:nvSpPr>
+        <p:spPr>
+          <a:xfrm>
+            <a:off x="1975104" y="3364992"/>
+            <a:ext cx="1554480" cy="475488"/>
           </a:xfrm>
           <a:prstGeom prst="rect">
             <a:avLst>
@@ -33436,14 +34951,14 @@
       </p:sp>
       <p:sp>
         <p:nvSpPr>
-          <p:cNvPr id="29" name="Text 27"/>
-          <p:cNvSpPr/>
-          <p:nvPr/>
-        </p:nvSpPr>
-        <p:spPr>
-          <a:xfrm>
-            <a:off x="1978152" y="3364992"/>
-            <a:ext cx="1225296" cy="475488"/>
+          <p:cNvPr id="32" name="Text 30"/>
+          <p:cNvSpPr/>
+          <p:nvPr/>
+        </p:nvSpPr>
+        <p:spPr>
+          <a:xfrm>
+            <a:off x="1975104" y="3364992"/>
+            <a:ext cx="1554480" cy="475488"/>
           </a:xfrm>
           <a:prstGeom prst="rect">
             <a:avLst/>
@@ -33475,14 +34990,14 @@
       </p:sp>
       <p:sp>
         <p:nvSpPr>
-          <p:cNvPr id="30" name="Text 28"/>
-          <p:cNvSpPr/>
-          <p:nvPr/>
-        </p:nvSpPr>
-        <p:spPr>
-          <a:xfrm>
-            <a:off x="3203448" y="3364992"/>
-            <a:ext cx="76200" cy="475488"/>
+          <p:cNvPr id="33" name="Text 31"/>
+          <p:cNvSpPr/>
+          <p:nvPr/>
+        </p:nvSpPr>
+        <p:spPr>
+          <a:xfrm>
+            <a:off x="3529584" y="3364992"/>
+            <a:ext cx="73152" cy="475488"/>
           </a:xfrm>
           <a:prstGeom prst="rect">
             <a:avLst/>
@@ -33514,14 +35029,14 @@
       </p:sp>
       <p:sp>
         <p:nvSpPr>
-          <p:cNvPr id="31" name="Shape 29"/>
-          <p:cNvSpPr/>
-          <p:nvPr/>
-        </p:nvSpPr>
-        <p:spPr>
-          <a:xfrm>
-            <a:off x="3279648" y="3364992"/>
-            <a:ext cx="1225296" cy="475488"/>
+          <p:cNvPr id="34" name="Shape 32"/>
+          <p:cNvSpPr/>
+          <p:nvPr/>
+        </p:nvSpPr>
+        <p:spPr>
+          <a:xfrm>
+            <a:off x="3602736" y="3364992"/>
+            <a:ext cx="1554480" cy="475488"/>
           </a:xfrm>
           <a:prstGeom prst="rect">
             <a:avLst>
@@ -33541,14 +35056,14 @@
       </p:sp>
       <p:sp>
         <p:nvSpPr>
-          <p:cNvPr id="32" name="Text 30"/>
-          <p:cNvSpPr/>
-          <p:nvPr/>
-        </p:nvSpPr>
-        <p:spPr>
-          <a:xfrm>
-            <a:off x="3279648" y="3364992"/>
-            <a:ext cx="1225296" cy="475488"/>
+          <p:cNvPr id="35" name="Text 33"/>
+          <p:cNvSpPr/>
+          <p:nvPr/>
+        </p:nvSpPr>
+        <p:spPr>
+          <a:xfrm>
+            <a:off x="3602736" y="3364992"/>
+            <a:ext cx="1554480" cy="475488"/>
           </a:xfrm>
           <a:prstGeom prst="rect">
             <a:avLst/>
@@ -33580,14 +35095,14 @@
       </p:sp>
       <p:sp>
         <p:nvSpPr>
-          <p:cNvPr id="33" name="Text 31"/>
-          <p:cNvSpPr/>
-          <p:nvPr/>
-        </p:nvSpPr>
-        <p:spPr>
-          <a:xfrm>
-            <a:off x="4504944" y="3364992"/>
-            <a:ext cx="76200" cy="475488"/>
+          <p:cNvPr id="36" name="Text 34"/>
+          <p:cNvSpPr/>
+          <p:nvPr/>
+        </p:nvSpPr>
+        <p:spPr>
+          <a:xfrm>
+            <a:off x="5157216" y="3364992"/>
+            <a:ext cx="73152" cy="475488"/>
           </a:xfrm>
           <a:prstGeom prst="rect">
             <a:avLst/>
@@ -33619,14 +35134,14 @@
       </p:sp>
       <p:sp>
         <p:nvSpPr>
-          <p:cNvPr id="34" name="Shape 32"/>
-          <p:cNvSpPr/>
-          <p:nvPr/>
-        </p:nvSpPr>
-        <p:spPr>
-          <a:xfrm>
-            <a:off x="4581144" y="3364992"/>
-            <a:ext cx="1225296" cy="475488"/>
+          <p:cNvPr id="37" name="Shape 35"/>
+          <p:cNvSpPr/>
+          <p:nvPr/>
+        </p:nvSpPr>
+        <p:spPr>
+          <a:xfrm>
+            <a:off x="5230368" y="3364992"/>
+            <a:ext cx="1554480" cy="475488"/>
           </a:xfrm>
           <a:prstGeom prst="rect">
             <a:avLst>
@@ -33646,14 +35161,14 @@
       </p:sp>
       <p:sp>
         <p:nvSpPr>
-          <p:cNvPr id="35" name="Text 33"/>
-          <p:cNvSpPr/>
-          <p:nvPr/>
-        </p:nvSpPr>
-        <p:spPr>
-          <a:xfrm>
-            <a:off x="4581144" y="3364992"/>
-            <a:ext cx="1225296" cy="475488"/>
+          <p:cNvPr id="38" name="Text 36"/>
+          <p:cNvSpPr/>
+          <p:nvPr/>
+        </p:nvSpPr>
+        <p:spPr>
+          <a:xfrm>
+            <a:off x="5230368" y="3364992"/>
+            <a:ext cx="1554480" cy="475488"/>
           </a:xfrm>
           <a:prstGeom prst="rect">
             <a:avLst/>
@@ -33677,7 +35192,7 @@
                 <a:ea typeface="Trebuchet MS" pitchFamily="34" charset="-122"/>
                 <a:cs typeface="Trebuchet MS" pitchFamily="34" charset="-120"/>
               </a:rPr>
-              <a:t>na</a:t>
+              <a:t>ven</a:t>
             </a:r>
             <a:endParaRPr lang="en-US" sz="1400" dirty="0"/>
           </a:p>
@@ -33685,14 +35200,14 @@
       </p:sp>
       <p:sp>
         <p:nvSpPr>
-          <p:cNvPr id="36" name="Text 34"/>
-          <p:cNvSpPr/>
-          <p:nvPr/>
-        </p:nvSpPr>
-        <p:spPr>
-          <a:xfrm>
-            <a:off x="5806440" y="3364992"/>
-            <a:ext cx="76200" cy="475488"/>
+          <p:cNvPr id="39" name="Text 37"/>
+          <p:cNvSpPr/>
+          <p:nvPr/>
+        </p:nvSpPr>
+        <p:spPr>
+          <a:xfrm>
+            <a:off x="6784848" y="3364992"/>
+            <a:ext cx="73152" cy="475488"/>
           </a:xfrm>
           <a:prstGeom prst="rect">
             <a:avLst/>
@@ -33724,14 +35239,14 @@
       </p:sp>
       <p:sp>
         <p:nvSpPr>
-          <p:cNvPr id="37" name="Shape 35"/>
-          <p:cNvSpPr/>
-          <p:nvPr/>
-        </p:nvSpPr>
-        <p:spPr>
-          <a:xfrm>
-            <a:off x="5882640" y="3364992"/>
-            <a:ext cx="1225296" cy="475488"/>
+          <p:cNvPr id="40" name="Shape 38"/>
+          <p:cNvSpPr/>
+          <p:nvPr/>
+        </p:nvSpPr>
+        <p:spPr>
+          <a:xfrm>
+            <a:off x="6858000" y="3364992"/>
+            <a:ext cx="1554480" cy="475488"/>
           </a:xfrm>
           <a:prstGeom prst="rect">
             <a:avLst>
@@ -33751,14 +35266,14 @@
       </p:sp>
       <p:sp>
         <p:nvSpPr>
-          <p:cNvPr id="38" name="Text 36"/>
-          <p:cNvSpPr/>
-          <p:nvPr/>
-        </p:nvSpPr>
-        <p:spPr>
-          <a:xfrm>
-            <a:off x="5882640" y="3364992"/>
-            <a:ext cx="1225296" cy="475488"/>
+          <p:cNvPr id="41" name="Text 39"/>
+          <p:cNvSpPr/>
+          <p:nvPr/>
+        </p:nvSpPr>
+        <p:spPr>
+          <a:xfrm>
+            <a:off x="6858000" y="3364992"/>
+            <a:ext cx="1554480" cy="475488"/>
           </a:xfrm>
           <a:prstGeom prst="rect">
             <a:avLst/>
@@ -33782,7 +35297,7 @@
                 <a:ea typeface="Trebuchet MS" pitchFamily="34" charset="-122"/>
                 <a:cs typeface="Trebuchet MS" pitchFamily="34" charset="-120"/>
               </a:rPr>
-              <a:t>tion</a:t>
+              <a:t>tions</a:t>
             </a:r>
             <a:endParaRPr lang="en-US" sz="1400" dirty="0"/>
           </a:p>
@@ -33790,193 +35305,247 @@
       </p:sp>
       <p:sp>
         <p:nvSpPr>
-          <p:cNvPr id="39" name="Text 37"/>
-          <p:cNvSpPr/>
-          <p:nvPr/>
-        </p:nvSpPr>
-        <p:spPr>
-          <a:xfrm>
-            <a:off x="7107936" y="3364992"/>
-            <a:ext cx="76200" cy="475488"/>
-          </a:xfrm>
-          <a:prstGeom prst="rect">
-            <a:avLst/>
-          </a:prstGeom>
-          <a:noFill/>
-          <a:ln/>
-        </p:spPr>
-        <p:txBody>
-          <a:bodyPr wrap="square" lIns="0" tIns="0" rIns="0" bIns="0" rtlCol="0" anchor="ctr"/>
-          <a:lstStyle/>
-          <a:p>
-            <a:pPr algn="ctr" indent="0" marL="0">
-              <a:buNone/>
-            </a:pPr>
-            <a:r>
-              <a:rPr lang="en-US" sz="1600" b="1" dirty="0">
-                <a:solidFill>
-                  <a:srgbClr val="0D9488"/>
+          <p:cNvPr id="42" name="Shape 40"/>
+          <p:cNvSpPr/>
+          <p:nvPr/>
+        </p:nvSpPr>
+        <p:spPr>
+          <a:xfrm>
+            <a:off x="365760" y="4096512"/>
+            <a:ext cx="1371600" cy="804672"/>
+          </a:xfrm>
+          <a:prstGeom prst="rect">
+            <a:avLst>
+              <a:gd name="adj" fmla="val 6818"/>
+            </a:avLst>
+          </a:prstGeom>
+          <a:solidFill>
+            <a:srgbClr val="E2E8F0"/>
+          </a:solidFill>
+          <a:ln w="12700">
+            <a:solidFill>
+              <a:srgbClr val="E2E8F0"/>
+            </a:solidFill>
+            <a:prstDash val="solid"/>
+          </a:ln>
+        </p:spPr>
+      </p:sp>
+      <p:sp>
+        <p:nvSpPr>
+          <p:cNvPr id="43" name="Text 41"/>
+          <p:cNvSpPr/>
+          <p:nvPr/>
+        </p:nvSpPr>
+        <p:spPr>
+          <a:xfrm>
+            <a:off x="365760" y="4096512"/>
+            <a:ext cx="1371600" cy="804672"/>
+          </a:xfrm>
+          <a:prstGeom prst="rect">
+            <a:avLst/>
+          </a:prstGeom>
+          <a:noFill/>
+          <a:ln/>
+        </p:spPr>
+        <p:txBody>
+          <a:bodyPr wrap="square" lIns="0" tIns="0" rIns="0" bIns="0" rtlCol="0" anchor="ctr"/>
+          <a:lstStyle/>
+          <a:p>
+            <a:pPr algn="ctr" indent="0" marL="0">
+              <a:buNone/>
+            </a:pPr>
+            <a:r>
+              <a:rPr lang="en-US" sz="1100" b="1" dirty="0">
+                <a:solidFill>
+                  <a:srgbClr val="475569"/>
                 </a:solidFill>
                 <a:latin typeface="Trebuchet MS" pitchFamily="34" charset="0"/>
                 <a:ea typeface="Trebuchet MS" pitchFamily="34" charset="-122"/>
                 <a:cs typeface="Trebuchet MS" pitchFamily="34" charset="-120"/>
               </a:rPr>
-              <a:t>·</a:t>
-            </a:r>
-            <a:endParaRPr lang="en-US" sz="1600" dirty="0"/>
-          </a:p>
-        </p:txBody>
-      </p:sp>
-      <p:sp>
-        <p:nvSpPr>
-          <p:cNvPr id="40" name="Shape 38"/>
-          <p:cNvSpPr/>
-          <p:nvPr/>
-        </p:nvSpPr>
-        <p:spPr>
-          <a:xfrm>
-            <a:off x="7184136" y="3364992"/>
-            <a:ext cx="1225296" cy="475488"/>
+              <a:t>Phonemes</a:t>
+            </a:r>
+            <a:endParaRPr lang="en-US" sz="1100" dirty="0"/>
+          </a:p>
+        </p:txBody>
+      </p:sp>
+      <p:sp>
+        <p:nvSpPr>
+          <p:cNvPr id="44" name="Shape 42"/>
+          <p:cNvSpPr/>
+          <p:nvPr/>
+        </p:nvSpPr>
+        <p:spPr>
+          <a:xfrm>
+            <a:off x="1874520" y="4096512"/>
+            <a:ext cx="6903720" cy="658368"/>
           </a:xfrm>
           <a:prstGeom prst="rect">
             <a:avLst>
-              <a:gd name="adj" fmla="val 9615"/>
+              <a:gd name="adj" fmla="val 8333"/>
             </a:avLst>
           </a:prstGeom>
           <a:solidFill>
+            <a:srgbClr val="FCE7F3"/>
+          </a:solidFill>
+          <a:ln w="12700">
+            <a:solidFill>
+              <a:srgbClr val="DB2777"/>
+            </a:solidFill>
+            <a:prstDash val="solid"/>
+          </a:ln>
+        </p:spPr>
+      </p:sp>
+      <p:sp>
+        <p:nvSpPr>
+          <p:cNvPr id="45" name="Shape 43"/>
+          <p:cNvSpPr/>
+          <p:nvPr/>
+        </p:nvSpPr>
+        <p:spPr>
+          <a:xfrm>
+            <a:off x="1952244" y="4169664"/>
+            <a:ext cx="543652" cy="475488"/>
+          </a:xfrm>
+          <a:prstGeom prst="rect">
+            <a:avLst>
+              <a:gd name="adj" fmla="val 7692"/>
+            </a:avLst>
+          </a:prstGeom>
+          <a:solidFill>
             <a:srgbClr val="FFFFFF"/>
           </a:solidFill>
           <a:ln w="12700">
             <a:solidFill>
-              <a:srgbClr val="0D9488"/>
-            </a:solidFill>
-            <a:prstDash val="solid"/>
-          </a:ln>
-        </p:spPr>
-      </p:sp>
-      <p:sp>
-        <p:nvSpPr>
-          <p:cNvPr id="41" name="Text 39"/>
-          <p:cNvSpPr/>
-          <p:nvPr/>
-        </p:nvSpPr>
-        <p:spPr>
-          <a:xfrm>
-            <a:off x="7184136" y="3364992"/>
-            <a:ext cx="1225296" cy="475488"/>
-          </a:xfrm>
-          <a:prstGeom prst="rect">
-            <a:avLst/>
-          </a:prstGeom>
-          <a:noFill/>
-          <a:ln/>
-        </p:spPr>
-        <p:txBody>
-          <a:bodyPr wrap="square" lIns="0" tIns="0" rIns="0" bIns="0" rtlCol="0" anchor="ctr"/>
-          <a:lstStyle/>
-          <a:p>
-            <a:pPr algn="ctr" indent="0" marL="0">
-              <a:buNone/>
-            </a:pPr>
-            <a:r>
-              <a:rPr lang="en-US" sz="1400" b="1" dirty="0">
-                <a:solidFill>
-                  <a:srgbClr val="0D9488"/>
+              <a:srgbClr val="DB2777"/>
+            </a:solidFill>
+            <a:prstDash val="solid"/>
+          </a:ln>
+        </p:spPr>
+      </p:sp>
+      <p:sp>
+        <p:nvSpPr>
+          <p:cNvPr id="46" name="Text 44"/>
+          <p:cNvSpPr/>
+          <p:nvPr/>
+        </p:nvSpPr>
+        <p:spPr>
+          <a:xfrm>
+            <a:off x="1952244" y="4169664"/>
+            <a:ext cx="543652" cy="475488"/>
+          </a:xfrm>
+          <a:prstGeom prst="rect">
+            <a:avLst/>
+          </a:prstGeom>
+          <a:noFill/>
+          <a:ln/>
+        </p:spPr>
+        <p:txBody>
+          <a:bodyPr wrap="square" lIns="0" tIns="0" rIns="0" bIns="0" rtlCol="0" anchor="ctr"/>
+          <a:lstStyle/>
+          <a:p>
+            <a:pPr algn="ctr" indent="0" marL="0">
+              <a:buNone/>
+            </a:pPr>
+            <a:r>
+              <a:rPr lang="en-US" sz="900" b="1" dirty="0">
+                <a:solidFill>
+                  <a:srgbClr val="9D174D"/>
                 </a:solidFill>
                 <a:latin typeface="Trebuchet MS" pitchFamily="34" charset="0"/>
                 <a:ea typeface="Trebuchet MS" pitchFamily="34" charset="-122"/>
                 <a:cs typeface="Trebuchet MS" pitchFamily="34" charset="-120"/>
               </a:rPr>
-              <a:t>al</a:t>
-            </a:r>
-            <a:endParaRPr lang="en-US" sz="1400" dirty="0"/>
-          </a:p>
-        </p:txBody>
-      </p:sp>
-      <p:sp>
-        <p:nvSpPr>
-          <p:cNvPr id="42" name="Shape 40"/>
-          <p:cNvSpPr/>
-          <p:nvPr/>
-        </p:nvSpPr>
-        <p:spPr>
-          <a:xfrm>
-            <a:off x="365760" y="4096512"/>
-            <a:ext cx="1371600" cy="804672"/>
+              <a:t>i</a:t>
+            </a:r>
+            <a:endParaRPr lang="en-US" sz="900" dirty="0"/>
+          </a:p>
+        </p:txBody>
+      </p:sp>
+      <p:sp>
+        <p:nvSpPr>
+          <p:cNvPr id="47" name="Shape 45"/>
+          <p:cNvSpPr/>
+          <p:nvPr/>
+        </p:nvSpPr>
+        <p:spPr>
+          <a:xfrm>
+            <a:off x="2546188" y="4169664"/>
+            <a:ext cx="543652" cy="475488"/>
           </a:xfrm>
           <a:prstGeom prst="rect">
             <a:avLst>
-              <a:gd name="adj" fmla="val 6818"/>
+              <a:gd name="adj" fmla="val 7692"/>
             </a:avLst>
           </a:prstGeom>
           <a:solidFill>
-            <a:srgbClr val="E2E8F0"/>
-          </a:solidFill>
-          <a:ln w="12700">
-            <a:solidFill>
-              <a:srgbClr val="E2E8F0"/>
-            </a:solidFill>
-            <a:prstDash val="solid"/>
-          </a:ln>
-        </p:spPr>
-      </p:sp>
-      <p:sp>
-        <p:nvSpPr>
-          <p:cNvPr id="43" name="Text 41"/>
-          <p:cNvSpPr/>
-          <p:nvPr/>
-        </p:nvSpPr>
-        <p:spPr>
-          <a:xfrm>
-            <a:off x="365760" y="4096512"/>
-            <a:ext cx="1371600" cy="804672"/>
-          </a:xfrm>
-          <a:prstGeom prst="rect">
-            <a:avLst/>
-          </a:prstGeom>
-          <a:noFill/>
-          <a:ln/>
-        </p:spPr>
-        <p:txBody>
-          <a:bodyPr wrap="square" lIns="0" tIns="0" rIns="0" bIns="0" rtlCol="0" anchor="ctr"/>
-          <a:lstStyle/>
-          <a:p>
-            <a:pPr algn="ctr" indent="0" marL="0">
-              <a:buNone/>
-            </a:pPr>
-            <a:r>
-              <a:rPr lang="en-US" sz="1100" b="1" dirty="0">
-                <a:solidFill>
-                  <a:srgbClr val="475569"/>
+            <a:srgbClr val="FFFFFF"/>
+          </a:solidFill>
+          <a:ln w="12700">
+            <a:solidFill>
+              <a:srgbClr val="DB2777"/>
+            </a:solidFill>
+            <a:prstDash val="solid"/>
+          </a:ln>
+        </p:spPr>
+      </p:sp>
+      <p:sp>
+        <p:nvSpPr>
+          <p:cNvPr id="48" name="Text 46"/>
+          <p:cNvSpPr/>
+          <p:nvPr/>
+        </p:nvSpPr>
+        <p:spPr>
+          <a:xfrm>
+            <a:off x="2546188" y="4169664"/>
+            <a:ext cx="543652" cy="475488"/>
+          </a:xfrm>
+          <a:prstGeom prst="rect">
+            <a:avLst/>
+          </a:prstGeom>
+          <a:noFill/>
+          <a:ln/>
+        </p:spPr>
+        <p:txBody>
+          <a:bodyPr wrap="square" lIns="0" tIns="0" rIns="0" bIns="0" rtlCol="0" anchor="ctr"/>
+          <a:lstStyle/>
+          <a:p>
+            <a:pPr algn="ctr" indent="0" marL="0">
+              <a:buNone/>
+            </a:pPr>
+            <a:r>
+              <a:rPr lang="en-US" sz="900" b="1" dirty="0">
+                <a:solidFill>
+                  <a:srgbClr val="9D174D"/>
                 </a:solidFill>
                 <a:latin typeface="Trebuchet MS" pitchFamily="34" charset="0"/>
                 <a:ea typeface="Trebuchet MS" pitchFamily="34" charset="-122"/>
                 <a:cs typeface="Trebuchet MS" pitchFamily="34" charset="-120"/>
               </a:rPr>
-              <a:t>Phonemes</a:t>
-            </a:r>
-            <a:endParaRPr lang="en-US" sz="1100" dirty="0"/>
-          </a:p>
-        </p:txBody>
-      </p:sp>
-      <p:sp>
-        <p:nvSpPr>
-          <p:cNvPr id="44" name="Shape 42"/>
-          <p:cNvSpPr/>
-          <p:nvPr/>
-        </p:nvSpPr>
-        <p:spPr>
-          <a:xfrm>
-            <a:off x="1874520" y="4096512"/>
-            <a:ext cx="6903720" cy="804672"/>
+              <a:t>n</a:t>
+            </a:r>
+            <a:endParaRPr lang="en-US" sz="900" dirty="0"/>
+          </a:p>
+        </p:txBody>
+      </p:sp>
+      <p:sp>
+        <p:nvSpPr>
+          <p:cNvPr id="49" name="Shape 47"/>
+          <p:cNvSpPr/>
+          <p:nvPr/>
+        </p:nvSpPr>
+        <p:spPr>
+          <a:xfrm>
+            <a:off x="3140133" y="4169664"/>
+            <a:ext cx="543652" cy="475488"/>
           </a:xfrm>
           <a:prstGeom prst="rect">
             <a:avLst>
-              <a:gd name="adj" fmla="val 6818"/>
+              <a:gd name="adj" fmla="val 7692"/>
             </a:avLst>
           </a:prstGeom>
           <a:solidFill>
-            <a:srgbClr val="FCE7F3"/>
+            <a:srgbClr val="FFFFFF"/>
           </a:solidFill>
           <a:ln w="12700">
             <a:solidFill>
@@ -33988,41 +35557,14 @@
       </p:sp>
       <p:sp>
         <p:nvSpPr>
-          <p:cNvPr id="45" name="Shape 43"/>
-          <p:cNvSpPr/>
-          <p:nvPr/>
-        </p:nvSpPr>
-        <p:spPr>
-          <a:xfrm>
-            <a:off x="1952244" y="4169664"/>
-            <a:ext cx="543652" cy="384048"/>
-          </a:xfrm>
-          <a:prstGeom prst="rect">
-            <a:avLst>
-              <a:gd name="adj" fmla="val 9524"/>
-            </a:avLst>
-          </a:prstGeom>
-          <a:solidFill>
-            <a:srgbClr val="FFFFFF"/>
-          </a:solidFill>
-          <a:ln w="12700">
-            <a:solidFill>
-              <a:srgbClr val="DB2777"/>
-            </a:solidFill>
-            <a:prstDash val="solid"/>
-          </a:ln>
-        </p:spPr>
-      </p:sp>
-      <p:sp>
-        <p:nvSpPr>
-          <p:cNvPr id="46" name="Text 44"/>
-          <p:cNvSpPr/>
-          <p:nvPr/>
-        </p:nvSpPr>
-        <p:spPr>
-          <a:xfrm>
-            <a:off x="1952244" y="4169664"/>
-            <a:ext cx="543652" cy="384048"/>
+          <p:cNvPr id="50" name="Text 48"/>
+          <p:cNvSpPr/>
+          <p:nvPr/>
+        </p:nvSpPr>
+        <p:spPr>
+          <a:xfrm>
+            <a:off x="3140133" y="4169664"/>
+            <a:ext cx="543652" cy="475488"/>
           </a:xfrm>
           <a:prstGeom prst="rect">
             <a:avLst/>
@@ -34046,7 +35588,7 @@
                 <a:ea typeface="Trebuchet MS" pitchFamily="34" charset="-122"/>
                 <a:cs typeface="Trebuchet MS" pitchFamily="34" charset="-120"/>
               </a:rPr>
-              <a:t>i</a:t>
+              <a:t>t</a:t>
             </a:r>
             <a:endParaRPr lang="en-US" sz="900" dirty="0"/>
           </a:p>
@@ -34054,18 +35596,18 @@
       </p:sp>
       <p:sp>
         <p:nvSpPr>
-          <p:cNvPr id="47" name="Shape 45"/>
-          <p:cNvSpPr/>
-          <p:nvPr/>
-        </p:nvSpPr>
-        <p:spPr>
-          <a:xfrm>
-            <a:off x="2546188" y="4169664"/>
-            <a:ext cx="543652" cy="384048"/>
+          <p:cNvPr id="51" name="Shape 49"/>
+          <p:cNvSpPr/>
+          <p:nvPr/>
+        </p:nvSpPr>
+        <p:spPr>
+          <a:xfrm>
+            <a:off x="3734077" y="4169664"/>
+            <a:ext cx="543652" cy="475488"/>
           </a:xfrm>
           <a:prstGeom prst="rect">
             <a:avLst>
-              <a:gd name="adj" fmla="val 9524"/>
+              <a:gd name="adj" fmla="val 7692"/>
             </a:avLst>
           </a:prstGeom>
           <a:solidFill>
@@ -34081,14 +35623,14 @@
       </p:sp>
       <p:sp>
         <p:nvSpPr>
-          <p:cNvPr id="48" name="Text 46"/>
-          <p:cNvSpPr/>
-          <p:nvPr/>
-        </p:nvSpPr>
-        <p:spPr>
-          <a:xfrm>
-            <a:off x="2546188" y="4169664"/>
-            <a:ext cx="543652" cy="384048"/>
+          <p:cNvPr id="52" name="Text 50"/>
+          <p:cNvSpPr/>
+          <p:nvPr/>
+        </p:nvSpPr>
+        <p:spPr>
+          <a:xfrm>
+            <a:off x="3734077" y="4169664"/>
+            <a:ext cx="543652" cy="475488"/>
           </a:xfrm>
           <a:prstGeom prst="rect">
             <a:avLst/>
@@ -34112,7 +35654,7 @@
                 <a:ea typeface="Trebuchet MS" pitchFamily="34" charset="-122"/>
                 <a:cs typeface="Trebuchet MS" pitchFamily="34" charset="-120"/>
               </a:rPr>
-              <a:t>n</a:t>
+              <a:t>er</a:t>
             </a:r>
             <a:endParaRPr lang="en-US" sz="900" dirty="0"/>
           </a:p>
@@ -34120,18 +35662,18 @@
       </p:sp>
       <p:sp>
         <p:nvSpPr>
-          <p:cNvPr id="49" name="Shape 47"/>
-          <p:cNvSpPr/>
-          <p:nvPr/>
-        </p:nvSpPr>
-        <p:spPr>
-          <a:xfrm>
-            <a:off x="3140133" y="4169664"/>
-            <a:ext cx="543652" cy="384048"/>
+          <p:cNvPr id="53" name="Shape 51"/>
+          <p:cNvSpPr/>
+          <p:nvPr/>
+        </p:nvSpPr>
+        <p:spPr>
+          <a:xfrm>
+            <a:off x="4328021" y="4169664"/>
+            <a:ext cx="543652" cy="475488"/>
           </a:xfrm>
           <a:prstGeom prst="rect">
             <a:avLst>
-              <a:gd name="adj" fmla="val 9524"/>
+              <a:gd name="adj" fmla="val 7692"/>
             </a:avLst>
           </a:prstGeom>
           <a:solidFill>
@@ -34147,14 +35689,14 @@
       </p:sp>
       <p:sp>
         <p:nvSpPr>
-          <p:cNvPr id="50" name="Text 48"/>
-          <p:cNvSpPr/>
-          <p:nvPr/>
-        </p:nvSpPr>
-        <p:spPr>
-          <a:xfrm>
-            <a:off x="3140133" y="4169664"/>
-            <a:ext cx="543652" cy="384048"/>
+          <p:cNvPr id="54" name="Text 52"/>
+          <p:cNvSpPr/>
+          <p:nvPr/>
+        </p:nvSpPr>
+        <p:spPr>
+          <a:xfrm>
+            <a:off x="4328021" y="4169664"/>
+            <a:ext cx="543652" cy="475488"/>
           </a:xfrm>
           <a:prstGeom prst="rect">
             <a:avLst/>
@@ -34178,7 +35720,7 @@
                 <a:ea typeface="Trebuchet MS" pitchFamily="34" charset="-122"/>
                 <a:cs typeface="Trebuchet MS" pitchFamily="34" charset="-120"/>
               </a:rPr>
-              <a:t>t</a:t>
+              <a:t>v</a:t>
             </a:r>
             <a:endParaRPr lang="en-US" sz="900" dirty="0"/>
           </a:p>
@@ -34186,18 +35728,18 @@
       </p:sp>
       <p:sp>
         <p:nvSpPr>
-          <p:cNvPr id="51" name="Shape 49"/>
-          <p:cNvSpPr/>
-          <p:nvPr/>
-        </p:nvSpPr>
-        <p:spPr>
-          <a:xfrm>
-            <a:off x="3734077" y="4169664"/>
-            <a:ext cx="543652" cy="384048"/>
+          <p:cNvPr id="55" name="Shape 53"/>
+          <p:cNvSpPr/>
+          <p:nvPr/>
+        </p:nvSpPr>
+        <p:spPr>
+          <a:xfrm>
+            <a:off x="4921966" y="4169664"/>
+            <a:ext cx="543652" cy="475488"/>
           </a:xfrm>
           <a:prstGeom prst="rect">
             <a:avLst>
-              <a:gd name="adj" fmla="val 9524"/>
+              <a:gd name="adj" fmla="val 7692"/>
             </a:avLst>
           </a:prstGeom>
           <a:solidFill>
@@ -34213,14 +35755,14 @@
       </p:sp>
       <p:sp>
         <p:nvSpPr>
-          <p:cNvPr id="52" name="Text 50"/>
-          <p:cNvSpPr/>
-          <p:nvPr/>
-        </p:nvSpPr>
-        <p:spPr>
-          <a:xfrm>
-            <a:off x="3734077" y="4169664"/>
-            <a:ext cx="543652" cy="384048"/>
+          <p:cNvPr id="56" name="Text 54"/>
+          <p:cNvSpPr/>
+          <p:nvPr/>
+        </p:nvSpPr>
+        <p:spPr>
+          <a:xfrm>
+            <a:off x="4921966" y="4169664"/>
+            <a:ext cx="543652" cy="475488"/>
           </a:xfrm>
           <a:prstGeom prst="rect">
             <a:avLst/>
@@ -34244,7 +35786,7 @@
                 <a:ea typeface="Trebuchet MS" pitchFamily="34" charset="-122"/>
                 <a:cs typeface="Trebuchet MS" pitchFamily="34" charset="-120"/>
               </a:rPr>
-              <a:t>er</a:t>
+              <a:t>e</a:t>
             </a:r>
             <a:endParaRPr lang="en-US" sz="900" dirty="0"/>
           </a:p>
@@ -34252,18 +35794,18 @@
       </p:sp>
       <p:sp>
         <p:nvSpPr>
-          <p:cNvPr id="53" name="Shape 51"/>
-          <p:cNvSpPr/>
-          <p:nvPr/>
-        </p:nvSpPr>
-        <p:spPr>
-          <a:xfrm>
-            <a:off x="4328021" y="4169664"/>
-            <a:ext cx="543652" cy="384048"/>
+          <p:cNvPr id="57" name="Shape 55"/>
+          <p:cNvSpPr/>
+          <p:nvPr/>
+        </p:nvSpPr>
+        <p:spPr>
+          <a:xfrm>
+            <a:off x="5515910" y="4169664"/>
+            <a:ext cx="543652" cy="475488"/>
           </a:xfrm>
           <a:prstGeom prst="rect">
             <a:avLst>
-              <a:gd name="adj" fmla="val 9524"/>
+              <a:gd name="adj" fmla="val 7692"/>
             </a:avLst>
           </a:prstGeom>
           <a:solidFill>
@@ -34279,14 +35821,14 @@
       </p:sp>
       <p:sp>
         <p:nvSpPr>
-          <p:cNvPr id="54" name="Text 52"/>
-          <p:cNvSpPr/>
-          <p:nvPr/>
-        </p:nvSpPr>
-        <p:spPr>
-          <a:xfrm>
-            <a:off x="4328021" y="4169664"/>
-            <a:ext cx="543652" cy="384048"/>
+          <p:cNvPr id="58" name="Text 56"/>
+          <p:cNvSpPr/>
+          <p:nvPr/>
+        </p:nvSpPr>
+        <p:spPr>
+          <a:xfrm>
+            <a:off x="5515910" y="4169664"/>
+            <a:ext cx="543652" cy="475488"/>
           </a:xfrm>
           <a:prstGeom prst="rect">
             <a:avLst/>
@@ -34318,18 +35860,18 @@
       </p:sp>
       <p:sp>
         <p:nvSpPr>
-          <p:cNvPr id="55" name="Shape 53"/>
-          <p:cNvSpPr/>
-          <p:nvPr/>
-        </p:nvSpPr>
-        <p:spPr>
-          <a:xfrm>
-            <a:off x="4921966" y="4169664"/>
-            <a:ext cx="543652" cy="384048"/>
+          <p:cNvPr id="59" name="Shape 57"/>
+          <p:cNvSpPr/>
+          <p:nvPr/>
+        </p:nvSpPr>
+        <p:spPr>
+          <a:xfrm>
+            <a:off x="6109855" y="4169664"/>
+            <a:ext cx="543652" cy="475488"/>
           </a:xfrm>
           <a:prstGeom prst="rect">
             <a:avLst>
-              <a:gd name="adj" fmla="val 9524"/>
+              <a:gd name="adj" fmla="val 7692"/>
             </a:avLst>
           </a:prstGeom>
           <a:solidFill>
@@ -34345,14 +35887,14 @@
       </p:sp>
       <p:sp>
         <p:nvSpPr>
-          <p:cNvPr id="56" name="Text 54"/>
-          <p:cNvSpPr/>
-          <p:nvPr/>
-        </p:nvSpPr>
-        <p:spPr>
-          <a:xfrm>
-            <a:off x="4921966" y="4169664"/>
-            <a:ext cx="543652" cy="384048"/>
+          <p:cNvPr id="60" name="Text 58"/>
+          <p:cNvSpPr/>
+          <p:nvPr/>
+        </p:nvSpPr>
+        <p:spPr>
+          <a:xfrm>
+            <a:off x="6109855" y="4169664"/>
+            <a:ext cx="543652" cy="475488"/>
           </a:xfrm>
           <a:prstGeom prst="rect">
             <a:avLst/>
@@ -34376,7 +35918,7 @@
                 <a:ea typeface="Trebuchet MS" pitchFamily="34" charset="-122"/>
                 <a:cs typeface="Trebuchet MS" pitchFamily="34" charset="-120"/>
               </a:rPr>
-              <a:t>a</a:t>
+              <a:t>ti</a:t>
             </a:r>
             <a:endParaRPr lang="en-US" sz="900" dirty="0"/>
           </a:p>
@@ -34384,18 +35926,18 @@
       </p:sp>
       <p:sp>
         <p:nvSpPr>
-          <p:cNvPr id="57" name="Shape 55"/>
-          <p:cNvSpPr/>
-          <p:nvPr/>
-        </p:nvSpPr>
-        <p:spPr>
-          <a:xfrm>
-            <a:off x="5515910" y="4169664"/>
-            <a:ext cx="543652" cy="384048"/>
+          <p:cNvPr id="61" name="Shape 59"/>
+          <p:cNvSpPr/>
+          <p:nvPr/>
+        </p:nvSpPr>
+        <p:spPr>
+          <a:xfrm>
+            <a:off x="6703799" y="4169664"/>
+            <a:ext cx="543652" cy="475488"/>
           </a:xfrm>
           <a:prstGeom prst="rect">
             <a:avLst>
-              <a:gd name="adj" fmla="val 9524"/>
+              <a:gd name="adj" fmla="val 7692"/>
             </a:avLst>
           </a:prstGeom>
           <a:solidFill>
@@ -34411,14 +35953,14 @@
       </p:sp>
       <p:sp>
         <p:nvSpPr>
-          <p:cNvPr id="58" name="Text 56"/>
-          <p:cNvSpPr/>
-          <p:nvPr/>
-        </p:nvSpPr>
-        <p:spPr>
-          <a:xfrm>
-            <a:off x="5515910" y="4169664"/>
-            <a:ext cx="543652" cy="384048"/>
+          <p:cNvPr id="62" name="Text 60"/>
+          <p:cNvSpPr/>
+          <p:nvPr/>
+        </p:nvSpPr>
+        <p:spPr>
+          <a:xfrm>
+            <a:off x="6703799" y="4169664"/>
+            <a:ext cx="543652" cy="475488"/>
           </a:xfrm>
           <a:prstGeom prst="rect">
             <a:avLst/>
@@ -34442,7 +35984,7 @@
                 <a:ea typeface="Trebuchet MS" pitchFamily="34" charset="-122"/>
                 <a:cs typeface="Trebuchet MS" pitchFamily="34" charset="-120"/>
               </a:rPr>
-              <a:t>ti</a:t>
+              <a:t>o</a:t>
             </a:r>
             <a:endParaRPr lang="en-US" sz="900" dirty="0"/>
           </a:p>
@@ -34450,57 +35992,18 @@
       </p:sp>
       <p:sp>
         <p:nvSpPr>
-          <p:cNvPr id="59" name="Text 57"/>
-          <p:cNvSpPr/>
-          <p:nvPr/>
-        </p:nvSpPr>
-        <p:spPr>
-          <a:xfrm>
-            <a:off x="5515910" y="4572000"/>
-            <a:ext cx="543652" cy="219456"/>
-          </a:xfrm>
-          <a:prstGeom prst="rect">
-            <a:avLst/>
-          </a:prstGeom>
-          <a:noFill/>
-          <a:ln/>
-        </p:spPr>
-        <p:txBody>
-          <a:bodyPr wrap="square" lIns="0" tIns="0" rIns="0" bIns="0" rtlCol="0" anchor="t"/>
-          <a:lstStyle/>
-          <a:p>
-            <a:pPr algn="ctr" indent="0" marL="0">
-              <a:buNone/>
-            </a:pPr>
-            <a:r>
-              <a:rPr lang="en-US" sz="750" i="1" dirty="0">
-                <a:solidFill>
-                  <a:srgbClr val="94A3B8"/>
-                </a:solidFill>
-                <a:latin typeface="Calibri" pitchFamily="34" charset="0"/>
-                <a:ea typeface="Calibri" pitchFamily="34" charset="-122"/>
-                <a:cs typeface="Calibri" pitchFamily="34" charset="-120"/>
-              </a:rPr>
-              <a:t>/sh/</a:t>
-            </a:r>
-            <a:endParaRPr lang="en-US" sz="750" dirty="0"/>
-          </a:p>
-        </p:txBody>
-      </p:sp>
-      <p:sp>
-        <p:nvSpPr>
-          <p:cNvPr id="60" name="Shape 58"/>
-          <p:cNvSpPr/>
-          <p:nvPr/>
-        </p:nvSpPr>
-        <p:spPr>
-          <a:xfrm>
-            <a:off x="6109855" y="4169664"/>
-            <a:ext cx="543652" cy="384048"/>
+          <p:cNvPr id="63" name="Shape 61"/>
+          <p:cNvSpPr/>
+          <p:nvPr/>
+        </p:nvSpPr>
+        <p:spPr>
+          <a:xfrm>
+            <a:off x="7297743" y="4169664"/>
+            <a:ext cx="543652" cy="475488"/>
           </a:xfrm>
           <a:prstGeom prst="rect">
             <a:avLst>
-              <a:gd name="adj" fmla="val 9524"/>
+              <a:gd name="adj" fmla="val 7692"/>
             </a:avLst>
           </a:prstGeom>
           <a:solidFill>
@@ -34516,14 +36019,14 @@
       </p:sp>
       <p:sp>
         <p:nvSpPr>
-          <p:cNvPr id="61" name="Text 59"/>
-          <p:cNvSpPr/>
-          <p:nvPr/>
-        </p:nvSpPr>
-        <p:spPr>
-          <a:xfrm>
-            <a:off x="6109855" y="4169664"/>
-            <a:ext cx="543652" cy="384048"/>
+          <p:cNvPr id="64" name="Text 62"/>
+          <p:cNvSpPr/>
+          <p:nvPr/>
+        </p:nvSpPr>
+        <p:spPr>
+          <a:xfrm>
+            <a:off x="7297743" y="4169664"/>
+            <a:ext cx="543652" cy="475488"/>
           </a:xfrm>
           <a:prstGeom prst="rect">
             <a:avLst/>
@@ -34547,7 +36050,7 @@
                 <a:ea typeface="Trebuchet MS" pitchFamily="34" charset="-122"/>
                 <a:cs typeface="Trebuchet MS" pitchFamily="34" charset="-120"/>
               </a:rPr>
-              <a:t>o</a:t>
+              <a:t>n</a:t>
             </a:r>
             <a:endParaRPr lang="en-US" sz="900" dirty="0"/>
           </a:p>
@@ -34555,18 +36058,18 @@
       </p:sp>
       <p:sp>
         <p:nvSpPr>
-          <p:cNvPr id="62" name="Shape 60"/>
-          <p:cNvSpPr/>
-          <p:nvPr/>
-        </p:nvSpPr>
-        <p:spPr>
-          <a:xfrm>
-            <a:off x="6703799" y="4169664"/>
-            <a:ext cx="543652" cy="384048"/>
+          <p:cNvPr id="65" name="Shape 63"/>
+          <p:cNvSpPr/>
+          <p:nvPr/>
+        </p:nvSpPr>
+        <p:spPr>
+          <a:xfrm>
+            <a:off x="7891688" y="4169664"/>
+            <a:ext cx="543652" cy="475488"/>
           </a:xfrm>
           <a:prstGeom prst="rect">
             <a:avLst>
-              <a:gd name="adj" fmla="val 9524"/>
+              <a:gd name="adj" fmla="val 7692"/>
             </a:avLst>
           </a:prstGeom>
           <a:solidFill>
@@ -34582,14 +36085,14 @@
       </p:sp>
       <p:sp>
         <p:nvSpPr>
-          <p:cNvPr id="63" name="Text 61"/>
-          <p:cNvSpPr/>
-          <p:nvPr/>
-        </p:nvSpPr>
-        <p:spPr>
-          <a:xfrm>
-            <a:off x="6703799" y="4169664"/>
-            <a:ext cx="543652" cy="384048"/>
+          <p:cNvPr id="66" name="Text 64"/>
+          <p:cNvSpPr/>
+          <p:nvPr/>
+        </p:nvSpPr>
+        <p:spPr>
+          <a:xfrm>
+            <a:off x="7891688" y="4169664"/>
+            <a:ext cx="543652" cy="475488"/>
           </a:xfrm>
           <a:prstGeom prst="rect">
             <a:avLst/>
@@ -34613,139 +36116,7 @@
                 <a:ea typeface="Trebuchet MS" pitchFamily="34" charset="-122"/>
                 <a:cs typeface="Trebuchet MS" pitchFamily="34" charset="-120"/>
               </a:rPr>
-              <a:t>n</a:t>
-            </a:r>
-            <a:endParaRPr lang="en-US" sz="900" dirty="0"/>
-          </a:p>
-        </p:txBody>
-      </p:sp>
-      <p:sp>
-        <p:nvSpPr>
-          <p:cNvPr id="64" name="Shape 62"/>
-          <p:cNvSpPr/>
-          <p:nvPr/>
-        </p:nvSpPr>
-        <p:spPr>
-          <a:xfrm>
-            <a:off x="7297743" y="4169664"/>
-            <a:ext cx="543652" cy="384048"/>
-          </a:xfrm>
-          <a:prstGeom prst="rect">
-            <a:avLst>
-              <a:gd name="adj" fmla="val 9524"/>
-            </a:avLst>
-          </a:prstGeom>
-          <a:solidFill>
-            <a:srgbClr val="FFFFFF"/>
-          </a:solidFill>
-          <a:ln w="12700">
-            <a:solidFill>
-              <a:srgbClr val="DB2777"/>
-            </a:solidFill>
-            <a:prstDash val="solid"/>
-          </a:ln>
-        </p:spPr>
-      </p:sp>
-      <p:sp>
-        <p:nvSpPr>
-          <p:cNvPr id="65" name="Text 63"/>
-          <p:cNvSpPr/>
-          <p:nvPr/>
-        </p:nvSpPr>
-        <p:spPr>
-          <a:xfrm>
-            <a:off x="7297743" y="4169664"/>
-            <a:ext cx="543652" cy="384048"/>
-          </a:xfrm>
-          <a:prstGeom prst="rect">
-            <a:avLst/>
-          </a:prstGeom>
-          <a:noFill/>
-          <a:ln/>
-        </p:spPr>
-        <p:txBody>
-          <a:bodyPr wrap="square" lIns="0" tIns="0" rIns="0" bIns="0" rtlCol="0" anchor="ctr"/>
-          <a:lstStyle/>
-          <a:p>
-            <a:pPr algn="ctr" indent="0" marL="0">
-              <a:buNone/>
-            </a:pPr>
-            <a:r>
-              <a:rPr lang="en-US" sz="900" b="1" dirty="0">
-                <a:solidFill>
-                  <a:srgbClr val="9D174D"/>
-                </a:solidFill>
-                <a:latin typeface="Trebuchet MS" pitchFamily="34" charset="0"/>
-                <a:ea typeface="Trebuchet MS" pitchFamily="34" charset="-122"/>
-                <a:cs typeface="Trebuchet MS" pitchFamily="34" charset="-120"/>
-              </a:rPr>
-              <a:t>a</a:t>
-            </a:r>
-            <a:endParaRPr lang="en-US" sz="900" dirty="0"/>
-          </a:p>
-        </p:txBody>
-      </p:sp>
-      <p:sp>
-        <p:nvSpPr>
-          <p:cNvPr id="66" name="Shape 64"/>
-          <p:cNvSpPr/>
-          <p:nvPr/>
-        </p:nvSpPr>
-        <p:spPr>
-          <a:xfrm>
-            <a:off x="7891688" y="4169664"/>
-            <a:ext cx="543652" cy="384048"/>
-          </a:xfrm>
-          <a:prstGeom prst="rect">
-            <a:avLst>
-              <a:gd name="adj" fmla="val 9524"/>
-            </a:avLst>
-          </a:prstGeom>
-          <a:solidFill>
-            <a:srgbClr val="FFFFFF"/>
-          </a:solidFill>
-          <a:ln w="12700">
-            <a:solidFill>
-              <a:srgbClr val="DB2777"/>
-            </a:solidFill>
-            <a:prstDash val="solid"/>
-          </a:ln>
-        </p:spPr>
-      </p:sp>
-      <p:sp>
-        <p:nvSpPr>
-          <p:cNvPr id="67" name="Text 65"/>
-          <p:cNvSpPr/>
-          <p:nvPr/>
-        </p:nvSpPr>
-        <p:spPr>
-          <a:xfrm>
-            <a:off x="7891688" y="4169664"/>
-            <a:ext cx="543652" cy="384048"/>
-          </a:xfrm>
-          <a:prstGeom prst="rect">
-            <a:avLst/>
-          </a:prstGeom>
-          <a:noFill/>
-          <a:ln/>
-        </p:spPr>
-        <p:txBody>
-          <a:bodyPr wrap="square" lIns="0" tIns="0" rIns="0" bIns="0" rtlCol="0" anchor="ctr"/>
-          <a:lstStyle/>
-          <a:p>
-            <a:pPr algn="ctr" indent="0" marL="0">
-              <a:buNone/>
-            </a:pPr>
-            <a:r>
-              <a:rPr lang="en-US" sz="900" b="1" dirty="0">
-                <a:solidFill>
-                  <a:srgbClr val="9D174D"/>
-                </a:solidFill>
-                <a:latin typeface="Trebuchet MS" pitchFamily="34" charset="0"/>
-                <a:ea typeface="Trebuchet MS" pitchFamily="34" charset="-122"/>
-                <a:cs typeface="Trebuchet MS" pitchFamily="34" charset="-120"/>
-              </a:rPr>
-              <a:t>l</a:t>
+              <a:t>s</a:t>
             </a:r>
             <a:endParaRPr lang="en-US" sz="900" dirty="0"/>
           </a:p>
@@ -35037,7 +36408,7 @@
                 <a:ea typeface="Calibri" pitchFamily="34" charset="-122"/>
                 <a:cs typeface="Calibri" pitchFamily="34" charset="-120"/>
               </a:rPr>
-              <a:t>Word Labs  •  wordlabs.app  •  Prefix: 'inter-' = between, among, together</a:t>
+              <a:t>Word Labs  •  wordlabs.app  •  Prefix: 'inter-' = between</a:t>
             </a:r>
             <a:endParaRPr lang="en-US" sz="800" dirty="0"/>
           </a:p>
@@ -36206,7 +37577,7 @@
                 <a:ea typeface="Calibri" pitchFamily="34" charset="-122"/>
                 <a:cs typeface="Calibri" pitchFamily="34" charset="-120"/>
               </a:rPr>
-              <a:t>Word Labs  •  wordlabs.app  •  Prefix: 'inter-' = between, among, together</a:t>
+              <a:t>Word Labs  •  wordlabs.app  •  Prefix: 'inter-' = between</a:t>
             </a:r>
             <a:endParaRPr lang="en-US" sz="800" dirty="0"/>
           </a:p>
@@ -36635,7 +38006,7 @@
                 <a:ea typeface="Trebuchet MS" pitchFamily="34" charset="-122"/>
                 <a:cs typeface="Trebuchet MS" pitchFamily="34" charset="-120"/>
               </a:rPr>
-              <a:t>-ion</a:t>
+              <a:t>-ing</a:t>
             </a:r>
             <a:endParaRPr lang="en-US" sz="1300" dirty="0"/>
           </a:p>
@@ -36724,7 +38095,7 @@
                 <a:ea typeface="Trebuchet MS" pitchFamily="34" charset="-122"/>
                 <a:cs typeface="Trebuchet MS" pitchFamily="34" charset="-120"/>
               </a:rPr>
-              <a:t>connect</a:t>
+              <a:t>cept</a:t>
             </a:r>
             <a:endParaRPr lang="en-US" sz="1300" dirty="0"/>
           </a:p>
@@ -36788,7 +38159,7 @@
                 <a:ea typeface="Trebuchet MS" pitchFamily="34" charset="-122"/>
                 <a:cs typeface="Trebuchet MS" pitchFamily="34" charset="-120"/>
               </a:rPr>
-              <a:t>-ing</a:t>
+              <a:t>-ion</a:t>
             </a:r>
             <a:endParaRPr lang="en-US" sz="1300" dirty="0"/>
           </a:p>
@@ -36877,7 +38248,7 @@
                 <a:ea typeface="Trebuchet MS" pitchFamily="34" charset="-122"/>
                 <a:cs typeface="Trebuchet MS" pitchFamily="34" charset="-120"/>
               </a:rPr>
-              <a:t>rupt</a:t>
+              <a:t>connect</a:t>
             </a:r>
             <a:endParaRPr lang="en-US" sz="1300" dirty="0"/>
           </a:p>
@@ -36941,7 +38312,7 @@
                 <a:ea typeface="Trebuchet MS" pitchFamily="34" charset="-122"/>
                 <a:cs typeface="Trebuchet MS" pitchFamily="34" charset="-120"/>
               </a:rPr>
-              <a:t>-ed</a:t>
+              <a:t>-ive</a:t>
             </a:r>
             <a:endParaRPr lang="en-US" sz="1300" dirty="0"/>
           </a:p>
@@ -37030,7 +38401,7 @@
                 <a:ea typeface="Trebuchet MS" pitchFamily="34" charset="-122"/>
                 <a:cs typeface="Trebuchet MS" pitchFamily="34" charset="-120"/>
               </a:rPr>
-              <a:t>view</a:t>
+              <a:t>fer</a:t>
             </a:r>
             <a:endParaRPr lang="en-US" sz="1300" dirty="0"/>
           </a:p>
@@ -37094,7 +38465,7 @@
                 <a:ea typeface="Trebuchet MS" pitchFamily="34" charset="-122"/>
                 <a:cs typeface="Trebuchet MS" pitchFamily="34" charset="-120"/>
               </a:rPr>
-              <a:t>-al</a:t>
+              <a:t>-ence</a:t>
             </a:r>
             <a:endParaRPr lang="en-US" sz="1300" dirty="0"/>
           </a:p>
@@ -37183,7 +38554,7 @@
                 <a:ea typeface="Trebuchet MS" pitchFamily="34" charset="-122"/>
                 <a:cs typeface="Trebuchet MS" pitchFamily="34" charset="-120"/>
               </a:rPr>
-              <a:t>nation</a:t>
+              <a:t>govern</a:t>
             </a:r>
             <a:endParaRPr lang="en-US" sz="1300" dirty="0"/>
           </a:p>
@@ -37247,7 +38618,7 @@
                 <a:ea typeface="Trebuchet MS" pitchFamily="34" charset="-122"/>
                 <a:cs typeface="Trebuchet MS" pitchFamily="34" charset="-120"/>
               </a:rPr>
-              <a:t>-ive</a:t>
+              <a:t>-ment</a:t>
             </a:r>
             <a:endParaRPr lang="en-US" sz="1300" dirty="0"/>
           </a:p>
@@ -37255,37 +38626,190 @@
       </p:sp>
       <p:sp>
         <p:nvSpPr>
-          <p:cNvPr id="43" name="Text 41"/>
-          <p:cNvSpPr/>
-          <p:nvPr/>
-        </p:nvSpPr>
-        <p:spPr>
-          <a:xfrm>
-            <a:off x="365760" y="3611880"/>
-            <a:ext cx="1828800" cy="347472"/>
-          </a:xfrm>
-          <a:prstGeom prst="rect">
-            <a:avLst/>
-          </a:prstGeom>
-          <a:noFill/>
-          <a:ln/>
-        </p:spPr>
-        <p:txBody>
-          <a:bodyPr wrap="square" lIns="0" tIns="0" rIns="0" bIns="0" rtlCol="0" anchor="ctr"/>
-          <a:lstStyle/>
-          <a:p>
-            <a:pPr algn="l" indent="0" marL="0">
-              <a:buNone/>
-            </a:pPr>
-            <a:r>
-              <a:rPr lang="en-US" sz="1200" b="1" dirty="0">
-                <a:solidFill>
-                  <a:srgbClr val="0F172A"/>
+          <p:cNvPr id="43" name="Shape 41"/>
+          <p:cNvSpPr/>
+          <p:nvPr/>
+        </p:nvSpPr>
+        <p:spPr>
+          <a:xfrm>
+            <a:off x="365760" y="3666744"/>
+            <a:ext cx="2468880" cy="402336"/>
+          </a:xfrm>
+          <a:prstGeom prst="rect">
+            <a:avLst/>
+          </a:prstGeom>
+          <a:solidFill>
+            <a:srgbClr val="F1F5F9"/>
+          </a:solidFill>
+          <a:ln w="12700">
+            <a:solidFill>
+              <a:srgbClr val="E2E8F0"/>
+            </a:solidFill>
+            <a:prstDash val="solid"/>
+          </a:ln>
+        </p:spPr>
+      </p:sp>
+      <p:sp>
+        <p:nvSpPr>
+          <p:cNvPr id="44" name="Shape 42"/>
+          <p:cNvSpPr/>
+          <p:nvPr/>
+        </p:nvSpPr>
+        <p:spPr>
+          <a:xfrm>
+            <a:off x="2971800" y="3666744"/>
+            <a:ext cx="2834640" cy="402336"/>
+          </a:xfrm>
+          <a:prstGeom prst="rect">
+            <a:avLst/>
+          </a:prstGeom>
+          <a:solidFill>
+            <a:srgbClr val="CCFBF1"/>
+          </a:solidFill>
+          <a:ln w="12700">
+            <a:solidFill>
+              <a:srgbClr val="E2E8F0"/>
+            </a:solidFill>
+            <a:prstDash val="solid"/>
+          </a:ln>
+        </p:spPr>
+      </p:sp>
+      <p:sp>
+        <p:nvSpPr>
+          <p:cNvPr id="45" name="Text 43"/>
+          <p:cNvSpPr/>
+          <p:nvPr/>
+        </p:nvSpPr>
+        <p:spPr>
+          <a:xfrm>
+            <a:off x="2971800" y="3666744"/>
+            <a:ext cx="2834640" cy="402336"/>
+          </a:xfrm>
+          <a:prstGeom prst="rect">
+            <a:avLst/>
+          </a:prstGeom>
+          <a:noFill/>
+          <a:ln/>
+        </p:spPr>
+        <p:txBody>
+          <a:bodyPr wrap="square" lIns="0" tIns="0" rIns="0" bIns="0" rtlCol="0" anchor="ctr"/>
+          <a:lstStyle/>
+          <a:p>
+            <a:pPr algn="ctr" indent="0" marL="0">
+              <a:buNone/>
+            </a:pPr>
+            <a:r>
+              <a:rPr lang="en-US" sz="1300" b="1" dirty="0">
+                <a:solidFill>
+                  <a:srgbClr val="0F766E"/>
                 </a:solidFill>
                 <a:latin typeface="Trebuchet MS" pitchFamily="34" charset="0"/>
                 <a:ea typeface="Trebuchet MS" pitchFamily="34" charset="-122"/>
                 <a:cs typeface="Trebuchet MS" pitchFamily="34" charset="-120"/>
               </a:rPr>
+              <a:t>national</a:t>
+            </a:r>
+            <a:endParaRPr lang="en-US" sz="1300" dirty="0"/>
+          </a:p>
+        </p:txBody>
+      </p:sp>
+      <p:sp>
+        <p:nvSpPr>
+          <p:cNvPr id="46" name="Shape 44"/>
+          <p:cNvSpPr/>
+          <p:nvPr/>
+        </p:nvSpPr>
+        <p:spPr>
+          <a:xfrm>
+            <a:off x="5943600" y="3666744"/>
+            <a:ext cx="2834640" cy="402336"/>
+          </a:xfrm>
+          <a:prstGeom prst="rect">
+            <a:avLst/>
+          </a:prstGeom>
+          <a:solidFill>
+            <a:srgbClr val="FCE7F3"/>
+          </a:solidFill>
+          <a:ln w="12700">
+            <a:solidFill>
+              <a:srgbClr val="E2E8F0"/>
+            </a:solidFill>
+            <a:prstDash val="solid"/>
+          </a:ln>
+        </p:spPr>
+      </p:sp>
+      <p:sp>
+        <p:nvSpPr>
+          <p:cNvPr id="47" name="Text 45"/>
+          <p:cNvSpPr/>
+          <p:nvPr/>
+        </p:nvSpPr>
+        <p:spPr>
+          <a:xfrm>
+            <a:off x="5943600" y="3666744"/>
+            <a:ext cx="2834640" cy="402336"/>
+          </a:xfrm>
+          <a:prstGeom prst="rect">
+            <a:avLst/>
+          </a:prstGeom>
+          <a:noFill/>
+          <a:ln/>
+        </p:spPr>
+        <p:txBody>
+          <a:bodyPr wrap="square" lIns="0" tIns="0" rIns="0" bIns="0" rtlCol="0" anchor="ctr"/>
+          <a:lstStyle/>
+          <a:p>
+            <a:pPr algn="ctr" indent="0" marL="0">
+              <a:buNone/>
+            </a:pPr>
+            <a:r>
+              <a:rPr lang="en-US" sz="1300" b="1" dirty="0">
+                <a:solidFill>
+                  <a:srgbClr val="9D174D"/>
+                </a:solidFill>
+                <a:latin typeface="Trebuchet MS" pitchFamily="34" charset="0"/>
+                <a:ea typeface="Trebuchet MS" pitchFamily="34" charset="-122"/>
+                <a:cs typeface="Trebuchet MS" pitchFamily="34" charset="-120"/>
+              </a:rPr>
+              <a:t>-ly</a:t>
+            </a:r>
+            <a:endParaRPr lang="en-US" sz="1300" dirty="0"/>
+          </a:p>
+        </p:txBody>
+      </p:sp>
+      <p:sp>
+        <p:nvSpPr>
+          <p:cNvPr id="48" name="Text 46"/>
+          <p:cNvSpPr/>
+          <p:nvPr/>
+        </p:nvSpPr>
+        <p:spPr>
+          <a:xfrm>
+            <a:off x="365760" y="3611880"/>
+            <a:ext cx="1828800" cy="347472"/>
+          </a:xfrm>
+          <a:prstGeom prst="rect">
+            <a:avLst/>
+          </a:prstGeom>
+          <a:noFill/>
+          <a:ln/>
+        </p:spPr>
+        <p:txBody>
+          <a:bodyPr wrap="square" lIns="0" tIns="0" rIns="0" bIns="0" rtlCol="0" anchor="ctr"/>
+          <a:lstStyle/>
+          <a:p>
+            <a:pPr algn="l" indent="0" marL="0">
+              <a:buNone/>
+            </a:pPr>
+            <a:r>
+              <a:rPr lang="en-US" sz="1200" b="1" dirty="0">
+                <a:solidFill>
+                  <a:srgbClr val="0F172A"/>
+                </a:solidFill>
+                <a:latin typeface="Trebuchet MS" pitchFamily="34" charset="0"/>
+                <a:ea typeface="Trebuchet MS" pitchFamily="34" charset="-122"/>
+                <a:cs typeface="Trebuchet MS" pitchFamily="34" charset="-120"/>
+              </a:rPr>
               <a:t>Sample words:</a:t>
             </a:r>
             <a:endParaRPr lang="en-US" sz="1200" dirty="0"/>
@@ -37294,7 +38818,7 @@
       </p:sp>
       <p:sp>
         <p:nvSpPr>
-          <p:cNvPr id="44" name="Shape 42"/>
+          <p:cNvPr id="49" name="Shape 47"/>
           <p:cNvSpPr/>
           <p:nvPr/>
         </p:nvSpPr>
@@ -37321,7 +38845,7 @@
       </p:sp>
       <p:sp>
         <p:nvSpPr>
-          <p:cNvPr id="45" name="Text 43"/>
+          <p:cNvPr id="50" name="Text 48"/>
           <p:cNvSpPr/>
           <p:nvPr/>
         </p:nvSpPr>
@@ -37360,7 +38884,7 @@
       </p:sp>
       <p:sp>
         <p:nvSpPr>
-          <p:cNvPr id="46" name="Shape 44"/>
+          <p:cNvPr id="51" name="Shape 49"/>
           <p:cNvSpPr/>
           <p:nvPr/>
         </p:nvSpPr>
@@ -37387,7 +38911,7 @@
       </p:sp>
       <p:sp>
         <p:nvSpPr>
-          <p:cNvPr id="47" name="Text 45"/>
+          <p:cNvPr id="52" name="Text 50"/>
           <p:cNvSpPr/>
           <p:nvPr/>
         </p:nvSpPr>
@@ -37418,7 +38942,7 @@
                 <a:ea typeface="Trebuchet MS" pitchFamily="34" charset="-122"/>
                 <a:cs typeface="Trebuchet MS" pitchFamily="34" charset="-120"/>
               </a:rPr>
-              <a:t>international</a:t>
+              <a:t>interview</a:t>
             </a:r>
             <a:endParaRPr lang="en-US" sz="1200" dirty="0"/>
           </a:p>
@@ -37426,7 +38950,7 @@
       </p:sp>
       <p:sp>
         <p:nvSpPr>
-          <p:cNvPr id="48" name="Shape 46"/>
+          <p:cNvPr id="53" name="Shape 51"/>
           <p:cNvSpPr/>
           <p:nvPr/>
         </p:nvSpPr>
@@ -37453,7 +38977,7 @@
       </p:sp>
       <p:sp>
         <p:nvSpPr>
-          <p:cNvPr id="49" name="Text 47"/>
+          <p:cNvPr id="54" name="Text 52"/>
           <p:cNvSpPr/>
           <p:nvPr/>
         </p:nvSpPr>
@@ -37484,7 +39008,7 @@
                 <a:ea typeface="Trebuchet MS" pitchFamily="34" charset="-122"/>
                 <a:cs typeface="Trebuchet MS" pitchFamily="34" charset="-120"/>
               </a:rPr>
-              <a:t>interrupt</a:t>
+              <a:t>interviews</a:t>
             </a:r>
             <a:endParaRPr lang="en-US" sz="1200" dirty="0"/>
           </a:p>
@@ -37492,7 +39016,7 @@
       </p:sp>
       <p:sp>
         <p:nvSpPr>
-          <p:cNvPr id="50" name="Shape 48"/>
+          <p:cNvPr id="55" name="Shape 53"/>
           <p:cNvSpPr/>
           <p:nvPr/>
         </p:nvSpPr>
@@ -37519,7 +39043,7 @@
       </p:sp>
       <p:sp>
         <p:nvSpPr>
-          <p:cNvPr id="51" name="Text 49"/>
+          <p:cNvPr id="56" name="Text 54"/>
           <p:cNvSpPr/>
           <p:nvPr/>
         </p:nvSpPr>
@@ -37550,7 +39074,7 @@
                 <a:ea typeface="Trebuchet MS" pitchFamily="34" charset="-122"/>
                 <a:cs typeface="Trebuchet MS" pitchFamily="34" charset="-120"/>
               </a:rPr>
-              <a:t>interview</a:t>
+              <a:t>interacting</a:t>
             </a:r>
             <a:endParaRPr lang="en-US" sz="1200" dirty="0"/>
           </a:p>
@@ -37558,7 +39082,7 @@
       </p:sp>
       <p:sp>
         <p:nvSpPr>
-          <p:cNvPr id="52" name="Shape 50"/>
+          <p:cNvPr id="57" name="Shape 55"/>
           <p:cNvSpPr/>
           <p:nvPr/>
         </p:nvSpPr>
@@ -37585,7 +39109,7 @@
       </p:sp>
       <p:sp>
         <p:nvSpPr>
-          <p:cNvPr id="53" name="Text 51"/>
+          <p:cNvPr id="58" name="Text 56"/>
           <p:cNvSpPr/>
           <p:nvPr/>
         </p:nvSpPr>
@@ -37616,7 +39140,7 @@
                 <a:ea typeface="Trebuchet MS" pitchFamily="34" charset="-122"/>
                 <a:cs typeface="Trebuchet MS" pitchFamily="34" charset="-120"/>
               </a:rPr>
-              <a:t>interconnect</a:t>
+              <a:t>interaction</a:t>
             </a:r>
             <a:endParaRPr lang="en-US" sz="1200" dirty="0"/>
           </a:p>
@@ -37624,7 +39148,7 @@
       </p:sp>
       <p:sp>
         <p:nvSpPr>
-          <p:cNvPr id="54" name="Shape 52"/>
+          <p:cNvPr id="59" name="Shape 57"/>
           <p:cNvSpPr/>
           <p:nvPr/>
         </p:nvSpPr>
@@ -37651,7 +39175,7 @@
       </p:sp>
       <p:sp>
         <p:nvSpPr>
-          <p:cNvPr id="55" name="Text 53"/>
+          <p:cNvPr id="60" name="Text 58"/>
           <p:cNvSpPr/>
           <p:nvPr/>
         </p:nvSpPr>
@@ -37682,7 +39206,7 @@
                 <a:ea typeface="Trebuchet MS" pitchFamily="34" charset="-122"/>
                 <a:cs typeface="Trebuchet MS" pitchFamily="34" charset="-120"/>
               </a:rPr>
-              <a:t>interval</a:t>
+              <a:t>interactive</a:t>
             </a:r>
             <a:endParaRPr lang="en-US" sz="1200" dirty="0"/>
           </a:p>
@@ -37690,7 +39214,7 @@
       </p:sp>
       <p:sp>
         <p:nvSpPr>
-          <p:cNvPr id="56" name="Shape 54"/>
+          <p:cNvPr id="61" name="Shape 59"/>
           <p:cNvSpPr/>
           <p:nvPr/>
         </p:nvSpPr>
@@ -37717,7 +39241,7 @@
       </p:sp>
       <p:sp>
         <p:nvSpPr>
-          <p:cNvPr id="57" name="Text 55"/>
+          <p:cNvPr id="62" name="Text 60"/>
           <p:cNvSpPr/>
           <p:nvPr/>
         </p:nvSpPr>
@@ -37748,73 +39272,7 @@
                 <a:ea typeface="Trebuchet MS" pitchFamily="34" charset="-122"/>
                 <a:cs typeface="Trebuchet MS" pitchFamily="34" charset="-120"/>
               </a:rPr>
-              <a:t>intercept</a:t>
-            </a:r>
-            <a:endParaRPr lang="en-US" sz="1200" dirty="0"/>
-          </a:p>
-        </p:txBody>
-      </p:sp>
-      <p:sp>
-        <p:nvSpPr>
-          <p:cNvPr id="58" name="Shape 56"/>
-          <p:cNvSpPr/>
-          <p:nvPr/>
-        </p:nvSpPr>
-        <p:spPr>
-          <a:xfrm>
-            <a:off x="6894576" y="4498848"/>
-            <a:ext cx="2011680" cy="402336"/>
-          </a:xfrm>
-          <a:prstGeom prst="rect">
-            <a:avLst>
-              <a:gd name="adj" fmla="val 13636"/>
-            </a:avLst>
-          </a:prstGeom>
-          <a:solidFill>
-            <a:srgbClr val="EEF2FF"/>
-          </a:solidFill>
-          <a:ln w="12700">
-            <a:solidFill>
-              <a:srgbClr val="6366F1"/>
-            </a:solidFill>
-            <a:prstDash val="solid"/>
-          </a:ln>
-        </p:spPr>
-      </p:sp>
-      <p:sp>
-        <p:nvSpPr>
-          <p:cNvPr id="59" name="Text 57"/>
-          <p:cNvSpPr/>
-          <p:nvPr/>
-        </p:nvSpPr>
-        <p:spPr>
-          <a:xfrm>
-            <a:off x="6894576" y="4498848"/>
-            <a:ext cx="2011680" cy="402336"/>
-          </a:xfrm>
-          <a:prstGeom prst="rect">
-            <a:avLst/>
-          </a:prstGeom>
-          <a:noFill/>
-          <a:ln/>
-        </p:spPr>
-        <p:txBody>
-          <a:bodyPr wrap="square" lIns="0" tIns="0" rIns="0" bIns="0" rtlCol="0" anchor="ctr"/>
-          <a:lstStyle/>
-          <a:p>
-            <a:pPr algn="ctr" indent="0" marL="0">
-              <a:buNone/>
-            </a:pPr>
-            <a:r>
-              <a:rPr lang="en-US" sz="1200" b="1" dirty="0">
-                <a:solidFill>
-                  <a:srgbClr val="4338CA"/>
-                </a:solidFill>
-                <a:latin typeface="Trebuchet MS" pitchFamily="34" charset="0"/>
-                <a:ea typeface="Trebuchet MS" pitchFamily="34" charset="-122"/>
-                <a:cs typeface="Trebuchet MS" pitchFamily="34" charset="-120"/>
-              </a:rPr>
-              <a:t>intercom</a:t>
+              <a:t>interviewed</a:t>
             </a:r>
             <a:endParaRPr lang="en-US" sz="1200" dirty="0"/>
           </a:p>
@@ -38106,7 +39564,7 @@
                 <a:ea typeface="Calibri" pitchFamily="34" charset="-122"/>
                 <a:cs typeface="Calibri" pitchFamily="34" charset="-120"/>
               </a:rPr>
-              <a:t>Word Labs  •  wordlabs.app  •  Prefix: 'inter-' = between, among, together</a:t>
+              <a:t>Word Labs  •  wordlabs.app  •  Prefix: 'inter-' = between</a:t>
             </a:r>
             <a:endParaRPr lang="en-US" sz="800" dirty="0"/>
           </a:p>
@@ -38270,7 +39728,7 @@
                 <a:ea typeface="Calibri" pitchFamily="34" charset="-122"/>
                 <a:cs typeface="Calibri" pitchFamily="34" charset="-120"/>
               </a:rPr>
-              <a:t>A meaningful word part added to the beginning of a root to change its meaning. The prefix 'inter-' means 'between, among, together'.</a:t>
+              <a:t>A meaningful word part added to the beginning of a root to change its meaning. The prefix 'inter-' means 'between'.</a:t>
             </a:r>
             <a:endParaRPr lang="en-US" sz="1350" dirty="0"/>
           </a:p>
@@ -38890,7 +40348,7 @@
                 <a:ea typeface="Calibri" pitchFamily="34" charset="-122"/>
                 <a:cs typeface="Calibri" pitchFamily="34" charset="-120"/>
               </a:rPr>
-              <a:t>Word Labs  •  wordlabs.app  •  Prefix: 'inter-' = between, among, together</a:t>
+              <a:t>Word Labs  •  wordlabs.app  •  Prefix: 'inter-' = between</a:t>
             </a:r>
             <a:endParaRPr lang="en-US" sz="800" dirty="0"/>
           </a:p>
@@ -39002,7 +40460,7 @@
                 <a:ea typeface="Calibri" pitchFamily="34" charset="-122"/>
                 <a:cs typeface="Calibri" pitchFamily="34" charset="-120"/>
               </a:rPr>
-              <a:t>1.  The prefix 'inter-' comes from Latin.</a:t>
+              <a:t>1.  'interview' means 'a type of sweet dessert'.</a:t>
             </a:r>
             <a:endParaRPr lang="en-US" sz="1300" dirty="0"/>
           </a:p>
@@ -39025,11 +40483,11 @@
             </a:avLst>
           </a:prstGeom>
           <a:solidFill>
-            <a:srgbClr val="DCFCE7"/>
-          </a:solidFill>
-          <a:ln w="12700">
-            <a:solidFill>
-              <a:srgbClr val="16A34A"/>
+            <a:srgbClr val="FEE2E2"/>
+          </a:solidFill>
+          <a:ln w="12700">
+            <a:solidFill>
+              <a:srgbClr val="DC2626"/>
             </a:solidFill>
             <a:prstDash val="solid"/>
           </a:ln>
@@ -39062,13 +40520,13 @@
             <a:r>
               <a:rPr lang="en-US" sz="1100" b="1" dirty="0">
                 <a:solidFill>
-                  <a:srgbClr val="16A34A"/>
+                  <a:srgbClr val="DC2626"/>
                 </a:solidFill>
                 <a:latin typeface="Trebuchet MS" pitchFamily="34" charset="0"/>
                 <a:ea typeface="Trebuchet MS" pitchFamily="34" charset="-122"/>
                 <a:cs typeface="Trebuchet MS" pitchFamily="34" charset="-120"/>
               </a:rPr>
-              <a:t>TRUE</a:t>
+              <a:t>FALSE</a:t>
             </a:r>
             <a:endParaRPr lang="en-US" sz="1100" dirty="0"/>
           </a:p>
@@ -39141,7 +40599,7 @@
                 <a:ea typeface="Calibri" pitchFamily="34" charset="-122"/>
                 <a:cs typeface="Calibri" pitchFamily="34" charset="-120"/>
               </a:rPr>
-              <a:t>2.  The word 'internet' does not contain the prefix 'inter-'.</a:t>
+              <a:t>2.  'interview' means 'a formal meeting where someone is asked questions'.</a:t>
             </a:r>
             <a:endParaRPr lang="en-US" sz="1300" dirty="0"/>
           </a:p>
@@ -39164,11 +40622,11 @@
             </a:avLst>
           </a:prstGeom>
           <a:solidFill>
-            <a:srgbClr val="FEE2E2"/>
-          </a:solidFill>
-          <a:ln w="12700">
-            <a:solidFill>
-              <a:srgbClr val="DC2626"/>
+            <a:srgbClr val="DCFCE7"/>
+          </a:solidFill>
+          <a:ln w="12700">
+            <a:solidFill>
+              <a:srgbClr val="16A34A"/>
             </a:solidFill>
             <a:prstDash val="solid"/>
           </a:ln>
@@ -39201,13 +40659,13 @@
             <a:r>
               <a:rPr lang="en-US" sz="1100" b="1" dirty="0">
                 <a:solidFill>
-                  <a:srgbClr val="DC2626"/>
+                  <a:srgbClr val="16A34A"/>
                 </a:solidFill>
                 <a:latin typeface="Trebuchet MS" pitchFamily="34" charset="0"/>
                 <a:ea typeface="Trebuchet MS" pitchFamily="34" charset="-122"/>
                 <a:cs typeface="Trebuchet MS" pitchFamily="34" charset="-120"/>
               </a:rPr>
-              <a:t>FALSE</a:t>
+              <a:t>TRUE</a:t>
             </a:r>
             <a:endParaRPr lang="en-US" sz="1100" dirty="0"/>
           </a:p>
@@ -39280,7 +40738,7 @@
                 <a:ea typeface="Calibri" pitchFamily="34" charset="-122"/>
                 <a:cs typeface="Calibri" pitchFamily="34" charset="-120"/>
               </a:rPr>
-              <a:t>3.  The prefix 'inter-' means the same as the prefix 'un-'.</a:t>
+              <a:t>3.  'interact' means 'to sleep for a very long time'.</a:t>
             </a:r>
             <a:endParaRPr lang="en-US" sz="1300" dirty="0"/>
           </a:p>
@@ -39419,7 +40877,7 @@
                 <a:ea typeface="Calibri" pitchFamily="34" charset="-122"/>
                 <a:cs typeface="Calibri" pitchFamily="34" charset="-120"/>
               </a:rPr>
-              <a:t>4.  The prefix 'inter-' means between or among things.</a:t>
+              <a:t>4.  'interact' means 'to communicate or work together with someone'.</a:t>
             </a:r>
             <a:endParaRPr lang="en-US" sz="1300" dirty="0"/>
           </a:p>
@@ -39558,7 +41016,7 @@
                 <a:ea typeface="Calibri" pitchFamily="34" charset="-122"/>
                 <a:cs typeface="Calibri" pitchFamily="34" charset="-120"/>
               </a:rPr>
-              <a:t>5.  An international match involves more than one country.</a:t>
+              <a:t>5.  'inter' means 'between'.</a:t>
             </a:r>
             <a:endParaRPr lang="en-US" sz="1300" dirty="0"/>
           </a:p>
@@ -39916,7 +41374,7 @@
                 <a:ea typeface="Calibri" pitchFamily="34" charset="-122"/>
                 <a:cs typeface="Calibri" pitchFamily="34" charset="-120"/>
               </a:rPr>
-              <a:t>Word Labs  •  wordlabs.app  •  Prefix: 'inter-' = between, among, together</a:t>
+              <a:t>Word Labs  •  wordlabs.app  •  Prefix: 'inter-' = between</a:t>
             </a:r>
             <a:endParaRPr lang="en-US" sz="800" dirty="0"/>
           </a:p>
@@ -40053,7 +41511,7 @@
                 <a:ea typeface="Trebuchet MS" pitchFamily="34" charset="-122"/>
                 <a:cs typeface="Trebuchet MS" pitchFamily="34" charset="-120"/>
               </a:rPr>
-              <a:t>between, among, together</a:t>
+              <a:t>between</a:t>
             </a:r>
             <a:endParaRPr lang="en-US" sz="2000" dirty="0"/>
           </a:p>
@@ -40092,7 +41550,7 @@
                 <a:ea typeface="Calibri" pitchFamily="34" charset="-122"/>
                 <a:cs typeface="Calibri" pitchFamily="34" charset="-120"/>
               </a:rPr>
-              <a:t>Origin: Latin: inter</a:t>
+              <a:t>Origin: Prefix</a:t>
             </a:r>
             <a:endParaRPr lang="en-US" sz="1100" dirty="0"/>
           </a:p>
@@ -40263,7 +41721,7 @@
                 <a:ea typeface="Trebuchet MS" pitchFamily="34" charset="-122"/>
                 <a:cs typeface="Trebuchet MS" pitchFamily="34" charset="-120"/>
               </a:rPr>
-              <a:t>international</a:t>
+              <a:t>interview</a:t>
             </a:r>
             <a:endParaRPr lang="en-US" sz="1300" dirty="0"/>
           </a:p>
@@ -40329,7 +41787,7 @@
                 <a:ea typeface="Trebuchet MS" pitchFamily="34" charset="-122"/>
                 <a:cs typeface="Trebuchet MS" pitchFamily="34" charset="-120"/>
               </a:rPr>
-              <a:t>interrupt</a:t>
+              <a:t>interviews</a:t>
             </a:r>
             <a:endParaRPr lang="en-US" sz="1300" dirty="0"/>
           </a:p>
@@ -40395,7 +41853,7 @@
                 <a:ea typeface="Trebuchet MS" pitchFamily="34" charset="-122"/>
                 <a:cs typeface="Trebuchet MS" pitchFamily="34" charset="-120"/>
               </a:rPr>
-              <a:t>interview</a:t>
+              <a:t>interacting</a:t>
             </a:r>
             <a:endParaRPr lang="en-US" sz="1300" dirty="0"/>
           </a:p>
@@ -40461,7 +41919,7 @@
                 <a:ea typeface="Trebuchet MS" pitchFamily="34" charset="-122"/>
                 <a:cs typeface="Trebuchet MS" pitchFamily="34" charset="-120"/>
               </a:rPr>
-              <a:t>interconnect</a:t>
+              <a:t>interaction</a:t>
             </a:r>
             <a:endParaRPr lang="en-US" sz="1300" dirty="0"/>
           </a:p>
@@ -40527,7 +41985,7 @@
                 <a:ea typeface="Trebuchet MS" pitchFamily="34" charset="-122"/>
                 <a:cs typeface="Trebuchet MS" pitchFamily="34" charset="-120"/>
               </a:rPr>
-              <a:t>interval</a:t>
+              <a:t>interactive</a:t>
             </a:r>
             <a:endParaRPr lang="en-US" sz="1300" dirty="0"/>
           </a:p>
@@ -40593,7 +42051,7 @@
                 <a:ea typeface="Trebuchet MS" pitchFamily="34" charset="-122"/>
                 <a:cs typeface="Trebuchet MS" pitchFamily="34" charset="-120"/>
               </a:rPr>
-              <a:t>intercept</a:t>
+              <a:t>interviewed</a:t>
             </a:r>
             <a:endParaRPr lang="en-US" sz="1300" dirty="0"/>
           </a:p>
@@ -40885,7 +42343,7 @@
                 <a:ea typeface="Calibri" pitchFamily="34" charset="-122"/>
                 <a:cs typeface="Calibri" pitchFamily="34" charset="-120"/>
               </a:rPr>
-              <a:t>Word Labs  •  wordlabs.app  •  Prefix: 'inter-' = between, among, together</a:t>
+              <a:t>Word Labs  •  wordlabs.app  •  Prefix: 'inter-' = between</a:t>
             </a:r>
             <a:endParaRPr lang="en-US" sz="800" dirty="0"/>
           </a:p>
@@ -41314,7 +42772,7 @@
                 <a:ea typeface="Trebuchet MS" pitchFamily="34" charset="-122"/>
                 <a:cs typeface="Trebuchet MS" pitchFamily="34" charset="-120"/>
               </a:rPr>
-              <a:t>-ion</a:t>
+              <a:t>-ing</a:t>
             </a:r>
             <a:endParaRPr lang="en-US" sz="1300" dirty="0"/>
           </a:p>
@@ -41403,7 +42861,7 @@
                 <a:ea typeface="Trebuchet MS" pitchFamily="34" charset="-122"/>
                 <a:cs typeface="Trebuchet MS" pitchFamily="34" charset="-120"/>
               </a:rPr>
-              <a:t>connect</a:t>
+              <a:t>cept</a:t>
             </a:r>
             <a:endParaRPr lang="en-US" sz="1300" dirty="0"/>
           </a:p>
@@ -41467,7 +42925,7 @@
                 <a:ea typeface="Trebuchet MS" pitchFamily="34" charset="-122"/>
                 <a:cs typeface="Trebuchet MS" pitchFamily="34" charset="-120"/>
               </a:rPr>
-              <a:t>-ing</a:t>
+              <a:t>-ion</a:t>
             </a:r>
             <a:endParaRPr lang="en-US" sz="1300" dirty="0"/>
           </a:p>
@@ -41556,7 +43014,7 @@
                 <a:ea typeface="Trebuchet MS" pitchFamily="34" charset="-122"/>
                 <a:cs typeface="Trebuchet MS" pitchFamily="34" charset="-120"/>
               </a:rPr>
-              <a:t>rupt</a:t>
+              <a:t>connect</a:t>
             </a:r>
             <a:endParaRPr lang="en-US" sz="1300" dirty="0"/>
           </a:p>
@@ -41620,7 +43078,7 @@
                 <a:ea typeface="Trebuchet MS" pitchFamily="34" charset="-122"/>
                 <a:cs typeface="Trebuchet MS" pitchFamily="34" charset="-120"/>
               </a:rPr>
-              <a:t>-ed</a:t>
+              <a:t>-ive</a:t>
             </a:r>
             <a:endParaRPr lang="en-US" sz="1300" dirty="0"/>
           </a:p>
@@ -41709,7 +43167,7 @@
                 <a:ea typeface="Trebuchet MS" pitchFamily="34" charset="-122"/>
                 <a:cs typeface="Trebuchet MS" pitchFamily="34" charset="-120"/>
               </a:rPr>
-              <a:t>view</a:t>
+              <a:t>fer</a:t>
             </a:r>
             <a:endParaRPr lang="en-US" sz="1300" dirty="0"/>
           </a:p>
@@ -41773,7 +43231,7 @@
                 <a:ea typeface="Trebuchet MS" pitchFamily="34" charset="-122"/>
                 <a:cs typeface="Trebuchet MS" pitchFamily="34" charset="-120"/>
               </a:rPr>
-              <a:t>-al</a:t>
+              <a:t>-ence</a:t>
             </a:r>
             <a:endParaRPr lang="en-US" sz="1300" dirty="0"/>
           </a:p>
@@ -41862,7 +43320,7 @@
                 <a:ea typeface="Trebuchet MS" pitchFamily="34" charset="-122"/>
                 <a:cs typeface="Trebuchet MS" pitchFamily="34" charset="-120"/>
               </a:rPr>
-              <a:t>nation</a:t>
+              <a:t>govern</a:t>
             </a:r>
             <a:endParaRPr lang="en-US" sz="1300" dirty="0"/>
           </a:p>
@@ -41926,7 +43384,7 @@
                 <a:ea typeface="Trebuchet MS" pitchFamily="34" charset="-122"/>
                 <a:cs typeface="Trebuchet MS" pitchFamily="34" charset="-120"/>
               </a:rPr>
-              <a:t>-ive</a:t>
+              <a:t>-ment</a:t>
             </a:r>
             <a:endParaRPr lang="en-US" sz="1300" dirty="0"/>
           </a:p>
@@ -41934,13 +43392,166 @@
       </p:sp>
       <p:sp>
         <p:nvSpPr>
-          <p:cNvPr id="43" name="Text 41"/>
-          <p:cNvSpPr/>
-          <p:nvPr/>
-        </p:nvSpPr>
-        <p:spPr>
-          <a:xfrm>
-            <a:off x="365760" y="4178808"/>
+          <p:cNvPr id="43" name="Shape 41"/>
+          <p:cNvSpPr/>
+          <p:nvPr/>
+        </p:nvSpPr>
+        <p:spPr>
+          <a:xfrm>
+            <a:off x="640080" y="4041648"/>
+            <a:ext cx="1463040" cy="420624"/>
+          </a:xfrm>
+          <a:prstGeom prst="rect">
+            <a:avLst/>
+          </a:prstGeom>
+          <a:solidFill>
+            <a:srgbClr val="F1F5F9"/>
+          </a:solidFill>
+          <a:ln w="12700">
+            <a:solidFill>
+              <a:srgbClr val="E5E7EB"/>
+            </a:solidFill>
+            <a:prstDash val="solid"/>
+          </a:ln>
+        </p:spPr>
+      </p:sp>
+      <p:sp>
+        <p:nvSpPr>
+          <p:cNvPr id="44" name="Shape 42"/>
+          <p:cNvSpPr/>
+          <p:nvPr/>
+        </p:nvSpPr>
+        <p:spPr>
+          <a:xfrm>
+            <a:off x="3291840" y="4041648"/>
+            <a:ext cx="1645920" cy="420624"/>
+          </a:xfrm>
+          <a:prstGeom prst="rect">
+            <a:avLst/>
+          </a:prstGeom>
+          <a:solidFill>
+            <a:srgbClr val="CCFBF1"/>
+          </a:solidFill>
+          <a:ln w="12700">
+            <a:solidFill>
+              <a:srgbClr val="E5E7EB"/>
+            </a:solidFill>
+            <a:prstDash val="solid"/>
+          </a:ln>
+        </p:spPr>
+      </p:sp>
+      <p:sp>
+        <p:nvSpPr>
+          <p:cNvPr id="45" name="Text 43"/>
+          <p:cNvSpPr/>
+          <p:nvPr/>
+        </p:nvSpPr>
+        <p:spPr>
+          <a:xfrm>
+            <a:off x="3291840" y="4041648"/>
+            <a:ext cx="1645920" cy="420624"/>
+          </a:xfrm>
+          <a:prstGeom prst="rect">
+            <a:avLst/>
+          </a:prstGeom>
+          <a:noFill/>
+          <a:ln/>
+        </p:spPr>
+        <p:txBody>
+          <a:bodyPr wrap="square" lIns="0" tIns="0" rIns="0" bIns="0" rtlCol="0" anchor="ctr"/>
+          <a:lstStyle/>
+          <a:p>
+            <a:pPr algn="ctr" indent="0" marL="0">
+              <a:buNone/>
+            </a:pPr>
+            <a:r>
+              <a:rPr lang="en-US" sz="1300" b="1" dirty="0">
+                <a:solidFill>
+                  <a:srgbClr val="0F766E"/>
+                </a:solidFill>
+                <a:latin typeface="Trebuchet MS" pitchFamily="34" charset="0"/>
+                <a:ea typeface="Trebuchet MS" pitchFamily="34" charset="-122"/>
+                <a:cs typeface="Trebuchet MS" pitchFamily="34" charset="-120"/>
+              </a:rPr>
+              <a:t>national</a:t>
+            </a:r>
+            <a:endParaRPr lang="en-US" sz="1300" dirty="0"/>
+          </a:p>
+        </p:txBody>
+      </p:sp>
+      <p:sp>
+        <p:nvSpPr>
+          <p:cNvPr id="46" name="Shape 44"/>
+          <p:cNvSpPr/>
+          <p:nvPr/>
+        </p:nvSpPr>
+        <p:spPr>
+          <a:xfrm>
+            <a:off x="5943600" y="4041648"/>
+            <a:ext cx="1463040" cy="420624"/>
+          </a:xfrm>
+          <a:prstGeom prst="rect">
+            <a:avLst/>
+          </a:prstGeom>
+          <a:solidFill>
+            <a:srgbClr val="FCE7F3"/>
+          </a:solidFill>
+          <a:ln w="12700">
+            <a:solidFill>
+              <a:srgbClr val="E5E7EB"/>
+            </a:solidFill>
+            <a:prstDash val="solid"/>
+          </a:ln>
+        </p:spPr>
+      </p:sp>
+      <p:sp>
+        <p:nvSpPr>
+          <p:cNvPr id="47" name="Text 45"/>
+          <p:cNvSpPr/>
+          <p:nvPr/>
+        </p:nvSpPr>
+        <p:spPr>
+          <a:xfrm>
+            <a:off x="5943600" y="4041648"/>
+            <a:ext cx="1463040" cy="420624"/>
+          </a:xfrm>
+          <a:prstGeom prst="rect">
+            <a:avLst/>
+          </a:prstGeom>
+          <a:noFill/>
+          <a:ln/>
+        </p:spPr>
+        <p:txBody>
+          <a:bodyPr wrap="square" lIns="0" tIns="0" rIns="0" bIns="0" rtlCol="0" anchor="ctr"/>
+          <a:lstStyle/>
+          <a:p>
+            <a:pPr algn="ctr" indent="0" marL="0">
+              <a:buNone/>
+            </a:pPr>
+            <a:r>
+              <a:rPr lang="en-US" sz="1300" b="1" dirty="0">
+                <a:solidFill>
+                  <a:srgbClr val="9D174D"/>
+                </a:solidFill>
+                <a:latin typeface="Trebuchet MS" pitchFamily="34" charset="0"/>
+                <a:ea typeface="Trebuchet MS" pitchFamily="34" charset="-122"/>
+                <a:cs typeface="Trebuchet MS" pitchFamily="34" charset="-120"/>
+              </a:rPr>
+              <a:t>-ly</a:t>
+            </a:r>
+            <a:endParaRPr lang="en-US" sz="1300" dirty="0"/>
+          </a:p>
+        </p:txBody>
+      </p:sp>
+      <p:sp>
+        <p:nvSpPr>
+          <p:cNvPr id="48" name="Text 46"/>
+          <p:cNvSpPr/>
+          <p:nvPr/>
+        </p:nvSpPr>
+        <p:spPr>
+          <a:xfrm>
+            <a:off x="365760" y="4636008"/>
             <a:ext cx="1097280" cy="420624"/>
           </a:xfrm>
           <a:prstGeom prst="rect">
@@ -41973,13 +43584,13 @@
       </p:sp>
       <p:sp>
         <p:nvSpPr>
-          <p:cNvPr id="44" name="Shape 42"/>
-          <p:cNvSpPr/>
-          <p:nvPr/>
-        </p:nvSpPr>
-        <p:spPr>
-          <a:xfrm>
-            <a:off x="1508760" y="4178808"/>
+          <p:cNvPr id="49" name="Shape 47"/>
+          <p:cNvSpPr/>
+          <p:nvPr/>
+        </p:nvSpPr>
+        <p:spPr>
+          <a:xfrm>
+            <a:off x="1508760" y="4636008"/>
             <a:ext cx="1243584" cy="420624"/>
           </a:xfrm>
           <a:prstGeom prst="rect">
@@ -42007,13 +43618,13 @@
       </p:sp>
       <p:sp>
         <p:nvSpPr>
-          <p:cNvPr id="45" name="Text 43"/>
-          <p:cNvSpPr/>
-          <p:nvPr/>
-        </p:nvSpPr>
-        <p:spPr>
-          <a:xfrm>
-            <a:off x="1508760" y="4178808"/>
+          <p:cNvPr id="50" name="Text 48"/>
+          <p:cNvSpPr/>
+          <p:nvPr/>
+        </p:nvSpPr>
+        <p:spPr>
+          <a:xfrm>
+            <a:off x="1508760" y="4636008"/>
             <a:ext cx="1243584" cy="420624"/>
           </a:xfrm>
           <a:prstGeom prst="rect">
@@ -42046,13 +43657,13 @@
       </p:sp>
       <p:sp>
         <p:nvSpPr>
-          <p:cNvPr id="46" name="Text 44"/>
-          <p:cNvSpPr/>
-          <p:nvPr/>
-        </p:nvSpPr>
-        <p:spPr>
-          <a:xfrm>
-            <a:off x="2779776" y="4178808"/>
+          <p:cNvPr id="51" name="Text 49"/>
+          <p:cNvSpPr/>
+          <p:nvPr/>
+        </p:nvSpPr>
+        <p:spPr>
+          <a:xfrm>
+            <a:off x="2779776" y="4636008"/>
             <a:ext cx="320040" cy="420624"/>
           </a:xfrm>
           <a:prstGeom prst="rect">
@@ -42085,13 +43696,13 @@
       </p:sp>
       <p:sp>
         <p:nvSpPr>
-          <p:cNvPr id="47" name="Shape 45"/>
-          <p:cNvSpPr/>
-          <p:nvPr/>
-        </p:nvSpPr>
-        <p:spPr>
-          <a:xfrm>
-            <a:off x="3127248" y="4178808"/>
+          <p:cNvPr id="52" name="Shape 50"/>
+          <p:cNvSpPr/>
+          <p:nvPr/>
+        </p:nvSpPr>
+        <p:spPr>
+          <a:xfrm>
+            <a:off x="3127248" y="4636008"/>
             <a:ext cx="822960" cy="420624"/>
           </a:xfrm>
           <a:prstGeom prst="rect">
@@ -42119,13 +43730,13 @@
       </p:sp>
       <p:sp>
         <p:nvSpPr>
-          <p:cNvPr id="48" name="Text 46"/>
-          <p:cNvSpPr/>
-          <p:nvPr/>
-        </p:nvSpPr>
-        <p:spPr>
-          <a:xfrm>
-            <a:off x="3127248" y="4178808"/>
+          <p:cNvPr id="53" name="Text 51"/>
+          <p:cNvSpPr/>
+          <p:nvPr/>
+        </p:nvSpPr>
+        <p:spPr>
+          <a:xfrm>
+            <a:off x="3127248" y="4636008"/>
             <a:ext cx="822960" cy="420624"/>
           </a:xfrm>
           <a:prstGeom prst="rect">
@@ -42158,13 +43769,13 @@
       </p:sp>
       <p:sp>
         <p:nvSpPr>
-          <p:cNvPr id="49" name="Text 47"/>
-          <p:cNvSpPr/>
-          <p:nvPr/>
-        </p:nvSpPr>
-        <p:spPr>
-          <a:xfrm>
-            <a:off x="3977640" y="4178808"/>
+          <p:cNvPr id="54" name="Text 52"/>
+          <p:cNvSpPr/>
+          <p:nvPr/>
+        </p:nvSpPr>
+        <p:spPr>
+          <a:xfrm>
+            <a:off x="3977640" y="4636008"/>
             <a:ext cx="320040" cy="420624"/>
           </a:xfrm>
           <a:prstGeom prst="rect">
@@ -42197,13 +43808,13 @@
       </p:sp>
       <p:sp>
         <p:nvSpPr>
-          <p:cNvPr id="50" name="Shape 48"/>
-          <p:cNvSpPr/>
-          <p:nvPr/>
-        </p:nvSpPr>
-        <p:spPr>
-          <a:xfrm>
-            <a:off x="4325112" y="4178808"/>
+          <p:cNvPr id="55" name="Shape 53"/>
+          <p:cNvSpPr/>
+          <p:nvPr/>
+        </p:nvSpPr>
+        <p:spPr>
+          <a:xfrm>
+            <a:off x="4325112" y="4636008"/>
             <a:ext cx="950976" cy="420624"/>
           </a:xfrm>
           <a:prstGeom prst="rect">
@@ -42231,13 +43842,13 @@
       </p:sp>
       <p:sp>
         <p:nvSpPr>
-          <p:cNvPr id="51" name="Text 49"/>
-          <p:cNvSpPr/>
-          <p:nvPr/>
-        </p:nvSpPr>
-        <p:spPr>
-          <a:xfrm>
-            <a:off x="4325112" y="4178808"/>
+          <p:cNvPr id="56" name="Text 54"/>
+          <p:cNvSpPr/>
+          <p:nvPr/>
+        </p:nvSpPr>
+        <p:spPr>
+          <a:xfrm>
+            <a:off x="4325112" y="4636008"/>
             <a:ext cx="950976" cy="420624"/>
           </a:xfrm>
           <a:prstGeom prst="rect">
@@ -42262,7 +43873,7 @@
                 <a:ea typeface="Trebuchet MS" pitchFamily="34" charset="-122"/>
                 <a:cs typeface="Trebuchet MS" pitchFamily="34" charset="-120"/>
               </a:rPr>
-              <a:t>-ion</a:t>
+              <a:t>-ing</a:t>
             </a:r>
             <a:endParaRPr lang="en-US" sz="1300" dirty="0"/>
           </a:p>
@@ -42270,13 +43881,13 @@
       </p:sp>
       <p:sp>
         <p:nvSpPr>
-          <p:cNvPr id="52" name="Text 50"/>
-          <p:cNvSpPr/>
-          <p:nvPr/>
-        </p:nvSpPr>
-        <p:spPr>
-          <a:xfrm>
-            <a:off x="5349240" y="4178808"/>
+          <p:cNvPr id="57" name="Text 55"/>
+          <p:cNvSpPr/>
+          <p:nvPr/>
+        </p:nvSpPr>
+        <p:spPr>
+          <a:xfrm>
+            <a:off x="5349240" y="4636008"/>
             <a:ext cx="365760" cy="420624"/>
           </a:xfrm>
           <a:prstGeom prst="rect">
@@ -42309,13 +43920,13 @@
       </p:sp>
       <p:sp>
         <p:nvSpPr>
-          <p:cNvPr id="53" name="Shape 51"/>
-          <p:cNvSpPr/>
-          <p:nvPr/>
-        </p:nvSpPr>
-        <p:spPr>
-          <a:xfrm>
-            <a:off x="5760720" y="4178808"/>
+          <p:cNvPr id="58" name="Shape 56"/>
+          <p:cNvSpPr/>
+          <p:nvPr/>
+        </p:nvSpPr>
+        <p:spPr>
+          <a:xfrm>
+            <a:off x="5760720" y="4636008"/>
             <a:ext cx="2194560" cy="420624"/>
           </a:xfrm>
           <a:prstGeom prst="rect">
@@ -42336,13 +43947,13 @@
       </p:sp>
       <p:sp>
         <p:nvSpPr>
-          <p:cNvPr id="54" name="Text 52"/>
-          <p:cNvSpPr/>
-          <p:nvPr/>
-        </p:nvSpPr>
-        <p:spPr>
-          <a:xfrm>
-            <a:off x="5760720" y="4178808"/>
+          <p:cNvPr id="59" name="Text 57"/>
+          <p:cNvSpPr/>
+          <p:nvPr/>
+        </p:nvSpPr>
+        <p:spPr>
+          <a:xfrm>
+            <a:off x="5760720" y="4636008"/>
             <a:ext cx="2194560" cy="420624"/>
           </a:xfrm>
           <a:prstGeom prst="rect">
@@ -42659,7 +44270,7 @@
                 <a:ea typeface="Calibri" pitchFamily="34" charset="-122"/>
                 <a:cs typeface="Calibri" pitchFamily="34" charset="-120"/>
               </a:rPr>
-              <a:t>Word Labs  •  wordlabs.app  •  Prefix: 'inter-' = between, among, together</a:t>
+              <a:t>Word Labs  •  wordlabs.app  •  Prefix: 'inter-' = between</a:t>
             </a:r>
             <a:endParaRPr lang="en-US" sz="800" dirty="0"/>
           </a:p>
@@ -42837,7 +44448,7 @@
                 <a:ea typeface="Calibri" pitchFamily="34" charset="-122"/>
                 <a:cs typeface="Calibri" pitchFamily="34" charset="-120"/>
               </a:rPr>
-              <a:t>To stop or catch something before it reaches its destination.</a:t>
+              <a:t>asked someone questions in a formal meeting</a:t>
             </a:r>
             <a:endParaRPr lang="en-US" sz="1200" dirty="0"/>
           </a:p>
@@ -42910,7 +44521,7 @@
                 <a:ea typeface="Trebuchet MS" pitchFamily="34" charset="-122"/>
                 <a:cs typeface="Trebuchet MS" pitchFamily="34" charset="-120"/>
               </a:rPr>
-              <a:t>international</a:t>
+              <a:t>interview</a:t>
             </a:r>
             <a:endParaRPr lang="en-US" sz="1200" dirty="0"/>
           </a:p>
@@ -42976,7 +44587,7 @@
                 <a:ea typeface="Calibri" pitchFamily="34" charset="-122"/>
                 <a:cs typeface="Calibri" pitchFamily="34" charset="-120"/>
               </a:rPr>
-              <a:t>To talk or do things with another person or group.</a:t>
+              <a:t>to communicate or work together with someone</a:t>
             </a:r>
             <a:endParaRPr lang="en-US" sz="1200" dirty="0"/>
           </a:p>
@@ -43049,7 +44660,7 @@
                 <a:ea typeface="Trebuchet MS" pitchFamily="34" charset="-122"/>
                 <a:cs typeface="Trebuchet MS" pitchFamily="34" charset="-120"/>
               </a:rPr>
-              <a:t>interrupt</a:t>
+              <a:t>interviews</a:t>
             </a:r>
             <a:endParaRPr lang="en-US" sz="1200" dirty="0"/>
           </a:p>
@@ -43115,7 +44726,7 @@
                 <a:ea typeface="Calibri" pitchFamily="34" charset="-122"/>
                 <a:cs typeface="Calibri" pitchFamily="34" charset="-120"/>
               </a:rPr>
-              <a:t>A meeting where someone asks another person questions.</a:t>
+              <a:t>communicating or working together with others, happening now</a:t>
             </a:r>
             <a:endParaRPr lang="en-US" sz="1200" dirty="0"/>
           </a:p>
@@ -43188,7 +44799,7 @@
                 <a:ea typeface="Trebuchet MS" pitchFamily="34" charset="-122"/>
                 <a:cs typeface="Trebuchet MS" pitchFamily="34" charset="-120"/>
               </a:rPr>
-              <a:t>interview</a:t>
+              <a:t>interacting</a:t>
             </a:r>
             <a:endParaRPr lang="en-US" sz="1200" dirty="0"/>
           </a:p>
@@ -43254,7 +44865,7 @@
                 <a:ea typeface="Calibri" pitchFamily="34" charset="-122"/>
                 <a:cs typeface="Calibri" pitchFamily="34" charset="-120"/>
               </a:rPr>
-              <a:t>To link or join things together so they work with each other.</a:t>
+              <a:t>communication or contact between people or things</a:t>
             </a:r>
             <a:endParaRPr lang="en-US" sz="1200" dirty="0"/>
           </a:p>
@@ -43327,7 +44938,7 @@
                 <a:ea typeface="Trebuchet MS" pitchFamily="34" charset="-122"/>
                 <a:cs typeface="Trebuchet MS" pitchFamily="34" charset="-120"/>
               </a:rPr>
-              <a:t>interconnect</a:t>
+              <a:t>interaction</a:t>
             </a:r>
             <a:endParaRPr lang="en-US" sz="1200" dirty="0"/>
           </a:p>
@@ -43393,7 +45004,7 @@
                 <a:ea typeface="Calibri" pitchFamily="34" charset="-122"/>
                 <a:cs typeface="Calibri" pitchFamily="34" charset="-120"/>
               </a:rPr>
-              <a:t>A pause or gap between two events or parts of something.</a:t>
+              <a:t>allowing two-way communication or response, especially with a screen</a:t>
             </a:r>
             <a:endParaRPr lang="en-US" sz="1200" dirty="0"/>
           </a:p>
@@ -43466,7 +45077,7 @@
                 <a:ea typeface="Trebuchet MS" pitchFamily="34" charset="-122"/>
                 <a:cs typeface="Trebuchet MS" pitchFamily="34" charset="-120"/>
               </a:rPr>
-              <a:t>interval</a:t>
+              <a:t>interactive</a:t>
             </a:r>
             <a:endParaRPr lang="en-US" sz="1200" dirty="0"/>
           </a:p>
@@ -43532,7 +45143,7 @@
                 <a:ea typeface="Calibri" pitchFamily="34" charset="-122"/>
                 <a:cs typeface="Calibri" pitchFamily="34" charset="-120"/>
               </a:rPr>
-              <a:t>To break into someone's conversation or activity suddenly.</a:t>
+              <a:t>formal meetings where people are asked questions</a:t>
             </a:r>
             <a:endParaRPr lang="en-US" sz="1200" dirty="0"/>
           </a:p>
@@ -43605,7 +45216,7 @@
                 <a:ea typeface="Trebuchet MS" pitchFamily="34" charset="-122"/>
                 <a:cs typeface="Trebuchet MS" pitchFamily="34" charset="-120"/>
               </a:rPr>
-              <a:t>intercept</a:t>
+              <a:t>interviewed</a:t>
             </a:r>
             <a:endParaRPr lang="en-US" sz="1200" dirty="0"/>
           </a:p>
@@ -43671,7 +45282,7 @@
                 <a:ea typeface="Calibri" pitchFamily="34" charset="-122"/>
                 <a:cs typeface="Calibri" pitchFamily="34" charset="-120"/>
               </a:rPr>
-              <a:t>Involving two or more countries around the world.</a:t>
+              <a:t>a formal meeting where someone is asked questions</a:t>
             </a:r>
             <a:endParaRPr lang="en-US" sz="1200" dirty="0"/>
           </a:p>
@@ -43963,7 +45574,7 @@
                 <a:ea typeface="Calibri" pitchFamily="34" charset="-122"/>
                 <a:cs typeface="Calibri" pitchFamily="34" charset="-120"/>
               </a:rPr>
-              <a:t>Word Labs  •  wordlabs.app  •  Prefix: 'inter-' = between, among, together</a:t>
+              <a:t>Word Labs  •  wordlabs.app  •  Prefix: 'inter-' = between</a:t>
             </a:r>
             <a:endParaRPr lang="en-US" sz="800" dirty="0"/>
           </a:p>
@@ -44166,7 +45777,7 @@
                 <a:ea typeface="Calibri" pitchFamily="34" charset="-122"/>
                 <a:cs typeface="Calibri" pitchFamily="34" charset="-120"/>
               </a:rPr>
-              <a:t>The students were excited to interact with children from another school during the excursion.</a:t>
+              <a:t>The students interact with each other during group work.</a:t>
             </a:r>
             <a:endParaRPr lang="en-US" sz="1500" dirty="0"/>
           </a:p>
@@ -44330,7 +45941,7 @@
                 <a:ea typeface="Calibri" pitchFamily="34" charset="-122"/>
                 <a:cs typeface="Calibri" pitchFamily="34" charset="-120"/>
               </a:rPr>
-              <a:t>The referee blew the whistle so that the players could have an interval and drink some water.</a:t>
+              <a:t>She was nervous before her job interview.</a:t>
             </a:r>
             <a:endParaRPr lang="en-US" sz="1500" dirty="0"/>
           </a:p>
@@ -44494,7 +46105,7 @@
                 <a:ea typeface="Calibri" pitchFamily="34" charset="-122"/>
                 <a:cs typeface="Calibri" pitchFamily="34" charset="-120"/>
               </a:rPr>
-              <a:t>Our teacher asked us not to interrupt while she was explaining the new maths activity.</a:t>
+              <a:t>The company conducted interviews for the new job.</a:t>
             </a:r>
             <a:endParaRPr lang="en-US" sz="1500" dirty="0"/>
           </a:p>
